--- a/artifacts/theme-style-color-matrix/minimalism-ink-mono/deck.pptx
+++ b/artifacts/theme-style-color-matrix/minimalism-ink-mono/deck.pptx
@@ -15,9 +15,11 @@
     <p:sldId id="263" r:id="rId9"/>
     <p:sldId id="264" r:id="rId10"/>
     <p:sldId id="265" r:id="rId11"/>
+    <p:sldId id="266" r:id="rId12"/>
+    <p:sldId id="267" r:id="rId13"/>
   </p:sldIdLst>
   <p:notesMasterIdLst>
-    <p:notesMasterId r:id="rId12"/>
+    <p:notesMasterId r:id="rId14"/>
   </p:notesMasterIdLst>
   <p:sldSz cx="12191695" cy="6858000"/>
   <p:notesSz cx="6858000" cy="12191695"/>
@@ -996,6 +998,182 @@
 </p:notes>
 </file>
 
+<file path=ppt/notesSlides/notesSlide11.xml><?xml version="1.0" encoding="utf-8"?>
+<p:notes xmlns:a="http://schemas.openxmlformats.org/drawingml/2006/main" xmlns:r="http://schemas.openxmlformats.org/officeDocument/2006/relationships" xmlns:p="http://schemas.openxmlformats.org/presentationml/2006/main">
+  <p:cSld>
+    <p:spTree>
+      <p:nvGrpSpPr>
+        <p:cNvPr id="1" name=""/>
+        <p:cNvGrpSpPr/>
+        <p:nvPr/>
+      </p:nvGrpSpPr>
+      <p:grpSpPr>
+        <a:xfrm>
+          <a:off x="0" y="0"/>
+          <a:ext cx="0" cy="0"/>
+          <a:chOff x="0" y="0"/>
+          <a:chExt cx="0" cy="0"/>
+        </a:xfrm>
+      </p:grpSpPr>
+      <p:sp>
+        <p:nvSpPr>
+          <p:cNvPr id="2" name="Slide Image Placeholder 1"/>
+          <p:cNvSpPr>
+            <a:spLocks noGrp="1" noRot="1" noChangeAspect="1"/>
+          </p:cNvSpPr>
+          <p:nvPr>
+            <p:ph type="sldImg"/>
+          </p:nvPr>
+        </p:nvSpPr>
+        <p:spPr/>
+      </p:sp>
+      <p:sp>
+        <p:nvSpPr>
+          <p:cNvPr id="3" name="Notes Placeholder 2"/>
+          <p:cNvSpPr>
+            <a:spLocks noGrp="1"/>
+          </p:cNvSpPr>
+          <p:nvPr>
+            <p:ph type="body" idx="1"/>
+          </p:nvPr>
+        </p:nvSpPr>
+        <p:spPr/>
+        <p:txBody>
+          <a:bodyPr/>
+          <a:lstStyle/>
+          <a:p>
+            <a:r>
+              <a:rPr lang="en-US" dirty="0"/>
+              <a:t/>
+            </a:r>
+            <a:endParaRPr lang="en-US" dirty="0"/>
+          </a:p>
+        </p:txBody>
+      </p:sp>
+      <p:sp>
+        <p:nvSpPr>
+          <p:cNvPr id="4" name="Slide Number Placeholder 3"/>
+          <p:cNvSpPr>
+            <a:spLocks noGrp="1"/>
+          </p:cNvSpPr>
+          <p:nvPr>
+            <p:ph type="sldNum" sz="quarter" idx="10"/>
+          </p:nvPr>
+        </p:nvSpPr>
+        <p:spPr/>
+        <p:txBody>
+          <a:bodyPr/>
+          <a:lstStyle/>
+          <a:p>
+            <a:fld id="{F7021451-1387-4CA6-816F-3879F97B5CBC}" type="slidenum">
+              <a:rPr lang="en-US"/>
+              <a:t>11</a:t>
+            </a:fld>
+            <a:endParaRPr lang="en-US"/>
+          </a:p>
+        </p:txBody>
+      </p:sp>
+    </p:spTree>
+    <p:extLst>
+      <p:ext uri="{BB962C8B-B14F-4D97-AF65-F5344CB8AC3E}">
+        <p14:creationId xmlns:p14="http://schemas.microsoft.com/office/powerpoint/2010/main" val="1024086991"/>
+      </p:ext>
+    </p:extLst>
+  </p:cSld>
+  <p:clrMapOvr>
+    <a:masterClrMapping/>
+  </p:clrMapOvr>
+</p:notes>
+</file>
+
+<file path=ppt/notesSlides/notesSlide12.xml><?xml version="1.0" encoding="utf-8"?>
+<p:notes xmlns:a="http://schemas.openxmlformats.org/drawingml/2006/main" xmlns:r="http://schemas.openxmlformats.org/officeDocument/2006/relationships" xmlns:p="http://schemas.openxmlformats.org/presentationml/2006/main">
+  <p:cSld>
+    <p:spTree>
+      <p:nvGrpSpPr>
+        <p:cNvPr id="1" name=""/>
+        <p:cNvGrpSpPr/>
+        <p:nvPr/>
+      </p:nvGrpSpPr>
+      <p:grpSpPr>
+        <a:xfrm>
+          <a:off x="0" y="0"/>
+          <a:ext cx="0" cy="0"/>
+          <a:chOff x="0" y="0"/>
+          <a:chExt cx="0" cy="0"/>
+        </a:xfrm>
+      </p:grpSpPr>
+      <p:sp>
+        <p:nvSpPr>
+          <p:cNvPr id="2" name="Slide Image Placeholder 1"/>
+          <p:cNvSpPr>
+            <a:spLocks noGrp="1" noRot="1" noChangeAspect="1"/>
+          </p:cNvSpPr>
+          <p:nvPr>
+            <p:ph type="sldImg"/>
+          </p:nvPr>
+        </p:nvSpPr>
+        <p:spPr/>
+      </p:sp>
+      <p:sp>
+        <p:nvSpPr>
+          <p:cNvPr id="3" name="Notes Placeholder 2"/>
+          <p:cNvSpPr>
+            <a:spLocks noGrp="1"/>
+          </p:cNvSpPr>
+          <p:nvPr>
+            <p:ph type="body" idx="1"/>
+          </p:nvPr>
+        </p:nvSpPr>
+        <p:spPr/>
+        <p:txBody>
+          <a:bodyPr/>
+          <a:lstStyle/>
+          <a:p>
+            <a:r>
+              <a:rPr lang="en-US" dirty="0"/>
+              <a:t/>
+            </a:r>
+            <a:endParaRPr lang="en-US" dirty="0"/>
+          </a:p>
+        </p:txBody>
+      </p:sp>
+      <p:sp>
+        <p:nvSpPr>
+          <p:cNvPr id="4" name="Slide Number Placeholder 3"/>
+          <p:cNvSpPr>
+            <a:spLocks noGrp="1"/>
+          </p:cNvSpPr>
+          <p:nvPr>
+            <p:ph type="sldNum" sz="quarter" idx="10"/>
+          </p:nvPr>
+        </p:nvSpPr>
+        <p:spPr/>
+        <p:txBody>
+          <a:bodyPr/>
+          <a:lstStyle/>
+          <a:p>
+            <a:fld id="{F7021451-1387-4CA6-816F-3879F97B5CBC}" type="slidenum">
+              <a:rPr lang="en-US"/>
+              <a:t>12</a:t>
+            </a:fld>
+            <a:endParaRPr lang="en-US"/>
+          </a:p>
+        </p:txBody>
+      </p:sp>
+    </p:spTree>
+    <p:extLst>
+      <p:ext uri="{BB962C8B-B14F-4D97-AF65-F5344CB8AC3E}">
+        <p14:creationId xmlns:p14="http://schemas.microsoft.com/office/powerpoint/2010/main" val="1024086991"/>
+      </p:ext>
+    </p:extLst>
+  </p:cSld>
+  <p:clrMapOvr>
+    <a:masterClrMapping/>
+  </p:clrMapOvr>
+</p:notes>
+</file>
+
 <file path=ppt/notesSlides/notesSlide2.xml><?xml version="1.0" encoding="utf-8"?>
 <p:notes xmlns:a="http://schemas.openxmlformats.org/drawingml/2006/main" xmlns:r="http://schemas.openxmlformats.org/officeDocument/2006/relationships" xmlns:p="http://schemas.openxmlformats.org/presentationml/2006/main">
   <p:cSld>
@@ -2083,7 +2261,7 @@
       </p:sp>
       <p:sp>
         <p:nvSpPr>
-          <p:cNvPr id="4" name="Text 2"/>
+          <p:cNvPr id="4" name="mdpr:mdpr-theme-style-and-color-matrix-797102:title:__title:mdpr-theme-style-and-color-matrix-797102"/>
           <p:cNvSpPr txBox="1"/>
           <p:nvPr/>
         </p:nvSpPr>
@@ -2099,9 +2277,7 @@
           <a:ln/>
         </p:spPr>
         <p:txBody>
-          <a:bodyPr wrap="square" lIns="0" tIns="0" rIns="0" bIns="0" rtlCol="0" anchor="ctr">
-            <a:normAutofit/>
-          </a:bodyPr>
+          <a:bodyPr wrap="square" lIns="0" tIns="0" rIns="0" bIns="0" rtlCol="0" anchor="ctr"/>
           <a:lstStyle/>
           <a:p>
             <a:pPr algn="ctr" indent="0" marL="0">
@@ -2207,90 +2383,9 @@
           </a:ln>
         </p:spPr>
       </p:sp>
-      <p:sp>
-        <p:nvSpPr>
-          <p:cNvPr id="4" name="Shape 2"/>
-          <p:cNvSpPr/>
-          <p:nvPr/>
-        </p:nvSpPr>
-        <p:spPr>
-          <a:xfrm>
-            <a:off x="914400" y="1417320"/>
-            <a:ext cx="73152" cy="868680"/>
-          </a:xfrm>
-          <a:prstGeom prst="rect">
-            <a:avLst/>
-          </a:prstGeom>
-          <a:solidFill>
-            <a:srgbClr val="111827"/>
-          </a:solidFill>
-          <a:ln w="12700">
-            <a:solidFill>
-              <a:srgbClr val="111827">
-                <a:alpha val="0"/>
-              </a:srgbClr>
-            </a:solidFill>
-            <a:prstDash val="solid"/>
-          </a:ln>
-        </p:spPr>
-      </p:sp>
-      <p:sp>
-        <p:nvSpPr>
-          <p:cNvPr id="5" name="Shape 3"/>
-          <p:cNvSpPr/>
-          <p:nvPr/>
-        </p:nvSpPr>
-        <p:spPr>
-          <a:xfrm>
-            <a:off x="914400" y="2560320"/>
-            <a:ext cx="73152" cy="868680"/>
-          </a:xfrm>
-          <a:prstGeom prst="rect">
-            <a:avLst/>
-          </a:prstGeom>
-          <a:solidFill>
-            <a:srgbClr val="314163"/>
-          </a:solidFill>
-          <a:ln w="12700">
-            <a:solidFill>
-              <a:srgbClr val="314163">
-                <a:alpha val="0"/>
-              </a:srgbClr>
-            </a:solidFill>
-            <a:prstDash val="solid"/>
-          </a:ln>
-        </p:spPr>
-      </p:sp>
-      <p:sp>
-        <p:nvSpPr>
-          <p:cNvPr id="6" name="Shape 4"/>
-          <p:cNvSpPr/>
-          <p:nvPr/>
-        </p:nvSpPr>
-        <p:spPr>
-          <a:xfrm>
-            <a:off x="914400" y="3703320"/>
-            <a:ext cx="73152" cy="868680"/>
-          </a:xfrm>
-          <a:prstGeom prst="rect">
-            <a:avLst/>
-          </a:prstGeom>
-          <a:solidFill>
-            <a:srgbClr val="111827"/>
-          </a:solidFill>
-          <a:ln w="12700">
-            <a:solidFill>
-              <a:srgbClr val="111827">
-                <a:alpha val="0"/>
-              </a:srgbClr>
-            </a:solidFill>
-            <a:prstDash val="solid"/>
-          </a:ln>
-        </p:spPr>
-      </p:sp>
       <p:pic>
         <p:nvPicPr>
-          <p:cNvPr id="7" name="Image 0" descr="preencoded.png">    </p:cNvPr>
+          <p:cNvPr id="4" name="Image 0" descr="preencoded.png">    </p:cNvPr>
           <p:cNvPicPr>
             <a:picLocks noChangeAspect="1"/>
           </p:cNvPicPr>
@@ -2311,7 +2406,3647 @@
         <p:spPr>
           <a:xfrm>
             <a:off x="914400" y="1417320"/>
-            <a:ext cx="10241280" cy="868680"/>
+            <a:ext cx="10241280" cy="4526280"/>
+          </a:xfrm>
+          <a:prstGeom prst="rect">
+            <a:avLst/>
+          </a:prstGeom>
+        </p:spPr>
+      </p:pic>
+      <p:sp>
+        <p:nvSpPr>
+          <p:cNvPr id="5" name="mdpr:1-2-20250a:title:__title:1-2-20250a"/>
+          <p:cNvSpPr txBox="1"/>
+          <p:nvPr/>
+        </p:nvSpPr>
+        <p:spPr>
+          <a:xfrm>
+            <a:off x="731520" y="457200"/>
+            <a:ext cx="10698480" cy="731520"/>
+          </a:xfrm>
+          <a:prstGeom prst="rect">
+            <a:avLst/>
+          </a:prstGeom>
+          <a:noFill/>
+          <a:ln/>
+        </p:spPr>
+        <p:txBody>
+          <a:bodyPr wrap="square" lIns="0" tIns="0" rIns="0" bIns="0" rtlCol="0" anchor="ctr"/>
+          <a:lstStyle/>
+          <a:p>
+            <a:pPr algn="ctr" indent="0" marL="0">
+              <a:lnSpc>
+                <a:spcPct val="120000"/>
+              </a:lnSpc>
+              <a:buNone/>
+            </a:pPr>
+            <a:r>
+              <a:rPr lang="en-US" sz="3400" b="1" dirty="0">
+                <a:solidFill>
+                  <a:srgbClr val="111827"/>
+                </a:solidFill>
+                <a:latin typeface="Pretendard" pitchFamily="34" charset="0"/>
+                <a:ea typeface="Pretendard" pitchFamily="34" charset="-122"/>
+                <a:cs typeface="Pretendard" pitchFamily="34" charset="-120"/>
+              </a:rPr>
+              <a:t>Theme Matrix</a:t>
+            </a:r>
+            <a:endParaRPr lang="en-US" sz="3400" dirty="0"/>
+          </a:p>
+        </p:txBody>
+      </p:sp>
+      <p:graphicFrame>
+        <p:nvGraphicFramePr>
+          <p:cNvPr id="11" name="mdpr:1-2-20250a:table:block-19-chunk-1"/>
+          <p:cNvGraphicFramePr>
+            <a:graphicFrameLocks noGrp="1"/>
+          </p:cNvGraphicFramePr>
+          <p:nvPr>
+            <p:extLst>
+              <p:ext uri="{D42A27DB-BD31-4B8C-83A1-F6EECF244321}">
+                <p14:modId xmlns:p14="http://schemas.microsoft.com/office/powerpoint/2010/main" val="1579011935"/>
+              </p:ext>
+            </p:extLst>
+          </p:nvPr>
+        </p:nvGraphicFramePr>
+        <p:xfrm>
+          <a:off x="914400" y="1417320"/>
+          <a:ext cx="10241280" cy="4526280"/>
+        </p:xfrm>
+        <a:graphic>
+          <a:graphicData uri="http://schemas.openxmlformats.org/drawingml/2006/table">
+            <a:tbl>
+              <a:tblPr/>
+              <a:tblGrid>
+                <a:gridCol w="2560320"/>
+                <a:gridCol w="2560320"/>
+                <a:gridCol w="2560320"/>
+                <a:gridCol w="2560320"/>
+              </a:tblGrid>
+              <a:tr h="646611">
+                <a:tc>
+                  <a:txBody>
+                    <a:bodyPr/>
+                    <a:lstStyle/>
+                    <a:p>
+                      <a:pPr algn="ctr" indent="0" marL="0">
+                        <a:buNone/>
+                      </a:pPr>
+                      <a:r>
+                        <a:rPr lang="en-US" sz="1800" b="1" dirty="0">
+                          <a:solidFill>
+                            <a:srgbClr val="FFFFFF"/>
+                          </a:solidFill>
+                          <a:latin typeface="Pretendard" pitchFamily="34" charset="0"/>
+                          <a:ea typeface="Pretendard" pitchFamily="34" charset="-122"/>
+                          <a:cs typeface="Pretendard" pitchFamily="34" charset="-120"/>
+                        </a:rPr>
+                        <a:t>Style</a:t>
+                      </a:r>
+                      <a:endParaRPr lang="en-US" sz="1800" dirty="0">
+                        <a:latin typeface="Pretendard" charset="0"/>
+                        <a:ea typeface="Pretendard" charset="0"/>
+                        <a:cs typeface="Pretendard" charset="0"/>
+                      </a:endParaRPr>
+                    </a:p>
+                  </a:txBody>
+                  <a:tcPr marL="54864" marR="54864" marT="36576" marB="36576" anchor="ctr">
+                    <a:lnL w="12700" cap="flat" cmpd="sng" algn="ctr">
+                      <a:solidFill>
+                        <a:srgbClr val="D4D6DB"/>
+                      </a:solidFill>
+                      <a:prstDash val="solid"/>
+                      <a:round/>
+                      <a:headEnd type="none" w="med" len="med"/>
+                      <a:tailEnd type="none" w="med" len="med"/>
+                    </a:lnL>
+                    <a:lnR w="12700" cap="flat" cmpd="sng" algn="ctr">
+                      <a:solidFill>
+                        <a:srgbClr val="D4D6DB"/>
+                      </a:solidFill>
+                      <a:prstDash val="solid"/>
+                      <a:round/>
+                      <a:headEnd type="none" w="med" len="med"/>
+                      <a:tailEnd type="none" w="med" len="med"/>
+                    </a:lnR>
+                    <a:lnT w="12700" cap="flat" cmpd="sng" algn="ctr">
+                      <a:solidFill>
+                        <a:srgbClr val="D4D6DB"/>
+                      </a:solidFill>
+                      <a:prstDash val="solid"/>
+                      <a:round/>
+                      <a:headEnd type="none" w="med" len="med"/>
+                      <a:tailEnd type="none" w="med" len="med"/>
+                    </a:lnT>
+                    <a:lnB w="12700" cap="flat" cmpd="sng" algn="ctr">
+                      <a:solidFill>
+                        <a:srgbClr val="D4D6DB"/>
+                      </a:solidFill>
+                      <a:prstDash val="solid"/>
+                      <a:round/>
+                      <a:headEnd type="none" w="med" len="med"/>
+                      <a:tailEnd type="none" w="med" len="med"/>
+                    </a:lnB>
+                    <a:solidFill>
+                      <a:srgbClr val="111827"/>
+                    </a:solidFill>
+                  </a:tcPr>
+                </a:tc>
+                <a:tc>
+                  <a:txBody>
+                    <a:bodyPr/>
+                    <a:lstStyle/>
+                    <a:p>
+                      <a:pPr algn="ctr" indent="0" marL="0">
+                        <a:buNone/>
+                      </a:pPr>
+                      <a:r>
+                        <a:rPr lang="en-US" sz="1800" b="1" dirty="0">
+                          <a:solidFill>
+                            <a:srgbClr val="FFFFFF"/>
+                          </a:solidFill>
+                          <a:latin typeface="Pretendard" pitchFamily="34" charset="0"/>
+                          <a:ea typeface="Pretendard" pitchFamily="34" charset="-122"/>
+                          <a:cs typeface="Pretendard" pitchFamily="34" charset="-120"/>
+                        </a:rPr>
+                        <a:t>Main Color</a:t>
+                      </a:r>
+                      <a:endParaRPr lang="en-US" sz="1800" dirty="0">
+                        <a:latin typeface="Pretendard" charset="0"/>
+                        <a:ea typeface="Pretendard" charset="0"/>
+                        <a:cs typeface="Pretendard" charset="0"/>
+                      </a:endParaRPr>
+                    </a:p>
+                  </a:txBody>
+                  <a:tcPr marL="54864" marR="54864" marT="36576" marB="36576" anchor="ctr">
+                    <a:lnL w="12700" cap="flat" cmpd="sng" algn="ctr">
+                      <a:solidFill>
+                        <a:srgbClr val="D4D6DB"/>
+                      </a:solidFill>
+                      <a:prstDash val="solid"/>
+                      <a:round/>
+                      <a:headEnd type="none" w="med" len="med"/>
+                      <a:tailEnd type="none" w="med" len="med"/>
+                    </a:lnL>
+                    <a:lnR w="12700" cap="flat" cmpd="sng" algn="ctr">
+                      <a:solidFill>
+                        <a:srgbClr val="D4D6DB"/>
+                      </a:solidFill>
+                      <a:prstDash val="solid"/>
+                      <a:round/>
+                      <a:headEnd type="none" w="med" len="med"/>
+                      <a:tailEnd type="none" w="med" len="med"/>
+                    </a:lnR>
+                    <a:lnT w="12700" cap="flat" cmpd="sng" algn="ctr">
+                      <a:solidFill>
+                        <a:srgbClr val="D4D6DB"/>
+                      </a:solidFill>
+                      <a:prstDash val="solid"/>
+                      <a:round/>
+                      <a:headEnd type="none" w="med" len="med"/>
+                      <a:tailEnd type="none" w="med" len="med"/>
+                    </a:lnT>
+                    <a:lnB w="12700" cap="flat" cmpd="sng" algn="ctr">
+                      <a:solidFill>
+                        <a:srgbClr val="D4D6DB"/>
+                      </a:solidFill>
+                      <a:prstDash val="solid"/>
+                      <a:round/>
+                      <a:headEnd type="none" w="med" len="med"/>
+                      <a:tailEnd type="none" w="med" len="med"/>
+                    </a:lnB>
+                    <a:solidFill>
+                      <a:srgbClr val="111827"/>
+                    </a:solidFill>
+                  </a:tcPr>
+                </a:tc>
+                <a:tc>
+                  <a:txBody>
+                    <a:bodyPr/>
+                    <a:lstStyle/>
+                    <a:p>
+                      <a:pPr algn="ctr" indent="0" marL="0">
+                        <a:buNone/>
+                      </a:pPr>
+                      <a:r>
+                        <a:rPr lang="en-US" sz="1800" b="1" dirty="0">
+                          <a:solidFill>
+                            <a:srgbClr val="FFFFFF"/>
+                          </a:solidFill>
+                          <a:latin typeface="Pretendard" pitchFamily="34" charset="0"/>
+                          <a:ea typeface="Pretendard" pitchFamily="34" charset="-122"/>
+                          <a:cs typeface="Pretendard" pitchFamily="34" charset="-120"/>
+                        </a:rPr>
+                        <a:t>Harmony</a:t>
+                      </a:r>
+                      <a:endParaRPr lang="en-US" sz="1800" dirty="0">
+                        <a:latin typeface="Pretendard" charset="0"/>
+                        <a:ea typeface="Pretendard" charset="0"/>
+                        <a:cs typeface="Pretendard" charset="0"/>
+                      </a:endParaRPr>
+                    </a:p>
+                  </a:txBody>
+                  <a:tcPr marL="54864" marR="54864" marT="36576" marB="36576" anchor="ctr">
+                    <a:lnL w="12700" cap="flat" cmpd="sng" algn="ctr">
+                      <a:solidFill>
+                        <a:srgbClr val="D4D6DB"/>
+                      </a:solidFill>
+                      <a:prstDash val="solid"/>
+                      <a:round/>
+                      <a:headEnd type="none" w="med" len="med"/>
+                      <a:tailEnd type="none" w="med" len="med"/>
+                    </a:lnL>
+                    <a:lnR w="12700" cap="flat" cmpd="sng" algn="ctr">
+                      <a:solidFill>
+                        <a:srgbClr val="D4D6DB"/>
+                      </a:solidFill>
+                      <a:prstDash val="solid"/>
+                      <a:round/>
+                      <a:headEnd type="none" w="med" len="med"/>
+                      <a:tailEnd type="none" w="med" len="med"/>
+                    </a:lnR>
+                    <a:lnT w="12700" cap="flat" cmpd="sng" algn="ctr">
+                      <a:solidFill>
+                        <a:srgbClr val="D4D6DB"/>
+                      </a:solidFill>
+                      <a:prstDash val="solid"/>
+                      <a:round/>
+                      <a:headEnd type="none" w="med" len="med"/>
+                      <a:tailEnd type="none" w="med" len="med"/>
+                    </a:lnT>
+                    <a:lnB w="12700" cap="flat" cmpd="sng" algn="ctr">
+                      <a:solidFill>
+                        <a:srgbClr val="D4D6DB"/>
+                      </a:solidFill>
+                      <a:prstDash val="solid"/>
+                      <a:round/>
+                      <a:headEnd type="none" w="med" len="med"/>
+                      <a:tailEnd type="none" w="med" len="med"/>
+                    </a:lnB>
+                    <a:solidFill>
+                      <a:srgbClr val="111827"/>
+                    </a:solidFill>
+                  </a:tcPr>
+                </a:tc>
+                <a:tc>
+                  <a:txBody>
+                    <a:bodyPr/>
+                    <a:lstStyle/>
+                    <a:p>
+                      <a:pPr algn="ctr" indent="0" marL="0">
+                        <a:buNone/>
+                      </a:pPr>
+                      <a:r>
+                        <a:rPr lang="en-US" sz="1800" b="1" dirty="0">
+                          <a:solidFill>
+                            <a:srgbClr val="FFFFFF"/>
+                          </a:solidFill>
+                          <a:latin typeface="Pretendard" pitchFamily="34" charset="0"/>
+                          <a:ea typeface="Pretendard" pitchFamily="34" charset="-122"/>
+                          <a:cs typeface="Pretendard" pitchFamily="34" charset="-120"/>
+                        </a:rPr>
+                        <a:t>Intended Role</a:t>
+                      </a:r>
+                      <a:endParaRPr lang="en-US" sz="1800" dirty="0">
+                        <a:latin typeface="Pretendard" charset="0"/>
+                        <a:ea typeface="Pretendard" charset="0"/>
+                        <a:cs typeface="Pretendard" charset="0"/>
+                      </a:endParaRPr>
+                    </a:p>
+                  </a:txBody>
+                  <a:tcPr marL="54864" marR="54864" marT="36576" marB="36576" anchor="ctr">
+                    <a:lnL w="12700" cap="flat" cmpd="sng" algn="ctr">
+                      <a:solidFill>
+                        <a:srgbClr val="D4D6DB"/>
+                      </a:solidFill>
+                      <a:prstDash val="solid"/>
+                      <a:round/>
+                      <a:headEnd type="none" w="med" len="med"/>
+                      <a:tailEnd type="none" w="med" len="med"/>
+                    </a:lnL>
+                    <a:lnR w="12700" cap="flat" cmpd="sng" algn="ctr">
+                      <a:solidFill>
+                        <a:srgbClr val="D4D6DB"/>
+                      </a:solidFill>
+                      <a:prstDash val="solid"/>
+                      <a:round/>
+                      <a:headEnd type="none" w="med" len="med"/>
+                      <a:tailEnd type="none" w="med" len="med"/>
+                    </a:lnR>
+                    <a:lnT w="12700" cap="flat" cmpd="sng" algn="ctr">
+                      <a:solidFill>
+                        <a:srgbClr val="D4D6DB"/>
+                      </a:solidFill>
+                      <a:prstDash val="solid"/>
+                      <a:round/>
+                      <a:headEnd type="none" w="med" len="med"/>
+                      <a:tailEnd type="none" w="med" len="med"/>
+                    </a:lnT>
+                    <a:lnB w="12700" cap="flat" cmpd="sng" algn="ctr">
+                      <a:solidFill>
+                        <a:srgbClr val="D4D6DB"/>
+                      </a:solidFill>
+                      <a:prstDash val="solid"/>
+                      <a:round/>
+                      <a:headEnd type="none" w="med" len="med"/>
+                      <a:tailEnd type="none" w="med" len="med"/>
+                    </a:lnB>
+                    <a:solidFill>
+                      <a:srgbClr val="111827"/>
+                    </a:solidFill>
+                  </a:tcPr>
+                </a:tc>
+              </a:tr>
+              <a:tr h="646611">
+                <a:tc>
+                  <a:txBody>
+                    <a:bodyPr/>
+                    <a:lstStyle/>
+                    <a:p>
+                      <a:pPr algn="l" indent="0" marL="0">
+                        <a:buNone/>
+                      </a:pPr>
+                      <a:r>
+                        <a:rPr lang="en-US" sz="1800" b="1" dirty="0">
+                          <a:solidFill>
+                            <a:srgbClr val="111827"/>
+                          </a:solidFill>
+                          <a:latin typeface="Pretendard" pitchFamily="34" charset="0"/>
+                          <a:ea typeface="Pretendard" pitchFamily="34" charset="-122"/>
+                          <a:cs typeface="Pretendard" pitchFamily="34" charset="-120"/>
+                        </a:rPr>
+                        <a:t>clean</a:t>
+                      </a:r>
+                      <a:endParaRPr lang="en-US" sz="1800" dirty="0">
+                        <a:latin typeface="Pretendard" charset="0"/>
+                        <a:ea typeface="Pretendard" charset="0"/>
+                        <a:cs typeface="Pretendard" charset="0"/>
+                      </a:endParaRPr>
+                    </a:p>
+                  </a:txBody>
+                  <a:tcPr marL="54864" marR="54864" marT="36576" marB="36576" anchor="ctr">
+                    <a:lnL w="12700" cap="flat" cmpd="sng" algn="ctr">
+                      <a:solidFill>
+                        <a:srgbClr val="D4D6DB"/>
+                      </a:solidFill>
+                      <a:prstDash val="solid"/>
+                      <a:round/>
+                      <a:headEnd type="none" w="med" len="med"/>
+                      <a:tailEnd type="none" w="med" len="med"/>
+                    </a:lnL>
+                    <a:lnR w="12700" cap="flat" cmpd="sng" algn="ctr">
+                      <a:solidFill>
+                        <a:srgbClr val="D4D6DB"/>
+                      </a:solidFill>
+                      <a:prstDash val="solid"/>
+                      <a:round/>
+                      <a:headEnd type="none" w="med" len="med"/>
+                      <a:tailEnd type="none" w="med" len="med"/>
+                    </a:lnR>
+                    <a:lnT w="12700" cap="flat" cmpd="sng" algn="ctr">
+                      <a:solidFill>
+                        <a:srgbClr val="D4D6DB"/>
+                      </a:solidFill>
+                      <a:prstDash val="solid"/>
+                      <a:round/>
+                      <a:headEnd type="none" w="med" len="med"/>
+                      <a:tailEnd type="none" w="med" len="med"/>
+                    </a:lnT>
+                    <a:lnB w="12700" cap="flat" cmpd="sng" algn="ctr">
+                      <a:solidFill>
+                        <a:srgbClr val="D4D6DB"/>
+                      </a:solidFill>
+                      <a:prstDash val="solid"/>
+                      <a:round/>
+                      <a:headEnd type="none" w="med" len="med"/>
+                      <a:tailEnd type="none" w="med" len="med"/>
+                    </a:lnB>
+                  </a:tcPr>
+                </a:tc>
+                <a:tc>
+                  <a:txBody>
+                    <a:bodyPr/>
+                    <a:lstStyle/>
+                    <a:p>
+                      <a:pPr algn="l" indent="0" marL="0">
+                        <a:buNone/>
+                      </a:pPr>
+                      <a:r>
+                        <a:rPr lang="en-US" sz="1800" dirty="0">
+                          <a:solidFill>
+                            <a:srgbClr val="111827"/>
+                          </a:solidFill>
+                          <a:latin typeface="Pretendard" pitchFamily="34" charset="0"/>
+                          <a:ea typeface="Pretendard" pitchFamily="34" charset="-122"/>
+                          <a:cs typeface="Pretendard" pitchFamily="34" charset="-120"/>
+                        </a:rPr>
+                        <a:t>#2563EB</a:t>
+                      </a:r>
+                      <a:endParaRPr lang="en-US" sz="1800" dirty="0">
+                        <a:latin typeface="Pretendard" charset="0"/>
+                        <a:ea typeface="Pretendard" charset="0"/>
+                        <a:cs typeface="Pretendard" charset="0"/>
+                      </a:endParaRPr>
+                    </a:p>
+                  </a:txBody>
+                  <a:tcPr marL="54864" marR="54864" marT="36576" marB="36576" anchor="ctr">
+                    <a:lnL w="12700" cap="flat" cmpd="sng" algn="ctr">
+                      <a:solidFill>
+                        <a:srgbClr val="D4D6DB"/>
+                      </a:solidFill>
+                      <a:prstDash val="solid"/>
+                      <a:round/>
+                      <a:headEnd type="none" w="med" len="med"/>
+                      <a:tailEnd type="none" w="med" len="med"/>
+                    </a:lnL>
+                    <a:lnR w="12700" cap="flat" cmpd="sng" algn="ctr">
+                      <a:solidFill>
+                        <a:srgbClr val="D4D6DB"/>
+                      </a:solidFill>
+                      <a:prstDash val="solid"/>
+                      <a:round/>
+                      <a:headEnd type="none" w="med" len="med"/>
+                      <a:tailEnd type="none" w="med" len="med"/>
+                    </a:lnR>
+                    <a:lnT w="12700" cap="flat" cmpd="sng" algn="ctr">
+                      <a:solidFill>
+                        <a:srgbClr val="D4D6DB"/>
+                      </a:solidFill>
+                      <a:prstDash val="solid"/>
+                      <a:round/>
+                      <a:headEnd type="none" w="med" len="med"/>
+                      <a:tailEnd type="none" w="med" len="med"/>
+                    </a:lnT>
+                    <a:lnB w="12700" cap="flat" cmpd="sng" algn="ctr">
+                      <a:solidFill>
+                        <a:srgbClr val="D4D6DB"/>
+                      </a:solidFill>
+                      <a:prstDash val="solid"/>
+                      <a:round/>
+                      <a:headEnd type="none" w="med" len="med"/>
+                      <a:tailEnd type="none" w="med" len="med"/>
+                    </a:lnB>
+                  </a:tcPr>
+                </a:tc>
+                <a:tc>
+                  <a:txBody>
+                    <a:bodyPr/>
+                    <a:lstStyle/>
+                    <a:p>
+                      <a:pPr algn="l" indent="0" marL="0">
+                        <a:buNone/>
+                      </a:pPr>
+                      <a:r>
+                        <a:rPr lang="en-US" sz="1800" dirty="0">
+                          <a:solidFill>
+                            <a:srgbClr val="111827"/>
+                          </a:solidFill>
+                          <a:latin typeface="Pretendard" pitchFamily="34" charset="0"/>
+                          <a:ea typeface="Pretendard" pitchFamily="34" charset="-122"/>
+                          <a:cs typeface="Pretendard" pitchFamily="34" charset="-120"/>
+                        </a:rPr>
+                        <a:t>analogous</a:t>
+                      </a:r>
+                      <a:endParaRPr lang="en-US" sz="1800" dirty="0">
+                        <a:latin typeface="Pretendard" charset="0"/>
+                        <a:ea typeface="Pretendard" charset="0"/>
+                        <a:cs typeface="Pretendard" charset="0"/>
+                      </a:endParaRPr>
+                    </a:p>
+                  </a:txBody>
+                  <a:tcPr marL="54864" marR="54864" marT="36576" marB="36576" anchor="ctr">
+                    <a:lnL w="12700" cap="flat" cmpd="sng" algn="ctr">
+                      <a:solidFill>
+                        <a:srgbClr val="D4D6DB"/>
+                      </a:solidFill>
+                      <a:prstDash val="solid"/>
+                      <a:round/>
+                      <a:headEnd type="none" w="med" len="med"/>
+                      <a:tailEnd type="none" w="med" len="med"/>
+                    </a:lnL>
+                    <a:lnR w="12700" cap="flat" cmpd="sng" algn="ctr">
+                      <a:solidFill>
+                        <a:srgbClr val="D4D6DB"/>
+                      </a:solidFill>
+                      <a:prstDash val="solid"/>
+                      <a:round/>
+                      <a:headEnd type="none" w="med" len="med"/>
+                      <a:tailEnd type="none" w="med" len="med"/>
+                    </a:lnR>
+                    <a:lnT w="12700" cap="flat" cmpd="sng" algn="ctr">
+                      <a:solidFill>
+                        <a:srgbClr val="D4D6DB"/>
+                      </a:solidFill>
+                      <a:prstDash val="solid"/>
+                      <a:round/>
+                      <a:headEnd type="none" w="med" len="med"/>
+                      <a:tailEnd type="none" w="med" len="med"/>
+                    </a:lnT>
+                    <a:lnB w="12700" cap="flat" cmpd="sng" algn="ctr">
+                      <a:solidFill>
+                        <a:srgbClr val="D4D6DB"/>
+                      </a:solidFill>
+                      <a:prstDash val="solid"/>
+                      <a:round/>
+                      <a:headEnd type="none" w="med" len="med"/>
+                      <a:tailEnd type="none" w="med" len="med"/>
+                    </a:lnB>
+                  </a:tcPr>
+                </a:tc>
+                <a:tc>
+                  <a:txBody>
+                    <a:bodyPr/>
+                    <a:lstStyle/>
+                    <a:p>
+                      <a:pPr algn="l" indent="0" marL="0">
+                        <a:buNone/>
+                      </a:pPr>
+                      <a:r>
+                        <a:rPr lang="en-US" sz="1800" dirty="0">
+                          <a:solidFill>
+                            <a:srgbClr val="111827"/>
+                          </a:solidFill>
+                          <a:latin typeface="Pretendard" pitchFamily="34" charset="0"/>
+                          <a:ea typeface="Pretendard" pitchFamily="34" charset="-122"/>
+                          <a:cs typeface="Pretendard" pitchFamily="34" charset="-120"/>
+                        </a:rPr>
+                        <a:t>Minimal blue system for clean operational slides</a:t>
+                      </a:r>
+                      <a:endParaRPr lang="en-US" sz="1800" dirty="0">
+                        <a:latin typeface="Pretendard" charset="0"/>
+                        <a:ea typeface="Pretendard" charset="0"/>
+                        <a:cs typeface="Pretendard" charset="0"/>
+                      </a:endParaRPr>
+                    </a:p>
+                  </a:txBody>
+                  <a:tcPr marL="54864" marR="54864" marT="36576" marB="36576" anchor="ctr">
+                    <a:lnL w="12700" cap="flat" cmpd="sng" algn="ctr">
+                      <a:solidFill>
+                        <a:srgbClr val="D4D6DB"/>
+                      </a:solidFill>
+                      <a:prstDash val="solid"/>
+                      <a:round/>
+                      <a:headEnd type="none" w="med" len="med"/>
+                      <a:tailEnd type="none" w="med" len="med"/>
+                    </a:lnL>
+                    <a:lnR w="12700" cap="flat" cmpd="sng" algn="ctr">
+                      <a:solidFill>
+                        <a:srgbClr val="D4D6DB"/>
+                      </a:solidFill>
+                      <a:prstDash val="solid"/>
+                      <a:round/>
+                      <a:headEnd type="none" w="med" len="med"/>
+                      <a:tailEnd type="none" w="med" len="med"/>
+                    </a:lnR>
+                    <a:lnT w="12700" cap="flat" cmpd="sng" algn="ctr">
+                      <a:solidFill>
+                        <a:srgbClr val="D4D6DB"/>
+                      </a:solidFill>
+                      <a:prstDash val="solid"/>
+                      <a:round/>
+                      <a:headEnd type="none" w="med" len="med"/>
+                      <a:tailEnd type="none" w="med" len="med"/>
+                    </a:lnT>
+                    <a:lnB w="12700" cap="flat" cmpd="sng" algn="ctr">
+                      <a:solidFill>
+                        <a:srgbClr val="D4D6DB"/>
+                      </a:solidFill>
+                      <a:prstDash val="solid"/>
+                      <a:round/>
+                      <a:headEnd type="none" w="med" len="med"/>
+                      <a:tailEnd type="none" w="med" len="med"/>
+                    </a:lnB>
+                  </a:tcPr>
+                </a:tc>
+              </a:tr>
+              <a:tr h="646611">
+                <a:tc>
+                  <a:txBody>
+                    <a:bodyPr/>
+                    <a:lstStyle/>
+                    <a:p>
+                      <a:pPr algn="l" indent="0" marL="0">
+                        <a:buNone/>
+                      </a:pPr>
+                      <a:r>
+                        <a:rPr lang="en-US" sz="1800" b="1" dirty="0">
+                          <a:solidFill>
+                            <a:srgbClr val="111827"/>
+                          </a:solidFill>
+                          <a:latin typeface="Pretendard" pitchFamily="34" charset="0"/>
+                          <a:ea typeface="Pretendard" pitchFamily="34" charset="-122"/>
+                          <a:cs typeface="Pretendard" pitchFamily="34" charset="-120"/>
+                        </a:rPr>
+                        <a:t>minimalism</a:t>
+                      </a:r>
+                      <a:endParaRPr lang="en-US" sz="1800" dirty="0">
+                        <a:latin typeface="Pretendard" charset="0"/>
+                        <a:ea typeface="Pretendard" charset="0"/>
+                        <a:cs typeface="Pretendard" charset="0"/>
+                      </a:endParaRPr>
+                    </a:p>
+                  </a:txBody>
+                  <a:tcPr marL="54864" marR="54864" marT="36576" marB="36576" anchor="ctr">
+                    <a:lnL w="12700" cap="flat" cmpd="sng" algn="ctr">
+                      <a:solidFill>
+                        <a:srgbClr val="D4D6DB"/>
+                      </a:solidFill>
+                      <a:prstDash val="solid"/>
+                      <a:round/>
+                      <a:headEnd type="none" w="med" len="med"/>
+                      <a:tailEnd type="none" w="med" len="med"/>
+                    </a:lnL>
+                    <a:lnR w="12700" cap="flat" cmpd="sng" algn="ctr">
+                      <a:solidFill>
+                        <a:srgbClr val="D4D6DB"/>
+                      </a:solidFill>
+                      <a:prstDash val="solid"/>
+                      <a:round/>
+                      <a:headEnd type="none" w="med" len="med"/>
+                      <a:tailEnd type="none" w="med" len="med"/>
+                    </a:lnR>
+                    <a:lnT w="12700" cap="flat" cmpd="sng" algn="ctr">
+                      <a:solidFill>
+                        <a:srgbClr val="D4D6DB"/>
+                      </a:solidFill>
+                      <a:prstDash val="solid"/>
+                      <a:round/>
+                      <a:headEnd type="none" w="med" len="med"/>
+                      <a:tailEnd type="none" w="med" len="med"/>
+                    </a:lnT>
+                    <a:lnB w="12700" cap="flat" cmpd="sng" algn="ctr">
+                      <a:solidFill>
+                        <a:srgbClr val="D4D6DB"/>
+                      </a:solidFill>
+                      <a:prstDash val="solid"/>
+                      <a:round/>
+                      <a:headEnd type="none" w="med" len="med"/>
+                      <a:tailEnd type="none" w="med" len="med"/>
+                    </a:lnB>
+                    <a:solidFill>
+                      <a:srgbClr val="FFFFFF">
+                        <a:alpha val="80000"/>
+                      </a:srgbClr>
+                    </a:solidFill>
+                  </a:tcPr>
+                </a:tc>
+                <a:tc>
+                  <a:txBody>
+                    <a:bodyPr/>
+                    <a:lstStyle/>
+                    <a:p>
+                      <a:pPr algn="l" indent="0" marL="0">
+                        <a:buNone/>
+                      </a:pPr>
+                      <a:r>
+                        <a:rPr lang="en-US" sz="1800" dirty="0">
+                          <a:solidFill>
+                            <a:srgbClr val="111827"/>
+                          </a:solidFill>
+                          <a:latin typeface="Pretendard" pitchFamily="34" charset="0"/>
+                          <a:ea typeface="Pretendard" pitchFamily="34" charset="-122"/>
+                          <a:cs typeface="Pretendard" pitchFamily="34" charset="-120"/>
+                        </a:rPr>
+                        <a:t>#111827</a:t>
+                      </a:r>
+                      <a:endParaRPr lang="en-US" sz="1800" dirty="0">
+                        <a:latin typeface="Pretendard" charset="0"/>
+                        <a:ea typeface="Pretendard" charset="0"/>
+                        <a:cs typeface="Pretendard" charset="0"/>
+                      </a:endParaRPr>
+                    </a:p>
+                  </a:txBody>
+                  <a:tcPr marL="54864" marR="54864" marT="36576" marB="36576" anchor="ctr">
+                    <a:lnL w="12700" cap="flat" cmpd="sng" algn="ctr">
+                      <a:solidFill>
+                        <a:srgbClr val="D4D6DB"/>
+                      </a:solidFill>
+                      <a:prstDash val="solid"/>
+                      <a:round/>
+                      <a:headEnd type="none" w="med" len="med"/>
+                      <a:tailEnd type="none" w="med" len="med"/>
+                    </a:lnL>
+                    <a:lnR w="12700" cap="flat" cmpd="sng" algn="ctr">
+                      <a:solidFill>
+                        <a:srgbClr val="D4D6DB"/>
+                      </a:solidFill>
+                      <a:prstDash val="solid"/>
+                      <a:round/>
+                      <a:headEnd type="none" w="med" len="med"/>
+                      <a:tailEnd type="none" w="med" len="med"/>
+                    </a:lnR>
+                    <a:lnT w="12700" cap="flat" cmpd="sng" algn="ctr">
+                      <a:solidFill>
+                        <a:srgbClr val="D4D6DB"/>
+                      </a:solidFill>
+                      <a:prstDash val="solid"/>
+                      <a:round/>
+                      <a:headEnd type="none" w="med" len="med"/>
+                      <a:tailEnd type="none" w="med" len="med"/>
+                    </a:lnT>
+                    <a:lnB w="12700" cap="flat" cmpd="sng" algn="ctr">
+                      <a:solidFill>
+                        <a:srgbClr val="D4D6DB"/>
+                      </a:solidFill>
+                      <a:prstDash val="solid"/>
+                      <a:round/>
+                      <a:headEnd type="none" w="med" len="med"/>
+                      <a:tailEnd type="none" w="med" len="med"/>
+                    </a:lnB>
+                    <a:solidFill>
+                      <a:srgbClr val="FFFFFF">
+                        <a:alpha val="80000"/>
+                      </a:srgbClr>
+                    </a:solidFill>
+                  </a:tcPr>
+                </a:tc>
+                <a:tc>
+                  <a:txBody>
+                    <a:bodyPr/>
+                    <a:lstStyle/>
+                    <a:p>
+                      <a:pPr algn="l" indent="0" marL="0">
+                        <a:buNone/>
+                      </a:pPr>
+                      <a:r>
+                        <a:rPr lang="en-US" sz="1800" dirty="0">
+                          <a:solidFill>
+                            <a:srgbClr val="111827"/>
+                          </a:solidFill>
+                          <a:latin typeface="Pretendard" pitchFamily="34" charset="0"/>
+                          <a:ea typeface="Pretendard" pitchFamily="34" charset="-122"/>
+                          <a:cs typeface="Pretendard" pitchFamily="34" charset="-120"/>
+                        </a:rPr>
+                        <a:t>monochromatic</a:t>
+                      </a:r>
+                      <a:endParaRPr lang="en-US" sz="1800" dirty="0">
+                        <a:latin typeface="Pretendard" charset="0"/>
+                        <a:ea typeface="Pretendard" charset="0"/>
+                        <a:cs typeface="Pretendard" charset="0"/>
+                      </a:endParaRPr>
+                    </a:p>
+                  </a:txBody>
+                  <a:tcPr marL="54864" marR="54864" marT="36576" marB="36576" anchor="ctr">
+                    <a:lnL w="12700" cap="flat" cmpd="sng" algn="ctr">
+                      <a:solidFill>
+                        <a:srgbClr val="D4D6DB"/>
+                      </a:solidFill>
+                      <a:prstDash val="solid"/>
+                      <a:round/>
+                      <a:headEnd type="none" w="med" len="med"/>
+                      <a:tailEnd type="none" w="med" len="med"/>
+                    </a:lnL>
+                    <a:lnR w="12700" cap="flat" cmpd="sng" algn="ctr">
+                      <a:solidFill>
+                        <a:srgbClr val="D4D6DB"/>
+                      </a:solidFill>
+                      <a:prstDash val="solid"/>
+                      <a:round/>
+                      <a:headEnd type="none" w="med" len="med"/>
+                      <a:tailEnd type="none" w="med" len="med"/>
+                    </a:lnR>
+                    <a:lnT w="12700" cap="flat" cmpd="sng" algn="ctr">
+                      <a:solidFill>
+                        <a:srgbClr val="D4D6DB"/>
+                      </a:solidFill>
+                      <a:prstDash val="solid"/>
+                      <a:round/>
+                      <a:headEnd type="none" w="med" len="med"/>
+                      <a:tailEnd type="none" w="med" len="med"/>
+                    </a:lnT>
+                    <a:lnB w="12700" cap="flat" cmpd="sng" algn="ctr">
+                      <a:solidFill>
+                        <a:srgbClr val="D4D6DB"/>
+                      </a:solidFill>
+                      <a:prstDash val="solid"/>
+                      <a:round/>
+                      <a:headEnd type="none" w="med" len="med"/>
+                      <a:tailEnd type="none" w="med" len="med"/>
+                    </a:lnB>
+                    <a:solidFill>
+                      <a:srgbClr val="FFFFFF">
+                        <a:alpha val="80000"/>
+                      </a:srgbClr>
+                    </a:solidFill>
+                  </a:tcPr>
+                </a:tc>
+                <a:tc>
+                  <a:txBody>
+                    <a:bodyPr/>
+                    <a:lstStyle/>
+                    <a:p>
+                      <a:pPr algn="l" indent="0" marL="0">
+                        <a:buNone/>
+                      </a:pPr>
+                      <a:r>
+                        <a:rPr lang="en-US" sz="1800" dirty="0">
+                          <a:solidFill>
+                            <a:srgbClr val="111827"/>
+                          </a:solidFill>
+                          <a:latin typeface="Pretendard" pitchFamily="34" charset="0"/>
+                          <a:ea typeface="Pretendard" pitchFamily="34" charset="-122"/>
+                          <a:cs typeface="Pretendard" pitchFamily="34" charset="-120"/>
+                        </a:rPr>
+                        <a:t>Whitespace-first slides with thin rules and restrained emphasis</a:t>
+                      </a:r>
+                      <a:endParaRPr lang="en-US" sz="1800" dirty="0">
+                        <a:latin typeface="Pretendard" charset="0"/>
+                        <a:ea typeface="Pretendard" charset="0"/>
+                        <a:cs typeface="Pretendard" charset="0"/>
+                      </a:endParaRPr>
+                    </a:p>
+                  </a:txBody>
+                  <a:tcPr marL="54864" marR="54864" marT="36576" marB="36576" anchor="ctr">
+                    <a:lnL w="12700" cap="flat" cmpd="sng" algn="ctr">
+                      <a:solidFill>
+                        <a:srgbClr val="D4D6DB"/>
+                      </a:solidFill>
+                      <a:prstDash val="solid"/>
+                      <a:round/>
+                      <a:headEnd type="none" w="med" len="med"/>
+                      <a:tailEnd type="none" w="med" len="med"/>
+                    </a:lnL>
+                    <a:lnR w="12700" cap="flat" cmpd="sng" algn="ctr">
+                      <a:solidFill>
+                        <a:srgbClr val="D4D6DB"/>
+                      </a:solidFill>
+                      <a:prstDash val="solid"/>
+                      <a:round/>
+                      <a:headEnd type="none" w="med" len="med"/>
+                      <a:tailEnd type="none" w="med" len="med"/>
+                    </a:lnR>
+                    <a:lnT w="12700" cap="flat" cmpd="sng" algn="ctr">
+                      <a:solidFill>
+                        <a:srgbClr val="D4D6DB"/>
+                      </a:solidFill>
+                      <a:prstDash val="solid"/>
+                      <a:round/>
+                      <a:headEnd type="none" w="med" len="med"/>
+                      <a:tailEnd type="none" w="med" len="med"/>
+                    </a:lnT>
+                    <a:lnB w="12700" cap="flat" cmpd="sng" algn="ctr">
+                      <a:solidFill>
+                        <a:srgbClr val="D4D6DB"/>
+                      </a:solidFill>
+                      <a:prstDash val="solid"/>
+                      <a:round/>
+                      <a:headEnd type="none" w="med" len="med"/>
+                      <a:tailEnd type="none" w="med" len="med"/>
+                    </a:lnB>
+                    <a:solidFill>
+                      <a:srgbClr val="FFFFFF">
+                        <a:alpha val="80000"/>
+                      </a:srgbClr>
+                    </a:solidFill>
+                  </a:tcPr>
+                </a:tc>
+              </a:tr>
+              <a:tr h="646611">
+                <a:tc>
+                  <a:txBody>
+                    <a:bodyPr/>
+                    <a:lstStyle/>
+                    <a:p>
+                      <a:pPr algn="l" indent="0" marL="0">
+                        <a:buNone/>
+                      </a:pPr>
+                      <a:r>
+                        <a:rPr lang="en-US" sz="1800" b="1" dirty="0">
+                          <a:solidFill>
+                            <a:srgbClr val="111827"/>
+                          </a:solidFill>
+                          <a:latin typeface="Pretendard" pitchFamily="34" charset="0"/>
+                          <a:ea typeface="Pretendard" pitchFamily="34" charset="-122"/>
+                          <a:cs typeface="Pretendard" pitchFamily="34" charset="-120"/>
+                        </a:rPr>
+                        <a:t>newmorphism</a:t>
+                      </a:r>
+                      <a:endParaRPr lang="en-US" sz="1800" dirty="0">
+                        <a:latin typeface="Pretendard" charset="0"/>
+                        <a:ea typeface="Pretendard" charset="0"/>
+                        <a:cs typeface="Pretendard" charset="0"/>
+                      </a:endParaRPr>
+                    </a:p>
+                  </a:txBody>
+                  <a:tcPr marL="54864" marR="54864" marT="36576" marB="36576" anchor="ctr">
+                    <a:lnL w="12700" cap="flat" cmpd="sng" algn="ctr">
+                      <a:solidFill>
+                        <a:srgbClr val="D4D6DB"/>
+                      </a:solidFill>
+                      <a:prstDash val="solid"/>
+                      <a:round/>
+                      <a:headEnd type="none" w="med" len="med"/>
+                      <a:tailEnd type="none" w="med" len="med"/>
+                    </a:lnL>
+                    <a:lnR w="12700" cap="flat" cmpd="sng" algn="ctr">
+                      <a:solidFill>
+                        <a:srgbClr val="D4D6DB"/>
+                      </a:solidFill>
+                      <a:prstDash val="solid"/>
+                      <a:round/>
+                      <a:headEnd type="none" w="med" len="med"/>
+                      <a:tailEnd type="none" w="med" len="med"/>
+                    </a:lnR>
+                    <a:lnT w="12700" cap="flat" cmpd="sng" algn="ctr">
+                      <a:solidFill>
+                        <a:srgbClr val="D4D6DB"/>
+                      </a:solidFill>
+                      <a:prstDash val="solid"/>
+                      <a:round/>
+                      <a:headEnd type="none" w="med" len="med"/>
+                      <a:tailEnd type="none" w="med" len="med"/>
+                    </a:lnT>
+                    <a:lnB w="12700" cap="flat" cmpd="sng" algn="ctr">
+                      <a:solidFill>
+                        <a:srgbClr val="D4D6DB"/>
+                      </a:solidFill>
+                      <a:prstDash val="solid"/>
+                      <a:round/>
+                      <a:headEnd type="none" w="med" len="med"/>
+                      <a:tailEnd type="none" w="med" len="med"/>
+                    </a:lnB>
+                  </a:tcPr>
+                </a:tc>
+                <a:tc>
+                  <a:txBody>
+                    <a:bodyPr/>
+                    <a:lstStyle/>
+                    <a:p>
+                      <a:pPr algn="l" indent="0" marL="0">
+                        <a:buNone/>
+                      </a:pPr>
+                      <a:r>
+                        <a:rPr lang="en-US" sz="1800" dirty="0">
+                          <a:solidFill>
+                            <a:srgbClr val="111827"/>
+                          </a:solidFill>
+                          <a:latin typeface="Pretendard" pitchFamily="34" charset="0"/>
+                          <a:ea typeface="Pretendard" pitchFamily="34" charset="-122"/>
+                          <a:cs typeface="Pretendard" pitchFamily="34" charset="-120"/>
+                        </a:rPr>
+                        <a:t>#4F6F8F</a:t>
+                      </a:r>
+                      <a:endParaRPr lang="en-US" sz="1800" dirty="0">
+                        <a:latin typeface="Pretendard" charset="0"/>
+                        <a:ea typeface="Pretendard" charset="0"/>
+                        <a:cs typeface="Pretendard" charset="0"/>
+                      </a:endParaRPr>
+                    </a:p>
+                  </a:txBody>
+                  <a:tcPr marL="54864" marR="54864" marT="36576" marB="36576" anchor="ctr">
+                    <a:lnL w="12700" cap="flat" cmpd="sng" algn="ctr">
+                      <a:solidFill>
+                        <a:srgbClr val="D4D6DB"/>
+                      </a:solidFill>
+                      <a:prstDash val="solid"/>
+                      <a:round/>
+                      <a:headEnd type="none" w="med" len="med"/>
+                      <a:tailEnd type="none" w="med" len="med"/>
+                    </a:lnL>
+                    <a:lnR w="12700" cap="flat" cmpd="sng" algn="ctr">
+                      <a:solidFill>
+                        <a:srgbClr val="D4D6DB"/>
+                      </a:solidFill>
+                      <a:prstDash val="solid"/>
+                      <a:round/>
+                      <a:headEnd type="none" w="med" len="med"/>
+                      <a:tailEnd type="none" w="med" len="med"/>
+                    </a:lnR>
+                    <a:lnT w="12700" cap="flat" cmpd="sng" algn="ctr">
+                      <a:solidFill>
+                        <a:srgbClr val="D4D6DB"/>
+                      </a:solidFill>
+                      <a:prstDash val="solid"/>
+                      <a:round/>
+                      <a:headEnd type="none" w="med" len="med"/>
+                      <a:tailEnd type="none" w="med" len="med"/>
+                    </a:lnT>
+                    <a:lnB w="12700" cap="flat" cmpd="sng" algn="ctr">
+                      <a:solidFill>
+                        <a:srgbClr val="D4D6DB"/>
+                      </a:solidFill>
+                      <a:prstDash val="solid"/>
+                      <a:round/>
+                      <a:headEnd type="none" w="med" len="med"/>
+                      <a:tailEnd type="none" w="med" len="med"/>
+                    </a:lnB>
+                  </a:tcPr>
+                </a:tc>
+                <a:tc>
+                  <a:txBody>
+                    <a:bodyPr/>
+                    <a:lstStyle/>
+                    <a:p>
+                      <a:pPr algn="l" indent="0" marL="0">
+                        <a:buNone/>
+                      </a:pPr>
+                      <a:r>
+                        <a:rPr lang="en-US" sz="1800" dirty="0">
+                          <a:solidFill>
+                            <a:srgbClr val="111827"/>
+                          </a:solidFill>
+                          <a:latin typeface="Pretendard" pitchFamily="34" charset="0"/>
+                          <a:ea typeface="Pretendard" pitchFamily="34" charset="-122"/>
+                          <a:cs typeface="Pretendard" pitchFamily="34" charset="-120"/>
+                        </a:rPr>
+                        <a:t>analogous</a:t>
+                      </a:r>
+                      <a:endParaRPr lang="en-US" sz="1800" dirty="0">
+                        <a:latin typeface="Pretendard" charset="0"/>
+                        <a:ea typeface="Pretendard" charset="0"/>
+                        <a:cs typeface="Pretendard" charset="0"/>
+                      </a:endParaRPr>
+                    </a:p>
+                  </a:txBody>
+                  <a:tcPr marL="54864" marR="54864" marT="36576" marB="36576" anchor="ctr">
+                    <a:lnL w="12700" cap="flat" cmpd="sng" algn="ctr">
+                      <a:solidFill>
+                        <a:srgbClr val="D4D6DB"/>
+                      </a:solidFill>
+                      <a:prstDash val="solid"/>
+                      <a:round/>
+                      <a:headEnd type="none" w="med" len="med"/>
+                      <a:tailEnd type="none" w="med" len="med"/>
+                    </a:lnL>
+                    <a:lnR w="12700" cap="flat" cmpd="sng" algn="ctr">
+                      <a:solidFill>
+                        <a:srgbClr val="D4D6DB"/>
+                      </a:solidFill>
+                      <a:prstDash val="solid"/>
+                      <a:round/>
+                      <a:headEnd type="none" w="med" len="med"/>
+                      <a:tailEnd type="none" w="med" len="med"/>
+                    </a:lnR>
+                    <a:lnT w="12700" cap="flat" cmpd="sng" algn="ctr">
+                      <a:solidFill>
+                        <a:srgbClr val="D4D6DB"/>
+                      </a:solidFill>
+                      <a:prstDash val="solid"/>
+                      <a:round/>
+                      <a:headEnd type="none" w="med" len="med"/>
+                      <a:tailEnd type="none" w="med" len="med"/>
+                    </a:lnT>
+                    <a:lnB w="12700" cap="flat" cmpd="sng" algn="ctr">
+                      <a:solidFill>
+                        <a:srgbClr val="D4D6DB"/>
+                      </a:solidFill>
+                      <a:prstDash val="solid"/>
+                      <a:round/>
+                      <a:headEnd type="none" w="med" len="med"/>
+                      <a:tailEnd type="none" w="med" len="med"/>
+                    </a:lnB>
+                  </a:tcPr>
+                </a:tc>
+                <a:tc>
+                  <a:txBody>
+                    <a:bodyPr/>
+                    <a:lstStyle/>
+                    <a:p>
+                      <a:pPr algn="l" indent="0" marL="0">
+                        <a:buNone/>
+                      </a:pPr>
+                      <a:r>
+                        <a:rPr lang="en-US" sz="1800" dirty="0">
+                          <a:solidFill>
+                            <a:srgbClr val="111827"/>
+                          </a:solidFill>
+                          <a:latin typeface="Pretendard" pitchFamily="34" charset="0"/>
+                          <a:ea typeface="Pretendard" pitchFamily="34" charset="-122"/>
+                          <a:cs typeface="Pretendard" pitchFamily="34" charset="-120"/>
+                        </a:rPr>
+                        <a:t>Soft UI surfaces using same-tone panels and paired shadows</a:t>
+                      </a:r>
+                      <a:endParaRPr lang="en-US" sz="1800" dirty="0">
+                        <a:latin typeface="Pretendard" charset="0"/>
+                        <a:ea typeface="Pretendard" charset="0"/>
+                        <a:cs typeface="Pretendard" charset="0"/>
+                      </a:endParaRPr>
+                    </a:p>
+                  </a:txBody>
+                  <a:tcPr marL="54864" marR="54864" marT="36576" marB="36576" anchor="ctr">
+                    <a:lnL w="12700" cap="flat" cmpd="sng" algn="ctr">
+                      <a:solidFill>
+                        <a:srgbClr val="D4D6DB"/>
+                      </a:solidFill>
+                      <a:prstDash val="solid"/>
+                      <a:round/>
+                      <a:headEnd type="none" w="med" len="med"/>
+                      <a:tailEnd type="none" w="med" len="med"/>
+                    </a:lnL>
+                    <a:lnR w="12700" cap="flat" cmpd="sng" algn="ctr">
+                      <a:solidFill>
+                        <a:srgbClr val="D4D6DB"/>
+                      </a:solidFill>
+                      <a:prstDash val="solid"/>
+                      <a:round/>
+                      <a:headEnd type="none" w="med" len="med"/>
+                      <a:tailEnd type="none" w="med" len="med"/>
+                    </a:lnR>
+                    <a:lnT w="12700" cap="flat" cmpd="sng" algn="ctr">
+                      <a:solidFill>
+                        <a:srgbClr val="D4D6DB"/>
+                      </a:solidFill>
+                      <a:prstDash val="solid"/>
+                      <a:round/>
+                      <a:headEnd type="none" w="med" len="med"/>
+                      <a:tailEnd type="none" w="med" len="med"/>
+                    </a:lnT>
+                    <a:lnB w="12700" cap="flat" cmpd="sng" algn="ctr">
+                      <a:solidFill>
+                        <a:srgbClr val="D4D6DB"/>
+                      </a:solidFill>
+                      <a:prstDash val="solid"/>
+                      <a:round/>
+                      <a:headEnd type="none" w="med" len="med"/>
+                      <a:tailEnd type="none" w="med" len="med"/>
+                    </a:lnB>
+                  </a:tcPr>
+                </a:tc>
+              </a:tr>
+              <a:tr h="646611">
+                <a:tc>
+                  <a:txBody>
+                    <a:bodyPr/>
+                    <a:lstStyle/>
+                    <a:p>
+                      <a:pPr algn="l" indent="0" marL="0">
+                        <a:buNone/>
+                      </a:pPr>
+                      <a:r>
+                        <a:rPr lang="en-US" sz="1800" b="1" dirty="0">
+                          <a:solidFill>
+                            <a:srgbClr val="111827"/>
+                          </a:solidFill>
+                          <a:latin typeface="Pretendard" pitchFamily="34" charset="0"/>
+                          <a:ea typeface="Pretendard" pitchFamily="34" charset="-122"/>
+                          <a:cs typeface="Pretendard" pitchFamily="34" charset="-120"/>
+                        </a:rPr>
+                        <a:t>glass</a:t>
+                      </a:r>
+                      <a:endParaRPr lang="en-US" sz="1800" dirty="0">
+                        <a:latin typeface="Pretendard" charset="0"/>
+                        <a:ea typeface="Pretendard" charset="0"/>
+                        <a:cs typeface="Pretendard" charset="0"/>
+                      </a:endParaRPr>
+                    </a:p>
+                  </a:txBody>
+                  <a:tcPr marL="54864" marR="54864" marT="36576" marB="36576" anchor="ctr">
+                    <a:lnL w="12700" cap="flat" cmpd="sng" algn="ctr">
+                      <a:solidFill>
+                        <a:srgbClr val="D4D6DB"/>
+                      </a:solidFill>
+                      <a:prstDash val="solid"/>
+                      <a:round/>
+                      <a:headEnd type="none" w="med" len="med"/>
+                      <a:tailEnd type="none" w="med" len="med"/>
+                    </a:lnL>
+                    <a:lnR w="12700" cap="flat" cmpd="sng" algn="ctr">
+                      <a:solidFill>
+                        <a:srgbClr val="D4D6DB"/>
+                      </a:solidFill>
+                      <a:prstDash val="solid"/>
+                      <a:round/>
+                      <a:headEnd type="none" w="med" len="med"/>
+                      <a:tailEnd type="none" w="med" len="med"/>
+                    </a:lnR>
+                    <a:lnT w="12700" cap="flat" cmpd="sng" algn="ctr">
+                      <a:solidFill>
+                        <a:srgbClr val="D4D6DB"/>
+                      </a:solidFill>
+                      <a:prstDash val="solid"/>
+                      <a:round/>
+                      <a:headEnd type="none" w="med" len="med"/>
+                      <a:tailEnd type="none" w="med" len="med"/>
+                    </a:lnT>
+                    <a:lnB w="12700" cap="flat" cmpd="sng" algn="ctr">
+                      <a:solidFill>
+                        <a:srgbClr val="D4D6DB"/>
+                      </a:solidFill>
+                      <a:prstDash val="solid"/>
+                      <a:round/>
+                      <a:headEnd type="none" w="med" len="med"/>
+                      <a:tailEnd type="none" w="med" len="med"/>
+                    </a:lnB>
+                    <a:solidFill>
+                      <a:srgbClr val="FFFFFF">
+                        <a:alpha val="80000"/>
+                      </a:srgbClr>
+                    </a:solidFill>
+                  </a:tcPr>
+                </a:tc>
+                <a:tc>
+                  <a:txBody>
+                    <a:bodyPr/>
+                    <a:lstStyle/>
+                    <a:p>
+                      <a:pPr algn="l" indent="0" marL="0">
+                        <a:buNone/>
+                      </a:pPr>
+                      <a:r>
+                        <a:rPr lang="en-US" sz="1800" dirty="0">
+                          <a:solidFill>
+                            <a:srgbClr val="111827"/>
+                          </a:solidFill>
+                          <a:latin typeface="Pretendard" pitchFamily="34" charset="0"/>
+                          <a:ea typeface="Pretendard" pitchFamily="34" charset="-122"/>
+                          <a:cs typeface="Pretendard" pitchFamily="34" charset="-120"/>
+                        </a:rPr>
+                        <a:t>#8A4FFF</a:t>
+                      </a:r>
+                      <a:endParaRPr lang="en-US" sz="1800" dirty="0">
+                        <a:latin typeface="Pretendard" charset="0"/>
+                        <a:ea typeface="Pretendard" charset="0"/>
+                        <a:cs typeface="Pretendard" charset="0"/>
+                      </a:endParaRPr>
+                    </a:p>
+                  </a:txBody>
+                  <a:tcPr marL="54864" marR="54864" marT="36576" marB="36576" anchor="ctr">
+                    <a:lnL w="12700" cap="flat" cmpd="sng" algn="ctr">
+                      <a:solidFill>
+                        <a:srgbClr val="D4D6DB"/>
+                      </a:solidFill>
+                      <a:prstDash val="solid"/>
+                      <a:round/>
+                      <a:headEnd type="none" w="med" len="med"/>
+                      <a:tailEnd type="none" w="med" len="med"/>
+                    </a:lnL>
+                    <a:lnR w="12700" cap="flat" cmpd="sng" algn="ctr">
+                      <a:solidFill>
+                        <a:srgbClr val="D4D6DB"/>
+                      </a:solidFill>
+                      <a:prstDash val="solid"/>
+                      <a:round/>
+                      <a:headEnd type="none" w="med" len="med"/>
+                      <a:tailEnd type="none" w="med" len="med"/>
+                    </a:lnR>
+                    <a:lnT w="12700" cap="flat" cmpd="sng" algn="ctr">
+                      <a:solidFill>
+                        <a:srgbClr val="D4D6DB"/>
+                      </a:solidFill>
+                      <a:prstDash val="solid"/>
+                      <a:round/>
+                      <a:headEnd type="none" w="med" len="med"/>
+                      <a:tailEnd type="none" w="med" len="med"/>
+                    </a:lnT>
+                    <a:lnB w="12700" cap="flat" cmpd="sng" algn="ctr">
+                      <a:solidFill>
+                        <a:srgbClr val="D4D6DB"/>
+                      </a:solidFill>
+                      <a:prstDash val="solid"/>
+                      <a:round/>
+                      <a:headEnd type="none" w="med" len="med"/>
+                      <a:tailEnd type="none" w="med" len="med"/>
+                    </a:lnB>
+                    <a:solidFill>
+                      <a:srgbClr val="FFFFFF">
+                        <a:alpha val="80000"/>
+                      </a:srgbClr>
+                    </a:solidFill>
+                  </a:tcPr>
+                </a:tc>
+                <a:tc>
+                  <a:txBody>
+                    <a:bodyPr/>
+                    <a:lstStyle/>
+                    <a:p>
+                      <a:pPr algn="l" indent="0" marL="0">
+                        <a:buNone/>
+                      </a:pPr>
+                      <a:r>
+                        <a:rPr lang="en-US" sz="1800" dirty="0">
+                          <a:solidFill>
+                            <a:srgbClr val="111827"/>
+                          </a:solidFill>
+                          <a:latin typeface="Pretendard" pitchFamily="34" charset="0"/>
+                          <a:ea typeface="Pretendard" pitchFamily="34" charset="-122"/>
+                          <a:cs typeface="Pretendard" pitchFamily="34" charset="-120"/>
+                        </a:rPr>
+                        <a:t>split-complementary</a:t>
+                      </a:r>
+                      <a:endParaRPr lang="en-US" sz="1800" dirty="0">
+                        <a:latin typeface="Pretendard" charset="0"/>
+                        <a:ea typeface="Pretendard" charset="0"/>
+                        <a:cs typeface="Pretendard" charset="0"/>
+                      </a:endParaRPr>
+                    </a:p>
+                  </a:txBody>
+                  <a:tcPr marL="54864" marR="54864" marT="36576" marB="36576" anchor="ctr">
+                    <a:lnL w="12700" cap="flat" cmpd="sng" algn="ctr">
+                      <a:solidFill>
+                        <a:srgbClr val="D4D6DB"/>
+                      </a:solidFill>
+                      <a:prstDash val="solid"/>
+                      <a:round/>
+                      <a:headEnd type="none" w="med" len="med"/>
+                      <a:tailEnd type="none" w="med" len="med"/>
+                    </a:lnL>
+                    <a:lnR w="12700" cap="flat" cmpd="sng" algn="ctr">
+                      <a:solidFill>
+                        <a:srgbClr val="D4D6DB"/>
+                      </a:solidFill>
+                      <a:prstDash val="solid"/>
+                      <a:round/>
+                      <a:headEnd type="none" w="med" len="med"/>
+                      <a:tailEnd type="none" w="med" len="med"/>
+                    </a:lnR>
+                    <a:lnT w="12700" cap="flat" cmpd="sng" algn="ctr">
+                      <a:solidFill>
+                        <a:srgbClr val="D4D6DB"/>
+                      </a:solidFill>
+                      <a:prstDash val="solid"/>
+                      <a:round/>
+                      <a:headEnd type="none" w="med" len="med"/>
+                      <a:tailEnd type="none" w="med" len="med"/>
+                    </a:lnT>
+                    <a:lnB w="12700" cap="flat" cmpd="sng" algn="ctr">
+                      <a:solidFill>
+                        <a:srgbClr val="D4D6DB"/>
+                      </a:solidFill>
+                      <a:prstDash val="solid"/>
+                      <a:round/>
+                      <a:headEnd type="none" w="med" len="med"/>
+                      <a:tailEnd type="none" w="med" len="med"/>
+                    </a:lnB>
+                    <a:solidFill>
+                      <a:srgbClr val="FFFFFF">
+                        <a:alpha val="80000"/>
+                      </a:srgbClr>
+                    </a:solidFill>
+                  </a:tcPr>
+                </a:tc>
+                <a:tc>
+                  <a:txBody>
+                    <a:bodyPr/>
+                    <a:lstStyle/>
+                    <a:p>
+                      <a:pPr algn="l" indent="0" marL="0">
+                        <a:buNone/>
+                      </a:pPr>
+                      <a:r>
+                        <a:rPr lang="en-US" sz="1800" dirty="0">
+                          <a:solidFill>
+                            <a:srgbClr val="111827"/>
+                          </a:solidFill>
+                          <a:latin typeface="Pretendard" pitchFamily="34" charset="0"/>
+                          <a:ea typeface="Pretendard" pitchFamily="34" charset="-122"/>
+                          <a:cs typeface="Pretendard" pitchFamily="34" charset="-120"/>
+                        </a:rPr>
+                        <a:t>Translucent proof surfaces with contrast accents</a:t>
+                      </a:r>
+                      <a:endParaRPr lang="en-US" sz="1800" dirty="0">
+                        <a:latin typeface="Pretendard" charset="0"/>
+                        <a:ea typeface="Pretendard" charset="0"/>
+                        <a:cs typeface="Pretendard" charset="0"/>
+                      </a:endParaRPr>
+                    </a:p>
+                  </a:txBody>
+                  <a:tcPr marL="54864" marR="54864" marT="36576" marB="36576" anchor="ctr">
+                    <a:lnL w="12700" cap="flat" cmpd="sng" algn="ctr">
+                      <a:solidFill>
+                        <a:srgbClr val="D4D6DB"/>
+                      </a:solidFill>
+                      <a:prstDash val="solid"/>
+                      <a:round/>
+                      <a:headEnd type="none" w="med" len="med"/>
+                      <a:tailEnd type="none" w="med" len="med"/>
+                    </a:lnL>
+                    <a:lnR w="12700" cap="flat" cmpd="sng" algn="ctr">
+                      <a:solidFill>
+                        <a:srgbClr val="D4D6DB"/>
+                      </a:solidFill>
+                      <a:prstDash val="solid"/>
+                      <a:round/>
+                      <a:headEnd type="none" w="med" len="med"/>
+                      <a:tailEnd type="none" w="med" len="med"/>
+                    </a:lnR>
+                    <a:lnT w="12700" cap="flat" cmpd="sng" algn="ctr">
+                      <a:solidFill>
+                        <a:srgbClr val="D4D6DB"/>
+                      </a:solidFill>
+                      <a:prstDash val="solid"/>
+                      <a:round/>
+                      <a:headEnd type="none" w="med" len="med"/>
+                      <a:tailEnd type="none" w="med" len="med"/>
+                    </a:lnT>
+                    <a:lnB w="12700" cap="flat" cmpd="sng" algn="ctr">
+                      <a:solidFill>
+                        <a:srgbClr val="D4D6DB"/>
+                      </a:solidFill>
+                      <a:prstDash val="solid"/>
+                      <a:round/>
+                      <a:headEnd type="none" w="med" len="med"/>
+                      <a:tailEnd type="none" w="med" len="med"/>
+                    </a:lnB>
+                    <a:solidFill>
+                      <a:srgbClr val="FFFFFF">
+                        <a:alpha val="80000"/>
+                      </a:srgbClr>
+                    </a:solidFill>
+                  </a:tcPr>
+                </a:tc>
+              </a:tr>
+              <a:tr h="646611">
+                <a:tc>
+                  <a:txBody>
+                    <a:bodyPr/>
+                    <a:lstStyle/>
+                    <a:p>
+                      <a:pPr algn="l" indent="0" marL="0">
+                        <a:buNone/>
+                      </a:pPr>
+                      <a:r>
+                        <a:rPr lang="en-US" sz="1800" b="1" dirty="0">
+                          <a:solidFill>
+                            <a:srgbClr val="111827"/>
+                          </a:solidFill>
+                          <a:latin typeface="Pretendard" pitchFamily="34" charset="0"/>
+                          <a:ea typeface="Pretendard" pitchFamily="34" charset="-122"/>
+                          <a:cs typeface="Pretendard" pitchFamily="34" charset="-120"/>
+                        </a:rPr>
+                        <a:t>clean</a:t>
+                      </a:r>
+                      <a:endParaRPr lang="en-US" sz="1800" dirty="0">
+                        <a:latin typeface="Pretendard" charset="0"/>
+                        <a:ea typeface="Pretendard" charset="0"/>
+                        <a:cs typeface="Pretendard" charset="0"/>
+                      </a:endParaRPr>
+                    </a:p>
+                  </a:txBody>
+                  <a:tcPr marL="54864" marR="54864" marT="36576" marB="36576" anchor="ctr">
+                    <a:lnL w="12700" cap="flat" cmpd="sng" algn="ctr">
+                      <a:solidFill>
+                        <a:srgbClr val="D4D6DB"/>
+                      </a:solidFill>
+                      <a:prstDash val="solid"/>
+                      <a:round/>
+                      <a:headEnd type="none" w="med" len="med"/>
+                      <a:tailEnd type="none" w="med" len="med"/>
+                    </a:lnL>
+                    <a:lnR w="12700" cap="flat" cmpd="sng" algn="ctr">
+                      <a:solidFill>
+                        <a:srgbClr val="D4D6DB"/>
+                      </a:solidFill>
+                      <a:prstDash val="solid"/>
+                      <a:round/>
+                      <a:headEnd type="none" w="med" len="med"/>
+                      <a:tailEnd type="none" w="med" len="med"/>
+                    </a:lnR>
+                    <a:lnT w="12700" cap="flat" cmpd="sng" algn="ctr">
+                      <a:solidFill>
+                        <a:srgbClr val="D4D6DB"/>
+                      </a:solidFill>
+                      <a:prstDash val="solid"/>
+                      <a:round/>
+                      <a:headEnd type="none" w="med" len="med"/>
+                      <a:tailEnd type="none" w="med" len="med"/>
+                    </a:lnT>
+                    <a:lnB w="12700" cap="flat" cmpd="sng" algn="ctr">
+                      <a:solidFill>
+                        <a:srgbClr val="D4D6DB"/>
+                      </a:solidFill>
+                      <a:prstDash val="solid"/>
+                      <a:round/>
+                      <a:headEnd type="none" w="med" len="med"/>
+                      <a:tailEnd type="none" w="med" len="med"/>
+                    </a:lnB>
+                  </a:tcPr>
+                </a:tc>
+                <a:tc>
+                  <a:txBody>
+                    <a:bodyPr/>
+                    <a:lstStyle/>
+                    <a:p>
+                      <a:pPr algn="l" indent="0" marL="0">
+                        <a:buNone/>
+                      </a:pPr>
+                      <a:r>
+                        <a:rPr lang="en-US" sz="1800" dirty="0">
+                          <a:solidFill>
+                            <a:srgbClr val="111827"/>
+                          </a:solidFill>
+                          <a:latin typeface="Pretendard" pitchFamily="34" charset="0"/>
+                          <a:ea typeface="Pretendard" pitchFamily="34" charset="-122"/>
+                          <a:cs typeface="Pretendard" pitchFamily="34" charset="-120"/>
+                        </a:rPr>
+                        <a:t>#DC2626</a:t>
+                      </a:r>
+                      <a:endParaRPr lang="en-US" sz="1800" dirty="0">
+                        <a:latin typeface="Pretendard" charset="0"/>
+                        <a:ea typeface="Pretendard" charset="0"/>
+                        <a:cs typeface="Pretendard" charset="0"/>
+                      </a:endParaRPr>
+                    </a:p>
+                  </a:txBody>
+                  <a:tcPr marL="54864" marR="54864" marT="36576" marB="36576" anchor="ctr">
+                    <a:lnL w="12700" cap="flat" cmpd="sng" algn="ctr">
+                      <a:solidFill>
+                        <a:srgbClr val="D4D6DB"/>
+                      </a:solidFill>
+                      <a:prstDash val="solid"/>
+                      <a:round/>
+                      <a:headEnd type="none" w="med" len="med"/>
+                      <a:tailEnd type="none" w="med" len="med"/>
+                    </a:lnL>
+                    <a:lnR w="12700" cap="flat" cmpd="sng" algn="ctr">
+                      <a:solidFill>
+                        <a:srgbClr val="D4D6DB"/>
+                      </a:solidFill>
+                      <a:prstDash val="solid"/>
+                      <a:round/>
+                      <a:headEnd type="none" w="med" len="med"/>
+                      <a:tailEnd type="none" w="med" len="med"/>
+                    </a:lnR>
+                    <a:lnT w="12700" cap="flat" cmpd="sng" algn="ctr">
+                      <a:solidFill>
+                        <a:srgbClr val="D4D6DB"/>
+                      </a:solidFill>
+                      <a:prstDash val="solid"/>
+                      <a:round/>
+                      <a:headEnd type="none" w="med" len="med"/>
+                      <a:tailEnd type="none" w="med" len="med"/>
+                    </a:lnT>
+                    <a:lnB w="12700" cap="flat" cmpd="sng" algn="ctr">
+                      <a:solidFill>
+                        <a:srgbClr val="D4D6DB"/>
+                      </a:solidFill>
+                      <a:prstDash val="solid"/>
+                      <a:round/>
+                      <a:headEnd type="none" w="med" len="med"/>
+                      <a:tailEnd type="none" w="med" len="med"/>
+                    </a:lnB>
+                  </a:tcPr>
+                </a:tc>
+                <a:tc>
+                  <a:txBody>
+                    <a:bodyPr/>
+                    <a:lstStyle/>
+                    <a:p>
+                      <a:pPr algn="l" indent="0" marL="0">
+                        <a:buNone/>
+                      </a:pPr>
+                      <a:r>
+                        <a:rPr lang="en-US" sz="1800" dirty="0">
+                          <a:solidFill>
+                            <a:srgbClr val="111827"/>
+                          </a:solidFill>
+                          <a:latin typeface="Pretendard" pitchFamily="34" charset="0"/>
+                          <a:ea typeface="Pretendard" pitchFamily="34" charset="-122"/>
+                          <a:cs typeface="Pretendard" pitchFamily="34" charset="-120"/>
+                        </a:rPr>
+                        <a:t>complementary</a:t>
+                      </a:r>
+                      <a:endParaRPr lang="en-US" sz="1800" dirty="0">
+                        <a:latin typeface="Pretendard" charset="0"/>
+                        <a:ea typeface="Pretendard" charset="0"/>
+                        <a:cs typeface="Pretendard" charset="0"/>
+                      </a:endParaRPr>
+                    </a:p>
+                  </a:txBody>
+                  <a:tcPr marL="54864" marR="54864" marT="36576" marB="36576" anchor="ctr">
+                    <a:lnL w="12700" cap="flat" cmpd="sng" algn="ctr">
+                      <a:solidFill>
+                        <a:srgbClr val="D4D6DB"/>
+                      </a:solidFill>
+                      <a:prstDash val="solid"/>
+                      <a:round/>
+                      <a:headEnd type="none" w="med" len="med"/>
+                      <a:tailEnd type="none" w="med" len="med"/>
+                    </a:lnL>
+                    <a:lnR w="12700" cap="flat" cmpd="sng" algn="ctr">
+                      <a:solidFill>
+                        <a:srgbClr val="D4D6DB"/>
+                      </a:solidFill>
+                      <a:prstDash val="solid"/>
+                      <a:round/>
+                      <a:headEnd type="none" w="med" len="med"/>
+                      <a:tailEnd type="none" w="med" len="med"/>
+                    </a:lnR>
+                    <a:lnT w="12700" cap="flat" cmpd="sng" algn="ctr">
+                      <a:solidFill>
+                        <a:srgbClr val="D4D6DB"/>
+                      </a:solidFill>
+                      <a:prstDash val="solid"/>
+                      <a:round/>
+                      <a:headEnd type="none" w="med" len="med"/>
+                      <a:tailEnd type="none" w="med" len="med"/>
+                    </a:lnT>
+                    <a:lnB w="12700" cap="flat" cmpd="sng" algn="ctr">
+                      <a:solidFill>
+                        <a:srgbClr val="D4D6DB"/>
+                      </a:solidFill>
+                      <a:prstDash val="solid"/>
+                      <a:round/>
+                      <a:headEnd type="none" w="med" len="med"/>
+                      <a:tailEnd type="none" w="med" len="med"/>
+                    </a:lnB>
+                  </a:tcPr>
+                </a:tc>
+                <a:tc>
+                  <a:txBody>
+                    <a:bodyPr/>
+                    <a:lstStyle/>
+                    <a:p>
+                      <a:pPr algn="l" indent="0" marL="0">
+                        <a:buNone/>
+                      </a:pPr>
+                      <a:r>
+                        <a:rPr lang="en-US" sz="1800" dirty="0">
+                          <a:solidFill>
+                            <a:srgbClr val="111827"/>
+                          </a:solidFill>
+                          <a:latin typeface="Pretendard" pitchFamily="34" charset="0"/>
+                          <a:ea typeface="Pretendard" pitchFamily="34" charset="-122"/>
+                          <a:cs typeface="Pretendard" pitchFamily="34" charset="-120"/>
+                        </a:rPr>
+                        <a:t>Swiss modular grid with restrained red accent</a:t>
+                      </a:r>
+                      <a:endParaRPr lang="en-US" sz="1800" dirty="0">
+                        <a:latin typeface="Pretendard" charset="0"/>
+                        <a:ea typeface="Pretendard" charset="0"/>
+                        <a:cs typeface="Pretendard" charset="0"/>
+                      </a:endParaRPr>
+                    </a:p>
+                  </a:txBody>
+                  <a:tcPr marL="54864" marR="54864" marT="36576" marB="36576" anchor="ctr">
+                    <a:lnL w="12700" cap="flat" cmpd="sng" algn="ctr">
+                      <a:solidFill>
+                        <a:srgbClr val="D4D6DB"/>
+                      </a:solidFill>
+                      <a:prstDash val="solid"/>
+                      <a:round/>
+                      <a:headEnd type="none" w="med" len="med"/>
+                      <a:tailEnd type="none" w="med" len="med"/>
+                    </a:lnL>
+                    <a:lnR w="12700" cap="flat" cmpd="sng" algn="ctr">
+                      <a:solidFill>
+                        <a:srgbClr val="D4D6DB"/>
+                      </a:solidFill>
+                      <a:prstDash val="solid"/>
+                      <a:round/>
+                      <a:headEnd type="none" w="med" len="med"/>
+                      <a:tailEnd type="none" w="med" len="med"/>
+                    </a:lnR>
+                    <a:lnT w="12700" cap="flat" cmpd="sng" algn="ctr">
+                      <a:solidFill>
+                        <a:srgbClr val="D4D6DB"/>
+                      </a:solidFill>
+                      <a:prstDash val="solid"/>
+                      <a:round/>
+                      <a:headEnd type="none" w="med" len="med"/>
+                      <a:tailEnd type="none" w="med" len="med"/>
+                    </a:lnT>
+                    <a:lnB w="12700" cap="flat" cmpd="sng" algn="ctr">
+                      <a:solidFill>
+                        <a:srgbClr val="D4D6DB"/>
+                      </a:solidFill>
+                      <a:prstDash val="solid"/>
+                      <a:round/>
+                      <a:headEnd type="none" w="med" len="med"/>
+                      <a:tailEnd type="none" w="med" len="med"/>
+                    </a:lnB>
+                  </a:tcPr>
+                </a:tc>
+              </a:tr>
+              <a:tr h="646611">
+                <a:tc>
+                  <a:txBody>
+                    <a:bodyPr/>
+                    <a:lstStyle/>
+                    <a:p>
+                      <a:pPr algn="l" indent="0" marL="0">
+                        <a:buNone/>
+                      </a:pPr>
+                      <a:r>
+                        <a:rPr lang="en-US" sz="1800" b="1" dirty="0">
+                          <a:solidFill>
+                            <a:srgbClr val="111827"/>
+                          </a:solidFill>
+                          <a:latin typeface="Pretendard" pitchFamily="34" charset="0"/>
+                          <a:ea typeface="Pretendard" pitchFamily="34" charset="-122"/>
+                          <a:cs typeface="Pretendard" pitchFamily="34" charset="-120"/>
+                        </a:rPr>
+                        <a:t>data</a:t>
+                      </a:r>
+                      <a:endParaRPr lang="en-US" sz="1800" dirty="0">
+                        <a:latin typeface="Pretendard" charset="0"/>
+                        <a:ea typeface="Pretendard" charset="0"/>
+                        <a:cs typeface="Pretendard" charset="0"/>
+                      </a:endParaRPr>
+                    </a:p>
+                  </a:txBody>
+                  <a:tcPr marL="54864" marR="54864" marT="36576" marB="36576" anchor="ctr">
+                    <a:lnL w="12700" cap="flat" cmpd="sng" algn="ctr">
+                      <a:solidFill>
+                        <a:srgbClr val="D4D6DB"/>
+                      </a:solidFill>
+                      <a:prstDash val="solid"/>
+                      <a:round/>
+                      <a:headEnd type="none" w="med" len="med"/>
+                      <a:tailEnd type="none" w="med" len="med"/>
+                    </a:lnL>
+                    <a:lnR w="12700" cap="flat" cmpd="sng" algn="ctr">
+                      <a:solidFill>
+                        <a:srgbClr val="D4D6DB"/>
+                      </a:solidFill>
+                      <a:prstDash val="solid"/>
+                      <a:round/>
+                      <a:headEnd type="none" w="med" len="med"/>
+                      <a:tailEnd type="none" w="med" len="med"/>
+                    </a:lnR>
+                    <a:lnT w="12700" cap="flat" cmpd="sng" algn="ctr">
+                      <a:solidFill>
+                        <a:srgbClr val="D4D6DB"/>
+                      </a:solidFill>
+                      <a:prstDash val="solid"/>
+                      <a:round/>
+                      <a:headEnd type="none" w="med" len="med"/>
+                      <a:tailEnd type="none" w="med" len="med"/>
+                    </a:lnT>
+                    <a:lnB w="12700" cap="flat" cmpd="sng" algn="ctr">
+                      <a:solidFill>
+                        <a:srgbClr val="D4D6DB"/>
+                      </a:solidFill>
+                      <a:prstDash val="solid"/>
+                      <a:round/>
+                      <a:headEnd type="none" w="med" len="med"/>
+                      <a:tailEnd type="none" w="med" len="med"/>
+                    </a:lnB>
+                    <a:solidFill>
+                      <a:srgbClr val="FFFFFF">
+                        <a:alpha val="80000"/>
+                      </a:srgbClr>
+                    </a:solidFill>
+                  </a:tcPr>
+                </a:tc>
+                <a:tc>
+                  <a:txBody>
+                    <a:bodyPr/>
+                    <a:lstStyle/>
+                    <a:p>
+                      <a:pPr algn="l" indent="0" marL="0">
+                        <a:buNone/>
+                      </a:pPr>
+                      <a:r>
+                        <a:rPr lang="en-US" sz="1800" dirty="0">
+                          <a:solidFill>
+                            <a:srgbClr val="111827"/>
+                          </a:solidFill>
+                          <a:latin typeface="Pretendard" pitchFamily="34" charset="0"/>
+                          <a:ea typeface="Pretendard" pitchFamily="34" charset="-122"/>
+                          <a:cs typeface="Pretendard" pitchFamily="34" charset="-120"/>
+                        </a:rPr>
+                        <a:t>#F59E0B</a:t>
+                      </a:r>
+                      <a:endParaRPr lang="en-US" sz="1800" dirty="0">
+                        <a:latin typeface="Pretendard" charset="0"/>
+                        <a:ea typeface="Pretendard" charset="0"/>
+                        <a:cs typeface="Pretendard" charset="0"/>
+                      </a:endParaRPr>
+                    </a:p>
+                  </a:txBody>
+                  <a:tcPr marL="54864" marR="54864" marT="36576" marB="36576" anchor="ctr">
+                    <a:lnL w="12700" cap="flat" cmpd="sng" algn="ctr">
+                      <a:solidFill>
+                        <a:srgbClr val="D4D6DB"/>
+                      </a:solidFill>
+                      <a:prstDash val="solid"/>
+                      <a:round/>
+                      <a:headEnd type="none" w="med" len="med"/>
+                      <a:tailEnd type="none" w="med" len="med"/>
+                    </a:lnL>
+                    <a:lnR w="12700" cap="flat" cmpd="sng" algn="ctr">
+                      <a:solidFill>
+                        <a:srgbClr val="D4D6DB"/>
+                      </a:solidFill>
+                      <a:prstDash val="solid"/>
+                      <a:round/>
+                      <a:headEnd type="none" w="med" len="med"/>
+                      <a:tailEnd type="none" w="med" len="med"/>
+                    </a:lnR>
+                    <a:lnT w="12700" cap="flat" cmpd="sng" algn="ctr">
+                      <a:solidFill>
+                        <a:srgbClr val="D4D6DB"/>
+                      </a:solidFill>
+                      <a:prstDash val="solid"/>
+                      <a:round/>
+                      <a:headEnd type="none" w="med" len="med"/>
+                      <a:tailEnd type="none" w="med" len="med"/>
+                    </a:lnT>
+                    <a:lnB w="12700" cap="flat" cmpd="sng" algn="ctr">
+                      <a:solidFill>
+                        <a:srgbClr val="D4D6DB"/>
+                      </a:solidFill>
+                      <a:prstDash val="solid"/>
+                      <a:round/>
+                      <a:headEnd type="none" w="med" len="med"/>
+                      <a:tailEnd type="none" w="med" len="med"/>
+                    </a:lnB>
+                    <a:solidFill>
+                      <a:srgbClr val="FFFFFF">
+                        <a:alpha val="80000"/>
+                      </a:srgbClr>
+                    </a:solidFill>
+                  </a:tcPr>
+                </a:tc>
+                <a:tc>
+                  <a:txBody>
+                    <a:bodyPr/>
+                    <a:lstStyle/>
+                    <a:p>
+                      <a:pPr algn="l" indent="0" marL="0">
+                        <a:buNone/>
+                      </a:pPr>
+                      <a:r>
+                        <a:rPr lang="en-US" sz="1800" dirty="0">
+                          <a:solidFill>
+                            <a:srgbClr val="111827"/>
+                          </a:solidFill>
+                          <a:latin typeface="Pretendard" pitchFamily="34" charset="0"/>
+                          <a:ea typeface="Pretendard" pitchFamily="34" charset="-122"/>
+                          <a:cs typeface="Pretendard" pitchFamily="34" charset="-120"/>
+                        </a:rPr>
+                        <a:t>monochromatic</a:t>
+                      </a:r>
+                      <a:endParaRPr lang="en-US" sz="1800" dirty="0">
+                        <a:latin typeface="Pretendard" charset="0"/>
+                        <a:ea typeface="Pretendard" charset="0"/>
+                        <a:cs typeface="Pretendard" charset="0"/>
+                      </a:endParaRPr>
+                    </a:p>
+                  </a:txBody>
+                  <a:tcPr marL="54864" marR="54864" marT="36576" marB="36576" anchor="ctr">
+                    <a:lnL w="12700" cap="flat" cmpd="sng" algn="ctr">
+                      <a:solidFill>
+                        <a:srgbClr val="D4D6DB"/>
+                      </a:solidFill>
+                      <a:prstDash val="solid"/>
+                      <a:round/>
+                      <a:headEnd type="none" w="med" len="med"/>
+                      <a:tailEnd type="none" w="med" len="med"/>
+                    </a:lnL>
+                    <a:lnR w="12700" cap="flat" cmpd="sng" algn="ctr">
+                      <a:solidFill>
+                        <a:srgbClr val="D4D6DB"/>
+                      </a:solidFill>
+                      <a:prstDash val="solid"/>
+                      <a:round/>
+                      <a:headEnd type="none" w="med" len="med"/>
+                      <a:tailEnd type="none" w="med" len="med"/>
+                    </a:lnR>
+                    <a:lnT w="12700" cap="flat" cmpd="sng" algn="ctr">
+                      <a:solidFill>
+                        <a:srgbClr val="D4D6DB"/>
+                      </a:solidFill>
+                      <a:prstDash val="solid"/>
+                      <a:round/>
+                      <a:headEnd type="none" w="med" len="med"/>
+                      <a:tailEnd type="none" w="med" len="med"/>
+                    </a:lnT>
+                    <a:lnB w="12700" cap="flat" cmpd="sng" algn="ctr">
+                      <a:solidFill>
+                        <a:srgbClr val="D4D6DB"/>
+                      </a:solidFill>
+                      <a:prstDash val="solid"/>
+                      <a:round/>
+                      <a:headEnd type="none" w="med" len="med"/>
+                      <a:tailEnd type="none" w="med" len="med"/>
+                    </a:lnB>
+                    <a:solidFill>
+                      <a:srgbClr val="FFFFFF">
+                        <a:alpha val="80000"/>
+                      </a:srgbClr>
+                    </a:solidFill>
+                  </a:tcPr>
+                </a:tc>
+                <a:tc>
+                  <a:txBody>
+                    <a:bodyPr/>
+                    <a:lstStyle/>
+                    <a:p>
+                      <a:pPr algn="l" indent="0" marL="0">
+                        <a:buNone/>
+                      </a:pPr>
+                      <a:r>
+                        <a:rPr lang="en-US" sz="1800" dirty="0">
+                          <a:solidFill>
+                            <a:srgbClr val="111827"/>
+                          </a:solidFill>
+                          <a:latin typeface="Pretendard" pitchFamily="34" charset="0"/>
+                          <a:ea typeface="Pretendard" pitchFamily="34" charset="-122"/>
+                          <a:cs typeface="Pretendard" pitchFamily="34" charset="-120"/>
+                        </a:rPr>
+                        <a:t>Dark data-journalism page with dense proof rails</a:t>
+                      </a:r>
+                      <a:endParaRPr lang="en-US" sz="1800" dirty="0">
+                        <a:latin typeface="Pretendard" charset="0"/>
+                        <a:ea typeface="Pretendard" charset="0"/>
+                        <a:cs typeface="Pretendard" charset="0"/>
+                      </a:endParaRPr>
+                    </a:p>
+                  </a:txBody>
+                  <a:tcPr marL="54864" marR="54864" marT="36576" marB="36576" anchor="ctr">
+                    <a:lnL w="12700" cap="flat" cmpd="sng" algn="ctr">
+                      <a:solidFill>
+                        <a:srgbClr val="D4D6DB"/>
+                      </a:solidFill>
+                      <a:prstDash val="solid"/>
+                      <a:round/>
+                      <a:headEnd type="none" w="med" len="med"/>
+                      <a:tailEnd type="none" w="med" len="med"/>
+                    </a:lnL>
+                    <a:lnR w="12700" cap="flat" cmpd="sng" algn="ctr">
+                      <a:solidFill>
+                        <a:srgbClr val="D4D6DB"/>
+                      </a:solidFill>
+                      <a:prstDash val="solid"/>
+                      <a:round/>
+                      <a:headEnd type="none" w="med" len="med"/>
+                      <a:tailEnd type="none" w="med" len="med"/>
+                    </a:lnR>
+                    <a:lnT w="12700" cap="flat" cmpd="sng" algn="ctr">
+                      <a:solidFill>
+                        <a:srgbClr val="D4D6DB"/>
+                      </a:solidFill>
+                      <a:prstDash val="solid"/>
+                      <a:round/>
+                      <a:headEnd type="none" w="med" len="med"/>
+                      <a:tailEnd type="none" w="med" len="med"/>
+                    </a:lnT>
+                    <a:lnB w="12700" cap="flat" cmpd="sng" algn="ctr">
+                      <a:solidFill>
+                        <a:srgbClr val="D4D6DB"/>
+                      </a:solidFill>
+                      <a:prstDash val="solid"/>
+                      <a:round/>
+                      <a:headEnd type="none" w="med" len="med"/>
+                      <a:tailEnd type="none" w="med" len="med"/>
+                    </a:lnB>
+                    <a:solidFill>
+                      <a:srgbClr val="FFFFFF">
+                        <a:alpha val="80000"/>
+                      </a:srgbClr>
+                    </a:solidFill>
+                  </a:tcPr>
+                </a:tc>
+              </a:tr>
+            </a:tbl>
+          </a:graphicData>
+        </a:graphic>
+      </p:graphicFrame>
+    </p:spTree>
+  </p:cSld>
+  <p:clrMapOvr>
+    <a:masterClrMapping/>
+  </p:clrMapOvr>
+</p:sld>
+</file>
+
+<file path=ppt/slides/slide11.xml><?xml version="1.0" encoding="utf-8"?>
+<p:sld xmlns:a="http://schemas.openxmlformats.org/drawingml/2006/main" xmlns:r="http://schemas.openxmlformats.org/officeDocument/2006/relationships" xmlns:p="http://schemas.openxmlformats.org/presentationml/2006/main">
+  <p:cSld name="Slide 11">
+    <p:bg>
+      <p:bgPr>
+        <a:solidFill>
+          <a:srgbClr val="FFFFFF"/>
+        </a:solidFill>
+      </p:bgPr>
+    </p:bg>
+    <p:spTree>
+      <p:nvGrpSpPr>
+        <p:cNvPr id="1" name=""/>
+        <p:cNvGrpSpPr/>
+        <p:nvPr/>
+      </p:nvGrpSpPr>
+      <p:grpSpPr>
+        <a:xfrm>
+          <a:off x="0" y="0"/>
+          <a:ext cx="0" cy="0"/>
+          <a:chOff x="0" y="0"/>
+          <a:chExt cx="0" cy="0"/>
+        </a:xfrm>
+      </p:grpSpPr>
+      <p:sp>
+        <p:nvSpPr>
+          <p:cNvPr id="2" name="Shape 0"/>
+          <p:cNvSpPr/>
+          <p:nvPr/>
+        </p:nvSpPr>
+        <p:spPr>
+          <a:xfrm>
+            <a:off x="749808" y="713232"/>
+            <a:ext cx="2194505" cy="0"/>
+          </a:xfrm>
+          <a:prstGeom prst="line">
+            <a:avLst/>
+          </a:prstGeom>
+          <a:noFill/>
+          <a:ln w="12700">
+            <a:solidFill>
+              <a:srgbClr val="111827">
+                <a:alpha val="82000"/>
+              </a:srgbClr>
+            </a:solidFill>
+            <a:prstDash val="solid"/>
+          </a:ln>
+        </p:spPr>
+      </p:sp>
+      <p:sp>
+        <p:nvSpPr>
+          <p:cNvPr id="3" name="Shape 1"/>
+          <p:cNvSpPr/>
+          <p:nvPr/>
+        </p:nvSpPr>
+        <p:spPr>
+          <a:xfrm>
+            <a:off x="9338767" y="6199632"/>
+            <a:ext cx="2103120" cy="0"/>
+          </a:xfrm>
+          <a:prstGeom prst="line">
+            <a:avLst/>
+          </a:prstGeom>
+          <a:noFill/>
+          <a:ln w="12700">
+            <a:solidFill>
+              <a:srgbClr val="D4D6DB">
+                <a:alpha val="82000"/>
+              </a:srgbClr>
+            </a:solidFill>
+            <a:prstDash val="solid"/>
+          </a:ln>
+        </p:spPr>
+      </p:sp>
+      <p:pic>
+        <p:nvPicPr>
+          <p:cNvPr id="4" name="Image 0" descr="preencoded.png">    </p:cNvPr>
+          <p:cNvPicPr>
+            <a:picLocks noChangeAspect="1"/>
+          </p:cNvPicPr>
+          <p:nvPr/>
+        </p:nvPicPr>
+        <p:blipFill>
+          <a:blip r:embed="rId1">
+            <a:extLst>
+              <a:ext uri="{96DAC541-7B7A-43D3-8B79-37D633B846F1}">
+                <asvg:svgBlip xmlns:asvg="http://schemas.microsoft.com/office/drawing/2016/SVG/main" r:embed="rId2"/>
+              </a:ext>
+            </a:extLst>
+          </a:blip>
+          <a:stretch>
+            <a:fillRect/>
+          </a:stretch>
+        </p:blipFill>
+        <p:spPr>
+          <a:xfrm>
+            <a:off x="914400" y="1417320"/>
+            <a:ext cx="10241280" cy="4526280"/>
+          </a:xfrm>
+          <a:prstGeom prst="rect">
+            <a:avLst/>
+          </a:prstGeom>
+        </p:spPr>
+      </p:pic>
+      <p:sp>
+        <p:nvSpPr>
+          <p:cNvPr id="5" name="mdpr:2-2-3dcbe2:title:__title:2-2-3dcbe2"/>
+          <p:cNvSpPr txBox="1"/>
+          <p:nvPr/>
+        </p:nvSpPr>
+        <p:spPr>
+          <a:xfrm>
+            <a:off x="731520" y="457200"/>
+            <a:ext cx="10698480" cy="731520"/>
+          </a:xfrm>
+          <a:prstGeom prst="rect">
+            <a:avLst/>
+          </a:prstGeom>
+          <a:noFill/>
+          <a:ln/>
+        </p:spPr>
+        <p:txBody>
+          <a:bodyPr wrap="square" lIns="0" tIns="0" rIns="0" bIns="0" rtlCol="0" anchor="ctr"/>
+          <a:lstStyle/>
+          <a:p>
+            <a:pPr algn="ctr" indent="0" marL="0">
+              <a:lnSpc>
+                <a:spcPct val="120000"/>
+              </a:lnSpc>
+              <a:buNone/>
+            </a:pPr>
+            <a:r>
+              <a:rPr lang="en-US" sz="3400" b="1" dirty="0">
+                <a:solidFill>
+                  <a:srgbClr val="111827"/>
+                </a:solidFill>
+                <a:latin typeface="Pretendard" pitchFamily="34" charset="0"/>
+                <a:ea typeface="Pretendard" pitchFamily="34" charset="-122"/>
+                <a:cs typeface="Pretendard" pitchFamily="34" charset="-120"/>
+              </a:rPr>
+              <a:t>Theme Matrix (Cont. 2/2)</a:t>
+            </a:r>
+            <a:endParaRPr lang="en-US" sz="3400" dirty="0"/>
+          </a:p>
+        </p:txBody>
+      </p:sp>
+      <p:graphicFrame>
+        <p:nvGraphicFramePr>
+          <p:cNvPr id="12" name="mdpr:2-2-3dcbe2:table:block-19-chunk-2"/>
+          <p:cNvGraphicFramePr>
+            <a:graphicFrameLocks noGrp="1"/>
+          </p:cNvGraphicFramePr>
+          <p:nvPr>
+            <p:extLst>
+              <p:ext uri="{D42A27DB-BD31-4B8C-83A1-F6EECF244321}">
+                <p14:modId xmlns:p14="http://schemas.microsoft.com/office/powerpoint/2010/main" val="1579011935"/>
+              </p:ext>
+            </p:extLst>
+          </p:nvPr>
+        </p:nvGraphicFramePr>
+        <p:xfrm>
+          <a:off x="914400" y="1417320"/>
+          <a:ext cx="10241280" cy="4526280"/>
+        </p:xfrm>
+        <a:graphic>
+          <a:graphicData uri="http://schemas.openxmlformats.org/drawingml/2006/table">
+            <a:tbl>
+              <a:tblPr/>
+              <a:tblGrid>
+                <a:gridCol w="2560320"/>
+                <a:gridCol w="2560320"/>
+                <a:gridCol w="2560320"/>
+                <a:gridCol w="2560320"/>
+              </a:tblGrid>
+              <a:tr h="905256">
+                <a:tc>
+                  <a:txBody>
+                    <a:bodyPr/>
+                    <a:lstStyle/>
+                    <a:p>
+                      <a:pPr algn="ctr" indent="0" marL="0">
+                        <a:buNone/>
+                      </a:pPr>
+                      <a:r>
+                        <a:rPr lang="en-US" sz="1800" b="1" dirty="0">
+                          <a:solidFill>
+                            <a:srgbClr val="FFFFFF"/>
+                          </a:solidFill>
+                          <a:latin typeface="Pretendard" pitchFamily="34" charset="0"/>
+                          <a:ea typeface="Pretendard" pitchFamily="34" charset="-122"/>
+                          <a:cs typeface="Pretendard" pitchFamily="34" charset="-120"/>
+                        </a:rPr>
+                        <a:t>Style</a:t>
+                      </a:r>
+                      <a:endParaRPr lang="en-US" sz="1800" dirty="0">
+                        <a:latin typeface="Pretendard" charset="0"/>
+                        <a:ea typeface="Pretendard" charset="0"/>
+                        <a:cs typeface="Pretendard" charset="0"/>
+                      </a:endParaRPr>
+                    </a:p>
+                  </a:txBody>
+                  <a:tcPr marL="54864" marR="54864" marT="36576" marB="36576" anchor="ctr">
+                    <a:lnL w="12700" cap="flat" cmpd="sng" algn="ctr">
+                      <a:solidFill>
+                        <a:srgbClr val="D4D6DB"/>
+                      </a:solidFill>
+                      <a:prstDash val="solid"/>
+                      <a:round/>
+                      <a:headEnd type="none" w="med" len="med"/>
+                      <a:tailEnd type="none" w="med" len="med"/>
+                    </a:lnL>
+                    <a:lnR w="12700" cap="flat" cmpd="sng" algn="ctr">
+                      <a:solidFill>
+                        <a:srgbClr val="D4D6DB"/>
+                      </a:solidFill>
+                      <a:prstDash val="solid"/>
+                      <a:round/>
+                      <a:headEnd type="none" w="med" len="med"/>
+                      <a:tailEnd type="none" w="med" len="med"/>
+                    </a:lnR>
+                    <a:lnT w="12700" cap="flat" cmpd="sng" algn="ctr">
+                      <a:solidFill>
+                        <a:srgbClr val="D4D6DB"/>
+                      </a:solidFill>
+                      <a:prstDash val="solid"/>
+                      <a:round/>
+                      <a:headEnd type="none" w="med" len="med"/>
+                      <a:tailEnd type="none" w="med" len="med"/>
+                    </a:lnT>
+                    <a:lnB w="12700" cap="flat" cmpd="sng" algn="ctr">
+                      <a:solidFill>
+                        <a:srgbClr val="D4D6DB"/>
+                      </a:solidFill>
+                      <a:prstDash val="solid"/>
+                      <a:round/>
+                      <a:headEnd type="none" w="med" len="med"/>
+                      <a:tailEnd type="none" w="med" len="med"/>
+                    </a:lnB>
+                    <a:solidFill>
+                      <a:srgbClr val="111827"/>
+                    </a:solidFill>
+                  </a:tcPr>
+                </a:tc>
+                <a:tc>
+                  <a:txBody>
+                    <a:bodyPr/>
+                    <a:lstStyle/>
+                    <a:p>
+                      <a:pPr algn="ctr" indent="0" marL="0">
+                        <a:buNone/>
+                      </a:pPr>
+                      <a:r>
+                        <a:rPr lang="en-US" sz="1800" b="1" dirty="0">
+                          <a:solidFill>
+                            <a:srgbClr val="FFFFFF"/>
+                          </a:solidFill>
+                          <a:latin typeface="Pretendard" pitchFamily="34" charset="0"/>
+                          <a:ea typeface="Pretendard" pitchFamily="34" charset="-122"/>
+                          <a:cs typeface="Pretendard" pitchFamily="34" charset="-120"/>
+                        </a:rPr>
+                        <a:t>Main Color</a:t>
+                      </a:r>
+                      <a:endParaRPr lang="en-US" sz="1800" dirty="0">
+                        <a:latin typeface="Pretendard" charset="0"/>
+                        <a:ea typeface="Pretendard" charset="0"/>
+                        <a:cs typeface="Pretendard" charset="0"/>
+                      </a:endParaRPr>
+                    </a:p>
+                  </a:txBody>
+                  <a:tcPr marL="54864" marR="54864" marT="36576" marB="36576" anchor="ctr">
+                    <a:lnL w="12700" cap="flat" cmpd="sng" algn="ctr">
+                      <a:solidFill>
+                        <a:srgbClr val="D4D6DB"/>
+                      </a:solidFill>
+                      <a:prstDash val="solid"/>
+                      <a:round/>
+                      <a:headEnd type="none" w="med" len="med"/>
+                      <a:tailEnd type="none" w="med" len="med"/>
+                    </a:lnL>
+                    <a:lnR w="12700" cap="flat" cmpd="sng" algn="ctr">
+                      <a:solidFill>
+                        <a:srgbClr val="D4D6DB"/>
+                      </a:solidFill>
+                      <a:prstDash val="solid"/>
+                      <a:round/>
+                      <a:headEnd type="none" w="med" len="med"/>
+                      <a:tailEnd type="none" w="med" len="med"/>
+                    </a:lnR>
+                    <a:lnT w="12700" cap="flat" cmpd="sng" algn="ctr">
+                      <a:solidFill>
+                        <a:srgbClr val="D4D6DB"/>
+                      </a:solidFill>
+                      <a:prstDash val="solid"/>
+                      <a:round/>
+                      <a:headEnd type="none" w="med" len="med"/>
+                      <a:tailEnd type="none" w="med" len="med"/>
+                    </a:lnT>
+                    <a:lnB w="12700" cap="flat" cmpd="sng" algn="ctr">
+                      <a:solidFill>
+                        <a:srgbClr val="D4D6DB"/>
+                      </a:solidFill>
+                      <a:prstDash val="solid"/>
+                      <a:round/>
+                      <a:headEnd type="none" w="med" len="med"/>
+                      <a:tailEnd type="none" w="med" len="med"/>
+                    </a:lnB>
+                    <a:solidFill>
+                      <a:srgbClr val="111827"/>
+                    </a:solidFill>
+                  </a:tcPr>
+                </a:tc>
+                <a:tc>
+                  <a:txBody>
+                    <a:bodyPr/>
+                    <a:lstStyle/>
+                    <a:p>
+                      <a:pPr algn="ctr" indent="0" marL="0">
+                        <a:buNone/>
+                      </a:pPr>
+                      <a:r>
+                        <a:rPr lang="en-US" sz="1800" b="1" dirty="0">
+                          <a:solidFill>
+                            <a:srgbClr val="FFFFFF"/>
+                          </a:solidFill>
+                          <a:latin typeface="Pretendard" pitchFamily="34" charset="0"/>
+                          <a:ea typeface="Pretendard" pitchFamily="34" charset="-122"/>
+                          <a:cs typeface="Pretendard" pitchFamily="34" charset="-120"/>
+                        </a:rPr>
+                        <a:t>Harmony</a:t>
+                      </a:r>
+                      <a:endParaRPr lang="en-US" sz="1800" dirty="0">
+                        <a:latin typeface="Pretendard" charset="0"/>
+                        <a:ea typeface="Pretendard" charset="0"/>
+                        <a:cs typeface="Pretendard" charset="0"/>
+                      </a:endParaRPr>
+                    </a:p>
+                  </a:txBody>
+                  <a:tcPr marL="54864" marR="54864" marT="36576" marB="36576" anchor="ctr">
+                    <a:lnL w="12700" cap="flat" cmpd="sng" algn="ctr">
+                      <a:solidFill>
+                        <a:srgbClr val="D4D6DB"/>
+                      </a:solidFill>
+                      <a:prstDash val="solid"/>
+                      <a:round/>
+                      <a:headEnd type="none" w="med" len="med"/>
+                      <a:tailEnd type="none" w="med" len="med"/>
+                    </a:lnL>
+                    <a:lnR w="12700" cap="flat" cmpd="sng" algn="ctr">
+                      <a:solidFill>
+                        <a:srgbClr val="D4D6DB"/>
+                      </a:solidFill>
+                      <a:prstDash val="solid"/>
+                      <a:round/>
+                      <a:headEnd type="none" w="med" len="med"/>
+                      <a:tailEnd type="none" w="med" len="med"/>
+                    </a:lnR>
+                    <a:lnT w="12700" cap="flat" cmpd="sng" algn="ctr">
+                      <a:solidFill>
+                        <a:srgbClr val="D4D6DB"/>
+                      </a:solidFill>
+                      <a:prstDash val="solid"/>
+                      <a:round/>
+                      <a:headEnd type="none" w="med" len="med"/>
+                      <a:tailEnd type="none" w="med" len="med"/>
+                    </a:lnT>
+                    <a:lnB w="12700" cap="flat" cmpd="sng" algn="ctr">
+                      <a:solidFill>
+                        <a:srgbClr val="D4D6DB"/>
+                      </a:solidFill>
+                      <a:prstDash val="solid"/>
+                      <a:round/>
+                      <a:headEnd type="none" w="med" len="med"/>
+                      <a:tailEnd type="none" w="med" len="med"/>
+                    </a:lnB>
+                    <a:solidFill>
+                      <a:srgbClr val="111827"/>
+                    </a:solidFill>
+                  </a:tcPr>
+                </a:tc>
+                <a:tc>
+                  <a:txBody>
+                    <a:bodyPr/>
+                    <a:lstStyle/>
+                    <a:p>
+                      <a:pPr algn="ctr" indent="0" marL="0">
+                        <a:buNone/>
+                      </a:pPr>
+                      <a:r>
+                        <a:rPr lang="en-US" sz="1800" b="1" dirty="0">
+                          <a:solidFill>
+                            <a:srgbClr val="FFFFFF"/>
+                          </a:solidFill>
+                          <a:latin typeface="Pretendard" pitchFamily="34" charset="0"/>
+                          <a:ea typeface="Pretendard" pitchFamily="34" charset="-122"/>
+                          <a:cs typeface="Pretendard" pitchFamily="34" charset="-120"/>
+                        </a:rPr>
+                        <a:t>Intended Role</a:t>
+                      </a:r>
+                      <a:endParaRPr lang="en-US" sz="1800" dirty="0">
+                        <a:latin typeface="Pretendard" charset="0"/>
+                        <a:ea typeface="Pretendard" charset="0"/>
+                        <a:cs typeface="Pretendard" charset="0"/>
+                      </a:endParaRPr>
+                    </a:p>
+                  </a:txBody>
+                  <a:tcPr marL="54864" marR="54864" marT="36576" marB="36576" anchor="ctr">
+                    <a:lnL w="12700" cap="flat" cmpd="sng" algn="ctr">
+                      <a:solidFill>
+                        <a:srgbClr val="D4D6DB"/>
+                      </a:solidFill>
+                      <a:prstDash val="solid"/>
+                      <a:round/>
+                      <a:headEnd type="none" w="med" len="med"/>
+                      <a:tailEnd type="none" w="med" len="med"/>
+                    </a:lnL>
+                    <a:lnR w="12700" cap="flat" cmpd="sng" algn="ctr">
+                      <a:solidFill>
+                        <a:srgbClr val="D4D6DB"/>
+                      </a:solidFill>
+                      <a:prstDash val="solid"/>
+                      <a:round/>
+                      <a:headEnd type="none" w="med" len="med"/>
+                      <a:tailEnd type="none" w="med" len="med"/>
+                    </a:lnR>
+                    <a:lnT w="12700" cap="flat" cmpd="sng" algn="ctr">
+                      <a:solidFill>
+                        <a:srgbClr val="D4D6DB"/>
+                      </a:solidFill>
+                      <a:prstDash val="solid"/>
+                      <a:round/>
+                      <a:headEnd type="none" w="med" len="med"/>
+                      <a:tailEnd type="none" w="med" len="med"/>
+                    </a:lnT>
+                    <a:lnB w="12700" cap="flat" cmpd="sng" algn="ctr">
+                      <a:solidFill>
+                        <a:srgbClr val="D4D6DB"/>
+                      </a:solidFill>
+                      <a:prstDash val="solid"/>
+                      <a:round/>
+                      <a:headEnd type="none" w="med" len="med"/>
+                      <a:tailEnd type="none" w="med" len="med"/>
+                    </a:lnB>
+                    <a:solidFill>
+                      <a:srgbClr val="111827"/>
+                    </a:solidFill>
+                  </a:tcPr>
+                </a:tc>
+              </a:tr>
+              <a:tr h="905256">
+                <a:tc>
+                  <a:txBody>
+                    <a:bodyPr/>
+                    <a:lstStyle/>
+                    <a:p>
+                      <a:pPr algn="l" indent="0" marL="0">
+                        <a:buNone/>
+                      </a:pPr>
+                      <a:r>
+                        <a:rPr lang="en-US" sz="1800" b="1" dirty="0">
+                          <a:solidFill>
+                            <a:srgbClr val="111827"/>
+                          </a:solidFill>
+                          <a:latin typeface="Pretendard" pitchFamily="34" charset="0"/>
+                          <a:ea typeface="Pretendard" pitchFamily="34" charset="-122"/>
+                          <a:cs typeface="Pretendard" pitchFamily="34" charset="-120"/>
+                        </a:rPr>
+                        <a:t>technical</a:t>
+                      </a:r>
+                      <a:endParaRPr lang="en-US" sz="1800" dirty="0">
+                        <a:latin typeface="Pretendard" charset="0"/>
+                        <a:ea typeface="Pretendard" charset="0"/>
+                        <a:cs typeface="Pretendard" charset="0"/>
+                      </a:endParaRPr>
+                    </a:p>
+                  </a:txBody>
+                  <a:tcPr marL="54864" marR="54864" marT="36576" marB="36576" anchor="ctr">
+                    <a:lnL w="12700" cap="flat" cmpd="sng" algn="ctr">
+                      <a:solidFill>
+                        <a:srgbClr val="D4D6DB"/>
+                      </a:solidFill>
+                      <a:prstDash val="solid"/>
+                      <a:round/>
+                      <a:headEnd type="none" w="med" len="med"/>
+                      <a:tailEnd type="none" w="med" len="med"/>
+                    </a:lnL>
+                    <a:lnR w="12700" cap="flat" cmpd="sng" algn="ctr">
+                      <a:solidFill>
+                        <a:srgbClr val="D4D6DB"/>
+                      </a:solidFill>
+                      <a:prstDash val="solid"/>
+                      <a:round/>
+                      <a:headEnd type="none" w="med" len="med"/>
+                      <a:tailEnd type="none" w="med" len="med"/>
+                    </a:lnR>
+                    <a:lnT w="12700" cap="flat" cmpd="sng" algn="ctr">
+                      <a:solidFill>
+                        <a:srgbClr val="D4D6DB"/>
+                      </a:solidFill>
+                      <a:prstDash val="solid"/>
+                      <a:round/>
+                      <a:headEnd type="none" w="med" len="med"/>
+                      <a:tailEnd type="none" w="med" len="med"/>
+                    </a:lnT>
+                    <a:lnB w="12700" cap="flat" cmpd="sng" algn="ctr">
+                      <a:solidFill>
+                        <a:srgbClr val="D4D6DB"/>
+                      </a:solidFill>
+                      <a:prstDash val="solid"/>
+                      <a:round/>
+                      <a:headEnd type="none" w="med" len="med"/>
+                      <a:tailEnd type="none" w="med" len="med"/>
+                    </a:lnB>
+                  </a:tcPr>
+                </a:tc>
+                <a:tc>
+                  <a:txBody>
+                    <a:bodyPr/>
+                    <a:lstStyle/>
+                    <a:p>
+                      <a:pPr algn="l" indent="0" marL="0">
+                        <a:buNone/>
+                      </a:pPr>
+                      <a:r>
+                        <a:rPr lang="en-US" sz="1800" dirty="0">
+                          <a:solidFill>
+                            <a:srgbClr val="111827"/>
+                          </a:solidFill>
+                          <a:latin typeface="Pretendard" pitchFamily="34" charset="0"/>
+                          <a:ea typeface="Pretendard" pitchFamily="34" charset="-122"/>
+                          <a:cs typeface="Pretendard" pitchFamily="34" charset="-120"/>
+                        </a:rPr>
+                        <a:t>#C2410C</a:t>
+                      </a:r>
+                      <a:endParaRPr lang="en-US" sz="1800" dirty="0">
+                        <a:latin typeface="Pretendard" charset="0"/>
+                        <a:ea typeface="Pretendard" charset="0"/>
+                        <a:cs typeface="Pretendard" charset="0"/>
+                      </a:endParaRPr>
+                    </a:p>
+                  </a:txBody>
+                  <a:tcPr marL="54864" marR="54864" marT="36576" marB="36576" anchor="ctr">
+                    <a:lnL w="12700" cap="flat" cmpd="sng" algn="ctr">
+                      <a:solidFill>
+                        <a:srgbClr val="D4D6DB"/>
+                      </a:solidFill>
+                      <a:prstDash val="solid"/>
+                      <a:round/>
+                      <a:headEnd type="none" w="med" len="med"/>
+                      <a:tailEnd type="none" w="med" len="med"/>
+                    </a:lnL>
+                    <a:lnR w="12700" cap="flat" cmpd="sng" algn="ctr">
+                      <a:solidFill>
+                        <a:srgbClr val="D4D6DB"/>
+                      </a:solidFill>
+                      <a:prstDash val="solid"/>
+                      <a:round/>
+                      <a:headEnd type="none" w="med" len="med"/>
+                      <a:tailEnd type="none" w="med" len="med"/>
+                    </a:lnR>
+                    <a:lnT w="12700" cap="flat" cmpd="sng" algn="ctr">
+                      <a:solidFill>
+                        <a:srgbClr val="D4D6DB"/>
+                      </a:solidFill>
+                      <a:prstDash val="solid"/>
+                      <a:round/>
+                      <a:headEnd type="none" w="med" len="med"/>
+                      <a:tailEnd type="none" w="med" len="med"/>
+                    </a:lnT>
+                    <a:lnB w="12700" cap="flat" cmpd="sng" algn="ctr">
+                      <a:solidFill>
+                        <a:srgbClr val="D4D6DB"/>
+                      </a:solidFill>
+                      <a:prstDash val="solid"/>
+                      <a:round/>
+                      <a:headEnd type="none" w="med" len="med"/>
+                      <a:tailEnd type="none" w="med" len="med"/>
+                    </a:lnB>
+                  </a:tcPr>
+                </a:tc>
+                <a:tc>
+                  <a:txBody>
+                    <a:bodyPr/>
+                    <a:lstStyle/>
+                    <a:p>
+                      <a:pPr algn="l" indent="0" marL="0">
+                        <a:buNone/>
+                      </a:pPr>
+                      <a:r>
+                        <a:rPr lang="en-US" sz="1800" dirty="0">
+                          <a:solidFill>
+                            <a:srgbClr val="111827"/>
+                          </a:solidFill>
+                          <a:latin typeface="Pretendard" pitchFamily="34" charset="0"/>
+                          <a:ea typeface="Pretendard" pitchFamily="34" charset="-122"/>
+                          <a:cs typeface="Pretendard" pitchFamily="34" charset="-120"/>
+                        </a:rPr>
+                        <a:t>triadic</a:t>
+                      </a:r>
+                      <a:endParaRPr lang="en-US" sz="1800" dirty="0">
+                        <a:latin typeface="Pretendard" charset="0"/>
+                        <a:ea typeface="Pretendard" charset="0"/>
+                        <a:cs typeface="Pretendard" charset="0"/>
+                      </a:endParaRPr>
+                    </a:p>
+                  </a:txBody>
+                  <a:tcPr marL="54864" marR="54864" marT="36576" marB="36576" anchor="ctr">
+                    <a:lnL w="12700" cap="flat" cmpd="sng" algn="ctr">
+                      <a:solidFill>
+                        <a:srgbClr val="D4D6DB"/>
+                      </a:solidFill>
+                      <a:prstDash val="solid"/>
+                      <a:round/>
+                      <a:headEnd type="none" w="med" len="med"/>
+                      <a:tailEnd type="none" w="med" len="med"/>
+                    </a:lnL>
+                    <a:lnR w="12700" cap="flat" cmpd="sng" algn="ctr">
+                      <a:solidFill>
+                        <a:srgbClr val="D4D6DB"/>
+                      </a:solidFill>
+                      <a:prstDash val="solid"/>
+                      <a:round/>
+                      <a:headEnd type="none" w="med" len="med"/>
+                      <a:tailEnd type="none" w="med" len="med"/>
+                    </a:lnR>
+                    <a:lnT w="12700" cap="flat" cmpd="sng" algn="ctr">
+                      <a:solidFill>
+                        <a:srgbClr val="D4D6DB"/>
+                      </a:solidFill>
+                      <a:prstDash val="solid"/>
+                      <a:round/>
+                      <a:headEnd type="none" w="med" len="med"/>
+                      <a:tailEnd type="none" w="med" len="med"/>
+                    </a:lnT>
+                    <a:lnB w="12700" cap="flat" cmpd="sng" algn="ctr">
+                      <a:solidFill>
+                        <a:srgbClr val="D4D6DB"/>
+                      </a:solidFill>
+                      <a:prstDash val="solid"/>
+                      <a:round/>
+                      <a:headEnd type="none" w="med" len="med"/>
+                      <a:tailEnd type="none" w="med" len="med"/>
+                    </a:lnB>
+                  </a:tcPr>
+                </a:tc>
+                <a:tc>
+                  <a:txBody>
+                    <a:bodyPr/>
+                    <a:lstStyle/>
+                    <a:p>
+                      <a:pPr algn="l" indent="0" marL="0">
+                        <a:buNone/>
+                      </a:pPr>
+                      <a:r>
+                        <a:rPr lang="en-US" sz="1800" dirty="0">
+                          <a:solidFill>
+                            <a:srgbClr val="111827"/>
+                          </a:solidFill>
+                          <a:latin typeface="Pretendard" pitchFamily="34" charset="0"/>
+                          <a:ea typeface="Pretendard" pitchFamily="34" charset="-122"/>
+                          <a:cs typeface="Pretendard" pitchFamily="34" charset="-120"/>
+                        </a:rPr>
+                        <a:t>Editorial magazine cover/page rhythm</a:t>
+                      </a:r>
+                      <a:endParaRPr lang="en-US" sz="1800" dirty="0">
+                        <a:latin typeface="Pretendard" charset="0"/>
+                        <a:ea typeface="Pretendard" charset="0"/>
+                        <a:cs typeface="Pretendard" charset="0"/>
+                      </a:endParaRPr>
+                    </a:p>
+                  </a:txBody>
+                  <a:tcPr marL="54864" marR="54864" marT="36576" marB="36576" anchor="ctr">
+                    <a:lnL w="12700" cap="flat" cmpd="sng" algn="ctr">
+                      <a:solidFill>
+                        <a:srgbClr val="D4D6DB"/>
+                      </a:solidFill>
+                      <a:prstDash val="solid"/>
+                      <a:round/>
+                      <a:headEnd type="none" w="med" len="med"/>
+                      <a:tailEnd type="none" w="med" len="med"/>
+                    </a:lnL>
+                    <a:lnR w="12700" cap="flat" cmpd="sng" algn="ctr">
+                      <a:solidFill>
+                        <a:srgbClr val="D4D6DB"/>
+                      </a:solidFill>
+                      <a:prstDash val="solid"/>
+                      <a:round/>
+                      <a:headEnd type="none" w="med" len="med"/>
+                      <a:tailEnd type="none" w="med" len="med"/>
+                    </a:lnR>
+                    <a:lnT w="12700" cap="flat" cmpd="sng" algn="ctr">
+                      <a:solidFill>
+                        <a:srgbClr val="D4D6DB"/>
+                      </a:solidFill>
+                      <a:prstDash val="solid"/>
+                      <a:round/>
+                      <a:headEnd type="none" w="med" len="med"/>
+                      <a:tailEnd type="none" w="med" len="med"/>
+                    </a:lnT>
+                    <a:lnB w="12700" cap="flat" cmpd="sng" algn="ctr">
+                      <a:solidFill>
+                        <a:srgbClr val="D4D6DB"/>
+                      </a:solidFill>
+                      <a:prstDash val="solid"/>
+                      <a:round/>
+                      <a:headEnd type="none" w="med" len="med"/>
+                      <a:tailEnd type="none" w="med" len="med"/>
+                    </a:lnB>
+                  </a:tcPr>
+                </a:tc>
+              </a:tr>
+              <a:tr h="905256">
+                <a:tc>
+                  <a:txBody>
+                    <a:bodyPr/>
+                    <a:lstStyle/>
+                    <a:p>
+                      <a:pPr algn="l" indent="0" marL="0">
+                        <a:buNone/>
+                      </a:pPr>
+                      <a:r>
+                        <a:rPr lang="en-US" sz="1800" b="1" dirty="0">
+                          <a:solidFill>
+                            <a:srgbClr val="111827"/>
+                          </a:solidFill>
+                          <a:latin typeface="Pretendard" pitchFamily="34" charset="0"/>
+                          <a:ea typeface="Pretendard" pitchFamily="34" charset="-122"/>
+                          <a:cs typeface="Pretendard" pitchFamily="34" charset="-120"/>
+                        </a:rPr>
+                        <a:t>executive</a:t>
+                      </a:r>
+                      <a:endParaRPr lang="en-US" sz="1800" dirty="0">
+                        <a:latin typeface="Pretendard" charset="0"/>
+                        <a:ea typeface="Pretendard" charset="0"/>
+                        <a:cs typeface="Pretendard" charset="0"/>
+                      </a:endParaRPr>
+                    </a:p>
+                  </a:txBody>
+                  <a:tcPr marL="54864" marR="54864" marT="36576" marB="36576" anchor="ctr">
+                    <a:lnL w="12700" cap="flat" cmpd="sng" algn="ctr">
+                      <a:solidFill>
+                        <a:srgbClr val="D4D6DB"/>
+                      </a:solidFill>
+                      <a:prstDash val="solid"/>
+                      <a:round/>
+                      <a:headEnd type="none" w="med" len="med"/>
+                      <a:tailEnd type="none" w="med" len="med"/>
+                    </a:lnL>
+                    <a:lnR w="12700" cap="flat" cmpd="sng" algn="ctr">
+                      <a:solidFill>
+                        <a:srgbClr val="D4D6DB"/>
+                      </a:solidFill>
+                      <a:prstDash val="solid"/>
+                      <a:round/>
+                      <a:headEnd type="none" w="med" len="med"/>
+                      <a:tailEnd type="none" w="med" len="med"/>
+                    </a:lnR>
+                    <a:lnT w="12700" cap="flat" cmpd="sng" algn="ctr">
+                      <a:solidFill>
+                        <a:srgbClr val="D4D6DB"/>
+                      </a:solidFill>
+                      <a:prstDash val="solid"/>
+                      <a:round/>
+                      <a:headEnd type="none" w="med" len="med"/>
+                      <a:tailEnd type="none" w="med" len="med"/>
+                    </a:lnT>
+                    <a:lnB w="12700" cap="flat" cmpd="sng" algn="ctr">
+                      <a:solidFill>
+                        <a:srgbClr val="D4D6DB"/>
+                      </a:solidFill>
+                      <a:prstDash val="solid"/>
+                      <a:round/>
+                      <a:headEnd type="none" w="med" len="med"/>
+                      <a:tailEnd type="none" w="med" len="med"/>
+                    </a:lnB>
+                    <a:solidFill>
+                      <a:srgbClr val="FFFFFF">
+                        <a:alpha val="80000"/>
+                      </a:srgbClr>
+                    </a:solidFill>
+                  </a:tcPr>
+                </a:tc>
+                <a:tc>
+                  <a:txBody>
+                    <a:bodyPr/>
+                    <a:lstStyle/>
+                    <a:p>
+                      <a:pPr algn="l" indent="0" marL="0">
+                        <a:buNone/>
+                      </a:pPr>
+                      <a:r>
+                        <a:rPr lang="en-US" sz="1800" dirty="0">
+                          <a:solidFill>
+                            <a:srgbClr val="111827"/>
+                          </a:solidFill>
+                          <a:latin typeface="Pretendard" pitchFamily="34" charset="0"/>
+                          <a:ea typeface="Pretendard" pitchFamily="34" charset="-122"/>
+                          <a:cs typeface="Pretendard" pitchFamily="34" charset="-120"/>
+                        </a:rPr>
+                        <a:t>#0F766E</a:t>
+                      </a:r>
+                      <a:endParaRPr lang="en-US" sz="1800" dirty="0">
+                        <a:latin typeface="Pretendard" charset="0"/>
+                        <a:ea typeface="Pretendard" charset="0"/>
+                        <a:cs typeface="Pretendard" charset="0"/>
+                      </a:endParaRPr>
+                    </a:p>
+                  </a:txBody>
+                  <a:tcPr marL="54864" marR="54864" marT="36576" marB="36576" anchor="ctr">
+                    <a:lnL w="12700" cap="flat" cmpd="sng" algn="ctr">
+                      <a:solidFill>
+                        <a:srgbClr val="D4D6DB"/>
+                      </a:solidFill>
+                      <a:prstDash val="solid"/>
+                      <a:round/>
+                      <a:headEnd type="none" w="med" len="med"/>
+                      <a:tailEnd type="none" w="med" len="med"/>
+                    </a:lnL>
+                    <a:lnR w="12700" cap="flat" cmpd="sng" algn="ctr">
+                      <a:solidFill>
+                        <a:srgbClr val="D4D6DB"/>
+                      </a:solidFill>
+                      <a:prstDash val="solid"/>
+                      <a:round/>
+                      <a:headEnd type="none" w="med" len="med"/>
+                      <a:tailEnd type="none" w="med" len="med"/>
+                    </a:lnR>
+                    <a:lnT w="12700" cap="flat" cmpd="sng" algn="ctr">
+                      <a:solidFill>
+                        <a:srgbClr val="D4D6DB"/>
+                      </a:solidFill>
+                      <a:prstDash val="solid"/>
+                      <a:round/>
+                      <a:headEnd type="none" w="med" len="med"/>
+                      <a:tailEnd type="none" w="med" len="med"/>
+                    </a:lnT>
+                    <a:lnB w="12700" cap="flat" cmpd="sng" algn="ctr">
+                      <a:solidFill>
+                        <a:srgbClr val="D4D6DB"/>
+                      </a:solidFill>
+                      <a:prstDash val="solid"/>
+                      <a:round/>
+                      <a:headEnd type="none" w="med" len="med"/>
+                      <a:tailEnd type="none" w="med" len="med"/>
+                    </a:lnB>
+                    <a:solidFill>
+                      <a:srgbClr val="FFFFFF">
+                        <a:alpha val="80000"/>
+                      </a:srgbClr>
+                    </a:solidFill>
+                  </a:tcPr>
+                </a:tc>
+                <a:tc>
+                  <a:txBody>
+                    <a:bodyPr/>
+                    <a:lstStyle/>
+                    <a:p>
+                      <a:pPr algn="l" indent="0" marL="0">
+                        <a:buNone/>
+                      </a:pPr>
+                      <a:r>
+                        <a:rPr lang="en-US" sz="1800" dirty="0">
+                          <a:solidFill>
+                            <a:srgbClr val="111827"/>
+                          </a:solidFill>
+                          <a:latin typeface="Pretendard" pitchFamily="34" charset="0"/>
+                          <a:ea typeface="Pretendard" pitchFamily="34" charset="-122"/>
+                          <a:cs typeface="Pretendard" pitchFamily="34" charset="-120"/>
+                        </a:rPr>
+                        <a:t>complementary</a:t>
+                      </a:r>
+                      <a:endParaRPr lang="en-US" sz="1800" dirty="0">
+                        <a:latin typeface="Pretendard" charset="0"/>
+                        <a:ea typeface="Pretendard" charset="0"/>
+                        <a:cs typeface="Pretendard" charset="0"/>
+                      </a:endParaRPr>
+                    </a:p>
+                  </a:txBody>
+                  <a:tcPr marL="54864" marR="54864" marT="36576" marB="36576" anchor="ctr">
+                    <a:lnL w="12700" cap="flat" cmpd="sng" algn="ctr">
+                      <a:solidFill>
+                        <a:srgbClr val="D4D6DB"/>
+                      </a:solidFill>
+                      <a:prstDash val="solid"/>
+                      <a:round/>
+                      <a:headEnd type="none" w="med" len="med"/>
+                      <a:tailEnd type="none" w="med" len="med"/>
+                    </a:lnL>
+                    <a:lnR w="12700" cap="flat" cmpd="sng" algn="ctr">
+                      <a:solidFill>
+                        <a:srgbClr val="D4D6DB"/>
+                      </a:solidFill>
+                      <a:prstDash val="solid"/>
+                      <a:round/>
+                      <a:headEnd type="none" w="med" len="med"/>
+                      <a:tailEnd type="none" w="med" len="med"/>
+                    </a:lnR>
+                    <a:lnT w="12700" cap="flat" cmpd="sng" algn="ctr">
+                      <a:solidFill>
+                        <a:srgbClr val="D4D6DB"/>
+                      </a:solidFill>
+                      <a:prstDash val="solid"/>
+                      <a:round/>
+                      <a:headEnd type="none" w="med" len="med"/>
+                      <a:tailEnd type="none" w="med" len="med"/>
+                    </a:lnT>
+                    <a:lnB w="12700" cap="flat" cmpd="sng" algn="ctr">
+                      <a:solidFill>
+                        <a:srgbClr val="D4D6DB"/>
+                      </a:solidFill>
+                      <a:prstDash val="solid"/>
+                      <a:round/>
+                      <a:headEnd type="none" w="med" len="med"/>
+                      <a:tailEnd type="none" w="med" len="med"/>
+                    </a:lnB>
+                    <a:solidFill>
+                      <a:srgbClr val="FFFFFF">
+                        <a:alpha val="80000"/>
+                      </a:srgbClr>
+                    </a:solidFill>
+                  </a:tcPr>
+                </a:tc>
+                <a:tc>
+                  <a:txBody>
+                    <a:bodyPr/>
+                    <a:lstStyle/>
+                    <a:p>
+                      <a:pPr algn="l" indent="0" marL="0">
+                        <a:buNone/>
+                      </a:pPr>
+                      <a:r>
+                        <a:rPr lang="en-US" sz="1800" dirty="0">
+                          <a:solidFill>
+                            <a:srgbClr val="111827"/>
+                          </a:solidFill>
+                          <a:latin typeface="Pretendard" pitchFamily="34" charset="0"/>
+                          <a:ea typeface="Pretendard" pitchFamily="34" charset="-122"/>
+                          <a:cs typeface="Pretendard" pitchFamily="34" charset="-120"/>
+                        </a:rPr>
+                        <a:t>Business deck rhythm with a warm opposing accent</a:t>
+                      </a:r>
+                      <a:endParaRPr lang="en-US" sz="1800" dirty="0">
+                        <a:latin typeface="Pretendard" charset="0"/>
+                        <a:ea typeface="Pretendard" charset="0"/>
+                        <a:cs typeface="Pretendard" charset="0"/>
+                      </a:endParaRPr>
+                    </a:p>
+                  </a:txBody>
+                  <a:tcPr marL="54864" marR="54864" marT="36576" marB="36576" anchor="ctr">
+                    <a:lnL w="12700" cap="flat" cmpd="sng" algn="ctr">
+                      <a:solidFill>
+                        <a:srgbClr val="D4D6DB"/>
+                      </a:solidFill>
+                      <a:prstDash val="solid"/>
+                      <a:round/>
+                      <a:headEnd type="none" w="med" len="med"/>
+                      <a:tailEnd type="none" w="med" len="med"/>
+                    </a:lnL>
+                    <a:lnR w="12700" cap="flat" cmpd="sng" algn="ctr">
+                      <a:solidFill>
+                        <a:srgbClr val="D4D6DB"/>
+                      </a:solidFill>
+                      <a:prstDash val="solid"/>
+                      <a:round/>
+                      <a:headEnd type="none" w="med" len="med"/>
+                      <a:tailEnd type="none" w="med" len="med"/>
+                    </a:lnR>
+                    <a:lnT w="12700" cap="flat" cmpd="sng" algn="ctr">
+                      <a:solidFill>
+                        <a:srgbClr val="D4D6DB"/>
+                      </a:solidFill>
+                      <a:prstDash val="solid"/>
+                      <a:round/>
+                      <a:headEnd type="none" w="med" len="med"/>
+                      <a:tailEnd type="none" w="med" len="med"/>
+                    </a:lnT>
+                    <a:lnB w="12700" cap="flat" cmpd="sng" algn="ctr">
+                      <a:solidFill>
+                        <a:srgbClr val="D4D6DB"/>
+                      </a:solidFill>
+                      <a:prstDash val="solid"/>
+                      <a:round/>
+                      <a:headEnd type="none" w="med" len="med"/>
+                      <a:tailEnd type="none" w="med" len="med"/>
+                    </a:lnB>
+                    <a:solidFill>
+                      <a:srgbClr val="FFFFFF">
+                        <a:alpha val="80000"/>
+                      </a:srgbClr>
+                    </a:solidFill>
+                  </a:tcPr>
+                </a:tc>
+              </a:tr>
+              <a:tr h="905256">
+                <a:tc>
+                  <a:txBody>
+                    <a:bodyPr/>
+                    <a:lstStyle/>
+                    <a:p>
+                      <a:pPr algn="l" indent="0" marL="0">
+                        <a:buNone/>
+                      </a:pPr>
+                      <a:r>
+                        <a:rPr lang="en-US" sz="1800" b="1" dirty="0">
+                          <a:solidFill>
+                            <a:srgbClr val="111827"/>
+                          </a:solidFill>
+                          <a:latin typeface="Pretendard" pitchFamily="34" charset="0"/>
+                          <a:ea typeface="Pretendard" pitchFamily="34" charset="-122"/>
+                          <a:cs typeface="Pretendard" pitchFamily="34" charset="-120"/>
+                        </a:rPr>
+                        <a:t>technical</a:t>
+                      </a:r>
+                      <a:endParaRPr lang="en-US" sz="1800" dirty="0">
+                        <a:latin typeface="Pretendard" charset="0"/>
+                        <a:ea typeface="Pretendard" charset="0"/>
+                        <a:cs typeface="Pretendard" charset="0"/>
+                      </a:endParaRPr>
+                    </a:p>
+                  </a:txBody>
+                  <a:tcPr marL="54864" marR="54864" marT="36576" marB="36576" anchor="ctr">
+                    <a:lnL w="12700" cap="flat" cmpd="sng" algn="ctr">
+                      <a:solidFill>
+                        <a:srgbClr val="D4D6DB"/>
+                      </a:solidFill>
+                      <a:prstDash val="solid"/>
+                      <a:round/>
+                      <a:headEnd type="none" w="med" len="med"/>
+                      <a:tailEnd type="none" w="med" len="med"/>
+                    </a:lnL>
+                    <a:lnR w="12700" cap="flat" cmpd="sng" algn="ctr">
+                      <a:solidFill>
+                        <a:srgbClr val="D4D6DB"/>
+                      </a:solidFill>
+                      <a:prstDash val="solid"/>
+                      <a:round/>
+                      <a:headEnd type="none" w="med" len="med"/>
+                      <a:tailEnd type="none" w="med" len="med"/>
+                    </a:lnR>
+                    <a:lnT w="12700" cap="flat" cmpd="sng" algn="ctr">
+                      <a:solidFill>
+                        <a:srgbClr val="D4D6DB"/>
+                      </a:solidFill>
+                      <a:prstDash val="solid"/>
+                      <a:round/>
+                      <a:headEnd type="none" w="med" len="med"/>
+                      <a:tailEnd type="none" w="med" len="med"/>
+                    </a:lnT>
+                    <a:lnB w="12700" cap="flat" cmpd="sng" algn="ctr">
+                      <a:solidFill>
+                        <a:srgbClr val="D4D6DB"/>
+                      </a:solidFill>
+                      <a:prstDash val="solid"/>
+                      <a:round/>
+                      <a:headEnd type="none" w="med" len="med"/>
+                      <a:tailEnd type="none" w="med" len="med"/>
+                    </a:lnB>
+                  </a:tcPr>
+                </a:tc>
+                <a:tc>
+                  <a:txBody>
+                    <a:bodyPr/>
+                    <a:lstStyle/>
+                    <a:p>
+                      <a:pPr algn="l" indent="0" marL="0">
+                        <a:buNone/>
+                      </a:pPr>
+                      <a:r>
+                        <a:rPr lang="en-US" sz="1800" dirty="0">
+                          <a:solidFill>
+                            <a:srgbClr val="111827"/>
+                          </a:solidFill>
+                          <a:latin typeface="Pretendard" pitchFamily="34" charset="0"/>
+                          <a:ea typeface="Pretendard" pitchFamily="34" charset="-122"/>
+                          <a:cs typeface="Pretendard" pitchFamily="34" charset="-120"/>
+                        </a:rPr>
+                        <a:t>#16A34A</a:t>
+                      </a:r>
+                      <a:endParaRPr lang="en-US" sz="1800" dirty="0">
+                        <a:latin typeface="Pretendard" charset="0"/>
+                        <a:ea typeface="Pretendard" charset="0"/>
+                        <a:cs typeface="Pretendard" charset="0"/>
+                      </a:endParaRPr>
+                    </a:p>
+                  </a:txBody>
+                  <a:tcPr marL="54864" marR="54864" marT="36576" marB="36576" anchor="ctr">
+                    <a:lnL w="12700" cap="flat" cmpd="sng" algn="ctr">
+                      <a:solidFill>
+                        <a:srgbClr val="D4D6DB"/>
+                      </a:solidFill>
+                      <a:prstDash val="solid"/>
+                      <a:round/>
+                      <a:headEnd type="none" w="med" len="med"/>
+                      <a:tailEnd type="none" w="med" len="med"/>
+                    </a:lnL>
+                    <a:lnR w="12700" cap="flat" cmpd="sng" algn="ctr">
+                      <a:solidFill>
+                        <a:srgbClr val="D4D6DB"/>
+                      </a:solidFill>
+                      <a:prstDash val="solid"/>
+                      <a:round/>
+                      <a:headEnd type="none" w="med" len="med"/>
+                      <a:tailEnd type="none" w="med" len="med"/>
+                    </a:lnR>
+                    <a:lnT w="12700" cap="flat" cmpd="sng" algn="ctr">
+                      <a:solidFill>
+                        <a:srgbClr val="D4D6DB"/>
+                      </a:solidFill>
+                      <a:prstDash val="solid"/>
+                      <a:round/>
+                      <a:headEnd type="none" w="med" len="med"/>
+                      <a:tailEnd type="none" w="med" len="med"/>
+                    </a:lnT>
+                    <a:lnB w="12700" cap="flat" cmpd="sng" algn="ctr">
+                      <a:solidFill>
+                        <a:srgbClr val="D4D6DB"/>
+                      </a:solidFill>
+                      <a:prstDash val="solid"/>
+                      <a:round/>
+                      <a:headEnd type="none" w="med" len="med"/>
+                      <a:tailEnd type="none" w="med" len="med"/>
+                    </a:lnB>
+                  </a:tcPr>
+                </a:tc>
+                <a:tc>
+                  <a:txBody>
+                    <a:bodyPr/>
+                    <a:lstStyle/>
+                    <a:p>
+                      <a:pPr algn="l" indent="0" marL="0">
+                        <a:buNone/>
+                      </a:pPr>
+                      <a:r>
+                        <a:rPr lang="en-US" sz="1800" dirty="0">
+                          <a:solidFill>
+                            <a:srgbClr val="111827"/>
+                          </a:solidFill>
+                          <a:latin typeface="Pretendard" pitchFamily="34" charset="0"/>
+                          <a:ea typeface="Pretendard" pitchFamily="34" charset="-122"/>
+                          <a:cs typeface="Pretendard" pitchFamily="34" charset="-120"/>
+                        </a:rPr>
+                        <a:t>monochromatic</a:t>
+                      </a:r>
+                      <a:endParaRPr lang="en-US" sz="1800" dirty="0">
+                        <a:latin typeface="Pretendard" charset="0"/>
+                        <a:ea typeface="Pretendard" charset="0"/>
+                        <a:cs typeface="Pretendard" charset="0"/>
+                      </a:endParaRPr>
+                    </a:p>
+                  </a:txBody>
+                  <a:tcPr marL="54864" marR="54864" marT="36576" marB="36576" anchor="ctr">
+                    <a:lnL w="12700" cap="flat" cmpd="sng" algn="ctr">
+                      <a:solidFill>
+                        <a:srgbClr val="D4D6DB"/>
+                      </a:solidFill>
+                      <a:prstDash val="solid"/>
+                      <a:round/>
+                      <a:headEnd type="none" w="med" len="med"/>
+                      <a:tailEnd type="none" w="med" len="med"/>
+                    </a:lnL>
+                    <a:lnR w="12700" cap="flat" cmpd="sng" algn="ctr">
+                      <a:solidFill>
+                        <a:srgbClr val="D4D6DB"/>
+                      </a:solidFill>
+                      <a:prstDash val="solid"/>
+                      <a:round/>
+                      <a:headEnd type="none" w="med" len="med"/>
+                      <a:tailEnd type="none" w="med" len="med"/>
+                    </a:lnR>
+                    <a:lnT w="12700" cap="flat" cmpd="sng" algn="ctr">
+                      <a:solidFill>
+                        <a:srgbClr val="D4D6DB"/>
+                      </a:solidFill>
+                      <a:prstDash val="solid"/>
+                      <a:round/>
+                      <a:headEnd type="none" w="med" len="med"/>
+                      <a:tailEnd type="none" w="med" len="med"/>
+                    </a:lnT>
+                    <a:lnB w="12700" cap="flat" cmpd="sng" algn="ctr">
+                      <a:solidFill>
+                        <a:srgbClr val="D4D6DB"/>
+                      </a:solidFill>
+                      <a:prstDash val="solid"/>
+                      <a:round/>
+                      <a:headEnd type="none" w="med" len="med"/>
+                      <a:tailEnd type="none" w="med" len="med"/>
+                    </a:lnB>
+                  </a:tcPr>
+                </a:tc>
+                <a:tc>
+                  <a:txBody>
+                    <a:bodyPr/>
+                    <a:lstStyle/>
+                    <a:p>
+                      <a:pPr algn="l" indent="0" marL="0">
+                        <a:buNone/>
+                      </a:pPr>
+                      <a:r>
+                        <a:rPr lang="en-US" sz="1800" dirty="0">
+                          <a:solidFill>
+                            <a:srgbClr val="111827"/>
+                          </a:solidFill>
+                          <a:latin typeface="Pretendard" pitchFamily="34" charset="0"/>
+                          <a:ea typeface="Pretendard" pitchFamily="34" charset="-122"/>
+                          <a:cs typeface="Pretendard" pitchFamily="34" charset="-120"/>
+                        </a:rPr>
+                        <a:t>Engineering/validation tone with brightness steps</a:t>
+                      </a:r>
+                      <a:endParaRPr lang="en-US" sz="1800" dirty="0">
+                        <a:latin typeface="Pretendard" charset="0"/>
+                        <a:ea typeface="Pretendard" charset="0"/>
+                        <a:cs typeface="Pretendard" charset="0"/>
+                      </a:endParaRPr>
+                    </a:p>
+                  </a:txBody>
+                  <a:tcPr marL="54864" marR="54864" marT="36576" marB="36576" anchor="ctr">
+                    <a:lnL w="12700" cap="flat" cmpd="sng" algn="ctr">
+                      <a:solidFill>
+                        <a:srgbClr val="D4D6DB"/>
+                      </a:solidFill>
+                      <a:prstDash val="solid"/>
+                      <a:round/>
+                      <a:headEnd type="none" w="med" len="med"/>
+                      <a:tailEnd type="none" w="med" len="med"/>
+                    </a:lnL>
+                    <a:lnR w="12700" cap="flat" cmpd="sng" algn="ctr">
+                      <a:solidFill>
+                        <a:srgbClr val="D4D6DB"/>
+                      </a:solidFill>
+                      <a:prstDash val="solid"/>
+                      <a:round/>
+                      <a:headEnd type="none" w="med" len="med"/>
+                      <a:tailEnd type="none" w="med" len="med"/>
+                    </a:lnR>
+                    <a:lnT w="12700" cap="flat" cmpd="sng" algn="ctr">
+                      <a:solidFill>
+                        <a:srgbClr val="D4D6DB"/>
+                      </a:solidFill>
+                      <a:prstDash val="solid"/>
+                      <a:round/>
+                      <a:headEnd type="none" w="med" len="med"/>
+                      <a:tailEnd type="none" w="med" len="med"/>
+                    </a:lnT>
+                    <a:lnB w="12700" cap="flat" cmpd="sng" algn="ctr">
+                      <a:solidFill>
+                        <a:srgbClr val="D4D6DB"/>
+                      </a:solidFill>
+                      <a:prstDash val="solid"/>
+                      <a:round/>
+                      <a:headEnd type="none" w="med" len="med"/>
+                      <a:tailEnd type="none" w="med" len="med"/>
+                    </a:lnB>
+                  </a:tcPr>
+                </a:tc>
+              </a:tr>
+              <a:tr h="905256">
+                <a:tc>
+                  <a:txBody>
+                    <a:bodyPr/>
+                    <a:lstStyle/>
+                    <a:p>
+                      <a:pPr algn="l" indent="0" marL="0">
+                        <a:buNone/>
+                      </a:pPr>
+                      <a:r>
+                        <a:rPr lang="en-US" sz="1800" b="1" dirty="0">
+                          <a:solidFill>
+                            <a:srgbClr val="111827"/>
+                          </a:solidFill>
+                          <a:latin typeface="Pretendard" pitchFamily="34" charset="0"/>
+                          <a:ea typeface="Pretendard" pitchFamily="34" charset="-122"/>
+                          <a:cs typeface="Pretendard" pitchFamily="34" charset="-120"/>
+                        </a:rPr>
+                        <a:t>executive</a:t>
+                      </a:r>
+                      <a:endParaRPr lang="en-US" sz="1800" dirty="0">
+                        <a:latin typeface="Pretendard" charset="0"/>
+                        <a:ea typeface="Pretendard" charset="0"/>
+                        <a:cs typeface="Pretendard" charset="0"/>
+                      </a:endParaRPr>
+                    </a:p>
+                  </a:txBody>
+                  <a:tcPr marL="54864" marR="54864" marT="36576" marB="36576" anchor="ctr">
+                    <a:lnL w="12700" cap="flat" cmpd="sng" algn="ctr">
+                      <a:solidFill>
+                        <a:srgbClr val="D4D6DB"/>
+                      </a:solidFill>
+                      <a:prstDash val="solid"/>
+                      <a:round/>
+                      <a:headEnd type="none" w="med" len="med"/>
+                      <a:tailEnd type="none" w="med" len="med"/>
+                    </a:lnL>
+                    <a:lnR w="12700" cap="flat" cmpd="sng" algn="ctr">
+                      <a:solidFill>
+                        <a:srgbClr val="D4D6DB"/>
+                      </a:solidFill>
+                      <a:prstDash val="solid"/>
+                      <a:round/>
+                      <a:headEnd type="none" w="med" len="med"/>
+                      <a:tailEnd type="none" w="med" len="med"/>
+                    </a:lnR>
+                    <a:lnT w="12700" cap="flat" cmpd="sng" algn="ctr">
+                      <a:solidFill>
+                        <a:srgbClr val="D4D6DB"/>
+                      </a:solidFill>
+                      <a:prstDash val="solid"/>
+                      <a:round/>
+                      <a:headEnd type="none" w="med" len="med"/>
+                      <a:tailEnd type="none" w="med" len="med"/>
+                    </a:lnT>
+                    <a:lnB w="12700" cap="flat" cmpd="sng" algn="ctr">
+                      <a:solidFill>
+                        <a:srgbClr val="D4D6DB"/>
+                      </a:solidFill>
+                      <a:prstDash val="solid"/>
+                      <a:round/>
+                      <a:headEnd type="none" w="med" len="med"/>
+                      <a:tailEnd type="none" w="med" len="med"/>
+                    </a:lnB>
+                    <a:solidFill>
+                      <a:srgbClr val="FFFFFF">
+                        <a:alpha val="80000"/>
+                      </a:srgbClr>
+                    </a:solidFill>
+                  </a:tcPr>
+                </a:tc>
+                <a:tc>
+                  <a:txBody>
+                    <a:bodyPr/>
+                    <a:lstStyle/>
+                    <a:p>
+                      <a:pPr algn="l" indent="0" marL="0">
+                        <a:buNone/>
+                      </a:pPr>
+                      <a:r>
+                        <a:rPr lang="en-US" sz="1800" dirty="0">
+                          <a:solidFill>
+                            <a:srgbClr val="111827"/>
+                          </a:solidFill>
+                          <a:latin typeface="Pretendard" pitchFamily="34" charset="0"/>
+                          <a:ea typeface="Pretendard" pitchFamily="34" charset="-122"/>
+                          <a:cs typeface="Pretendard" pitchFamily="34" charset="-120"/>
+                        </a:rPr>
+                        <a:t>#E11D48</a:t>
+                      </a:r>
+                      <a:endParaRPr lang="en-US" sz="1800" dirty="0">
+                        <a:latin typeface="Pretendard" charset="0"/>
+                        <a:ea typeface="Pretendard" charset="0"/>
+                        <a:cs typeface="Pretendard" charset="0"/>
+                      </a:endParaRPr>
+                    </a:p>
+                  </a:txBody>
+                  <a:tcPr marL="54864" marR="54864" marT="36576" marB="36576" anchor="ctr">
+                    <a:lnL w="12700" cap="flat" cmpd="sng" algn="ctr">
+                      <a:solidFill>
+                        <a:srgbClr val="D4D6DB"/>
+                      </a:solidFill>
+                      <a:prstDash val="solid"/>
+                      <a:round/>
+                      <a:headEnd type="none" w="med" len="med"/>
+                      <a:tailEnd type="none" w="med" len="med"/>
+                    </a:lnL>
+                    <a:lnR w="12700" cap="flat" cmpd="sng" algn="ctr">
+                      <a:solidFill>
+                        <a:srgbClr val="D4D6DB"/>
+                      </a:solidFill>
+                      <a:prstDash val="solid"/>
+                      <a:round/>
+                      <a:headEnd type="none" w="med" len="med"/>
+                      <a:tailEnd type="none" w="med" len="med"/>
+                    </a:lnR>
+                    <a:lnT w="12700" cap="flat" cmpd="sng" algn="ctr">
+                      <a:solidFill>
+                        <a:srgbClr val="D4D6DB"/>
+                      </a:solidFill>
+                      <a:prstDash val="solid"/>
+                      <a:round/>
+                      <a:headEnd type="none" w="med" len="med"/>
+                      <a:tailEnd type="none" w="med" len="med"/>
+                    </a:lnT>
+                    <a:lnB w="12700" cap="flat" cmpd="sng" algn="ctr">
+                      <a:solidFill>
+                        <a:srgbClr val="D4D6DB"/>
+                      </a:solidFill>
+                      <a:prstDash val="solid"/>
+                      <a:round/>
+                      <a:headEnd type="none" w="med" len="med"/>
+                      <a:tailEnd type="none" w="med" len="med"/>
+                    </a:lnB>
+                    <a:solidFill>
+                      <a:srgbClr val="FFFFFF">
+                        <a:alpha val="80000"/>
+                      </a:srgbClr>
+                    </a:solidFill>
+                  </a:tcPr>
+                </a:tc>
+                <a:tc>
+                  <a:txBody>
+                    <a:bodyPr/>
+                    <a:lstStyle/>
+                    <a:p>
+                      <a:pPr algn="l" indent="0" marL="0">
+                        <a:buNone/>
+                      </a:pPr>
+                      <a:r>
+                        <a:rPr lang="en-US" sz="1800" dirty="0">
+                          <a:solidFill>
+                            <a:srgbClr val="111827"/>
+                          </a:solidFill>
+                          <a:latin typeface="Pretendard" pitchFamily="34" charset="0"/>
+                          <a:ea typeface="Pretendard" pitchFamily="34" charset="-122"/>
+                          <a:cs typeface="Pretendard" pitchFamily="34" charset="-120"/>
+                        </a:rPr>
+                        <a:t>complementary</a:t>
+                      </a:r>
+                      <a:endParaRPr lang="en-US" sz="1800" dirty="0">
+                        <a:latin typeface="Pretendard" charset="0"/>
+                        <a:ea typeface="Pretendard" charset="0"/>
+                        <a:cs typeface="Pretendard" charset="0"/>
+                      </a:endParaRPr>
+                    </a:p>
+                  </a:txBody>
+                  <a:tcPr marL="54864" marR="54864" marT="36576" marB="36576" anchor="ctr">
+                    <a:lnL w="12700" cap="flat" cmpd="sng" algn="ctr">
+                      <a:solidFill>
+                        <a:srgbClr val="D4D6DB"/>
+                      </a:solidFill>
+                      <a:prstDash val="solid"/>
+                      <a:round/>
+                      <a:headEnd type="none" w="med" len="med"/>
+                      <a:tailEnd type="none" w="med" len="med"/>
+                    </a:lnL>
+                    <a:lnR w="12700" cap="flat" cmpd="sng" algn="ctr">
+                      <a:solidFill>
+                        <a:srgbClr val="D4D6DB"/>
+                      </a:solidFill>
+                      <a:prstDash val="solid"/>
+                      <a:round/>
+                      <a:headEnd type="none" w="med" len="med"/>
+                      <a:tailEnd type="none" w="med" len="med"/>
+                    </a:lnR>
+                    <a:lnT w="12700" cap="flat" cmpd="sng" algn="ctr">
+                      <a:solidFill>
+                        <a:srgbClr val="D4D6DB"/>
+                      </a:solidFill>
+                      <a:prstDash val="solid"/>
+                      <a:round/>
+                      <a:headEnd type="none" w="med" len="med"/>
+                      <a:tailEnd type="none" w="med" len="med"/>
+                    </a:lnT>
+                    <a:lnB w="12700" cap="flat" cmpd="sng" algn="ctr">
+                      <a:solidFill>
+                        <a:srgbClr val="D4D6DB"/>
+                      </a:solidFill>
+                      <a:prstDash val="solid"/>
+                      <a:round/>
+                      <a:headEnd type="none" w="med" len="med"/>
+                      <a:tailEnd type="none" w="med" len="med"/>
+                    </a:lnB>
+                    <a:solidFill>
+                      <a:srgbClr val="FFFFFF">
+                        <a:alpha val="80000"/>
+                      </a:srgbClr>
+                    </a:solidFill>
+                  </a:tcPr>
+                </a:tc>
+                <a:tc>
+                  <a:txBody>
+                    <a:bodyPr/>
+                    <a:lstStyle/>
+                    <a:p>
+                      <a:pPr algn="l" indent="0" marL="0">
+                        <a:buNone/>
+                      </a:pPr>
+                      <a:r>
+                        <a:rPr lang="en-US" sz="1800" dirty="0">
+                          <a:solidFill>
+                            <a:srgbClr val="111827"/>
+                          </a:solidFill>
+                          <a:latin typeface="Pretendard" pitchFamily="34" charset="0"/>
+                          <a:ea typeface="Pretendard" pitchFamily="34" charset="-122"/>
+                          <a:cs typeface="Pretendard" pitchFamily="34" charset="-120"/>
+                        </a:rPr>
+                        <a:t>Dark proof deck with high-contrast emphasis</a:t>
+                      </a:r>
+                      <a:endParaRPr lang="en-US" sz="1800" dirty="0">
+                        <a:latin typeface="Pretendard" charset="0"/>
+                        <a:ea typeface="Pretendard" charset="0"/>
+                        <a:cs typeface="Pretendard" charset="0"/>
+                      </a:endParaRPr>
+                    </a:p>
+                  </a:txBody>
+                  <a:tcPr marL="54864" marR="54864" marT="36576" marB="36576" anchor="ctr">
+                    <a:lnL w="12700" cap="flat" cmpd="sng" algn="ctr">
+                      <a:solidFill>
+                        <a:srgbClr val="D4D6DB"/>
+                      </a:solidFill>
+                      <a:prstDash val="solid"/>
+                      <a:round/>
+                      <a:headEnd type="none" w="med" len="med"/>
+                      <a:tailEnd type="none" w="med" len="med"/>
+                    </a:lnL>
+                    <a:lnR w="12700" cap="flat" cmpd="sng" algn="ctr">
+                      <a:solidFill>
+                        <a:srgbClr val="D4D6DB"/>
+                      </a:solidFill>
+                      <a:prstDash val="solid"/>
+                      <a:round/>
+                      <a:headEnd type="none" w="med" len="med"/>
+                      <a:tailEnd type="none" w="med" len="med"/>
+                    </a:lnR>
+                    <a:lnT w="12700" cap="flat" cmpd="sng" algn="ctr">
+                      <a:solidFill>
+                        <a:srgbClr val="D4D6DB"/>
+                      </a:solidFill>
+                      <a:prstDash val="solid"/>
+                      <a:round/>
+                      <a:headEnd type="none" w="med" len="med"/>
+                      <a:tailEnd type="none" w="med" len="med"/>
+                    </a:lnT>
+                    <a:lnB w="12700" cap="flat" cmpd="sng" algn="ctr">
+                      <a:solidFill>
+                        <a:srgbClr val="D4D6DB"/>
+                      </a:solidFill>
+                      <a:prstDash val="solid"/>
+                      <a:round/>
+                      <a:headEnd type="none" w="med" len="med"/>
+                      <a:tailEnd type="none" w="med" len="med"/>
+                    </a:lnB>
+                    <a:solidFill>
+                      <a:srgbClr val="FFFFFF">
+                        <a:alpha val="80000"/>
+                      </a:srgbClr>
+                    </a:solidFill>
+                  </a:tcPr>
+                </a:tc>
+              </a:tr>
+            </a:tbl>
+          </a:graphicData>
+        </a:graphic>
+      </p:graphicFrame>
+    </p:spTree>
+  </p:cSld>
+  <p:clrMapOvr>
+    <a:masterClrMapping/>
+  </p:clrMapOvr>
+</p:sld>
+</file>
+
+<file path=ppt/slides/slide12.xml><?xml version="1.0" encoding="utf-8"?>
+<p:sld xmlns:a="http://schemas.openxmlformats.org/drawingml/2006/main" xmlns:r="http://schemas.openxmlformats.org/officeDocument/2006/relationships" xmlns:p="http://schemas.openxmlformats.org/presentationml/2006/main">
+  <p:cSld name="Slide 12">
+    <p:bg>
+      <p:bgPr>
+        <a:solidFill>
+          <a:srgbClr val="FFFFFF"/>
+        </a:solidFill>
+      </p:bgPr>
+    </p:bg>
+    <p:spTree>
+      <p:nvGrpSpPr>
+        <p:cNvPr id="1" name=""/>
+        <p:cNvGrpSpPr/>
+        <p:nvPr/>
+      </p:nvGrpSpPr>
+      <p:grpSpPr>
+        <a:xfrm>
+          <a:off x="0" y="0"/>
+          <a:ext cx="0" cy="0"/>
+          <a:chOff x="0" y="0"/>
+          <a:chExt cx="0" cy="0"/>
+        </a:xfrm>
+      </p:grpSpPr>
+      <p:sp>
+        <p:nvSpPr>
+          <p:cNvPr id="2" name="Shape 0"/>
+          <p:cNvSpPr/>
+          <p:nvPr/>
+        </p:nvSpPr>
+        <p:spPr>
+          <a:xfrm>
+            <a:off x="749808" y="713232"/>
+            <a:ext cx="2194505" cy="0"/>
+          </a:xfrm>
+          <a:prstGeom prst="line">
+            <a:avLst/>
+          </a:prstGeom>
+          <a:noFill/>
+          <a:ln w="12700">
+            <a:solidFill>
+              <a:srgbClr val="111827">
+                <a:alpha val="82000"/>
+              </a:srgbClr>
+            </a:solidFill>
+            <a:prstDash val="solid"/>
+          </a:ln>
+        </p:spPr>
+      </p:sp>
+      <p:sp>
+        <p:nvSpPr>
+          <p:cNvPr id="3" name="Shape 1"/>
+          <p:cNvSpPr/>
+          <p:nvPr/>
+        </p:nvSpPr>
+        <p:spPr>
+          <a:xfrm>
+            <a:off x="9338767" y="6199632"/>
+            <a:ext cx="2103120" cy="0"/>
+          </a:xfrm>
+          <a:prstGeom prst="line">
+            <a:avLst/>
+          </a:prstGeom>
+          <a:noFill/>
+          <a:ln w="12700">
+            <a:solidFill>
+              <a:srgbClr val="D4D6DB">
+                <a:alpha val="82000"/>
+              </a:srgbClr>
+            </a:solidFill>
+            <a:prstDash val="solid"/>
+          </a:ln>
+        </p:spPr>
+      </p:sp>
+      <p:pic>
+        <p:nvPicPr>
+          <p:cNvPr id="4" name="Image 0" descr="preencoded.png">    </p:cNvPr>
+          <p:cNvPicPr>
+            <a:picLocks noChangeAspect="1"/>
+          </p:cNvPicPr>
+          <p:nvPr/>
+        </p:nvPicPr>
+        <p:blipFill>
+          <a:blip r:embed="rId1">
+            <a:extLst>
+              <a:ext uri="{96DAC541-7B7A-43D3-8B79-37D633B846F1}">
+                <asvg:svgBlip xmlns:asvg="http://schemas.microsoft.com/office/drawing/2016/SVG/main" r:embed="rId2"/>
+              </a:ext>
+            </a:extLst>
+          </a:blip>
+          <a:stretch>
+            <a:fillRect/>
+          </a:stretch>
+        </p:blipFill>
+        <p:spPr>
+          <a:xfrm>
+            <a:off x="914400" y="1865376"/>
+            <a:ext cx="10241280" cy="1024128"/>
           </a:xfrm>
           <a:prstGeom prst="rect">
             <a:avLst/>
@@ -2320,7 +6055,7 @@
       </p:pic>
       <p:pic>
         <p:nvPicPr>
-          <p:cNvPr id="8" name="Image 1" descr="preencoded.png">    </p:cNvPr>
+          <p:cNvPr id="5" name="Image 1" descr="preencoded.png">    </p:cNvPr>
           <p:cNvPicPr>
             <a:picLocks noChangeAspect="1"/>
           </p:cNvPicPr>
@@ -2340,8 +6075,8 @@
         </p:blipFill>
         <p:spPr>
           <a:xfrm>
-            <a:off x="914400" y="2560320"/>
-            <a:ext cx="10241280" cy="868680"/>
+            <a:off x="914400" y="3191256"/>
+            <a:ext cx="10241280" cy="1024128"/>
           </a:xfrm>
           <a:prstGeom prst="rect">
             <a:avLst/>
@@ -2350,7 +6085,7 @@
       </p:pic>
       <p:pic>
         <p:nvPicPr>
-          <p:cNvPr id="9" name="Image 2" descr="preencoded.png">    </p:cNvPr>
+          <p:cNvPr id="6" name="Image 2" descr="preencoded.png">    </p:cNvPr>
           <p:cNvPicPr>
             <a:picLocks noChangeAspect="1"/>
           </p:cNvPicPr>
@@ -2370,8 +6105,8 @@
         </p:blipFill>
         <p:spPr>
           <a:xfrm>
-            <a:off x="914400" y="3703320"/>
-            <a:ext cx="10241280" cy="868680"/>
+            <a:off x="914400" y="4507992"/>
+            <a:ext cx="10241280" cy="1024128"/>
           </a:xfrm>
           <a:prstGeom prst="rect">
             <a:avLst/>
@@ -2380,7 +6115,117 @@
       </p:pic>
       <p:sp>
         <p:nvSpPr>
-          <p:cNvPr id="10" name="Text 5"/>
+          <p:cNvPr id="7" name="Shape 2"/>
+          <p:cNvSpPr/>
+          <p:nvPr/>
+        </p:nvSpPr>
+        <p:spPr>
+          <a:xfrm>
+            <a:off x="786384" y="1956816"/>
+            <a:ext cx="32004" cy="3483864"/>
+          </a:xfrm>
+          <a:prstGeom prst="rect">
+            <a:avLst/>
+          </a:prstGeom>
+          <a:solidFill>
+            <a:srgbClr val="314163">
+              <a:alpha val="80000"/>
+            </a:srgbClr>
+          </a:solidFill>
+          <a:ln w="12700">
+            <a:solidFill>
+              <a:srgbClr val="314163">
+                <a:alpha val="0"/>
+              </a:srgbClr>
+            </a:solidFill>
+            <a:prstDash val="solid"/>
+          </a:ln>
+        </p:spPr>
+      </p:sp>
+      <p:sp>
+        <p:nvSpPr>
+          <p:cNvPr id="8" name="Shape 3"/>
+          <p:cNvSpPr/>
+          <p:nvPr/>
+        </p:nvSpPr>
+        <p:spPr>
+          <a:xfrm>
+            <a:off x="914400" y="1865376"/>
+            <a:ext cx="73152" cy="1024128"/>
+          </a:xfrm>
+          <a:prstGeom prst="rect">
+            <a:avLst/>
+          </a:prstGeom>
+          <a:solidFill>
+            <a:srgbClr val="111827"/>
+          </a:solidFill>
+          <a:ln w="12700">
+            <a:solidFill>
+              <a:srgbClr val="111827">
+                <a:alpha val="0"/>
+              </a:srgbClr>
+            </a:solidFill>
+            <a:prstDash val="solid"/>
+          </a:ln>
+        </p:spPr>
+      </p:sp>
+      <p:sp>
+        <p:nvSpPr>
+          <p:cNvPr id="9" name="Shape 4"/>
+          <p:cNvSpPr/>
+          <p:nvPr/>
+        </p:nvSpPr>
+        <p:spPr>
+          <a:xfrm>
+            <a:off x="914400" y="3191256"/>
+            <a:ext cx="73152" cy="1024128"/>
+          </a:xfrm>
+          <a:prstGeom prst="rect">
+            <a:avLst/>
+          </a:prstGeom>
+          <a:solidFill>
+            <a:srgbClr val="314163"/>
+          </a:solidFill>
+          <a:ln w="12700">
+            <a:solidFill>
+              <a:srgbClr val="314163">
+                <a:alpha val="0"/>
+              </a:srgbClr>
+            </a:solidFill>
+            <a:prstDash val="solid"/>
+          </a:ln>
+        </p:spPr>
+      </p:sp>
+      <p:sp>
+        <p:nvSpPr>
+          <p:cNvPr id="10" name="Shape 5"/>
+          <p:cNvSpPr/>
+          <p:nvPr/>
+        </p:nvSpPr>
+        <p:spPr>
+          <a:xfrm>
+            <a:off x="914400" y="4507992"/>
+            <a:ext cx="73152" cy="1024128"/>
+          </a:xfrm>
+          <a:prstGeom prst="rect">
+            <a:avLst/>
+          </a:prstGeom>
+          <a:solidFill>
+            <a:srgbClr val="111827"/>
+          </a:solidFill>
+          <a:ln w="12700">
+            <a:solidFill>
+              <a:srgbClr val="111827">
+                <a:alpha val="0"/>
+              </a:srgbClr>
+            </a:solidFill>
+            <a:prstDash val="solid"/>
+          </a:ln>
+        </p:spPr>
+      </p:sp>
+      <p:sp>
+        <p:nvSpPr>
+          <p:cNvPr id="11" name="mdpr:final-checks-4f0459:title:__title:final-checks-4f0459"/>
           <p:cNvSpPr txBox="1"/>
           <p:nvPr/>
         </p:nvSpPr>
@@ -2396,9 +6241,7 @@
           <a:ln/>
         </p:spPr>
         <p:txBody>
-          <a:bodyPr wrap="square" lIns="0" tIns="0" rIns="0" bIns="0" rtlCol="0" anchor="ctr">
-            <a:normAutofit/>
-          </a:bodyPr>
+          <a:bodyPr wrap="square" lIns="0" tIns="0" rIns="0" bIns="0" rtlCol="0" anchor="ctr"/>
           <a:lstStyle/>
           <a:p>
             <a:pPr algn="ctr" indent="0" marL="0">
@@ -2424,18 +6267,18 @@
       </p:sp>
       <p:sp>
         <p:nvSpPr>
-          <p:cNvPr id="11" name="Shape 6"/>
+          <p:cNvPr id="12" name="Shape 7"/>
           <p:cNvSpPr/>
           <p:nvPr/>
         </p:nvSpPr>
         <p:spPr>
           <a:xfrm>
-            <a:off x="1097280" y="1623060"/>
-            <a:ext cx="457200" cy="457200"/>
+            <a:off x="1097280" y="2140428"/>
+            <a:ext cx="474025" cy="474025"/>
           </a:xfrm>
           <a:prstGeom prst="roundRect">
             <a:avLst>
-              <a:gd name="adj" fmla="val 8000"/>
+              <a:gd name="adj" fmla="val 7716"/>
             </a:avLst>
           </a:prstGeom>
           <a:solidFill>
@@ -2451,7 +6294,7 @@
       </p:sp>
       <p:pic>
         <p:nvPicPr>
-          <p:cNvPr id="12" name="Image 3" descr="flow icon from tabler-icons (MIT)">    </p:cNvPr>
+          <p:cNvPr id="13" name="Image 3" descr="palette icon from tabler-icons (MIT)">    </p:cNvPr>
           <p:cNvPicPr>
             <a:picLocks noChangeAspect="1"/>
           </p:cNvPicPr>
@@ -2471,8 +6314,8 @@
         </p:blipFill>
         <p:spPr>
           <a:xfrm>
-            <a:off x="1170432" y="1696212"/>
-            <a:ext cx="310896" cy="310896"/>
+            <a:off x="1170432" y="2213580"/>
+            <a:ext cx="327721" cy="327721"/>
           </a:xfrm>
           <a:prstGeom prst="rect">
             <a:avLst/>
@@ -2481,14 +6324,14 @@
       </p:pic>
       <p:sp>
         <p:nvSpPr>
-          <p:cNvPr id="13" name="Text 7"/>
+          <p:cNvPr id="14" name="mdpr:final-checks-4f0459:item-1:block-21"/>
           <p:cNvSpPr txBox="1"/>
           <p:nvPr/>
         </p:nvSpPr>
         <p:spPr>
           <a:xfrm>
-            <a:off x="1682496" y="1638300"/>
-            <a:ext cx="9272016" cy="426720"/>
+            <a:off x="1699321" y="2164080"/>
+            <a:ext cx="9255191" cy="426720"/>
           </a:xfrm>
           <a:prstGeom prst="rect">
             <a:avLst/>
@@ -2500,7 +6343,7 @@
           <a:bodyPr wrap="square" lIns="0" tIns="25400" rIns="25400" bIns="0" rtlCol="0" anchor="ctr"/>
           <a:lstStyle/>
           <a:p>
-            <a:pPr algn="l" indent="0" marL="0">
+            <a:pPr algn="ctr" indent="0" marL="0">
               <a:lnSpc>
                 <a:spcPct val="120000"/>
               </a:lnSpc>
@@ -2523,18 +6366,18 @@
       </p:sp>
       <p:sp>
         <p:nvSpPr>
-          <p:cNvPr id="14" name="Shape 8"/>
+          <p:cNvPr id="15" name="Shape 9"/>
           <p:cNvSpPr/>
           <p:nvPr/>
         </p:nvSpPr>
         <p:spPr>
           <a:xfrm>
-            <a:off x="1097280" y="2766060"/>
-            <a:ext cx="457200" cy="457200"/>
+            <a:off x="1097280" y="3466308"/>
+            <a:ext cx="474025" cy="474025"/>
           </a:xfrm>
           <a:prstGeom prst="roundRect">
             <a:avLst>
-              <a:gd name="adj" fmla="val 8000"/>
+              <a:gd name="adj" fmla="val 7716"/>
             </a:avLst>
           </a:prstGeom>
           <a:solidFill>
@@ -2550,7 +6393,7 @@
       </p:sp>
       <p:pic>
         <p:nvPicPr>
-          <p:cNvPr id="15" name="Image 4" descr="verified icon from tabler-icons (MIT)">    </p:cNvPr>
+          <p:cNvPr id="16" name="Image 4" descr="image icon from tabler-icons (MIT)">    </p:cNvPr>
           <p:cNvPicPr>
             <a:picLocks noChangeAspect="1"/>
           </p:cNvPicPr>
@@ -2570,8 +6413,8 @@
         </p:blipFill>
         <p:spPr>
           <a:xfrm>
-            <a:off x="1170432" y="2839212"/>
-            <a:ext cx="310896" cy="310896"/>
+            <a:off x="1170432" y="3539460"/>
+            <a:ext cx="327721" cy="327721"/>
           </a:xfrm>
           <a:prstGeom prst="rect">
             <a:avLst/>
@@ -2580,14 +6423,14 @@
       </p:pic>
       <p:sp>
         <p:nvSpPr>
-          <p:cNvPr id="16" name="Text 9"/>
+          <p:cNvPr id="17" name="mdpr:final-checks-4f0459:item-2:block-21"/>
           <p:cNvSpPr txBox="1"/>
           <p:nvPr/>
         </p:nvSpPr>
         <p:spPr>
           <a:xfrm>
-            <a:off x="1682496" y="2651760"/>
-            <a:ext cx="9272016" cy="762000"/>
+            <a:off x="1699321" y="3322320"/>
+            <a:ext cx="9255191" cy="762000"/>
           </a:xfrm>
           <a:prstGeom prst="rect">
             <a:avLst/>
@@ -2596,12 +6439,10 @@
           <a:ln/>
         </p:spPr>
         <p:txBody>
-          <a:bodyPr wrap="square" lIns="0" tIns="25400" rIns="25400" bIns="0" rtlCol="0" anchor="ctr">
-            <a:normAutofit/>
-          </a:bodyPr>
+          <a:bodyPr wrap="square" lIns="0" tIns="25400" rIns="25400" bIns="0" rtlCol="0" anchor="ctr"/>
           <a:lstStyle/>
           <a:p>
-            <a:pPr algn="l" indent="0" marL="0">
+            <a:pPr algn="ctr" indent="0" marL="0">
               <a:lnSpc>
                 <a:spcPct val="120000"/>
               </a:lnSpc>
@@ -2624,18 +6465,18 @@
       </p:sp>
       <p:sp>
         <p:nvSpPr>
-          <p:cNvPr id="17" name="Shape 10"/>
+          <p:cNvPr id="18" name="Shape 11"/>
           <p:cNvSpPr/>
           <p:nvPr/>
         </p:nvSpPr>
         <p:spPr>
           <a:xfrm>
-            <a:off x="1097280" y="3909060"/>
-            <a:ext cx="457200" cy="457200"/>
+            <a:off x="1097280" y="4783044"/>
+            <a:ext cx="474025" cy="474025"/>
           </a:xfrm>
           <a:prstGeom prst="roundRect">
             <a:avLst>
-              <a:gd name="adj" fmla="val 8000"/>
+              <a:gd name="adj" fmla="val 7716"/>
             </a:avLst>
           </a:prstGeom>
           <a:solidFill>
@@ -2651,7 +6492,7 @@
       </p:sp>
       <p:pic>
         <p:nvPicPr>
-          <p:cNvPr id="18" name="Image 5" descr="spark icon from tabler-icons (MIT)">    </p:cNvPr>
+          <p:cNvPr id="19" name="Image 5" descr="image icon from tabler-icons (MIT)">    </p:cNvPr>
           <p:cNvPicPr>
             <a:picLocks noChangeAspect="1"/>
           </p:cNvPicPr>
@@ -2671,8 +6512,8 @@
         </p:blipFill>
         <p:spPr>
           <a:xfrm>
-            <a:off x="1170432" y="3982212"/>
-            <a:ext cx="310896" cy="310896"/>
+            <a:off x="1170432" y="4856196"/>
+            <a:ext cx="327721" cy="327721"/>
           </a:xfrm>
           <a:prstGeom prst="rect">
             <a:avLst/>
@@ -2681,14 +6522,14 @@
       </p:pic>
       <p:sp>
         <p:nvSpPr>
-          <p:cNvPr id="19" name="Text 11"/>
+          <p:cNvPr id="20" name="mdpr:final-checks-4f0459:item-3:block-21"/>
           <p:cNvSpPr txBox="1"/>
           <p:nvPr/>
         </p:nvSpPr>
         <p:spPr>
           <a:xfrm>
-            <a:off x="1682496" y="3794760"/>
-            <a:ext cx="9272016" cy="762000"/>
+            <a:off x="1699321" y="4639056"/>
+            <a:ext cx="9255191" cy="762000"/>
           </a:xfrm>
           <a:prstGeom prst="rect">
             <a:avLst/>
@@ -2697,12 +6538,10 @@
           <a:ln/>
         </p:spPr>
         <p:txBody>
-          <a:bodyPr wrap="square" lIns="0" tIns="25400" rIns="25400" bIns="0" rtlCol="0" anchor="ctr">
-            <a:normAutofit/>
-          </a:bodyPr>
+          <a:bodyPr wrap="square" lIns="0" tIns="25400" rIns="25400" bIns="0" rtlCol="0" anchor="ctr"/>
           <a:lstStyle/>
           <a:p>
-            <a:pPr algn="l" indent="0" marL="0">
+            <a:pPr algn="ctr" indent="0" marL="0">
               <a:lnSpc>
                 <a:spcPct val="120000"/>
               </a:lnSpc>
@@ -2813,8 +6652,8 @@
         </p:nvSpPr>
         <p:spPr>
           <a:xfrm>
-            <a:off x="914400" y="1463040"/>
-            <a:ext cx="10241280" cy="73152"/>
+            <a:off x="822960" y="1536192"/>
+            <a:ext cx="10515600" cy="45720"/>
           </a:xfrm>
           <a:prstGeom prst="rect">
             <a:avLst/>
@@ -2834,7 +6673,279 @@
       </p:sp>
       <p:sp>
         <p:nvSpPr>
-          <p:cNvPr id="5" name="Text 3"/>
+          <p:cNvPr id="5" name="Shape 3"/>
+          <p:cNvSpPr/>
+          <p:nvPr/>
+        </p:nvSpPr>
+        <p:spPr>
+          <a:xfrm>
+            <a:off x="822960" y="5852160"/>
+            <a:ext cx="2011680" cy="45720"/>
+          </a:xfrm>
+          <a:prstGeom prst="rect">
+            <a:avLst/>
+          </a:prstGeom>
+          <a:solidFill>
+            <a:srgbClr val="314163"/>
+          </a:solidFill>
+          <a:ln w="12700">
+            <a:solidFill>
+              <a:srgbClr val="314163">
+                <a:alpha val="0"/>
+              </a:srgbClr>
+            </a:solidFill>
+            <a:prstDash val="solid"/>
+          </a:ln>
+        </p:spPr>
+      </p:sp>
+      <p:sp>
+        <p:nvSpPr>
+          <p:cNvPr id="6" name="Shape 4"/>
+          <p:cNvSpPr/>
+          <p:nvPr/>
+        </p:nvSpPr>
+        <p:spPr>
+          <a:xfrm>
+            <a:off x="6080760" y="1737360"/>
+            <a:ext cx="22860" cy="3968496"/>
+          </a:xfrm>
+          <a:prstGeom prst="rect">
+            <a:avLst/>
+          </a:prstGeom>
+          <a:solidFill>
+            <a:srgbClr val="D4D6DB">
+              <a:alpha val="90000"/>
+            </a:srgbClr>
+          </a:solidFill>
+          <a:ln w="12700">
+            <a:solidFill>
+              <a:srgbClr val="D4D6DB">
+                <a:alpha val="0"/>
+              </a:srgbClr>
+            </a:solidFill>
+            <a:prstDash val="solid"/>
+          </a:ln>
+        </p:spPr>
+      </p:sp>
+      <p:sp>
+        <p:nvSpPr>
+          <p:cNvPr id="7" name="Shape 5"/>
+          <p:cNvSpPr/>
+          <p:nvPr/>
+        </p:nvSpPr>
+        <p:spPr>
+          <a:xfrm>
+            <a:off x="822960" y="1737360"/>
+            <a:ext cx="73152" cy="841248"/>
+          </a:xfrm>
+          <a:prstGeom prst="rect">
+            <a:avLst/>
+          </a:prstGeom>
+          <a:solidFill>
+            <a:srgbClr val="111827"/>
+          </a:solidFill>
+          <a:ln w="12700">
+            <a:solidFill>
+              <a:srgbClr val="111827">
+                <a:alpha val="0"/>
+              </a:srgbClr>
+            </a:solidFill>
+            <a:prstDash val="solid"/>
+          </a:ln>
+        </p:spPr>
+      </p:sp>
+      <p:sp>
+        <p:nvSpPr>
+          <p:cNvPr id="8" name="Shape 6"/>
+          <p:cNvSpPr/>
+          <p:nvPr/>
+        </p:nvSpPr>
+        <p:spPr>
+          <a:xfrm>
+            <a:off x="822960" y="2779776"/>
+            <a:ext cx="73152" cy="841248"/>
+          </a:xfrm>
+          <a:prstGeom prst="rect">
+            <a:avLst/>
+          </a:prstGeom>
+          <a:solidFill>
+            <a:srgbClr val="314163"/>
+          </a:solidFill>
+          <a:ln w="12700">
+            <a:solidFill>
+              <a:srgbClr val="314163">
+                <a:alpha val="0"/>
+              </a:srgbClr>
+            </a:solidFill>
+            <a:prstDash val="solid"/>
+          </a:ln>
+        </p:spPr>
+      </p:sp>
+      <p:sp>
+        <p:nvSpPr>
+          <p:cNvPr id="9" name="Shape 7"/>
+          <p:cNvSpPr/>
+          <p:nvPr/>
+        </p:nvSpPr>
+        <p:spPr>
+          <a:xfrm>
+            <a:off x="822960" y="3822192"/>
+            <a:ext cx="73152" cy="841248"/>
+          </a:xfrm>
+          <a:prstGeom prst="rect">
+            <a:avLst/>
+          </a:prstGeom>
+          <a:solidFill>
+            <a:srgbClr val="111827"/>
+          </a:solidFill>
+          <a:ln w="12700">
+            <a:solidFill>
+              <a:srgbClr val="111827">
+                <a:alpha val="0"/>
+              </a:srgbClr>
+            </a:solidFill>
+            <a:prstDash val="solid"/>
+          </a:ln>
+        </p:spPr>
+      </p:sp>
+      <p:sp>
+        <p:nvSpPr>
+          <p:cNvPr id="10" name="Shape 8"/>
+          <p:cNvSpPr/>
+          <p:nvPr/>
+        </p:nvSpPr>
+        <p:spPr>
+          <a:xfrm>
+            <a:off x="822960" y="4864608"/>
+            <a:ext cx="73152" cy="841248"/>
+          </a:xfrm>
+          <a:prstGeom prst="rect">
+            <a:avLst/>
+          </a:prstGeom>
+          <a:solidFill>
+            <a:srgbClr val="314163"/>
+          </a:solidFill>
+          <a:ln w="12700">
+            <a:solidFill>
+              <a:srgbClr val="314163">
+                <a:alpha val="0"/>
+              </a:srgbClr>
+            </a:solidFill>
+            <a:prstDash val="solid"/>
+          </a:ln>
+        </p:spPr>
+      </p:sp>
+      <p:sp>
+        <p:nvSpPr>
+          <p:cNvPr id="11" name="Shape 9"/>
+          <p:cNvSpPr/>
+          <p:nvPr/>
+        </p:nvSpPr>
+        <p:spPr>
+          <a:xfrm>
+            <a:off x="6272784" y="1737360"/>
+            <a:ext cx="73152" cy="841248"/>
+          </a:xfrm>
+          <a:prstGeom prst="rect">
+            <a:avLst/>
+          </a:prstGeom>
+          <a:solidFill>
+            <a:srgbClr val="111827"/>
+          </a:solidFill>
+          <a:ln w="12700">
+            <a:solidFill>
+              <a:srgbClr val="111827">
+                <a:alpha val="0"/>
+              </a:srgbClr>
+            </a:solidFill>
+            <a:prstDash val="solid"/>
+          </a:ln>
+        </p:spPr>
+      </p:sp>
+      <p:sp>
+        <p:nvSpPr>
+          <p:cNvPr id="12" name="Shape 10"/>
+          <p:cNvSpPr/>
+          <p:nvPr/>
+        </p:nvSpPr>
+        <p:spPr>
+          <a:xfrm>
+            <a:off x="6272784" y="2779776"/>
+            <a:ext cx="73152" cy="841248"/>
+          </a:xfrm>
+          <a:prstGeom prst="rect">
+            <a:avLst/>
+          </a:prstGeom>
+          <a:solidFill>
+            <a:srgbClr val="314163"/>
+          </a:solidFill>
+          <a:ln w="12700">
+            <a:solidFill>
+              <a:srgbClr val="314163">
+                <a:alpha val="0"/>
+              </a:srgbClr>
+            </a:solidFill>
+            <a:prstDash val="solid"/>
+          </a:ln>
+        </p:spPr>
+      </p:sp>
+      <p:sp>
+        <p:nvSpPr>
+          <p:cNvPr id="13" name="Shape 11"/>
+          <p:cNvSpPr/>
+          <p:nvPr/>
+        </p:nvSpPr>
+        <p:spPr>
+          <a:xfrm>
+            <a:off x="6272784" y="3822192"/>
+            <a:ext cx="73152" cy="841248"/>
+          </a:xfrm>
+          <a:prstGeom prst="rect">
+            <a:avLst/>
+          </a:prstGeom>
+          <a:solidFill>
+            <a:srgbClr val="111827"/>
+          </a:solidFill>
+          <a:ln w="12700">
+            <a:solidFill>
+              <a:srgbClr val="111827">
+                <a:alpha val="0"/>
+              </a:srgbClr>
+            </a:solidFill>
+            <a:prstDash val="solid"/>
+          </a:ln>
+        </p:spPr>
+      </p:sp>
+      <p:sp>
+        <p:nvSpPr>
+          <p:cNvPr id="14" name="Shape 12"/>
+          <p:cNvSpPr/>
+          <p:nvPr/>
+        </p:nvSpPr>
+        <p:spPr>
+          <a:xfrm>
+            <a:off x="6272784" y="4864608"/>
+            <a:ext cx="73152" cy="841248"/>
+          </a:xfrm>
+          <a:prstGeom prst="rect">
+            <a:avLst/>
+          </a:prstGeom>
+          <a:solidFill>
+            <a:srgbClr val="314163"/>
+          </a:solidFill>
+          <a:ln w="12700">
+            <a:solidFill>
+              <a:srgbClr val="314163">
+                <a:alpha val="0"/>
+              </a:srgbClr>
+            </a:solidFill>
+            <a:prstDash val="solid"/>
+          </a:ln>
+        </p:spPr>
+      </p:sp>
+      <p:sp>
+        <p:nvSpPr>
+          <p:cNvPr id="15" name="mdpr:toc-53a981:title:__title:toc-53a981"/>
           <p:cNvSpPr txBox="1"/>
           <p:nvPr/>
         </p:nvSpPr>
@@ -2850,9 +6961,7 @@
           <a:ln/>
         </p:spPr>
         <p:txBody>
-          <a:bodyPr wrap="square" lIns="0" tIns="0" rIns="0" bIns="0" rtlCol="0" anchor="ctr">
-            <a:normAutofit/>
-          </a:bodyPr>
+          <a:bodyPr wrap="square" lIns="0" tIns="0" rIns="0" bIns="0" rtlCol="0" anchor="ctr"/>
           <a:lstStyle/>
           <a:p>
             <a:pPr algn="ctr" indent="0" marL="0">
@@ -2870,7 +6979,7 @@
                 <a:ea typeface="Pretendard" pitchFamily="34" charset="-122"/>
                 <a:cs typeface="Pretendard" pitchFamily="34" charset="-120"/>
               </a:rPr>
-              <a:t>목차</a:t>
+              <a:t>Agenda</a:t>
             </a:r>
             <a:endParaRPr lang="en-US" sz="3800" dirty="0"/>
           </a:p>
@@ -2878,14 +6987,14 @@
       </p:sp>
       <p:sp>
         <p:nvSpPr>
-          <p:cNvPr id="6" name="Text 4"/>
+          <p:cNvPr id="16" name="mdpr:toc-53a981:toc-item-1:toc-item-1"/>
           <p:cNvSpPr txBox="1"/>
           <p:nvPr/>
         </p:nvSpPr>
         <p:spPr>
           <a:xfrm>
-            <a:off x="987552" y="1996440"/>
-            <a:ext cx="10094976" cy="426720"/>
+            <a:off x="1042416" y="1828800"/>
+            <a:ext cx="4645152" cy="658368"/>
           </a:xfrm>
           <a:prstGeom prst="rect">
             <a:avLst/>
@@ -2897,14 +7006,14 @@
           <a:bodyPr wrap="square" lIns="0" tIns="25400" rIns="25400" bIns="0" rtlCol="0" anchor="ctr"/>
           <a:lstStyle/>
           <a:p>
-            <a:pPr algn="l" indent="0" marL="0">
+            <a:pPr algn="ctr" indent="0" marL="0">
               <a:lnSpc>
                 <a:spcPct val="120000"/>
               </a:lnSpc>
               <a:buNone/>
             </a:pPr>
             <a:r>
-              <a:rPr lang="en-US" sz="2200" dirty="0">
+              <a:rPr lang="en-US" sz="1800" dirty="0">
                 <a:solidFill>
                   <a:srgbClr val="111827"/>
                 </a:solidFill>
@@ -2912,22 +7021,22 @@
                 <a:ea typeface="Pretendard" pitchFamily="34" charset="-122"/>
                 <a:cs typeface="Pretendard" pitchFamily="34" charset="-120"/>
               </a:rPr>
-              <a:t>Theme Contract</a:t>
+              <a:t>01  Theme Contract</a:t>
             </a:r>
-            <a:endParaRPr lang="en-US" sz="2200" dirty="0"/>
+            <a:endParaRPr lang="en-US" sz="1800" dirty="0"/>
           </a:p>
         </p:txBody>
       </p:sp>
       <p:sp>
         <p:nvSpPr>
-          <p:cNvPr id="7" name="Text 5"/>
+          <p:cNvPr id="17" name="mdpr:toc-53a981:toc-item-2:toc-item-2"/>
           <p:cNvSpPr txBox="1"/>
           <p:nvPr/>
         </p:nvSpPr>
         <p:spPr>
           <a:xfrm>
-            <a:off x="987552" y="2423160"/>
-            <a:ext cx="10094976" cy="426720"/>
+            <a:off x="1042416" y="2871216"/>
+            <a:ext cx="4645152" cy="658368"/>
           </a:xfrm>
           <a:prstGeom prst="rect">
             <a:avLst/>
@@ -2939,14 +7048,14 @@
           <a:bodyPr wrap="square" lIns="0" tIns="25400" rIns="25400" bIns="0" rtlCol="0" anchor="ctr"/>
           <a:lstStyle/>
           <a:p>
-            <a:pPr algn="l" indent="0" marL="0">
+            <a:pPr algn="ctr" indent="0" marL="0">
               <a:lnSpc>
                 <a:spcPct val="120000"/>
               </a:lnSpc>
               <a:buNone/>
             </a:pPr>
             <a:r>
-              <a:rPr lang="en-US" sz="2200" dirty="0">
+              <a:rPr lang="en-US" sz="1800" dirty="0">
                 <a:solidFill>
                   <a:srgbClr val="111827"/>
                 </a:solidFill>
@@ -2954,22 +7063,22 @@
                 <a:ea typeface="Pretendard" pitchFamily="34" charset="-122"/>
                 <a:cs typeface="Pretendard" pitchFamily="34" charset="-120"/>
               </a:rPr>
-              <a:t>Pipeline and Object Routing</a:t>
+              <a:t>02  Pipeline and Object Routing</a:t>
             </a:r>
-            <a:endParaRPr lang="en-US" sz="2200" dirty="0"/>
+            <a:endParaRPr lang="en-US" sz="1800" dirty="0"/>
           </a:p>
         </p:txBody>
       </p:sp>
       <p:sp>
         <p:nvSpPr>
-          <p:cNvPr id="8" name="Text 6"/>
+          <p:cNvPr id="18" name="mdpr:toc-53a981:toc-item-3:toc-item-3"/>
           <p:cNvSpPr txBox="1"/>
           <p:nvPr/>
         </p:nvSpPr>
         <p:spPr>
           <a:xfrm>
-            <a:off x="987552" y="2849880"/>
-            <a:ext cx="10094976" cy="426720"/>
+            <a:off x="1042416" y="3913632"/>
+            <a:ext cx="4645152" cy="658368"/>
           </a:xfrm>
           <a:prstGeom prst="rect">
             <a:avLst/>
@@ -2981,14 +7090,14 @@
           <a:bodyPr wrap="square" lIns="0" tIns="25400" rIns="25400" bIns="0" rtlCol="0" anchor="ctr"/>
           <a:lstStyle/>
           <a:p>
-            <a:pPr algn="l" indent="0" marL="0">
+            <a:pPr algn="ctr" indent="0" marL="0">
               <a:lnSpc>
                 <a:spcPct val="120000"/>
               </a:lnSpc>
               <a:buNone/>
             </a:pPr>
             <a:r>
-              <a:rPr lang="en-US" sz="2200" dirty="0">
+              <a:rPr lang="en-US" sz="1800" dirty="0">
                 <a:solidFill>
                   <a:srgbClr val="111827"/>
                 </a:solidFill>
@@ -2996,22 +7105,22 @@
                 <a:ea typeface="Pretendard" pitchFamily="34" charset="-122"/>
                 <a:cs typeface="Pretendard" pitchFamily="34" charset="-120"/>
               </a:rPr>
-              <a:t>Numeric Proof Objects</a:t>
+              <a:t>03  Numeric Proof Objects</a:t>
             </a:r>
-            <a:endParaRPr lang="en-US" sz="2200" dirty="0"/>
+            <a:endParaRPr lang="en-US" sz="1800" dirty="0"/>
           </a:p>
         </p:txBody>
       </p:sp>
       <p:sp>
         <p:nvSpPr>
-          <p:cNvPr id="9" name="Text 7"/>
+          <p:cNvPr id="19" name="mdpr:toc-53a981:toc-item-4:toc-item-4"/>
           <p:cNvSpPr txBox="1"/>
           <p:nvPr/>
         </p:nvSpPr>
         <p:spPr>
           <a:xfrm>
-            <a:off x="987552" y="3276600"/>
-            <a:ext cx="10094976" cy="426720"/>
+            <a:off x="1042416" y="4956048"/>
+            <a:ext cx="4645152" cy="658368"/>
           </a:xfrm>
           <a:prstGeom prst="rect">
             <a:avLst/>
@@ -3023,14 +7132,14 @@
           <a:bodyPr wrap="square" lIns="0" tIns="25400" rIns="25400" bIns="0" rtlCol="0" anchor="ctr"/>
           <a:lstStyle/>
           <a:p>
-            <a:pPr algn="l" indent="0" marL="0">
+            <a:pPr algn="ctr" indent="0" marL="0">
               <a:lnSpc>
                 <a:spcPct val="120000"/>
               </a:lnSpc>
               <a:buNone/>
             </a:pPr>
             <a:r>
-              <a:rPr lang="en-US" sz="2200" dirty="0">
+              <a:rPr lang="en-US" sz="1800" dirty="0">
                 <a:solidFill>
                   <a:srgbClr val="111827"/>
                 </a:solidFill>
@@ -3038,22 +7147,22 @@
                 <a:ea typeface="Pretendard" pitchFamily="34" charset="-122"/>
                 <a:cs typeface="Pretendard" pitchFamily="34" charset="-120"/>
               </a:rPr>
-              <a:t>Arc Ring Proof</a:t>
+              <a:t>04  Arc Ring Proof</a:t>
             </a:r>
-            <a:endParaRPr lang="en-US" sz="2200" dirty="0"/>
+            <a:endParaRPr lang="en-US" sz="1800" dirty="0"/>
           </a:p>
         </p:txBody>
       </p:sp>
       <p:sp>
         <p:nvSpPr>
-          <p:cNvPr id="10" name="Text 8"/>
+          <p:cNvPr id="20" name="mdpr:toc-53a981:toc-item-5:toc-item-5"/>
           <p:cNvSpPr txBox="1"/>
           <p:nvPr/>
         </p:nvSpPr>
         <p:spPr>
           <a:xfrm>
-            <a:off x="987552" y="3703320"/>
-            <a:ext cx="10094976" cy="426720"/>
+            <a:off x="6492240" y="1828800"/>
+            <a:ext cx="4645152" cy="658368"/>
           </a:xfrm>
           <a:prstGeom prst="rect">
             <a:avLst/>
@@ -3065,14 +7174,14 @@
           <a:bodyPr wrap="square" lIns="0" tIns="25400" rIns="25400" bIns="0" rtlCol="0" anchor="ctr"/>
           <a:lstStyle/>
           <a:p>
-            <a:pPr algn="l" indent="0" marL="0">
+            <a:pPr algn="ctr" indent="0" marL="0">
               <a:lnSpc>
                 <a:spcPct val="120000"/>
               </a:lnSpc>
               <a:buNone/>
             </a:pPr>
             <a:r>
-              <a:rPr lang="en-US" sz="2200" dirty="0">
+              <a:rPr lang="en-US" sz="1800" dirty="0">
                 <a:solidFill>
                   <a:srgbClr val="111827"/>
                 </a:solidFill>
@@ -3080,22 +7189,22 @@
                 <a:ea typeface="Pretendard" pitchFamily="34" charset="-122"/>
                 <a:cs typeface="Pretendard" pitchFamily="34" charset="-120"/>
               </a:rPr>
-              <a:t>Table and Text Coherence</a:t>
+              <a:t>05  Table and Text Coherence</a:t>
             </a:r>
-            <a:endParaRPr lang="en-US" sz="2200" dirty="0"/>
+            <a:endParaRPr lang="en-US" sz="1800" dirty="0"/>
           </a:p>
         </p:txBody>
       </p:sp>
       <p:sp>
         <p:nvSpPr>
-          <p:cNvPr id="11" name="Text 9"/>
+          <p:cNvPr id="21" name="mdpr:toc-53a981:toc-item-6:toc-item-6"/>
           <p:cNvSpPr txBox="1"/>
           <p:nvPr/>
         </p:nvSpPr>
         <p:spPr>
           <a:xfrm>
-            <a:off x="987552" y="4130040"/>
-            <a:ext cx="10094976" cy="426720"/>
+            <a:off x="6492240" y="2871216"/>
+            <a:ext cx="4645152" cy="658368"/>
           </a:xfrm>
           <a:prstGeom prst="rect">
             <a:avLst/>
@@ -3107,14 +7216,14 @@
           <a:bodyPr wrap="square" lIns="0" tIns="25400" rIns="25400" bIns="0" rtlCol="0" anchor="ctr"/>
           <a:lstStyle/>
           <a:p>
-            <a:pPr algn="l" indent="0" marL="0">
+            <a:pPr algn="ctr" indent="0" marL="0">
               <a:lnSpc>
                 <a:spcPct val="120000"/>
               </a:lnSpc>
               <a:buNone/>
             </a:pPr>
             <a:r>
-              <a:rPr lang="en-US" sz="2200" dirty="0">
+              <a:rPr lang="en-US" sz="1800" dirty="0">
                 <a:solidFill>
                   <a:srgbClr val="111827"/>
                 </a:solidFill>
@@ -3122,22 +7231,22 @@
                 <a:ea typeface="Pretendard" pitchFamily="34" charset="-122"/>
                 <a:cs typeface="Pretendard" pitchFamily="34" charset="-120"/>
               </a:rPr>
-              <a:t>Decoration Selection Inputs</a:t>
+              <a:t>06  Decoration Selection Inputs</a:t>
             </a:r>
-            <a:endParaRPr lang="en-US" sz="2200" dirty="0"/>
+            <a:endParaRPr lang="en-US" sz="1800" dirty="0"/>
           </a:p>
         </p:txBody>
       </p:sp>
       <p:sp>
         <p:nvSpPr>
-          <p:cNvPr id="12" name="Text 10"/>
+          <p:cNvPr id="22" name="mdpr:toc-53a981:toc-item-7:toc-item-7"/>
           <p:cNvSpPr txBox="1"/>
           <p:nvPr/>
         </p:nvSpPr>
         <p:spPr>
           <a:xfrm>
-            <a:off x="987552" y="4556760"/>
-            <a:ext cx="10094976" cy="426720"/>
+            <a:off x="6492240" y="3913632"/>
+            <a:ext cx="4645152" cy="658368"/>
           </a:xfrm>
           <a:prstGeom prst="rect">
             <a:avLst/>
@@ -3149,14 +7258,14 @@
           <a:bodyPr wrap="square" lIns="0" tIns="25400" rIns="25400" bIns="0" rtlCol="0" anchor="ctr"/>
           <a:lstStyle/>
           <a:p>
-            <a:pPr algn="l" indent="0" marL="0">
+            <a:pPr algn="ctr" indent="0" marL="0">
               <a:lnSpc>
                 <a:spcPct val="120000"/>
               </a:lnSpc>
               <a:buNone/>
             </a:pPr>
             <a:r>
-              <a:rPr lang="en-US" sz="2200" dirty="0">
+              <a:rPr lang="en-US" sz="1800" dirty="0">
                 <a:solidFill>
                   <a:srgbClr val="111827"/>
                 </a:solidFill>
@@ -3164,22 +7273,22 @@
                 <a:ea typeface="Pretendard" pitchFamily="34" charset="-122"/>
                 <a:cs typeface="Pretendard" pitchFamily="34" charset="-120"/>
               </a:rPr>
-              <a:t>Theme Matrix</a:t>
+              <a:t>07  Theme Matrix</a:t>
             </a:r>
-            <a:endParaRPr lang="en-US" sz="2200" dirty="0"/>
+            <a:endParaRPr lang="en-US" sz="1800" dirty="0"/>
           </a:p>
         </p:txBody>
       </p:sp>
       <p:sp>
         <p:nvSpPr>
-          <p:cNvPr id="13" name="Text 11"/>
+          <p:cNvPr id="23" name="mdpr:toc-53a981:toc-item-8:toc-item-8"/>
           <p:cNvSpPr txBox="1"/>
           <p:nvPr/>
         </p:nvSpPr>
         <p:spPr>
           <a:xfrm>
-            <a:off x="987552" y="4983480"/>
-            <a:ext cx="10094976" cy="426720"/>
+            <a:off x="6492240" y="4956048"/>
+            <a:ext cx="4645152" cy="658368"/>
           </a:xfrm>
           <a:prstGeom prst="rect">
             <a:avLst/>
@@ -3191,14 +7300,14 @@
           <a:bodyPr wrap="square" lIns="0" tIns="25400" rIns="25400" bIns="0" rtlCol="0" anchor="ctr"/>
           <a:lstStyle/>
           <a:p>
-            <a:pPr algn="l" indent="0" marL="0">
+            <a:pPr algn="ctr" indent="0" marL="0">
               <a:lnSpc>
                 <a:spcPct val="120000"/>
               </a:lnSpc>
               <a:buNone/>
             </a:pPr>
             <a:r>
-              <a:rPr lang="en-US" sz="2200" dirty="0">
+              <a:rPr lang="en-US" sz="1800" dirty="0">
                 <a:solidFill>
                   <a:srgbClr val="111827"/>
                 </a:solidFill>
@@ -3206,9 +7315,9 @@
                 <a:ea typeface="Pretendard" pitchFamily="34" charset="-122"/>
                 <a:cs typeface="Pretendard" pitchFamily="34" charset="-120"/>
               </a:rPr>
-              <a:t>Final Checks</a:t>
+              <a:t>08  Final Checks</a:t>
             </a:r>
-            <a:endParaRPr lang="en-US" sz="2200" dirty="0"/>
+            <a:endParaRPr lang="en-US" sz="1800" dirty="0"/>
           </a:p>
         </p:txBody>
       </p:sp>
@@ -3294,36 +7403,9 @@
           </a:ln>
         </p:spPr>
       </p:sp>
-      <p:sp>
-        <p:nvSpPr>
-          <p:cNvPr id="4" name="Shape 2"/>
-          <p:cNvSpPr/>
-          <p:nvPr/>
-        </p:nvSpPr>
-        <p:spPr>
-          <a:xfrm>
-            <a:off x="914400" y="3063240"/>
-            <a:ext cx="10241280" cy="73152"/>
-          </a:xfrm>
-          <a:prstGeom prst="rect">
-            <a:avLst/>
-          </a:prstGeom>
-          <a:solidFill>
-            <a:srgbClr val="111827"/>
-          </a:solidFill>
-          <a:ln w="12700">
-            <a:solidFill>
-              <a:srgbClr val="111827">
-                <a:alpha val="0"/>
-              </a:srgbClr>
-            </a:solidFill>
-            <a:prstDash val="solid"/>
-          </a:ln>
-        </p:spPr>
-      </p:sp>
       <p:pic>
         <p:nvPicPr>
-          <p:cNvPr id="5" name="Image 0" descr="preencoded.png">    </p:cNvPr>
+          <p:cNvPr id="4" name="Image 0" descr="preencoded.png">    </p:cNvPr>
           <p:cNvPicPr>
             <a:picLocks noChangeAspect="1"/>
           </p:cNvPicPr>
@@ -3353,7 +7435,7 @@
       </p:pic>
       <p:sp>
         <p:nvSpPr>
-          <p:cNvPr id="6" name="Shape 3"/>
+          <p:cNvPr id="5" name="Shape 2"/>
           <p:cNvSpPr/>
           <p:nvPr/>
         </p:nvSpPr>
@@ -3382,7 +7464,34 @@
       </p:sp>
       <p:sp>
         <p:nvSpPr>
-          <p:cNvPr id="7" name="Text 4"/>
+          <p:cNvPr id="6" name="Shape 3"/>
+          <p:cNvSpPr/>
+          <p:nvPr/>
+        </p:nvSpPr>
+        <p:spPr>
+          <a:xfrm>
+            <a:off x="914400" y="3063240"/>
+            <a:ext cx="10241280" cy="73152"/>
+          </a:xfrm>
+          <a:prstGeom prst="rect">
+            <a:avLst/>
+          </a:prstGeom>
+          <a:solidFill>
+            <a:srgbClr val="111827"/>
+          </a:solidFill>
+          <a:ln w="12700">
+            <a:solidFill>
+              <a:srgbClr val="111827">
+                <a:alpha val="0"/>
+              </a:srgbClr>
+            </a:solidFill>
+            <a:prstDash val="solid"/>
+          </a:ln>
+        </p:spPr>
+      </p:sp>
+      <p:sp>
+        <p:nvSpPr>
+          <p:cNvPr id="7" name="mdpr:theme-contract-c377f2:title:__title:theme-contract-c377f2"/>
           <p:cNvSpPr txBox="1"/>
           <p:nvPr/>
         </p:nvSpPr>
@@ -3398,9 +7507,7 @@
           <a:ln/>
         </p:spPr>
         <p:txBody>
-          <a:bodyPr wrap="square" lIns="0" tIns="0" rIns="0" bIns="0" rtlCol="0" anchor="ctr">
-            <a:normAutofit/>
-          </a:bodyPr>
+          <a:bodyPr wrap="square" lIns="0" tIns="0" rIns="0" bIns="0" rtlCol="0" anchor="ctr"/>
           <a:lstStyle/>
           <a:p>
             <a:pPr algn="ctr" indent="0" marL="0">
@@ -3426,7 +7533,7 @@
       </p:sp>
       <p:sp>
         <p:nvSpPr>
-          <p:cNvPr id="8" name="Text 5"/>
+          <p:cNvPr id="8" name="mdpr:theme-contract-c377f2:key-message:block-3"/>
           <p:cNvSpPr txBox="1"/>
           <p:nvPr/>
         </p:nvSpPr>
@@ -3442,9 +7549,7 @@
           <a:ln/>
         </p:spPr>
         <p:txBody>
-          <a:bodyPr wrap="square" lIns="0" tIns="0" rIns="0" bIns="0" rtlCol="0" anchor="ctr">
-            <a:normAutofit/>
-          </a:bodyPr>
+          <a:bodyPr wrap="square" lIns="0" tIns="0" rIns="0" bIns="0" rtlCol="0" anchor="ctr"/>
           <a:lstStyle/>
           <a:p>
             <a:pPr algn="l" indent="0" marL="0">
@@ -3470,7 +7575,7 @@
       </p:sp>
       <p:sp>
         <p:nvSpPr>
-          <p:cNvPr id="9" name="Text 6"/>
+          <p:cNvPr id="9" name="mdpr:theme-contract-c377f2:body:block-4"/>
           <p:cNvSpPr txBox="1"/>
           <p:nvPr/>
         </p:nvSpPr>
@@ -3486,9 +7591,7 @@
           <a:ln/>
         </p:spPr>
         <p:txBody>
-          <a:bodyPr wrap="square" lIns="0" tIns="25400" rIns="25400" bIns="0" rtlCol="0" anchor="t">
-            <a:normAutofit/>
-          </a:bodyPr>
+          <a:bodyPr wrap="square" lIns="0" tIns="25400" rIns="25400" bIns="0" rtlCol="0" anchor="t"/>
           <a:lstStyle/>
           <a:p>
             <a:pPr algn="l" indent="0" marL="0">
@@ -3693,7 +7796,7 @@
       </p:sp>
       <p:sp>
         <p:nvSpPr>
-          <p:cNvPr id="4" name="Text 2"/>
+          <p:cNvPr id="4" name="mdpr:pipeline-and-object-routing-fb82d5:title:__title:pipeline-and-object-routing-fb82d5"/>
           <p:cNvSpPr txBox="1"/>
           <p:nvPr/>
         </p:nvSpPr>
@@ -3709,9 +7812,7 @@
           <a:ln/>
         </p:spPr>
         <p:txBody>
-          <a:bodyPr wrap="square" lIns="0" tIns="0" rIns="0" bIns="0" rtlCol="0" anchor="ctr">
-            <a:normAutofit/>
-          </a:bodyPr>
+          <a:bodyPr wrap="square" lIns="0" tIns="0" rIns="0" bIns="0" rtlCol="0" anchor="ctr"/>
           <a:lstStyle/>
           <a:p>
             <a:pPr algn="ctr" indent="0" marL="0">
@@ -4993,36 +9094,9 @@
           </a:ln>
         </p:spPr>
       </p:sp>
-      <p:sp>
-        <p:nvSpPr>
-          <p:cNvPr id="4" name="Shape 2"/>
-          <p:cNvSpPr/>
-          <p:nvPr/>
-        </p:nvSpPr>
-        <p:spPr>
-          <a:xfrm>
-            <a:off x="841248" y="1517904"/>
-            <a:ext cx="3822192" cy="73152"/>
-          </a:xfrm>
-          <a:prstGeom prst="rect">
-            <a:avLst/>
-          </a:prstGeom>
-          <a:solidFill>
-            <a:srgbClr val="111827"/>
-          </a:solidFill>
-          <a:ln w="12700">
-            <a:solidFill>
-              <a:srgbClr val="111827">
-                <a:alpha val="0"/>
-              </a:srgbClr>
-            </a:solidFill>
-            <a:prstDash val="solid"/>
-          </a:ln>
-        </p:spPr>
-      </p:sp>
       <p:pic>
         <p:nvPicPr>
-          <p:cNvPr id="5" name="Image 0" descr="preencoded.png">    </p:cNvPr>
+          <p:cNvPr id="4" name="Image 0" descr="preencoded.png">    </p:cNvPr>
           <p:cNvPicPr>
             <a:picLocks noChangeAspect="1"/>
           </p:cNvPicPr>
@@ -5052,7 +9126,34 @@
       </p:pic>
       <p:sp>
         <p:nvSpPr>
-          <p:cNvPr id="6" name="Text 3"/>
+          <p:cNvPr id="5" name="Shape 2"/>
+          <p:cNvSpPr/>
+          <p:nvPr/>
+        </p:nvSpPr>
+        <p:spPr>
+          <a:xfrm>
+            <a:off x="841248" y="1517904"/>
+            <a:ext cx="3822192" cy="73152"/>
+          </a:xfrm>
+          <a:prstGeom prst="rect">
+            <a:avLst/>
+          </a:prstGeom>
+          <a:solidFill>
+            <a:srgbClr val="111827"/>
+          </a:solidFill>
+          <a:ln w="12700">
+            <a:solidFill>
+              <a:srgbClr val="111827">
+                <a:alpha val="0"/>
+              </a:srgbClr>
+            </a:solidFill>
+            <a:prstDash val="solid"/>
+          </a:ln>
+        </p:spPr>
+      </p:sp>
+      <p:sp>
+        <p:nvSpPr>
+          <p:cNvPr id="6" name="mdpr:numeric-proof-objects-cacd50:title:__title:numeric-proof-objects-cacd50"/>
           <p:cNvSpPr txBox="1"/>
           <p:nvPr/>
         </p:nvSpPr>
@@ -5068,9 +9169,7 @@
           <a:ln/>
         </p:spPr>
         <p:txBody>
-          <a:bodyPr wrap="square" lIns="0" tIns="0" rIns="0" bIns="0" rtlCol="0" anchor="ctr">
-            <a:normAutofit/>
-          </a:bodyPr>
+          <a:bodyPr wrap="square" lIns="0" tIns="0" rIns="0" bIns="0" rtlCol="0" anchor="ctr"/>
           <a:lstStyle/>
           <a:p>
             <a:pPr algn="ctr" indent="0" marL="0">
@@ -5096,7 +9195,7 @@
       </p:sp>
       <p:sp>
         <p:nvSpPr>
-          <p:cNvPr id="7" name="Text 4"/>
+          <p:cNvPr id="7" name="mdpr:numeric-proof-objects-cacd50:body:block-10"/>
           <p:cNvSpPr txBox="1"/>
           <p:nvPr/>
         </p:nvSpPr>
@@ -5112,9 +9211,7 @@
           <a:ln/>
         </p:spPr>
         <p:txBody>
-          <a:bodyPr wrap="square" lIns="0" tIns="25400" rIns="25400" bIns="0" rtlCol="0" anchor="t">
-            <a:normAutofit/>
-          </a:bodyPr>
+          <a:bodyPr wrap="square" lIns="0" tIns="25400" rIns="25400" bIns="0" rtlCol="0" anchor="t"/>
           <a:lstStyle/>
           <a:p>
             <a:pPr algn="l" indent="0" marL="0">
@@ -5236,36 +9333,9 @@
           </a:ln>
         </p:spPr>
       </p:sp>
-      <p:sp>
-        <p:nvSpPr>
-          <p:cNvPr id="4" name="Shape 2"/>
-          <p:cNvSpPr/>
-          <p:nvPr/>
-        </p:nvSpPr>
-        <p:spPr>
-          <a:xfrm>
-            <a:off x="841248" y="1517904"/>
-            <a:ext cx="3822192" cy="73152"/>
-          </a:xfrm>
-          <a:prstGeom prst="rect">
-            <a:avLst/>
-          </a:prstGeom>
-          <a:solidFill>
-            <a:srgbClr val="111827"/>
-          </a:solidFill>
-          <a:ln w="12700">
-            <a:solidFill>
-              <a:srgbClr val="111827">
-                <a:alpha val="0"/>
-              </a:srgbClr>
-            </a:solidFill>
-            <a:prstDash val="solid"/>
-          </a:ln>
-        </p:spPr>
-      </p:sp>
       <p:pic>
         <p:nvPicPr>
-          <p:cNvPr id="5" name="Image 0" descr="preencoded.png">    </p:cNvPr>
+          <p:cNvPr id="4" name="Image 0" descr="preencoded.png">    </p:cNvPr>
           <p:cNvPicPr>
             <a:picLocks noChangeAspect="1"/>
           </p:cNvPicPr>
@@ -5295,7 +9365,34 @@
       </p:pic>
       <p:sp>
         <p:nvSpPr>
-          <p:cNvPr id="6" name="Text 3"/>
+          <p:cNvPr id="5" name="Shape 2"/>
+          <p:cNvSpPr/>
+          <p:nvPr/>
+        </p:nvSpPr>
+        <p:spPr>
+          <a:xfrm>
+            <a:off x="841248" y="1517904"/>
+            <a:ext cx="3822192" cy="73152"/>
+          </a:xfrm>
+          <a:prstGeom prst="rect">
+            <a:avLst/>
+          </a:prstGeom>
+          <a:solidFill>
+            <a:srgbClr val="111827"/>
+          </a:solidFill>
+          <a:ln w="12700">
+            <a:solidFill>
+              <a:srgbClr val="111827">
+                <a:alpha val="0"/>
+              </a:srgbClr>
+            </a:solidFill>
+            <a:prstDash val="solid"/>
+          </a:ln>
+        </p:spPr>
+      </p:sp>
+      <p:sp>
+        <p:nvSpPr>
+          <p:cNvPr id="6" name="mdpr:arc-ring-proof-5379f8:title:__title:arc-ring-proof-5379f8"/>
           <p:cNvSpPr txBox="1"/>
           <p:nvPr/>
         </p:nvSpPr>
@@ -5311,9 +9408,7 @@
           <a:ln/>
         </p:spPr>
         <p:txBody>
-          <a:bodyPr wrap="square" lIns="0" tIns="0" rIns="0" bIns="0" rtlCol="0" anchor="ctr">
-            <a:normAutofit/>
-          </a:bodyPr>
+          <a:bodyPr wrap="square" lIns="0" tIns="0" rIns="0" bIns="0" rtlCol="0" anchor="ctr"/>
           <a:lstStyle/>
           <a:p>
             <a:pPr algn="ctr" indent="0" marL="0">
@@ -5339,7 +9434,7 @@
       </p:sp>
       <p:sp>
         <p:nvSpPr>
-          <p:cNvPr id="7" name="Text 4"/>
+          <p:cNvPr id="7" name="mdpr:arc-ring-proof-5379f8:body:block-13"/>
           <p:cNvSpPr txBox="1"/>
           <p:nvPr/>
         </p:nvSpPr>
@@ -5355,9 +9450,7 @@
           <a:ln/>
         </p:spPr>
         <p:txBody>
-          <a:bodyPr wrap="square" lIns="0" tIns="25400" rIns="25400" bIns="0" rtlCol="0" anchor="t">
-            <a:normAutofit/>
-          </a:bodyPr>
+          <a:bodyPr wrap="square" lIns="0" tIns="25400" rIns="25400" bIns="0" rtlCol="0" anchor="t"/>
           <a:lstStyle/>
           <a:p>
             <a:pPr algn="l" indent="0" marL="0">
@@ -5558,7 +9651,7 @@
               <a:buNone/>
             </a:pPr>
             <a:r>
-              <a:rPr lang="en-US" sz="2900" b="1" dirty="0">
+              <a:rPr lang="en-US" sz="3000" b="1" dirty="0">
                 <a:solidFill>
                   <a:srgbClr val="111827"/>
                 </a:solidFill>
@@ -5568,7 +9661,7 @@
               </a:rPr>
               <a:t>78%</a:t>
             </a:r>
-            <a:endParaRPr lang="en-US" sz="2900" dirty="0"/>
+            <a:endParaRPr lang="en-US" sz="3000" dirty="0"/>
           </a:p>
         </p:txBody>
       </p:sp>
@@ -5590,9 +9683,7 @@
           <a:ln/>
         </p:spPr>
         <p:txBody>
-          <a:bodyPr wrap="square" lIns="0" tIns="0" rIns="0" bIns="0" rtlCol="0" anchor="ctr">
-            <a:normAutofit/>
-          </a:bodyPr>
+          <a:bodyPr wrap="square" lIns="0" tIns="0" rIns="0" bIns="0" rtlCol="0" anchor="ctr"/>
           <a:lstStyle/>
           <a:p>
             <a:pPr algn="ctr" indent="0" marL="0">
@@ -5840,36 +9931,39 @@
           </a:ln>
         </p:spPr>
       </p:sp>
-      <p:sp>
-        <p:nvSpPr>
-          <p:cNvPr id="4" name="Shape 2"/>
-          <p:cNvSpPr/>
-          <p:nvPr/>
-        </p:nvSpPr>
-        <p:spPr>
-          <a:xfrm>
-            <a:off x="914400" y="1463040"/>
-            <a:ext cx="10241280" cy="73152"/>
+      <p:pic>
+        <p:nvPicPr>
+          <p:cNvPr id="4" name="Image 0" descr="preencoded.png">    </p:cNvPr>
+          <p:cNvPicPr>
+            <a:picLocks noChangeAspect="1"/>
+          </p:cNvPicPr>
+          <p:nvPr/>
+        </p:nvPicPr>
+        <p:blipFill>
+          <a:blip r:embed="rId1">
+            <a:extLst>
+              <a:ext uri="{96DAC541-7B7A-43D3-8B79-37D633B846F1}">
+                <asvg:svgBlip xmlns:asvg="http://schemas.microsoft.com/office/drawing/2016/SVG/main" r:embed="rId2"/>
+              </a:ext>
+            </a:extLst>
+          </a:blip>
+          <a:stretch>
+            <a:fillRect/>
+          </a:stretch>
+        </p:blipFill>
+        <p:spPr>
+          <a:xfrm>
+            <a:off x="914400" y="1417320"/>
+            <a:ext cx="10241280" cy="4526280"/>
           </a:xfrm>
           <a:prstGeom prst="rect">
             <a:avLst/>
           </a:prstGeom>
-          <a:solidFill>
-            <a:srgbClr val="111827"/>
-          </a:solidFill>
-          <a:ln w="12700">
-            <a:solidFill>
-              <a:srgbClr val="111827">
-                <a:alpha val="0"/>
-              </a:srgbClr>
-            </a:solidFill>
-            <a:prstDash val="solid"/>
-          </a:ln>
-        </p:spPr>
-      </p:sp>
-      <p:sp>
-        <p:nvSpPr>
-          <p:cNvPr id="5" name="Text 3"/>
+        </p:spPr>
+      </p:pic>
+      <p:sp>
+        <p:nvSpPr>
+          <p:cNvPr id="5" name="mdpr:table-and-text-coherence-6ef8a2:title:__title:table-and-text-coherence-6ef8a2"/>
           <p:cNvSpPr txBox="1"/>
           <p:nvPr/>
         </p:nvSpPr>
@@ -5885,9 +9979,7 @@
           <a:ln/>
         </p:spPr>
         <p:txBody>
-          <a:bodyPr wrap="square" lIns="0" tIns="0" rIns="0" bIns="0" rtlCol="0" anchor="ctr">
-            <a:normAutofit/>
-          </a:bodyPr>
+          <a:bodyPr wrap="square" lIns="0" tIns="0" rIns="0" bIns="0" rtlCol="0" anchor="ctr"/>
           <a:lstStyle/>
           <a:p>
             <a:pPr algn="ctr" indent="0" marL="0">
@@ -5913,7 +10005,7 @@
       </p:sp>
       <p:graphicFrame>
         <p:nvGraphicFramePr>
-          <p:cNvPr id="8" name="Table 0"/>
+          <p:cNvPr id="8" name="mdpr:table-and-text-coherence-6ef8a2:table:block-15"/>
           <p:cNvGraphicFramePr>
             <a:graphicFrameLocks noGrp="1"/>
           </p:cNvGraphicFramePr>
@@ -5926,8 +10018,8 @@
           </p:nvPr>
         </p:nvGraphicFramePr>
         <p:xfrm>
-          <a:off x="914400" y="1463040"/>
-          <a:ext cx="10241280" cy="4480560"/>
+          <a:off x="914400" y="1417320"/>
+          <a:ext cx="10241280" cy="4526280"/>
         </p:xfrm>
         <a:graphic>
           <a:graphicData uri="http://schemas.openxmlformats.org/drawingml/2006/table">
@@ -5938,7 +10030,7 @@
                 <a:gridCol w="3413760"/>
                 <a:gridCol w="3413760"/>
               </a:tblGrid>
-              <a:tr h="896112">
+              <a:tr h="905256">
                 <a:tc>
                   <a:txBody>
                     <a:bodyPr/>
@@ -5948,7 +10040,7 @@
                         <a:buNone/>
                       </a:pPr>
                       <a:r>
-                        <a:rPr lang="en-US" sz="2200" b="1" dirty="0">
+                        <a:rPr lang="en-US" sz="1800" b="1" dirty="0">
                           <a:solidFill>
                             <a:srgbClr val="FFFFFF"/>
                           </a:solidFill>
@@ -5958,7 +10050,7 @@
                         </a:rPr>
                         <a:t>Requirement</a:t>
                       </a:r>
-                      <a:endParaRPr lang="en-US" sz="2200" dirty="0">
+                      <a:endParaRPr lang="en-US" sz="1800" dirty="0">
                         <a:latin typeface="Pretendard" charset="0"/>
                         <a:ea typeface="Pretendard" charset="0"/>
                         <a:cs typeface="Pretendard" charset="0"/>
@@ -6016,7 +10108,7 @@
                         <a:buNone/>
                       </a:pPr>
                       <a:r>
-                        <a:rPr lang="en-US" sz="2200" b="1" dirty="0">
+                        <a:rPr lang="en-US" sz="1800" b="1" dirty="0">
                           <a:solidFill>
                             <a:srgbClr val="FFFFFF"/>
                           </a:solidFill>
@@ -6026,7 +10118,7 @@
                         </a:rPr>
                         <a:t>Rule</a:t>
                       </a:r>
-                      <a:endParaRPr lang="en-US" sz="2200" dirty="0">
+                      <a:endParaRPr lang="en-US" sz="1800" dirty="0">
                         <a:latin typeface="Pretendard" charset="0"/>
                         <a:ea typeface="Pretendard" charset="0"/>
                         <a:cs typeface="Pretendard" charset="0"/>
@@ -6084,7 +10176,7 @@
                         <a:buNone/>
                       </a:pPr>
                       <a:r>
-                        <a:rPr lang="en-US" sz="2200" b="1" dirty="0">
+                        <a:rPr lang="en-US" sz="1800" b="1" dirty="0">
                           <a:solidFill>
                             <a:srgbClr val="FFFFFF"/>
                           </a:solidFill>
@@ -6094,7 +10186,7 @@
                         </a:rPr>
                         <a:t>Visual Check</a:t>
                       </a:r>
-                      <a:endParaRPr lang="en-US" sz="2200" dirty="0">
+                      <a:endParaRPr lang="en-US" sz="1800" dirty="0">
                         <a:latin typeface="Pretendard" charset="0"/>
                         <a:ea typeface="Pretendard" charset="0"/>
                         <a:cs typeface="Pretendard" charset="0"/>
@@ -6144,7 +10236,7 @@
                   </a:tcPr>
                 </a:tc>
               </a:tr>
-              <a:tr h="896112">
+              <a:tr h="905256">
                 <a:tc>
                   <a:txBody>
                     <a:bodyPr/>
@@ -6154,7 +10246,7 @@
                         <a:buNone/>
                       </a:pPr>
                       <a:r>
-                        <a:rPr lang="en-US" sz="2200" b="1" dirty="0">
+                        <a:rPr lang="en-US" sz="1800" b="1" dirty="0">
                           <a:solidFill>
                             <a:srgbClr val="111827"/>
                           </a:solidFill>
@@ -6164,7 +10256,7 @@
                         </a:rPr>
                         <a:t>Shape text</a:t>
                       </a:r>
-                      <a:endParaRPr lang="en-US" sz="2200" dirty="0">
+                      <a:endParaRPr lang="en-US" sz="1800" dirty="0">
                         <a:latin typeface="Pretendard" charset="0"/>
                         <a:ea typeface="Pretendard" charset="0"/>
                         <a:cs typeface="Pretendard" charset="0"/>
@@ -6219,7 +10311,7 @@
                         <a:buNone/>
                       </a:pPr>
                       <a:r>
-                        <a:rPr lang="en-US" sz="2200" dirty="0">
+                        <a:rPr lang="en-US" sz="1800" dirty="0">
                           <a:solidFill>
                             <a:srgbClr val="111827"/>
                           </a:solidFill>
@@ -6229,7 +10321,7 @@
                         </a:rPr>
                         <a:t>Middle anchor plus readable insets</a:t>
                       </a:r>
-                      <a:endParaRPr lang="en-US" sz="2200" dirty="0">
+                      <a:endParaRPr lang="en-US" sz="1800" dirty="0">
                         <a:latin typeface="Pretendard" charset="0"/>
                         <a:ea typeface="Pretendard" charset="0"/>
                         <a:cs typeface="Pretendard" charset="0"/>
@@ -6284,7 +10376,7 @@
                         <a:buNone/>
                       </a:pPr>
                       <a:r>
-                        <a:rPr lang="en-US" sz="2200" dirty="0">
+                        <a:rPr lang="en-US" sz="1800" dirty="0">
                           <a:solidFill>
                             <a:srgbClr val="111827"/>
                           </a:solidFill>
@@ -6294,7 +10386,7 @@
                         </a:rPr>
                         <a:t>No text touches a border</a:t>
                       </a:r>
-                      <a:endParaRPr lang="en-US" sz="2200" dirty="0">
+                      <a:endParaRPr lang="en-US" sz="1800" dirty="0">
                         <a:latin typeface="Pretendard" charset="0"/>
                         <a:ea typeface="Pretendard" charset="0"/>
                         <a:cs typeface="Pretendard" charset="0"/>
@@ -6341,7 +10433,7 @@
                   </a:tcPr>
                 </a:tc>
               </a:tr>
-              <a:tr h="896112">
+              <a:tr h="905256">
                 <a:tc>
                   <a:txBody>
                     <a:bodyPr/>
@@ -6351,7 +10443,7 @@
                         <a:buNone/>
                       </a:pPr>
                       <a:r>
-                        <a:rPr lang="en-US" sz="2200" b="1" dirty="0">
+                        <a:rPr lang="en-US" sz="1800" b="1" dirty="0">
                           <a:solidFill>
                             <a:srgbClr val="111827"/>
                           </a:solidFill>
@@ -6361,7 +10453,7 @@
                         </a:rPr>
                         <a:t>Table text</a:t>
                       </a:r>
-                      <a:endParaRPr lang="en-US" sz="2200" dirty="0">
+                      <a:endParaRPr lang="en-US" sz="1800" dirty="0">
                         <a:latin typeface="Pretendard" charset="0"/>
                         <a:ea typeface="Pretendard" charset="0"/>
                         <a:cs typeface="Pretendard" charset="0"/>
@@ -6421,7 +10513,7 @@
                         <a:buNone/>
                       </a:pPr>
                       <a:r>
-                        <a:rPr lang="en-US" sz="2200" dirty="0">
+                        <a:rPr lang="en-US" sz="1800" dirty="0">
                           <a:solidFill>
                             <a:srgbClr val="111827"/>
                           </a:solidFill>
@@ -6431,7 +10523,7 @@
                         </a:rPr>
                         <a:t>Header emphasis and row labels</a:t>
                       </a:r>
-                      <a:endParaRPr lang="en-US" sz="2200" dirty="0">
+                      <a:endParaRPr lang="en-US" sz="1800" dirty="0">
                         <a:latin typeface="Pretendard" charset="0"/>
                         <a:ea typeface="Pretendard" charset="0"/>
                         <a:cs typeface="Pretendard" charset="0"/>
@@ -6491,7 +10583,7 @@
                         <a:buNone/>
                       </a:pPr>
                       <a:r>
-                        <a:rPr lang="en-US" sz="2200" dirty="0">
+                        <a:rPr lang="en-US" sz="1800" dirty="0">
                           <a:solidFill>
                             <a:srgbClr val="111827"/>
                           </a:solidFill>
@@ -6501,7 +10593,7 @@
                         </a:rPr>
                         <a:t>Cells keep row grammar</a:t>
                       </a:r>
-                      <a:endParaRPr lang="en-US" sz="2200" dirty="0">
+                      <a:endParaRPr lang="en-US" sz="1800" dirty="0">
                         <a:latin typeface="Pretendard" charset="0"/>
                         <a:ea typeface="Pretendard" charset="0"/>
                         <a:cs typeface="Pretendard" charset="0"/>
@@ -6553,7 +10645,7 @@
                   </a:tcPr>
                 </a:tc>
               </a:tr>
-              <a:tr h="896112">
+              <a:tr h="905256">
                 <a:tc>
                   <a:txBody>
                     <a:bodyPr/>
@@ -6563,7 +10655,7 @@
                         <a:buNone/>
                       </a:pPr>
                       <a:r>
-                        <a:rPr lang="en-US" sz="2200" b="1" dirty="0">
+                        <a:rPr lang="en-US" sz="1800" b="1" dirty="0">
                           <a:solidFill>
                             <a:srgbClr val="111827"/>
                           </a:solidFill>
@@ -6573,7 +10665,7 @@
                         </a:rPr>
                         <a:t>Bullet markers</a:t>
                       </a:r>
-                      <a:endParaRPr lang="en-US" sz="2200" dirty="0">
+                      <a:endParaRPr lang="en-US" sz="1800" dirty="0">
                         <a:latin typeface="Pretendard" charset="0"/>
                         <a:ea typeface="Pretendard" charset="0"/>
                         <a:cs typeface="Pretendard" charset="0"/>
@@ -6628,7 +10720,7 @@
                         <a:buNone/>
                       </a:pPr>
                       <a:r>
-                        <a:rPr lang="en-US" sz="2200" dirty="0">
+                        <a:rPr lang="en-US" sz="1800" dirty="0">
                           <a:solidFill>
                             <a:srgbClr val="111827"/>
                           </a:solidFill>
@@ -6638,7 +10730,7 @@
                         </a:rPr>
                         <a:t>Marker and text share a centerline</a:t>
                       </a:r>
-                      <a:endParaRPr lang="en-US" sz="2200" dirty="0">
+                      <a:endParaRPr lang="en-US" sz="1800" dirty="0">
                         <a:latin typeface="Pretendard" charset="0"/>
                         <a:ea typeface="Pretendard" charset="0"/>
                         <a:cs typeface="Pretendard" charset="0"/>
@@ -6693,7 +10785,7 @@
                         <a:buNone/>
                       </a:pPr>
                       <a:r>
-                        <a:rPr lang="en-US" sz="2200" dirty="0">
+                        <a:rPr lang="en-US" sz="1800" dirty="0">
                           <a:solidFill>
                             <a:srgbClr val="111827"/>
                           </a:solidFill>
@@ -6703,7 +10795,7 @@
                         </a:rPr>
                         <a:t>No low or drifting glyphs</a:t>
                       </a:r>
-                      <a:endParaRPr lang="en-US" sz="2200" dirty="0">
+                      <a:endParaRPr lang="en-US" sz="1800" dirty="0">
                         <a:latin typeface="Pretendard" charset="0"/>
                         <a:ea typeface="Pretendard" charset="0"/>
                         <a:cs typeface="Pretendard" charset="0"/>
@@ -6750,7 +10842,7 @@
                   </a:tcPr>
                 </a:tc>
               </a:tr>
-              <a:tr h="896112">
+              <a:tr h="905256">
                 <a:tc>
                   <a:txBody>
                     <a:bodyPr/>
@@ -6760,7 +10852,7 @@
                         <a:buNone/>
                       </a:pPr>
                       <a:r>
-                        <a:rPr lang="en-US" sz="2200" b="1" dirty="0">
+                        <a:rPr lang="en-US" sz="1800" b="1" dirty="0">
                           <a:solidFill>
                             <a:srgbClr val="111827"/>
                           </a:solidFill>
@@ -6770,7 +10862,7 @@
                         </a:rPr>
                         <a:t>Color usage</a:t>
                       </a:r>
-                      <a:endParaRPr lang="en-US" sz="2200" dirty="0">
+                      <a:endParaRPr lang="en-US" sz="1800" dirty="0">
                         <a:latin typeface="Pretendard" charset="0"/>
                         <a:ea typeface="Pretendard" charset="0"/>
                         <a:cs typeface="Pretendard" charset="0"/>
@@ -6830,7 +10922,7 @@
                         <a:buNone/>
                       </a:pPr>
                       <a:r>
-                        <a:rPr lang="en-US" sz="2200" dirty="0">
+                        <a:rPr lang="en-US" sz="1800" dirty="0">
                           <a:solidFill>
                             <a:srgbClr val="111827"/>
                           </a:solidFill>
@@ -6840,7 +10932,7 @@
                         </a:rPr>
                         <a:t>Harmony palette only</a:t>
                       </a:r>
-                      <a:endParaRPr lang="en-US" sz="2200" dirty="0">
+                      <a:endParaRPr lang="en-US" sz="1800" dirty="0">
                         <a:latin typeface="Pretendard" charset="0"/>
                         <a:ea typeface="Pretendard" charset="0"/>
                         <a:cs typeface="Pretendard" charset="0"/>
@@ -6900,7 +10992,7 @@
                         <a:buNone/>
                       </a:pPr>
                       <a:r>
-                        <a:rPr lang="en-US" sz="2200" dirty="0">
+                        <a:rPr lang="en-US" sz="1800" dirty="0">
                           <a:solidFill>
                             <a:srgbClr val="111827"/>
                           </a:solidFill>
@@ -6910,7 +11002,7 @@
                         </a:rPr>
                         <a:t>Accent color marks real contrast</a:t>
                       </a:r>
-                      <a:endParaRPr lang="en-US" sz="2200" dirty="0">
+                      <a:endParaRPr lang="en-US" sz="1800" dirty="0">
                         <a:latin typeface="Pretendard" charset="0"/>
                         <a:ea typeface="Pretendard" charset="0"/>
                         <a:cs typeface="Pretendard" charset="0"/>
@@ -7056,8 +11148,8 @@
         </p:nvSpPr>
         <p:spPr>
           <a:xfrm>
-            <a:off x="822960" y="1463040"/>
-            <a:ext cx="73152" cy="1920240"/>
+            <a:off x="822960" y="1554480"/>
+            <a:ext cx="4937760" cy="73152"/>
           </a:xfrm>
           <a:prstGeom prst="rect">
             <a:avLst/>
@@ -7083,35 +11175,8 @@
         </p:nvSpPr>
         <p:spPr>
           <a:xfrm>
-            <a:off x="6309360" y="1463040"/>
-            <a:ext cx="73152" cy="1920240"/>
-          </a:xfrm>
-          <a:prstGeom prst="rect">
-            <a:avLst/>
-          </a:prstGeom>
-          <a:solidFill>
-            <a:srgbClr val="314163"/>
-          </a:solidFill>
-          <a:ln w="12700">
-            <a:solidFill>
-              <a:srgbClr val="314163">
-                <a:alpha val="0"/>
-              </a:srgbClr>
-            </a:solidFill>
-            <a:prstDash val="solid"/>
-          </a:ln>
-        </p:spPr>
-      </p:sp>
-      <p:sp>
-        <p:nvSpPr>
-          <p:cNvPr id="6" name="Shape 4"/>
-          <p:cNvSpPr/>
-          <p:nvPr/>
-        </p:nvSpPr>
-        <p:spPr>
-          <a:xfrm>
-            <a:off x="822960" y="3749040"/>
-            <a:ext cx="73152" cy="1920240"/>
+            <a:off x="6400800" y="1554480"/>
+            <a:ext cx="4937760" cy="73152"/>
           </a:xfrm>
           <a:prstGeom prst="rect">
             <a:avLst/>
@@ -7131,154 +11196,7 @@
       </p:sp>
       <p:sp>
         <p:nvSpPr>
-          <p:cNvPr id="7" name="Shape 5"/>
-          <p:cNvSpPr/>
-          <p:nvPr/>
-        </p:nvSpPr>
-        <p:spPr>
-          <a:xfrm>
-            <a:off x="6309360" y="3749040"/>
-            <a:ext cx="73152" cy="1920240"/>
-          </a:xfrm>
-          <a:prstGeom prst="rect">
-            <a:avLst/>
-          </a:prstGeom>
-          <a:solidFill>
-            <a:srgbClr val="314163"/>
-          </a:solidFill>
-          <a:ln w="12700">
-            <a:solidFill>
-              <a:srgbClr val="314163">
-                <a:alpha val="0"/>
-              </a:srgbClr>
-            </a:solidFill>
-            <a:prstDash val="solid"/>
-          </a:ln>
-        </p:spPr>
-      </p:sp>
-      <p:pic>
-        <p:nvPicPr>
-          <p:cNvPr id="8" name="Image 0" descr="preencoded.png">    </p:cNvPr>
-          <p:cNvPicPr>
-            <a:picLocks noChangeAspect="1"/>
-          </p:cNvPicPr>
-          <p:nvPr/>
-        </p:nvPicPr>
-        <p:blipFill>
-          <a:blip r:embed="rId1">
-            <a:extLst>
-              <a:ext uri="{96DAC541-7B7A-43D3-8B79-37D633B846F1}">
-                <asvg:svgBlip xmlns:asvg="http://schemas.microsoft.com/office/drawing/2016/SVG/main" r:embed="rId2"/>
-              </a:ext>
-            </a:extLst>
-          </a:blip>
-          <a:stretch>
-            <a:fillRect/>
-          </a:stretch>
-        </p:blipFill>
-        <p:spPr>
-          <a:xfrm>
-            <a:off x="822960" y="1463040"/>
-            <a:ext cx="5029200" cy="1920240"/>
-          </a:xfrm>
-          <a:prstGeom prst="rect">
-            <a:avLst/>
-          </a:prstGeom>
-        </p:spPr>
-      </p:pic>
-      <p:pic>
-        <p:nvPicPr>
-          <p:cNvPr id="9" name="Image 1" descr="preencoded.png">    </p:cNvPr>
-          <p:cNvPicPr>
-            <a:picLocks noChangeAspect="1"/>
-          </p:cNvPicPr>
-          <p:nvPr/>
-        </p:nvPicPr>
-        <p:blipFill>
-          <a:blip r:embed="rId3">
-            <a:extLst>
-              <a:ext uri="{96DAC541-7B7A-43D3-8B79-37D633B846F1}">
-                <asvg:svgBlip xmlns:asvg="http://schemas.microsoft.com/office/drawing/2016/SVG/main" r:embed="rId4"/>
-              </a:ext>
-            </a:extLst>
-          </a:blip>
-          <a:stretch>
-            <a:fillRect/>
-          </a:stretch>
-        </p:blipFill>
-        <p:spPr>
-          <a:xfrm>
-            <a:off x="6309360" y="1463040"/>
-            <a:ext cx="5029200" cy="1920240"/>
-          </a:xfrm>
-          <a:prstGeom prst="rect">
-            <a:avLst/>
-          </a:prstGeom>
-        </p:spPr>
-      </p:pic>
-      <p:pic>
-        <p:nvPicPr>
-          <p:cNvPr id="10" name="Image 2" descr="preencoded.png">    </p:cNvPr>
-          <p:cNvPicPr>
-            <a:picLocks noChangeAspect="1"/>
-          </p:cNvPicPr>
-          <p:nvPr/>
-        </p:nvPicPr>
-        <p:blipFill>
-          <a:blip r:embed="rId5">
-            <a:extLst>
-              <a:ext uri="{96DAC541-7B7A-43D3-8B79-37D633B846F1}">
-                <asvg:svgBlip xmlns:asvg="http://schemas.microsoft.com/office/drawing/2016/SVG/main" r:embed="rId6"/>
-              </a:ext>
-            </a:extLst>
-          </a:blip>
-          <a:stretch>
-            <a:fillRect/>
-          </a:stretch>
-        </p:blipFill>
-        <p:spPr>
-          <a:xfrm>
-            <a:off x="822960" y="3749040"/>
-            <a:ext cx="5029200" cy="1920240"/>
-          </a:xfrm>
-          <a:prstGeom prst="rect">
-            <a:avLst/>
-          </a:prstGeom>
-        </p:spPr>
-      </p:pic>
-      <p:pic>
-        <p:nvPicPr>
-          <p:cNvPr id="11" name="Image 3" descr="preencoded.png">    </p:cNvPr>
-          <p:cNvPicPr>
-            <a:picLocks noChangeAspect="1"/>
-          </p:cNvPicPr>
-          <p:nvPr/>
-        </p:nvPicPr>
-        <p:blipFill>
-          <a:blip r:embed="rId7">
-            <a:extLst>
-              <a:ext uri="{96DAC541-7B7A-43D3-8B79-37D633B846F1}">
-                <asvg:svgBlip xmlns:asvg="http://schemas.microsoft.com/office/drawing/2016/SVG/main" r:embed="rId8"/>
-              </a:ext>
-            </a:extLst>
-          </a:blip>
-          <a:stretch>
-            <a:fillRect/>
-          </a:stretch>
-        </p:blipFill>
-        <p:spPr>
-          <a:xfrm>
-            <a:off x="6309360" y="3749040"/>
-            <a:ext cx="5029200" cy="1920240"/>
-          </a:xfrm>
-          <a:prstGeom prst="rect">
-            <a:avLst/>
-          </a:prstGeom>
-        </p:spPr>
-      </p:pic>
-      <p:sp>
-        <p:nvSpPr>
-          <p:cNvPr id="12" name="Text 6"/>
+          <p:cNvPr id="6" name="mdpr:1-2-5eab8f:title:__title:1-2-5eab8f"/>
           <p:cNvSpPr txBox="1"/>
           <p:nvPr/>
         </p:nvSpPr>
@@ -7294,9 +11212,7 @@
           <a:ln/>
         </p:spPr>
         <p:txBody>
-          <a:bodyPr wrap="square" lIns="0" tIns="0" rIns="0" bIns="0" rtlCol="0" anchor="ctr">
-            <a:normAutofit/>
-          </a:bodyPr>
+          <a:bodyPr wrap="square" lIns="0" tIns="0" rIns="0" bIns="0" rtlCol="0" anchor="ctr"/>
           <a:lstStyle/>
           <a:p>
             <a:pPr algn="ctr" indent="0" marL="0">
@@ -7322,71 +11238,14 @@
       </p:sp>
       <p:sp>
         <p:nvSpPr>
-          <p:cNvPr id="13" name="Shape 7"/>
-          <p:cNvSpPr/>
-          <p:nvPr/>
-        </p:nvSpPr>
-        <p:spPr>
-          <a:xfrm>
-            <a:off x="976122" y="2130552"/>
-            <a:ext cx="585216" cy="585216"/>
-          </a:xfrm>
-          <a:prstGeom prst="roundRect">
-            <a:avLst>
-              <a:gd name="adj" fmla="val 6250"/>
-            </a:avLst>
-          </a:prstGeom>
-          <a:solidFill>
-            <a:srgbClr val="FFFFFF"/>
-          </a:solidFill>
-          <a:ln w="12700">
-            <a:solidFill>
-              <a:srgbClr val="D4D6DB"/>
-            </a:solidFill>
-            <a:prstDash val="solid"/>
-          </a:ln>
-        </p:spPr>
-      </p:sp>
-      <p:pic>
-        <p:nvPicPr>
-          <p:cNvPr id="14" name="Image 4" descr="flow icon from tabler-icons (MIT)">    </p:cNvPr>
-          <p:cNvPicPr>
-            <a:picLocks noChangeAspect="1"/>
-          </p:cNvPicPr>
-          <p:nvPr/>
-        </p:nvPicPr>
-        <p:blipFill>
-          <a:blip r:embed="rId9">
-            <a:extLst>
-              <a:ext uri="{96DAC541-7B7A-43D3-8B79-37D633B846F1}">
-                <asvg:svgBlip xmlns:asvg="http://schemas.microsoft.com/office/drawing/2016/SVG/main" r:embed="rId10"/>
-              </a:ext>
-            </a:extLst>
-          </a:blip>
-          <a:stretch>
-            <a:fillRect/>
-          </a:stretch>
-        </p:blipFill>
-        <p:spPr>
-          <a:xfrm>
-            <a:off x="1049274" y="2203704"/>
-            <a:ext cx="438912" cy="438912"/>
-          </a:xfrm>
-          <a:prstGeom prst="rect">
-            <a:avLst/>
-          </a:prstGeom>
-        </p:spPr>
-      </p:pic>
-      <p:sp>
-        <p:nvSpPr>
-          <p:cNvPr id="15" name="Text 8"/>
+          <p:cNvPr id="7" name="mdpr:1-2-5eab8f:left:block-17-chunk-1"/>
           <p:cNvSpPr txBox="1"/>
           <p:nvPr/>
         </p:nvSpPr>
         <p:spPr>
           <a:xfrm>
-            <a:off x="1689354" y="1627632"/>
-            <a:ext cx="3961638" cy="1591056"/>
+            <a:off x="896112" y="1664208"/>
+            <a:ext cx="4791456" cy="4169664"/>
           </a:xfrm>
           <a:prstGeom prst="rect">
             <a:avLst/>
@@ -7395,9 +11254,7 @@
           <a:ln/>
         </p:spPr>
         <p:txBody>
-          <a:bodyPr wrap="square" lIns="0" tIns="25400" rIns="25400" bIns="0" rtlCol="0" anchor="ctr">
-            <a:normAutofit/>
-          </a:bodyPr>
+          <a:bodyPr wrap="square" lIns="0" tIns="25400" rIns="25400" bIns="0" rtlCol="0" anchor="t"/>
           <a:lstStyle/>
           <a:p>
             <a:pPr algn="l" indent="0" marL="0">
@@ -7415,7 +11272,7 @@
                 <a:ea typeface="Pretendard" pitchFamily="34" charset="-122"/>
                 <a:cs typeface="Pretendard" pitchFamily="34" charset="-120"/>
               </a:rPr>
-              <a:t>Constraint</a:t>
+              <a:t>- Constraint</a:t>
             </a:r>
             <a:pPr algn="l" indent="0" marL="0">
               <a:lnSpc>
@@ -7440,71 +11297,14 @@
       </p:sp>
       <p:sp>
         <p:nvSpPr>
-          <p:cNvPr id="16" name="Shape 9"/>
-          <p:cNvSpPr/>
-          <p:nvPr/>
-        </p:nvSpPr>
-        <p:spPr>
-          <a:xfrm>
-            <a:off x="6462522" y="2130552"/>
-            <a:ext cx="585216" cy="585216"/>
-          </a:xfrm>
-          <a:prstGeom prst="roundRect">
-            <a:avLst>
-              <a:gd name="adj" fmla="val 6250"/>
-            </a:avLst>
-          </a:prstGeom>
-          <a:solidFill>
-            <a:srgbClr val="FFFFFF"/>
-          </a:solidFill>
-          <a:ln w="12700">
-            <a:solidFill>
-              <a:srgbClr val="D4D6DB"/>
-            </a:solidFill>
-            <a:prstDash val="solid"/>
-          </a:ln>
-        </p:spPr>
-      </p:sp>
-      <p:pic>
-        <p:nvPicPr>
-          <p:cNvPr id="17" name="Image 5" descr="verified icon from tabler-icons (MIT)">    </p:cNvPr>
-          <p:cNvPicPr>
-            <a:picLocks noChangeAspect="1"/>
-          </p:cNvPicPr>
-          <p:nvPr/>
-        </p:nvPicPr>
-        <p:blipFill>
-          <a:blip r:embed="rId11">
-            <a:extLst>
-              <a:ext uri="{96DAC541-7B7A-43D3-8B79-37D633B846F1}">
-                <asvg:svgBlip xmlns:asvg="http://schemas.microsoft.com/office/drawing/2016/SVG/main" r:embed="rId12"/>
-              </a:ext>
-            </a:extLst>
-          </a:blip>
-          <a:stretch>
-            <a:fillRect/>
-          </a:stretch>
-        </p:blipFill>
-        <p:spPr>
-          <a:xfrm>
-            <a:off x="6535674" y="2203704"/>
-            <a:ext cx="438912" cy="438912"/>
-          </a:xfrm>
-          <a:prstGeom prst="rect">
-            <a:avLst/>
-          </a:prstGeom>
-        </p:spPr>
-      </p:pic>
-      <p:sp>
-        <p:nvSpPr>
-          <p:cNvPr id="18" name="Text 10"/>
+          <p:cNvPr id="8" name="mdpr:1-2-5eab8f:right:block-17-chunk-1"/>
           <p:cNvSpPr txBox="1"/>
           <p:nvPr/>
         </p:nvSpPr>
         <p:spPr>
           <a:xfrm>
-            <a:off x="7175754" y="1627632"/>
-            <a:ext cx="3961638" cy="1591056"/>
+            <a:off x="6473952" y="1664208"/>
+            <a:ext cx="4791456" cy="4169664"/>
           </a:xfrm>
           <a:prstGeom prst="rect">
             <a:avLst/>
@@ -7513,9 +11313,7 @@
           <a:ln/>
         </p:spPr>
         <p:txBody>
-          <a:bodyPr wrap="square" lIns="0" tIns="25400" rIns="25400" bIns="0" rtlCol="0" anchor="ctr">
-            <a:normAutofit/>
-          </a:bodyPr>
+          <a:bodyPr wrap="square" lIns="0" tIns="25400" rIns="25400" bIns="0" rtlCol="0" anchor="t"/>
           <a:lstStyle/>
           <a:p>
             <a:pPr algn="l" indent="0" marL="0">
@@ -7533,7 +11331,7 @@
                 <a:ea typeface="Pretendard" pitchFamily="34" charset="-122"/>
                 <a:cs typeface="Pretendard" pitchFamily="34" charset="-120"/>
               </a:rPr>
-              <a:t>Evidence</a:t>
+              <a:t>- Evidence</a:t>
             </a:r>
             <a:pPr algn="l" indent="0" marL="0">
               <a:lnSpc>
@@ -7551,242 +11349,6 @@
                 <a:cs typeface="Pretendard" pitchFamily="34" charset="-120"/>
               </a:rPr>
               <a:t>  Important proof points may receive a contrast chip, but sibling objects keep one grammar.</a:t>
-            </a:r>
-            <a:endParaRPr lang="en-US" sz="2200" dirty="0"/>
-          </a:p>
-        </p:txBody>
-      </p:sp>
-      <p:sp>
-        <p:nvSpPr>
-          <p:cNvPr id="19" name="Shape 11"/>
-          <p:cNvSpPr/>
-          <p:nvPr/>
-        </p:nvSpPr>
-        <p:spPr>
-          <a:xfrm>
-            <a:off x="976122" y="4416552"/>
-            <a:ext cx="585216" cy="585216"/>
-          </a:xfrm>
-          <a:prstGeom prst="roundRect">
-            <a:avLst>
-              <a:gd name="adj" fmla="val 6250"/>
-            </a:avLst>
-          </a:prstGeom>
-          <a:solidFill>
-            <a:srgbClr val="FFFFFF"/>
-          </a:solidFill>
-          <a:ln w="12700">
-            <a:solidFill>
-              <a:srgbClr val="D4D6DB"/>
-            </a:solidFill>
-            <a:prstDash val="solid"/>
-          </a:ln>
-        </p:spPr>
-      </p:sp>
-      <p:pic>
-        <p:nvPicPr>
-          <p:cNvPr id="20" name="Image 6" descr="spark icon from tabler-icons (MIT)">    </p:cNvPr>
-          <p:cNvPicPr>
-            <a:picLocks noChangeAspect="1"/>
-          </p:cNvPicPr>
-          <p:nvPr/>
-        </p:nvPicPr>
-        <p:blipFill>
-          <a:blip r:embed="rId13">
-            <a:extLst>
-              <a:ext uri="{96DAC541-7B7A-43D3-8B79-37D633B846F1}">
-                <asvg:svgBlip xmlns:asvg="http://schemas.microsoft.com/office/drawing/2016/SVG/main" r:embed="rId14"/>
-              </a:ext>
-            </a:extLst>
-          </a:blip>
-          <a:stretch>
-            <a:fillRect/>
-          </a:stretch>
-        </p:blipFill>
-        <p:spPr>
-          <a:xfrm>
-            <a:off x="1049274" y="4489704"/>
-            <a:ext cx="438912" cy="438912"/>
-          </a:xfrm>
-          <a:prstGeom prst="rect">
-            <a:avLst/>
-          </a:prstGeom>
-        </p:spPr>
-      </p:pic>
-      <p:sp>
-        <p:nvSpPr>
-          <p:cNvPr id="21" name="Text 12"/>
-          <p:cNvSpPr txBox="1"/>
-          <p:nvPr/>
-        </p:nvSpPr>
-        <p:spPr>
-          <a:xfrm>
-            <a:off x="1689354" y="3913632"/>
-            <a:ext cx="3961638" cy="1591056"/>
-          </a:xfrm>
-          <a:prstGeom prst="rect">
-            <a:avLst/>
-          </a:prstGeom>
-          <a:noFill/>
-          <a:ln/>
-        </p:spPr>
-        <p:txBody>
-          <a:bodyPr wrap="square" lIns="0" tIns="25400" rIns="25400" bIns="0" rtlCol="0" anchor="ctr">
-            <a:normAutofit/>
-          </a:bodyPr>
-          <a:lstStyle/>
-          <a:p>
-            <a:pPr algn="l" indent="0" marL="0">
-              <a:lnSpc>
-                <a:spcPct val="120000"/>
-              </a:lnSpc>
-              <a:buNone/>
-            </a:pPr>
-            <a:r>
-              <a:rPr lang="en-US" sz="2200" b="1" dirty="0">
-                <a:solidFill>
-                  <a:srgbClr val="111827"/>
-                </a:solidFill>
-                <a:latin typeface="Pretendard" pitchFamily="34" charset="0"/>
-                <a:ea typeface="Pretendard" pitchFamily="34" charset="-122"/>
-                <a:cs typeface="Pretendard" pitchFamily="34" charset="-120"/>
-              </a:rPr>
-              <a:t>Image need</a:t>
-            </a:r>
-            <a:pPr algn="l" indent="0" marL="0">
-              <a:lnSpc>
-                <a:spcPct val="120000"/>
-              </a:lnSpc>
-              <a:buNone/>
-            </a:pPr>
-            <a:r>
-              <a:rPr lang="en-US" sz="2200" dirty="0">
-                <a:solidFill>
-                  <a:srgbClr val="111827"/>
-                </a:solidFill>
-                <a:latin typeface="Pretendard" pitchFamily="34" charset="0"/>
-                <a:ea typeface="Pretendard" pitchFamily="34" charset="-122"/>
-                <a:cs typeface="Pretendard" pitchFamily="34" charset="-120"/>
-              </a:rPr>
-              <a:t>  Image sidecars are reserved only when the source contains or requires an image.</a:t>
-            </a:r>
-            <a:endParaRPr lang="en-US" sz="2200" dirty="0"/>
-          </a:p>
-        </p:txBody>
-      </p:sp>
-      <p:sp>
-        <p:nvSpPr>
-          <p:cNvPr id="22" name="Shape 13"/>
-          <p:cNvSpPr/>
-          <p:nvPr/>
-        </p:nvSpPr>
-        <p:spPr>
-          <a:xfrm>
-            <a:off x="6462522" y="4416552"/>
-            <a:ext cx="585216" cy="585216"/>
-          </a:xfrm>
-          <a:prstGeom prst="roundRect">
-            <a:avLst>
-              <a:gd name="adj" fmla="val 6250"/>
-            </a:avLst>
-          </a:prstGeom>
-          <a:solidFill>
-            <a:srgbClr val="FFFFFF"/>
-          </a:solidFill>
-          <a:ln w="12700">
-            <a:solidFill>
-              <a:srgbClr val="D4D6DB"/>
-            </a:solidFill>
-            <a:prstDash val="solid"/>
-          </a:ln>
-        </p:spPr>
-      </p:sp>
-      <p:pic>
-        <p:nvPicPr>
-          <p:cNvPr id="23" name="Image 7" descr="chart icon from tabler-icons (MIT)">    </p:cNvPr>
-          <p:cNvPicPr>
-            <a:picLocks noChangeAspect="1"/>
-          </p:cNvPicPr>
-          <p:nvPr/>
-        </p:nvPicPr>
-        <p:blipFill>
-          <a:blip r:embed="rId15">
-            <a:extLst>
-              <a:ext uri="{96DAC541-7B7A-43D3-8B79-37D633B846F1}">
-                <asvg:svgBlip xmlns:asvg="http://schemas.microsoft.com/office/drawing/2016/SVG/main" r:embed="rId16"/>
-              </a:ext>
-            </a:extLst>
-          </a:blip>
-          <a:stretch>
-            <a:fillRect/>
-          </a:stretch>
-        </p:blipFill>
-        <p:spPr>
-          <a:xfrm>
-            <a:off x="6535674" y="4489704"/>
-            <a:ext cx="438912" cy="438912"/>
-          </a:xfrm>
-          <a:prstGeom prst="rect">
-            <a:avLst/>
-          </a:prstGeom>
-        </p:spPr>
-      </p:pic>
-      <p:sp>
-        <p:nvSpPr>
-          <p:cNvPr id="24" name="Text 14"/>
-          <p:cNvSpPr txBox="1"/>
-          <p:nvPr/>
-        </p:nvSpPr>
-        <p:spPr>
-          <a:xfrm>
-            <a:off x="7175754" y="3913632"/>
-            <a:ext cx="3961638" cy="1591056"/>
-          </a:xfrm>
-          <a:prstGeom prst="rect">
-            <a:avLst/>
-          </a:prstGeom>
-          <a:noFill/>
-          <a:ln/>
-        </p:spPr>
-        <p:txBody>
-          <a:bodyPr wrap="square" lIns="0" tIns="25400" rIns="25400" bIns="0" rtlCol="0" anchor="ctr">
-            <a:normAutofit/>
-          </a:bodyPr>
-          <a:lstStyle/>
-          <a:p>
-            <a:pPr algn="l" indent="0" marL="0">
-              <a:lnSpc>
-                <a:spcPct val="120000"/>
-              </a:lnSpc>
-              <a:buNone/>
-            </a:pPr>
-            <a:r>
-              <a:rPr lang="en-US" sz="2200" b="1" dirty="0">
-                <a:solidFill>
-                  <a:srgbClr val="111827"/>
-                </a:solidFill>
-                <a:latin typeface="Pretendard" pitchFamily="34" charset="0"/>
-                <a:ea typeface="Pretendard" pitchFamily="34" charset="-122"/>
-                <a:cs typeface="Pretendard" pitchFamily="34" charset="-120"/>
-              </a:rPr>
-              <a:t>Density</a:t>
-            </a:r>
-            <a:pPr algn="l" indent="0" marL="0">
-              <a:lnSpc>
-                <a:spcPct val="120000"/>
-              </a:lnSpc>
-              <a:buNone/>
-            </a:pPr>
-            <a:r>
-              <a:rPr lang="en-US" sz="2200" dirty="0">
-                <a:solidFill>
-                  <a:srgbClr val="111827"/>
-                </a:solidFill>
-                <a:latin typeface="Pretendard" pitchFamily="34" charset="0"/>
-                <a:ea typeface="Pretendard" pitchFamily="34" charset="-122"/>
-                <a:cs typeface="Pretendard" pitchFamily="34" charset="-120"/>
-              </a:rPr>
-              <a:t>  Dense tables and code blocks reduce decoration before shrinking below the readable font floor.</a:t>
             </a:r>
             <a:endParaRPr lang="en-US" sz="2200" dirty="0"/>
           </a:p>
@@ -7882,8 +11444,8 @@
         </p:nvSpPr>
         <p:spPr>
           <a:xfrm>
-            <a:off x="914400" y="1463040"/>
-            <a:ext cx="10241280" cy="73152"/>
+            <a:off x="822960" y="1554480"/>
+            <a:ext cx="4937760" cy="73152"/>
           </a:xfrm>
           <a:prstGeom prst="rect">
             <a:avLst/>
@@ -7903,7 +11465,34 @@
       </p:sp>
       <p:sp>
         <p:nvSpPr>
-          <p:cNvPr id="5" name="Text 3"/>
+          <p:cNvPr id="5" name="Shape 3"/>
+          <p:cNvSpPr/>
+          <p:nvPr/>
+        </p:nvSpPr>
+        <p:spPr>
+          <a:xfrm>
+            <a:off x="6400800" y="1554480"/>
+            <a:ext cx="4937760" cy="73152"/>
+          </a:xfrm>
+          <a:prstGeom prst="rect">
+            <a:avLst/>
+          </a:prstGeom>
+          <a:solidFill>
+            <a:srgbClr val="111827"/>
+          </a:solidFill>
+          <a:ln w="12700">
+            <a:solidFill>
+              <a:srgbClr val="111827">
+                <a:alpha val="0"/>
+              </a:srgbClr>
+            </a:solidFill>
+            <a:prstDash val="solid"/>
+          </a:ln>
+        </p:spPr>
+      </p:sp>
+      <p:sp>
+        <p:nvSpPr>
+          <p:cNvPr id="6" name="mdpr:2-2-db6c82:title:__title:2-2-db6c82"/>
           <p:cNvSpPr txBox="1"/>
           <p:nvPr/>
         </p:nvSpPr>
@@ -7919,9 +11508,7 @@
           <a:ln/>
         </p:spPr>
         <p:txBody>
-          <a:bodyPr wrap="square" lIns="0" tIns="0" rIns="0" bIns="0" rtlCol="0" anchor="ctr">
-            <a:normAutofit/>
-          </a:bodyPr>
+          <a:bodyPr wrap="square" lIns="0" tIns="0" rIns="0" bIns="0" rtlCol="0" anchor="ctr"/>
           <a:lstStyle/>
           <a:p>
             <a:pPr algn="ctr" indent="0" marL="0">
@@ -7939,3038 +11526,130 @@
                 <a:ea typeface="Pretendard" pitchFamily="34" charset="-122"/>
                 <a:cs typeface="Pretendard" pitchFamily="34" charset="-120"/>
               </a:rPr>
-              <a:t>Theme Matrix</a:t>
+              <a:t>Decoration Selection Inputs (Cont. 2/2)</a:t>
             </a:r>
             <a:endParaRPr lang="en-US" sz="3400" dirty="0"/>
           </a:p>
         </p:txBody>
       </p:sp>
-      <p:graphicFrame>
-        <p:nvGraphicFramePr>
-          <p:cNvPr id="10" name="Table 0"/>
-          <p:cNvGraphicFramePr>
-            <a:graphicFrameLocks noGrp="1"/>
-          </p:cNvGraphicFramePr>
-          <p:nvPr>
-            <p:extLst>
-              <p:ext uri="{D42A27DB-BD31-4B8C-83A1-F6EECF244321}">
-                <p14:modId xmlns:p14="http://schemas.microsoft.com/office/powerpoint/2010/main" val="1579011935"/>
-              </p:ext>
-            </p:extLst>
-          </p:nvPr>
-        </p:nvGraphicFramePr>
-        <p:xfrm>
-          <a:off x="914400" y="1463040"/>
-          <a:ext cx="10241280" cy="4480560"/>
-        </p:xfrm>
-        <a:graphic>
-          <a:graphicData uri="http://schemas.openxmlformats.org/drawingml/2006/table">
-            <a:tbl>
-              <a:tblPr/>
-              <a:tblGrid>
-                <a:gridCol w="2560320"/>
-                <a:gridCol w="2560320"/>
-                <a:gridCol w="2560320"/>
-                <a:gridCol w="2560320"/>
-              </a:tblGrid>
-              <a:tr h="407324">
-                <a:tc>
-                  <a:txBody>
-                    <a:bodyPr/>
-                    <a:lstStyle/>
-                    <a:p>
-                      <a:pPr algn="ctr" indent="0" marL="0">
-                        <a:buNone/>
-                      </a:pPr>
-                      <a:r>
-                        <a:rPr lang="en-US" sz="1900" b="1" dirty="0">
-                          <a:solidFill>
-                            <a:srgbClr val="FFFFFF"/>
-                          </a:solidFill>
-                          <a:latin typeface="Pretendard" pitchFamily="34" charset="0"/>
-                          <a:ea typeface="Pretendard" pitchFamily="34" charset="-122"/>
-                          <a:cs typeface="Pretendard" pitchFamily="34" charset="-120"/>
-                        </a:rPr>
-                        <a:t>Style</a:t>
-                      </a:r>
-                      <a:endParaRPr lang="en-US" sz="1900" dirty="0">
-                        <a:latin typeface="Pretendard" charset="0"/>
-                        <a:ea typeface="Pretendard" charset="0"/>
-                        <a:cs typeface="Pretendard" charset="0"/>
-                      </a:endParaRPr>
-                    </a:p>
-                  </a:txBody>
-                  <a:tcPr marL="54864" marR="54864" marT="36576" marB="36576" anchor="ctr">
-                    <a:lnL w="12700" cap="flat" cmpd="sng" algn="ctr">
-                      <a:solidFill>
-                        <a:srgbClr val="D4D6DB"/>
-                      </a:solidFill>
-                      <a:prstDash val="solid"/>
-                      <a:round/>
-                      <a:headEnd type="none" w="med" len="med"/>
-                      <a:tailEnd type="none" w="med" len="med"/>
-                    </a:lnL>
-                    <a:lnR w="12700" cap="flat" cmpd="sng" algn="ctr">
-                      <a:solidFill>
-                        <a:srgbClr val="D4D6DB"/>
-                      </a:solidFill>
-                      <a:prstDash val="solid"/>
-                      <a:round/>
-                      <a:headEnd type="none" w="med" len="med"/>
-                      <a:tailEnd type="none" w="med" len="med"/>
-                    </a:lnR>
-                    <a:lnT w="12700" cap="flat" cmpd="sng" algn="ctr">
-                      <a:solidFill>
-                        <a:srgbClr val="D4D6DB"/>
-                      </a:solidFill>
-                      <a:prstDash val="solid"/>
-                      <a:round/>
-                      <a:headEnd type="none" w="med" len="med"/>
-                      <a:tailEnd type="none" w="med" len="med"/>
-                    </a:lnT>
-                    <a:lnB w="12700" cap="flat" cmpd="sng" algn="ctr">
-                      <a:solidFill>
-                        <a:srgbClr val="D4D6DB"/>
-                      </a:solidFill>
-                      <a:prstDash val="solid"/>
-                      <a:round/>
-                      <a:headEnd type="none" w="med" len="med"/>
-                      <a:tailEnd type="none" w="med" len="med"/>
-                    </a:lnB>
-                    <a:solidFill>
-                      <a:srgbClr val="111827"/>
-                    </a:solidFill>
-                  </a:tcPr>
-                </a:tc>
-                <a:tc>
-                  <a:txBody>
-                    <a:bodyPr/>
-                    <a:lstStyle/>
-                    <a:p>
-                      <a:pPr algn="ctr" indent="0" marL="0">
-                        <a:buNone/>
-                      </a:pPr>
-                      <a:r>
-                        <a:rPr lang="en-US" sz="1900" b="1" dirty="0">
-                          <a:solidFill>
-                            <a:srgbClr val="FFFFFF"/>
-                          </a:solidFill>
-                          <a:latin typeface="Pretendard" pitchFamily="34" charset="0"/>
-                          <a:ea typeface="Pretendard" pitchFamily="34" charset="-122"/>
-                          <a:cs typeface="Pretendard" pitchFamily="34" charset="-120"/>
-                        </a:rPr>
-                        <a:t>Main Color</a:t>
-                      </a:r>
-                      <a:endParaRPr lang="en-US" sz="1900" dirty="0">
-                        <a:latin typeface="Pretendard" charset="0"/>
-                        <a:ea typeface="Pretendard" charset="0"/>
-                        <a:cs typeface="Pretendard" charset="0"/>
-                      </a:endParaRPr>
-                    </a:p>
-                  </a:txBody>
-                  <a:tcPr marL="54864" marR="54864" marT="36576" marB="36576" anchor="ctr">
-                    <a:lnL w="12700" cap="flat" cmpd="sng" algn="ctr">
-                      <a:solidFill>
-                        <a:srgbClr val="D4D6DB"/>
-                      </a:solidFill>
-                      <a:prstDash val="solid"/>
-                      <a:round/>
-                      <a:headEnd type="none" w="med" len="med"/>
-                      <a:tailEnd type="none" w="med" len="med"/>
-                    </a:lnL>
-                    <a:lnR w="12700" cap="flat" cmpd="sng" algn="ctr">
-                      <a:solidFill>
-                        <a:srgbClr val="D4D6DB"/>
-                      </a:solidFill>
-                      <a:prstDash val="solid"/>
-                      <a:round/>
-                      <a:headEnd type="none" w="med" len="med"/>
-                      <a:tailEnd type="none" w="med" len="med"/>
-                    </a:lnR>
-                    <a:lnT w="12700" cap="flat" cmpd="sng" algn="ctr">
-                      <a:solidFill>
-                        <a:srgbClr val="D4D6DB"/>
-                      </a:solidFill>
-                      <a:prstDash val="solid"/>
-                      <a:round/>
-                      <a:headEnd type="none" w="med" len="med"/>
-                      <a:tailEnd type="none" w="med" len="med"/>
-                    </a:lnT>
-                    <a:lnB w="12700" cap="flat" cmpd="sng" algn="ctr">
-                      <a:solidFill>
-                        <a:srgbClr val="D4D6DB"/>
-                      </a:solidFill>
-                      <a:prstDash val="solid"/>
-                      <a:round/>
-                      <a:headEnd type="none" w="med" len="med"/>
-                      <a:tailEnd type="none" w="med" len="med"/>
-                    </a:lnB>
-                    <a:solidFill>
-                      <a:srgbClr val="111827"/>
-                    </a:solidFill>
-                  </a:tcPr>
-                </a:tc>
-                <a:tc>
-                  <a:txBody>
-                    <a:bodyPr/>
-                    <a:lstStyle/>
-                    <a:p>
-                      <a:pPr algn="ctr" indent="0" marL="0">
-                        <a:buNone/>
-                      </a:pPr>
-                      <a:r>
-                        <a:rPr lang="en-US" sz="1900" b="1" dirty="0">
-                          <a:solidFill>
-                            <a:srgbClr val="FFFFFF"/>
-                          </a:solidFill>
-                          <a:latin typeface="Pretendard" pitchFamily="34" charset="0"/>
-                          <a:ea typeface="Pretendard" pitchFamily="34" charset="-122"/>
-                          <a:cs typeface="Pretendard" pitchFamily="34" charset="-120"/>
-                        </a:rPr>
-                        <a:t>Harmony</a:t>
-                      </a:r>
-                      <a:endParaRPr lang="en-US" sz="1900" dirty="0">
-                        <a:latin typeface="Pretendard" charset="0"/>
-                        <a:ea typeface="Pretendard" charset="0"/>
-                        <a:cs typeface="Pretendard" charset="0"/>
-                      </a:endParaRPr>
-                    </a:p>
-                  </a:txBody>
-                  <a:tcPr marL="54864" marR="54864" marT="36576" marB="36576" anchor="ctr">
-                    <a:lnL w="12700" cap="flat" cmpd="sng" algn="ctr">
-                      <a:solidFill>
-                        <a:srgbClr val="D4D6DB"/>
-                      </a:solidFill>
-                      <a:prstDash val="solid"/>
-                      <a:round/>
-                      <a:headEnd type="none" w="med" len="med"/>
-                      <a:tailEnd type="none" w="med" len="med"/>
-                    </a:lnL>
-                    <a:lnR w="12700" cap="flat" cmpd="sng" algn="ctr">
-                      <a:solidFill>
-                        <a:srgbClr val="D4D6DB"/>
-                      </a:solidFill>
-                      <a:prstDash val="solid"/>
-                      <a:round/>
-                      <a:headEnd type="none" w="med" len="med"/>
-                      <a:tailEnd type="none" w="med" len="med"/>
-                    </a:lnR>
-                    <a:lnT w="12700" cap="flat" cmpd="sng" algn="ctr">
-                      <a:solidFill>
-                        <a:srgbClr val="D4D6DB"/>
-                      </a:solidFill>
-                      <a:prstDash val="solid"/>
-                      <a:round/>
-                      <a:headEnd type="none" w="med" len="med"/>
-                      <a:tailEnd type="none" w="med" len="med"/>
-                    </a:lnT>
-                    <a:lnB w="12700" cap="flat" cmpd="sng" algn="ctr">
-                      <a:solidFill>
-                        <a:srgbClr val="D4D6DB"/>
-                      </a:solidFill>
-                      <a:prstDash val="solid"/>
-                      <a:round/>
-                      <a:headEnd type="none" w="med" len="med"/>
-                      <a:tailEnd type="none" w="med" len="med"/>
-                    </a:lnB>
-                    <a:solidFill>
-                      <a:srgbClr val="111827"/>
-                    </a:solidFill>
-                  </a:tcPr>
-                </a:tc>
-                <a:tc>
-                  <a:txBody>
-                    <a:bodyPr/>
-                    <a:lstStyle/>
-                    <a:p>
-                      <a:pPr algn="ctr" indent="0" marL="0">
-                        <a:buNone/>
-                      </a:pPr>
-                      <a:r>
-                        <a:rPr lang="en-US" sz="1900" b="1" dirty="0">
-                          <a:solidFill>
-                            <a:srgbClr val="FFFFFF"/>
-                          </a:solidFill>
-                          <a:latin typeface="Pretendard" pitchFamily="34" charset="0"/>
-                          <a:ea typeface="Pretendard" pitchFamily="34" charset="-122"/>
-                          <a:cs typeface="Pretendard" pitchFamily="34" charset="-120"/>
-                        </a:rPr>
-                        <a:t>Intended Role</a:t>
-                      </a:r>
-                      <a:endParaRPr lang="en-US" sz="1900" dirty="0">
-                        <a:latin typeface="Pretendard" charset="0"/>
-                        <a:ea typeface="Pretendard" charset="0"/>
-                        <a:cs typeface="Pretendard" charset="0"/>
-                      </a:endParaRPr>
-                    </a:p>
-                  </a:txBody>
-                  <a:tcPr marL="54864" marR="54864" marT="36576" marB="36576" anchor="ctr">
-                    <a:lnL w="12700" cap="flat" cmpd="sng" algn="ctr">
-                      <a:solidFill>
-                        <a:srgbClr val="D4D6DB"/>
-                      </a:solidFill>
-                      <a:prstDash val="solid"/>
-                      <a:round/>
-                      <a:headEnd type="none" w="med" len="med"/>
-                      <a:tailEnd type="none" w="med" len="med"/>
-                    </a:lnL>
-                    <a:lnR w="12700" cap="flat" cmpd="sng" algn="ctr">
-                      <a:solidFill>
-                        <a:srgbClr val="D4D6DB"/>
-                      </a:solidFill>
-                      <a:prstDash val="solid"/>
-                      <a:round/>
-                      <a:headEnd type="none" w="med" len="med"/>
-                      <a:tailEnd type="none" w="med" len="med"/>
-                    </a:lnR>
-                    <a:lnT w="12700" cap="flat" cmpd="sng" algn="ctr">
-                      <a:solidFill>
-                        <a:srgbClr val="D4D6DB"/>
-                      </a:solidFill>
-                      <a:prstDash val="solid"/>
-                      <a:round/>
-                      <a:headEnd type="none" w="med" len="med"/>
-                      <a:tailEnd type="none" w="med" len="med"/>
-                    </a:lnT>
-                    <a:lnB w="12700" cap="flat" cmpd="sng" algn="ctr">
-                      <a:solidFill>
-                        <a:srgbClr val="D4D6DB"/>
-                      </a:solidFill>
-                      <a:prstDash val="solid"/>
-                      <a:round/>
-                      <a:headEnd type="none" w="med" len="med"/>
-                      <a:tailEnd type="none" w="med" len="med"/>
-                    </a:lnB>
-                    <a:solidFill>
-                      <a:srgbClr val="111827"/>
-                    </a:solidFill>
-                  </a:tcPr>
-                </a:tc>
-              </a:tr>
-              <a:tr h="407324">
-                <a:tc>
-                  <a:txBody>
-                    <a:bodyPr/>
-                    <a:lstStyle/>
-                    <a:p>
-                      <a:pPr algn="l" indent="0" marL="0">
-                        <a:buNone/>
-                      </a:pPr>
-                      <a:r>
-                        <a:rPr lang="en-US" sz="1800" b="1" dirty="0">
-                          <a:solidFill>
-                            <a:srgbClr val="111827"/>
-                          </a:solidFill>
-                          <a:latin typeface="Pretendard" pitchFamily="34" charset="0"/>
-                          <a:ea typeface="Pretendard" pitchFamily="34" charset="-122"/>
-                          <a:cs typeface="Pretendard" pitchFamily="34" charset="-120"/>
-                        </a:rPr>
-                        <a:t>simple</a:t>
-                      </a:r>
-                      <a:endParaRPr lang="en-US" sz="1800" dirty="0">
-                        <a:latin typeface="Pretendard" charset="0"/>
-                        <a:ea typeface="Pretendard" charset="0"/>
-                        <a:cs typeface="Pretendard" charset="0"/>
-                      </a:endParaRPr>
-                    </a:p>
-                  </a:txBody>
-                  <a:tcPr marL="54864" marR="54864" marT="36576" marB="36576" anchor="ctr">
-                    <a:lnL w="12700" cap="flat" cmpd="sng" algn="ctr">
-                      <a:solidFill>
-                        <a:srgbClr val="D4D6DB"/>
-                      </a:solidFill>
-                      <a:prstDash val="solid"/>
-                      <a:round/>
-                      <a:headEnd type="none" w="med" len="med"/>
-                      <a:tailEnd type="none" w="med" len="med"/>
-                    </a:lnL>
-                    <a:lnR w="12700" cap="flat" cmpd="sng" algn="ctr">
-                      <a:solidFill>
-                        <a:srgbClr val="D4D6DB"/>
-                      </a:solidFill>
-                      <a:prstDash val="solid"/>
-                      <a:round/>
-                      <a:headEnd type="none" w="med" len="med"/>
-                      <a:tailEnd type="none" w="med" len="med"/>
-                    </a:lnR>
-                    <a:lnT w="12700" cap="flat" cmpd="sng" algn="ctr">
-                      <a:solidFill>
-                        <a:srgbClr val="D4D6DB"/>
-                      </a:solidFill>
-                      <a:prstDash val="solid"/>
-                      <a:round/>
-                      <a:headEnd type="none" w="med" len="med"/>
-                      <a:tailEnd type="none" w="med" len="med"/>
-                    </a:lnT>
-                    <a:lnB w="12700" cap="flat" cmpd="sng" algn="ctr">
-                      <a:solidFill>
-                        <a:srgbClr val="D4D6DB"/>
-                      </a:solidFill>
-                      <a:prstDash val="solid"/>
-                      <a:round/>
-                      <a:headEnd type="none" w="med" len="med"/>
-                      <a:tailEnd type="none" w="med" len="med"/>
-                    </a:lnB>
-                  </a:tcPr>
-                </a:tc>
-                <a:tc>
-                  <a:txBody>
-                    <a:bodyPr/>
-                    <a:lstStyle/>
-                    <a:p>
-                      <a:pPr algn="l" indent="0" marL="0">
-                        <a:buNone/>
-                      </a:pPr>
-                      <a:r>
-                        <a:rPr lang="en-US" sz="1800" dirty="0">
-                          <a:solidFill>
-                            <a:srgbClr val="111827"/>
-                          </a:solidFill>
-                          <a:latin typeface="Pretendard" pitchFamily="34" charset="0"/>
-                          <a:ea typeface="Pretendard" pitchFamily="34" charset="-122"/>
-                          <a:cs typeface="Pretendard" pitchFamily="34" charset="-120"/>
-                        </a:rPr>
-                        <a:t>`#2563EB`</a:t>
-                      </a:r>
-                      <a:endParaRPr lang="en-US" sz="1800" dirty="0">
-                        <a:latin typeface="Pretendard" charset="0"/>
-                        <a:ea typeface="Pretendard" charset="0"/>
-                        <a:cs typeface="Pretendard" charset="0"/>
-                      </a:endParaRPr>
-                    </a:p>
-                  </a:txBody>
-                  <a:tcPr marL="54864" marR="54864" marT="36576" marB="36576" anchor="ctr">
-                    <a:lnL w="12700" cap="flat" cmpd="sng" algn="ctr">
-                      <a:solidFill>
-                        <a:srgbClr val="D4D6DB"/>
-                      </a:solidFill>
-                      <a:prstDash val="solid"/>
-                      <a:round/>
-                      <a:headEnd type="none" w="med" len="med"/>
-                      <a:tailEnd type="none" w="med" len="med"/>
-                    </a:lnL>
-                    <a:lnR w="12700" cap="flat" cmpd="sng" algn="ctr">
-                      <a:solidFill>
-                        <a:srgbClr val="D4D6DB"/>
-                      </a:solidFill>
-                      <a:prstDash val="solid"/>
-                      <a:round/>
-                      <a:headEnd type="none" w="med" len="med"/>
-                      <a:tailEnd type="none" w="med" len="med"/>
-                    </a:lnR>
-                    <a:lnT w="12700" cap="flat" cmpd="sng" algn="ctr">
-                      <a:solidFill>
-                        <a:srgbClr val="D4D6DB"/>
-                      </a:solidFill>
-                      <a:prstDash val="solid"/>
-                      <a:round/>
-                      <a:headEnd type="none" w="med" len="med"/>
-                      <a:tailEnd type="none" w="med" len="med"/>
-                    </a:lnT>
-                    <a:lnB w="12700" cap="flat" cmpd="sng" algn="ctr">
-                      <a:solidFill>
-                        <a:srgbClr val="D4D6DB"/>
-                      </a:solidFill>
-                      <a:prstDash val="solid"/>
-                      <a:round/>
-                      <a:headEnd type="none" w="med" len="med"/>
-                      <a:tailEnd type="none" w="med" len="med"/>
-                    </a:lnB>
-                  </a:tcPr>
-                </a:tc>
-                <a:tc>
-                  <a:txBody>
-                    <a:bodyPr/>
-                    <a:lstStyle/>
-                    <a:p>
-                      <a:pPr algn="l" indent="0" marL="0">
-                        <a:buNone/>
-                      </a:pPr>
-                      <a:r>
-                        <a:rPr lang="en-US" sz="1800" dirty="0">
-                          <a:solidFill>
-                            <a:srgbClr val="111827"/>
-                          </a:solidFill>
-                          <a:latin typeface="Pretendard" pitchFamily="34" charset="0"/>
-                          <a:ea typeface="Pretendard" pitchFamily="34" charset="-122"/>
-                          <a:cs typeface="Pretendard" pitchFamily="34" charset="-120"/>
-                        </a:rPr>
-                        <a:t>analogous</a:t>
-                      </a:r>
-                      <a:endParaRPr lang="en-US" sz="1800" dirty="0">
-                        <a:latin typeface="Pretendard" charset="0"/>
-                        <a:ea typeface="Pretendard" charset="0"/>
-                        <a:cs typeface="Pretendard" charset="0"/>
-                      </a:endParaRPr>
-                    </a:p>
-                  </a:txBody>
-                  <a:tcPr marL="54864" marR="54864" marT="36576" marB="36576" anchor="ctr">
-                    <a:lnL w="12700" cap="flat" cmpd="sng" algn="ctr">
-                      <a:solidFill>
-                        <a:srgbClr val="D4D6DB"/>
-                      </a:solidFill>
-                      <a:prstDash val="solid"/>
-                      <a:round/>
-                      <a:headEnd type="none" w="med" len="med"/>
-                      <a:tailEnd type="none" w="med" len="med"/>
-                    </a:lnL>
-                    <a:lnR w="12700" cap="flat" cmpd="sng" algn="ctr">
-                      <a:solidFill>
-                        <a:srgbClr val="D4D6DB"/>
-                      </a:solidFill>
-                      <a:prstDash val="solid"/>
-                      <a:round/>
-                      <a:headEnd type="none" w="med" len="med"/>
-                      <a:tailEnd type="none" w="med" len="med"/>
-                    </a:lnR>
-                    <a:lnT w="12700" cap="flat" cmpd="sng" algn="ctr">
-                      <a:solidFill>
-                        <a:srgbClr val="D4D6DB"/>
-                      </a:solidFill>
-                      <a:prstDash val="solid"/>
-                      <a:round/>
-                      <a:headEnd type="none" w="med" len="med"/>
-                      <a:tailEnd type="none" w="med" len="med"/>
-                    </a:lnT>
-                    <a:lnB w="12700" cap="flat" cmpd="sng" algn="ctr">
-                      <a:solidFill>
-                        <a:srgbClr val="D4D6DB"/>
-                      </a:solidFill>
-                      <a:prstDash val="solid"/>
-                      <a:round/>
-                      <a:headEnd type="none" w="med" len="med"/>
-                      <a:tailEnd type="none" w="med" len="med"/>
-                    </a:lnB>
-                  </a:tcPr>
-                </a:tc>
-                <a:tc>
-                  <a:txBody>
-                    <a:bodyPr/>
-                    <a:lstStyle/>
-                    <a:p>
-                      <a:pPr algn="l" indent="0" marL="0">
-                        <a:buNone/>
-                      </a:pPr>
-                      <a:r>
-                        <a:rPr lang="en-US" sz="1800" dirty="0">
-                          <a:solidFill>
-                            <a:srgbClr val="111827"/>
-                          </a:solidFill>
-                          <a:latin typeface="Pretendard" pitchFamily="34" charset="0"/>
-                          <a:ea typeface="Pretendard" pitchFamily="34" charset="-122"/>
-                          <a:cs typeface="Pretendard" pitchFamily="34" charset="-120"/>
-                        </a:rPr>
-                        <a:t>Minimal blue system for clean operational slides</a:t>
-                      </a:r>
-                      <a:endParaRPr lang="en-US" sz="1800" dirty="0">
-                        <a:latin typeface="Pretendard" charset="0"/>
-                        <a:ea typeface="Pretendard" charset="0"/>
-                        <a:cs typeface="Pretendard" charset="0"/>
-                      </a:endParaRPr>
-                    </a:p>
-                  </a:txBody>
-                  <a:tcPr marL="54864" marR="54864" marT="36576" marB="36576" anchor="ctr">
-                    <a:lnL w="12700" cap="flat" cmpd="sng" algn="ctr">
-                      <a:solidFill>
-                        <a:srgbClr val="D4D6DB"/>
-                      </a:solidFill>
-                      <a:prstDash val="solid"/>
-                      <a:round/>
-                      <a:headEnd type="none" w="med" len="med"/>
-                      <a:tailEnd type="none" w="med" len="med"/>
-                    </a:lnL>
-                    <a:lnR w="12700" cap="flat" cmpd="sng" algn="ctr">
-                      <a:solidFill>
-                        <a:srgbClr val="D4D6DB"/>
-                      </a:solidFill>
-                      <a:prstDash val="solid"/>
-                      <a:round/>
-                      <a:headEnd type="none" w="med" len="med"/>
-                      <a:tailEnd type="none" w="med" len="med"/>
-                    </a:lnR>
-                    <a:lnT w="12700" cap="flat" cmpd="sng" algn="ctr">
-                      <a:solidFill>
-                        <a:srgbClr val="D4D6DB"/>
-                      </a:solidFill>
-                      <a:prstDash val="solid"/>
-                      <a:round/>
-                      <a:headEnd type="none" w="med" len="med"/>
-                      <a:tailEnd type="none" w="med" len="med"/>
-                    </a:lnT>
-                    <a:lnB w="12700" cap="flat" cmpd="sng" algn="ctr">
-                      <a:solidFill>
-                        <a:srgbClr val="D4D6DB"/>
-                      </a:solidFill>
-                      <a:prstDash val="solid"/>
-                      <a:round/>
-                      <a:headEnd type="none" w="med" len="med"/>
-                      <a:tailEnd type="none" w="med" len="med"/>
-                    </a:lnB>
-                  </a:tcPr>
-                </a:tc>
-              </a:tr>
-              <a:tr h="407324">
-                <a:tc>
-                  <a:txBody>
-                    <a:bodyPr/>
-                    <a:lstStyle/>
-                    <a:p>
-                      <a:pPr algn="l" indent="0" marL="0">
-                        <a:buNone/>
-                      </a:pPr>
-                      <a:r>
-                        <a:rPr lang="en-US" sz="1800" b="1" dirty="0">
-                          <a:solidFill>
-                            <a:srgbClr val="111827"/>
-                          </a:solidFill>
-                          <a:latin typeface="Pretendard" pitchFamily="34" charset="0"/>
-                          <a:ea typeface="Pretendard" pitchFamily="34" charset="-122"/>
-                          <a:cs typeface="Pretendard" pitchFamily="34" charset="-120"/>
-                        </a:rPr>
-                        <a:t>minimalism</a:t>
-                      </a:r>
-                      <a:endParaRPr lang="en-US" sz="1800" dirty="0">
-                        <a:latin typeface="Pretendard" charset="0"/>
-                        <a:ea typeface="Pretendard" charset="0"/>
-                        <a:cs typeface="Pretendard" charset="0"/>
-                      </a:endParaRPr>
-                    </a:p>
-                  </a:txBody>
-                  <a:tcPr marL="54864" marR="54864" marT="36576" marB="36576" anchor="ctr">
-                    <a:lnL w="12700" cap="flat" cmpd="sng" algn="ctr">
-                      <a:solidFill>
-                        <a:srgbClr val="D4D6DB"/>
-                      </a:solidFill>
-                      <a:prstDash val="solid"/>
-                      <a:round/>
-                      <a:headEnd type="none" w="med" len="med"/>
-                      <a:tailEnd type="none" w="med" len="med"/>
-                    </a:lnL>
-                    <a:lnR w="12700" cap="flat" cmpd="sng" algn="ctr">
-                      <a:solidFill>
-                        <a:srgbClr val="D4D6DB"/>
-                      </a:solidFill>
-                      <a:prstDash val="solid"/>
-                      <a:round/>
-                      <a:headEnd type="none" w="med" len="med"/>
-                      <a:tailEnd type="none" w="med" len="med"/>
-                    </a:lnR>
-                    <a:lnT w="12700" cap="flat" cmpd="sng" algn="ctr">
-                      <a:solidFill>
-                        <a:srgbClr val="D4D6DB"/>
-                      </a:solidFill>
-                      <a:prstDash val="solid"/>
-                      <a:round/>
-                      <a:headEnd type="none" w="med" len="med"/>
-                      <a:tailEnd type="none" w="med" len="med"/>
-                    </a:lnT>
-                    <a:lnB w="12700" cap="flat" cmpd="sng" algn="ctr">
-                      <a:solidFill>
-                        <a:srgbClr val="D4D6DB"/>
-                      </a:solidFill>
-                      <a:prstDash val="solid"/>
-                      <a:round/>
-                      <a:headEnd type="none" w="med" len="med"/>
-                      <a:tailEnd type="none" w="med" len="med"/>
-                    </a:lnB>
-                    <a:solidFill>
-                      <a:srgbClr val="FFFFFF">
-                        <a:alpha val="80000"/>
-                      </a:srgbClr>
-                    </a:solidFill>
-                  </a:tcPr>
-                </a:tc>
-                <a:tc>
-                  <a:txBody>
-                    <a:bodyPr/>
-                    <a:lstStyle/>
-                    <a:p>
-                      <a:pPr algn="l" indent="0" marL="0">
-                        <a:buNone/>
-                      </a:pPr>
-                      <a:r>
-                        <a:rPr lang="en-US" sz="1800" dirty="0">
-                          <a:solidFill>
-                            <a:srgbClr val="111827"/>
-                          </a:solidFill>
-                          <a:latin typeface="Pretendard" pitchFamily="34" charset="0"/>
-                          <a:ea typeface="Pretendard" pitchFamily="34" charset="-122"/>
-                          <a:cs typeface="Pretendard" pitchFamily="34" charset="-120"/>
-                        </a:rPr>
-                        <a:t>`#111827`</a:t>
-                      </a:r>
-                      <a:endParaRPr lang="en-US" sz="1800" dirty="0">
-                        <a:latin typeface="Pretendard" charset="0"/>
-                        <a:ea typeface="Pretendard" charset="0"/>
-                        <a:cs typeface="Pretendard" charset="0"/>
-                      </a:endParaRPr>
-                    </a:p>
-                  </a:txBody>
-                  <a:tcPr marL="54864" marR="54864" marT="36576" marB="36576" anchor="ctr">
-                    <a:lnL w="12700" cap="flat" cmpd="sng" algn="ctr">
-                      <a:solidFill>
-                        <a:srgbClr val="D4D6DB"/>
-                      </a:solidFill>
-                      <a:prstDash val="solid"/>
-                      <a:round/>
-                      <a:headEnd type="none" w="med" len="med"/>
-                      <a:tailEnd type="none" w="med" len="med"/>
-                    </a:lnL>
-                    <a:lnR w="12700" cap="flat" cmpd="sng" algn="ctr">
-                      <a:solidFill>
-                        <a:srgbClr val="D4D6DB"/>
-                      </a:solidFill>
-                      <a:prstDash val="solid"/>
-                      <a:round/>
-                      <a:headEnd type="none" w="med" len="med"/>
-                      <a:tailEnd type="none" w="med" len="med"/>
-                    </a:lnR>
-                    <a:lnT w="12700" cap="flat" cmpd="sng" algn="ctr">
-                      <a:solidFill>
-                        <a:srgbClr val="D4D6DB"/>
-                      </a:solidFill>
-                      <a:prstDash val="solid"/>
-                      <a:round/>
-                      <a:headEnd type="none" w="med" len="med"/>
-                      <a:tailEnd type="none" w="med" len="med"/>
-                    </a:lnT>
-                    <a:lnB w="12700" cap="flat" cmpd="sng" algn="ctr">
-                      <a:solidFill>
-                        <a:srgbClr val="D4D6DB"/>
-                      </a:solidFill>
-                      <a:prstDash val="solid"/>
-                      <a:round/>
-                      <a:headEnd type="none" w="med" len="med"/>
-                      <a:tailEnd type="none" w="med" len="med"/>
-                    </a:lnB>
-                    <a:solidFill>
-                      <a:srgbClr val="FFFFFF">
-                        <a:alpha val="80000"/>
-                      </a:srgbClr>
-                    </a:solidFill>
-                  </a:tcPr>
-                </a:tc>
-                <a:tc>
-                  <a:txBody>
-                    <a:bodyPr/>
-                    <a:lstStyle/>
-                    <a:p>
-                      <a:pPr algn="l" indent="0" marL="0">
-                        <a:buNone/>
-                      </a:pPr>
-                      <a:r>
-                        <a:rPr lang="en-US" sz="1800" dirty="0">
-                          <a:solidFill>
-                            <a:srgbClr val="111827"/>
-                          </a:solidFill>
-                          <a:latin typeface="Pretendard" pitchFamily="34" charset="0"/>
-                          <a:ea typeface="Pretendard" pitchFamily="34" charset="-122"/>
-                          <a:cs typeface="Pretendard" pitchFamily="34" charset="-120"/>
-                        </a:rPr>
-                        <a:t>monochromatic</a:t>
-                      </a:r>
-                      <a:endParaRPr lang="en-US" sz="1800" dirty="0">
-                        <a:latin typeface="Pretendard" charset="0"/>
-                        <a:ea typeface="Pretendard" charset="0"/>
-                        <a:cs typeface="Pretendard" charset="0"/>
-                      </a:endParaRPr>
-                    </a:p>
-                  </a:txBody>
-                  <a:tcPr marL="54864" marR="54864" marT="36576" marB="36576" anchor="ctr">
-                    <a:lnL w="12700" cap="flat" cmpd="sng" algn="ctr">
-                      <a:solidFill>
-                        <a:srgbClr val="D4D6DB"/>
-                      </a:solidFill>
-                      <a:prstDash val="solid"/>
-                      <a:round/>
-                      <a:headEnd type="none" w="med" len="med"/>
-                      <a:tailEnd type="none" w="med" len="med"/>
-                    </a:lnL>
-                    <a:lnR w="12700" cap="flat" cmpd="sng" algn="ctr">
-                      <a:solidFill>
-                        <a:srgbClr val="D4D6DB"/>
-                      </a:solidFill>
-                      <a:prstDash val="solid"/>
-                      <a:round/>
-                      <a:headEnd type="none" w="med" len="med"/>
-                      <a:tailEnd type="none" w="med" len="med"/>
-                    </a:lnR>
-                    <a:lnT w="12700" cap="flat" cmpd="sng" algn="ctr">
-                      <a:solidFill>
-                        <a:srgbClr val="D4D6DB"/>
-                      </a:solidFill>
-                      <a:prstDash val="solid"/>
-                      <a:round/>
-                      <a:headEnd type="none" w="med" len="med"/>
-                      <a:tailEnd type="none" w="med" len="med"/>
-                    </a:lnT>
-                    <a:lnB w="12700" cap="flat" cmpd="sng" algn="ctr">
-                      <a:solidFill>
-                        <a:srgbClr val="D4D6DB"/>
-                      </a:solidFill>
-                      <a:prstDash val="solid"/>
-                      <a:round/>
-                      <a:headEnd type="none" w="med" len="med"/>
-                      <a:tailEnd type="none" w="med" len="med"/>
-                    </a:lnB>
-                    <a:solidFill>
-                      <a:srgbClr val="FFFFFF">
-                        <a:alpha val="80000"/>
-                      </a:srgbClr>
-                    </a:solidFill>
-                  </a:tcPr>
-                </a:tc>
-                <a:tc>
-                  <a:txBody>
-                    <a:bodyPr/>
-                    <a:lstStyle/>
-                    <a:p>
-                      <a:pPr algn="l" indent="0" marL="0">
-                        <a:buNone/>
-                      </a:pPr>
-                      <a:r>
-                        <a:rPr lang="en-US" sz="1800" dirty="0">
-                          <a:solidFill>
-                            <a:srgbClr val="111827"/>
-                          </a:solidFill>
-                          <a:latin typeface="Pretendard" pitchFamily="34" charset="0"/>
-                          <a:ea typeface="Pretendard" pitchFamily="34" charset="-122"/>
-                          <a:cs typeface="Pretendard" pitchFamily="34" charset="-120"/>
-                        </a:rPr>
-                        <a:t>Whitespace-first slides with thin rules and restrained emphasis</a:t>
-                      </a:r>
-                      <a:endParaRPr lang="en-US" sz="1800" dirty="0">
-                        <a:latin typeface="Pretendard" charset="0"/>
-                        <a:ea typeface="Pretendard" charset="0"/>
-                        <a:cs typeface="Pretendard" charset="0"/>
-                      </a:endParaRPr>
-                    </a:p>
-                  </a:txBody>
-                  <a:tcPr marL="54864" marR="54864" marT="36576" marB="36576" anchor="ctr">
-                    <a:lnL w="12700" cap="flat" cmpd="sng" algn="ctr">
-                      <a:solidFill>
-                        <a:srgbClr val="D4D6DB"/>
-                      </a:solidFill>
-                      <a:prstDash val="solid"/>
-                      <a:round/>
-                      <a:headEnd type="none" w="med" len="med"/>
-                      <a:tailEnd type="none" w="med" len="med"/>
-                    </a:lnL>
-                    <a:lnR w="12700" cap="flat" cmpd="sng" algn="ctr">
-                      <a:solidFill>
-                        <a:srgbClr val="D4D6DB"/>
-                      </a:solidFill>
-                      <a:prstDash val="solid"/>
-                      <a:round/>
-                      <a:headEnd type="none" w="med" len="med"/>
-                      <a:tailEnd type="none" w="med" len="med"/>
-                    </a:lnR>
-                    <a:lnT w="12700" cap="flat" cmpd="sng" algn="ctr">
-                      <a:solidFill>
-                        <a:srgbClr val="D4D6DB"/>
-                      </a:solidFill>
-                      <a:prstDash val="solid"/>
-                      <a:round/>
-                      <a:headEnd type="none" w="med" len="med"/>
-                      <a:tailEnd type="none" w="med" len="med"/>
-                    </a:lnT>
-                    <a:lnB w="12700" cap="flat" cmpd="sng" algn="ctr">
-                      <a:solidFill>
-                        <a:srgbClr val="D4D6DB"/>
-                      </a:solidFill>
-                      <a:prstDash val="solid"/>
-                      <a:round/>
-                      <a:headEnd type="none" w="med" len="med"/>
-                      <a:tailEnd type="none" w="med" len="med"/>
-                    </a:lnB>
-                    <a:solidFill>
-                      <a:srgbClr val="FFFFFF">
-                        <a:alpha val="80000"/>
-                      </a:srgbClr>
-                    </a:solidFill>
-                  </a:tcPr>
-                </a:tc>
-              </a:tr>
-              <a:tr h="407324">
-                <a:tc>
-                  <a:txBody>
-                    <a:bodyPr/>
-                    <a:lstStyle/>
-                    <a:p>
-                      <a:pPr algn="l" indent="0" marL="0">
-                        <a:buNone/>
-                      </a:pPr>
-                      <a:r>
-                        <a:rPr lang="en-US" sz="1800" b="1" dirty="0">
-                          <a:solidFill>
-                            <a:srgbClr val="111827"/>
-                          </a:solidFill>
-                          <a:latin typeface="Pretendard" pitchFamily="34" charset="0"/>
-                          <a:ea typeface="Pretendard" pitchFamily="34" charset="-122"/>
-                          <a:cs typeface="Pretendard" pitchFamily="34" charset="-120"/>
-                        </a:rPr>
-                        <a:t>newmorphism</a:t>
-                      </a:r>
-                      <a:endParaRPr lang="en-US" sz="1800" dirty="0">
-                        <a:latin typeface="Pretendard" charset="0"/>
-                        <a:ea typeface="Pretendard" charset="0"/>
-                        <a:cs typeface="Pretendard" charset="0"/>
-                      </a:endParaRPr>
-                    </a:p>
-                  </a:txBody>
-                  <a:tcPr marL="54864" marR="54864" marT="36576" marB="36576" anchor="ctr">
-                    <a:lnL w="12700" cap="flat" cmpd="sng" algn="ctr">
-                      <a:solidFill>
-                        <a:srgbClr val="D4D6DB"/>
-                      </a:solidFill>
-                      <a:prstDash val="solid"/>
-                      <a:round/>
-                      <a:headEnd type="none" w="med" len="med"/>
-                      <a:tailEnd type="none" w="med" len="med"/>
-                    </a:lnL>
-                    <a:lnR w="12700" cap="flat" cmpd="sng" algn="ctr">
-                      <a:solidFill>
-                        <a:srgbClr val="D4D6DB"/>
-                      </a:solidFill>
-                      <a:prstDash val="solid"/>
-                      <a:round/>
-                      <a:headEnd type="none" w="med" len="med"/>
-                      <a:tailEnd type="none" w="med" len="med"/>
-                    </a:lnR>
-                    <a:lnT w="12700" cap="flat" cmpd="sng" algn="ctr">
-                      <a:solidFill>
-                        <a:srgbClr val="D4D6DB"/>
-                      </a:solidFill>
-                      <a:prstDash val="solid"/>
-                      <a:round/>
-                      <a:headEnd type="none" w="med" len="med"/>
-                      <a:tailEnd type="none" w="med" len="med"/>
-                    </a:lnT>
-                    <a:lnB w="12700" cap="flat" cmpd="sng" algn="ctr">
-                      <a:solidFill>
-                        <a:srgbClr val="D4D6DB"/>
-                      </a:solidFill>
-                      <a:prstDash val="solid"/>
-                      <a:round/>
-                      <a:headEnd type="none" w="med" len="med"/>
-                      <a:tailEnd type="none" w="med" len="med"/>
-                    </a:lnB>
-                  </a:tcPr>
-                </a:tc>
-                <a:tc>
-                  <a:txBody>
-                    <a:bodyPr/>
-                    <a:lstStyle/>
-                    <a:p>
-                      <a:pPr algn="l" indent="0" marL="0">
-                        <a:buNone/>
-                      </a:pPr>
-                      <a:r>
-                        <a:rPr lang="en-US" sz="1800" dirty="0">
-                          <a:solidFill>
-                            <a:srgbClr val="111827"/>
-                          </a:solidFill>
-                          <a:latin typeface="Pretendard" pitchFamily="34" charset="0"/>
-                          <a:ea typeface="Pretendard" pitchFamily="34" charset="-122"/>
-                          <a:cs typeface="Pretendard" pitchFamily="34" charset="-120"/>
-                        </a:rPr>
-                        <a:t>`#4F6F8F`</a:t>
-                      </a:r>
-                      <a:endParaRPr lang="en-US" sz="1800" dirty="0">
-                        <a:latin typeface="Pretendard" charset="0"/>
-                        <a:ea typeface="Pretendard" charset="0"/>
-                        <a:cs typeface="Pretendard" charset="0"/>
-                      </a:endParaRPr>
-                    </a:p>
-                  </a:txBody>
-                  <a:tcPr marL="54864" marR="54864" marT="36576" marB="36576" anchor="ctr">
-                    <a:lnL w="12700" cap="flat" cmpd="sng" algn="ctr">
-                      <a:solidFill>
-                        <a:srgbClr val="D4D6DB"/>
-                      </a:solidFill>
-                      <a:prstDash val="solid"/>
-                      <a:round/>
-                      <a:headEnd type="none" w="med" len="med"/>
-                      <a:tailEnd type="none" w="med" len="med"/>
-                    </a:lnL>
-                    <a:lnR w="12700" cap="flat" cmpd="sng" algn="ctr">
-                      <a:solidFill>
-                        <a:srgbClr val="D4D6DB"/>
-                      </a:solidFill>
-                      <a:prstDash val="solid"/>
-                      <a:round/>
-                      <a:headEnd type="none" w="med" len="med"/>
-                      <a:tailEnd type="none" w="med" len="med"/>
-                    </a:lnR>
-                    <a:lnT w="12700" cap="flat" cmpd="sng" algn="ctr">
-                      <a:solidFill>
-                        <a:srgbClr val="D4D6DB"/>
-                      </a:solidFill>
-                      <a:prstDash val="solid"/>
-                      <a:round/>
-                      <a:headEnd type="none" w="med" len="med"/>
-                      <a:tailEnd type="none" w="med" len="med"/>
-                    </a:lnT>
-                    <a:lnB w="12700" cap="flat" cmpd="sng" algn="ctr">
-                      <a:solidFill>
-                        <a:srgbClr val="D4D6DB"/>
-                      </a:solidFill>
-                      <a:prstDash val="solid"/>
-                      <a:round/>
-                      <a:headEnd type="none" w="med" len="med"/>
-                      <a:tailEnd type="none" w="med" len="med"/>
-                    </a:lnB>
-                  </a:tcPr>
-                </a:tc>
-                <a:tc>
-                  <a:txBody>
-                    <a:bodyPr/>
-                    <a:lstStyle/>
-                    <a:p>
-                      <a:pPr algn="l" indent="0" marL="0">
-                        <a:buNone/>
-                      </a:pPr>
-                      <a:r>
-                        <a:rPr lang="en-US" sz="1800" dirty="0">
-                          <a:solidFill>
-                            <a:srgbClr val="111827"/>
-                          </a:solidFill>
-                          <a:latin typeface="Pretendard" pitchFamily="34" charset="0"/>
-                          <a:ea typeface="Pretendard" pitchFamily="34" charset="-122"/>
-                          <a:cs typeface="Pretendard" pitchFamily="34" charset="-120"/>
-                        </a:rPr>
-                        <a:t>analogous</a:t>
-                      </a:r>
-                      <a:endParaRPr lang="en-US" sz="1800" dirty="0">
-                        <a:latin typeface="Pretendard" charset="0"/>
-                        <a:ea typeface="Pretendard" charset="0"/>
-                        <a:cs typeface="Pretendard" charset="0"/>
-                      </a:endParaRPr>
-                    </a:p>
-                  </a:txBody>
-                  <a:tcPr marL="54864" marR="54864" marT="36576" marB="36576" anchor="ctr">
-                    <a:lnL w="12700" cap="flat" cmpd="sng" algn="ctr">
-                      <a:solidFill>
-                        <a:srgbClr val="D4D6DB"/>
-                      </a:solidFill>
-                      <a:prstDash val="solid"/>
-                      <a:round/>
-                      <a:headEnd type="none" w="med" len="med"/>
-                      <a:tailEnd type="none" w="med" len="med"/>
-                    </a:lnL>
-                    <a:lnR w="12700" cap="flat" cmpd="sng" algn="ctr">
-                      <a:solidFill>
-                        <a:srgbClr val="D4D6DB"/>
-                      </a:solidFill>
-                      <a:prstDash val="solid"/>
-                      <a:round/>
-                      <a:headEnd type="none" w="med" len="med"/>
-                      <a:tailEnd type="none" w="med" len="med"/>
-                    </a:lnR>
-                    <a:lnT w="12700" cap="flat" cmpd="sng" algn="ctr">
-                      <a:solidFill>
-                        <a:srgbClr val="D4D6DB"/>
-                      </a:solidFill>
-                      <a:prstDash val="solid"/>
-                      <a:round/>
-                      <a:headEnd type="none" w="med" len="med"/>
-                      <a:tailEnd type="none" w="med" len="med"/>
-                    </a:lnT>
-                    <a:lnB w="12700" cap="flat" cmpd="sng" algn="ctr">
-                      <a:solidFill>
-                        <a:srgbClr val="D4D6DB"/>
-                      </a:solidFill>
-                      <a:prstDash val="solid"/>
-                      <a:round/>
-                      <a:headEnd type="none" w="med" len="med"/>
-                      <a:tailEnd type="none" w="med" len="med"/>
-                    </a:lnB>
-                  </a:tcPr>
-                </a:tc>
-                <a:tc>
-                  <a:txBody>
-                    <a:bodyPr/>
-                    <a:lstStyle/>
-                    <a:p>
-                      <a:pPr algn="l" indent="0" marL="0">
-                        <a:buNone/>
-                      </a:pPr>
-                      <a:r>
-                        <a:rPr lang="en-US" sz="1800" dirty="0">
-                          <a:solidFill>
-                            <a:srgbClr val="111827"/>
-                          </a:solidFill>
-                          <a:latin typeface="Pretendard" pitchFamily="34" charset="0"/>
-                          <a:ea typeface="Pretendard" pitchFamily="34" charset="-122"/>
-                          <a:cs typeface="Pretendard" pitchFamily="34" charset="-120"/>
-                        </a:rPr>
-                        <a:t>Soft UI surfaces using same-tone panels and paired shadows</a:t>
-                      </a:r>
-                      <a:endParaRPr lang="en-US" sz="1800" dirty="0">
-                        <a:latin typeface="Pretendard" charset="0"/>
-                        <a:ea typeface="Pretendard" charset="0"/>
-                        <a:cs typeface="Pretendard" charset="0"/>
-                      </a:endParaRPr>
-                    </a:p>
-                  </a:txBody>
-                  <a:tcPr marL="54864" marR="54864" marT="36576" marB="36576" anchor="ctr">
-                    <a:lnL w="12700" cap="flat" cmpd="sng" algn="ctr">
-                      <a:solidFill>
-                        <a:srgbClr val="D4D6DB"/>
-                      </a:solidFill>
-                      <a:prstDash val="solid"/>
-                      <a:round/>
-                      <a:headEnd type="none" w="med" len="med"/>
-                      <a:tailEnd type="none" w="med" len="med"/>
-                    </a:lnL>
-                    <a:lnR w="12700" cap="flat" cmpd="sng" algn="ctr">
-                      <a:solidFill>
-                        <a:srgbClr val="D4D6DB"/>
-                      </a:solidFill>
-                      <a:prstDash val="solid"/>
-                      <a:round/>
-                      <a:headEnd type="none" w="med" len="med"/>
-                      <a:tailEnd type="none" w="med" len="med"/>
-                    </a:lnR>
-                    <a:lnT w="12700" cap="flat" cmpd="sng" algn="ctr">
-                      <a:solidFill>
-                        <a:srgbClr val="D4D6DB"/>
-                      </a:solidFill>
-                      <a:prstDash val="solid"/>
-                      <a:round/>
-                      <a:headEnd type="none" w="med" len="med"/>
-                      <a:tailEnd type="none" w="med" len="med"/>
-                    </a:lnT>
-                    <a:lnB w="12700" cap="flat" cmpd="sng" algn="ctr">
-                      <a:solidFill>
-                        <a:srgbClr val="D4D6DB"/>
-                      </a:solidFill>
-                      <a:prstDash val="solid"/>
-                      <a:round/>
-                      <a:headEnd type="none" w="med" len="med"/>
-                      <a:tailEnd type="none" w="med" len="med"/>
-                    </a:lnB>
-                  </a:tcPr>
-                </a:tc>
-              </a:tr>
-              <a:tr h="407324">
-                <a:tc>
-                  <a:txBody>
-                    <a:bodyPr/>
-                    <a:lstStyle/>
-                    <a:p>
-                      <a:pPr algn="l" indent="0" marL="0">
-                        <a:buNone/>
-                      </a:pPr>
-                      <a:r>
-                        <a:rPr lang="en-US" sz="1800" b="1" dirty="0">
-                          <a:solidFill>
-                            <a:srgbClr val="111827"/>
-                          </a:solidFill>
-                          <a:latin typeface="Pretendard" pitchFamily="34" charset="0"/>
-                          <a:ea typeface="Pretendard" pitchFamily="34" charset="-122"/>
-                          <a:cs typeface="Pretendard" pitchFamily="34" charset="-120"/>
-                        </a:rPr>
-                        <a:t>glass</a:t>
-                      </a:r>
-                      <a:endParaRPr lang="en-US" sz="1800" dirty="0">
-                        <a:latin typeface="Pretendard" charset="0"/>
-                        <a:ea typeface="Pretendard" charset="0"/>
-                        <a:cs typeface="Pretendard" charset="0"/>
-                      </a:endParaRPr>
-                    </a:p>
-                  </a:txBody>
-                  <a:tcPr marL="54864" marR="54864" marT="36576" marB="36576" anchor="ctr">
-                    <a:lnL w="12700" cap="flat" cmpd="sng" algn="ctr">
-                      <a:solidFill>
-                        <a:srgbClr val="D4D6DB"/>
-                      </a:solidFill>
-                      <a:prstDash val="solid"/>
-                      <a:round/>
-                      <a:headEnd type="none" w="med" len="med"/>
-                      <a:tailEnd type="none" w="med" len="med"/>
-                    </a:lnL>
-                    <a:lnR w="12700" cap="flat" cmpd="sng" algn="ctr">
-                      <a:solidFill>
-                        <a:srgbClr val="D4D6DB"/>
-                      </a:solidFill>
-                      <a:prstDash val="solid"/>
-                      <a:round/>
-                      <a:headEnd type="none" w="med" len="med"/>
-                      <a:tailEnd type="none" w="med" len="med"/>
-                    </a:lnR>
-                    <a:lnT w="12700" cap="flat" cmpd="sng" algn="ctr">
-                      <a:solidFill>
-                        <a:srgbClr val="D4D6DB"/>
-                      </a:solidFill>
-                      <a:prstDash val="solid"/>
-                      <a:round/>
-                      <a:headEnd type="none" w="med" len="med"/>
-                      <a:tailEnd type="none" w="med" len="med"/>
-                    </a:lnT>
-                    <a:lnB w="12700" cap="flat" cmpd="sng" algn="ctr">
-                      <a:solidFill>
-                        <a:srgbClr val="D4D6DB"/>
-                      </a:solidFill>
-                      <a:prstDash val="solid"/>
-                      <a:round/>
-                      <a:headEnd type="none" w="med" len="med"/>
-                      <a:tailEnd type="none" w="med" len="med"/>
-                    </a:lnB>
-                    <a:solidFill>
-                      <a:srgbClr val="FFFFFF">
-                        <a:alpha val="80000"/>
-                      </a:srgbClr>
-                    </a:solidFill>
-                  </a:tcPr>
-                </a:tc>
-                <a:tc>
-                  <a:txBody>
-                    <a:bodyPr/>
-                    <a:lstStyle/>
-                    <a:p>
-                      <a:pPr algn="l" indent="0" marL="0">
-                        <a:buNone/>
-                      </a:pPr>
-                      <a:r>
-                        <a:rPr lang="en-US" sz="1800" dirty="0">
-                          <a:solidFill>
-                            <a:srgbClr val="111827"/>
-                          </a:solidFill>
-                          <a:latin typeface="Pretendard" pitchFamily="34" charset="0"/>
-                          <a:ea typeface="Pretendard" pitchFamily="34" charset="-122"/>
-                          <a:cs typeface="Pretendard" pitchFamily="34" charset="-120"/>
-                        </a:rPr>
-                        <a:t>`#8A4FFF`</a:t>
-                      </a:r>
-                      <a:endParaRPr lang="en-US" sz="1800" dirty="0">
-                        <a:latin typeface="Pretendard" charset="0"/>
-                        <a:ea typeface="Pretendard" charset="0"/>
-                        <a:cs typeface="Pretendard" charset="0"/>
-                      </a:endParaRPr>
-                    </a:p>
-                  </a:txBody>
-                  <a:tcPr marL="54864" marR="54864" marT="36576" marB="36576" anchor="ctr">
-                    <a:lnL w="12700" cap="flat" cmpd="sng" algn="ctr">
-                      <a:solidFill>
-                        <a:srgbClr val="D4D6DB"/>
-                      </a:solidFill>
-                      <a:prstDash val="solid"/>
-                      <a:round/>
-                      <a:headEnd type="none" w="med" len="med"/>
-                      <a:tailEnd type="none" w="med" len="med"/>
-                    </a:lnL>
-                    <a:lnR w="12700" cap="flat" cmpd="sng" algn="ctr">
-                      <a:solidFill>
-                        <a:srgbClr val="D4D6DB"/>
-                      </a:solidFill>
-                      <a:prstDash val="solid"/>
-                      <a:round/>
-                      <a:headEnd type="none" w="med" len="med"/>
-                      <a:tailEnd type="none" w="med" len="med"/>
-                    </a:lnR>
-                    <a:lnT w="12700" cap="flat" cmpd="sng" algn="ctr">
-                      <a:solidFill>
-                        <a:srgbClr val="D4D6DB"/>
-                      </a:solidFill>
-                      <a:prstDash val="solid"/>
-                      <a:round/>
-                      <a:headEnd type="none" w="med" len="med"/>
-                      <a:tailEnd type="none" w="med" len="med"/>
-                    </a:lnT>
-                    <a:lnB w="12700" cap="flat" cmpd="sng" algn="ctr">
-                      <a:solidFill>
-                        <a:srgbClr val="D4D6DB"/>
-                      </a:solidFill>
-                      <a:prstDash val="solid"/>
-                      <a:round/>
-                      <a:headEnd type="none" w="med" len="med"/>
-                      <a:tailEnd type="none" w="med" len="med"/>
-                    </a:lnB>
-                    <a:solidFill>
-                      <a:srgbClr val="FFFFFF">
-                        <a:alpha val="80000"/>
-                      </a:srgbClr>
-                    </a:solidFill>
-                  </a:tcPr>
-                </a:tc>
-                <a:tc>
-                  <a:txBody>
-                    <a:bodyPr/>
-                    <a:lstStyle/>
-                    <a:p>
-                      <a:pPr algn="l" indent="0" marL="0">
-                        <a:buNone/>
-                      </a:pPr>
-                      <a:r>
-                        <a:rPr lang="en-US" sz="1800" dirty="0">
-                          <a:solidFill>
-                            <a:srgbClr val="111827"/>
-                          </a:solidFill>
-                          <a:latin typeface="Pretendard" pitchFamily="34" charset="0"/>
-                          <a:ea typeface="Pretendard" pitchFamily="34" charset="-122"/>
-                          <a:cs typeface="Pretendard" pitchFamily="34" charset="-120"/>
-                        </a:rPr>
-                        <a:t>split-complementary</a:t>
-                      </a:r>
-                      <a:endParaRPr lang="en-US" sz="1800" dirty="0">
-                        <a:latin typeface="Pretendard" charset="0"/>
-                        <a:ea typeface="Pretendard" charset="0"/>
-                        <a:cs typeface="Pretendard" charset="0"/>
-                      </a:endParaRPr>
-                    </a:p>
-                  </a:txBody>
-                  <a:tcPr marL="54864" marR="54864" marT="36576" marB="36576" anchor="ctr">
-                    <a:lnL w="12700" cap="flat" cmpd="sng" algn="ctr">
-                      <a:solidFill>
-                        <a:srgbClr val="D4D6DB"/>
-                      </a:solidFill>
-                      <a:prstDash val="solid"/>
-                      <a:round/>
-                      <a:headEnd type="none" w="med" len="med"/>
-                      <a:tailEnd type="none" w="med" len="med"/>
-                    </a:lnL>
-                    <a:lnR w="12700" cap="flat" cmpd="sng" algn="ctr">
-                      <a:solidFill>
-                        <a:srgbClr val="D4D6DB"/>
-                      </a:solidFill>
-                      <a:prstDash val="solid"/>
-                      <a:round/>
-                      <a:headEnd type="none" w="med" len="med"/>
-                      <a:tailEnd type="none" w="med" len="med"/>
-                    </a:lnR>
-                    <a:lnT w="12700" cap="flat" cmpd="sng" algn="ctr">
-                      <a:solidFill>
-                        <a:srgbClr val="D4D6DB"/>
-                      </a:solidFill>
-                      <a:prstDash val="solid"/>
-                      <a:round/>
-                      <a:headEnd type="none" w="med" len="med"/>
-                      <a:tailEnd type="none" w="med" len="med"/>
-                    </a:lnT>
-                    <a:lnB w="12700" cap="flat" cmpd="sng" algn="ctr">
-                      <a:solidFill>
-                        <a:srgbClr val="D4D6DB"/>
-                      </a:solidFill>
-                      <a:prstDash val="solid"/>
-                      <a:round/>
-                      <a:headEnd type="none" w="med" len="med"/>
-                      <a:tailEnd type="none" w="med" len="med"/>
-                    </a:lnB>
-                    <a:solidFill>
-                      <a:srgbClr val="FFFFFF">
-                        <a:alpha val="80000"/>
-                      </a:srgbClr>
-                    </a:solidFill>
-                  </a:tcPr>
-                </a:tc>
-                <a:tc>
-                  <a:txBody>
-                    <a:bodyPr/>
-                    <a:lstStyle/>
-                    <a:p>
-                      <a:pPr algn="l" indent="0" marL="0">
-                        <a:buNone/>
-                      </a:pPr>
-                      <a:r>
-                        <a:rPr lang="en-US" sz="1800" dirty="0">
-                          <a:solidFill>
-                            <a:srgbClr val="111827"/>
-                          </a:solidFill>
-                          <a:latin typeface="Pretendard" pitchFamily="34" charset="0"/>
-                          <a:ea typeface="Pretendard" pitchFamily="34" charset="-122"/>
-                          <a:cs typeface="Pretendard" pitchFamily="34" charset="-120"/>
-                        </a:rPr>
-                        <a:t>Translucent proof surfaces with contrast accents</a:t>
-                      </a:r>
-                      <a:endParaRPr lang="en-US" sz="1800" dirty="0">
-                        <a:latin typeface="Pretendard" charset="0"/>
-                        <a:ea typeface="Pretendard" charset="0"/>
-                        <a:cs typeface="Pretendard" charset="0"/>
-                      </a:endParaRPr>
-                    </a:p>
-                  </a:txBody>
-                  <a:tcPr marL="54864" marR="54864" marT="36576" marB="36576" anchor="ctr">
-                    <a:lnL w="12700" cap="flat" cmpd="sng" algn="ctr">
-                      <a:solidFill>
-                        <a:srgbClr val="D4D6DB"/>
-                      </a:solidFill>
-                      <a:prstDash val="solid"/>
-                      <a:round/>
-                      <a:headEnd type="none" w="med" len="med"/>
-                      <a:tailEnd type="none" w="med" len="med"/>
-                    </a:lnL>
-                    <a:lnR w="12700" cap="flat" cmpd="sng" algn="ctr">
-                      <a:solidFill>
-                        <a:srgbClr val="D4D6DB"/>
-                      </a:solidFill>
-                      <a:prstDash val="solid"/>
-                      <a:round/>
-                      <a:headEnd type="none" w="med" len="med"/>
-                      <a:tailEnd type="none" w="med" len="med"/>
-                    </a:lnR>
-                    <a:lnT w="12700" cap="flat" cmpd="sng" algn="ctr">
-                      <a:solidFill>
-                        <a:srgbClr val="D4D6DB"/>
-                      </a:solidFill>
-                      <a:prstDash val="solid"/>
-                      <a:round/>
-                      <a:headEnd type="none" w="med" len="med"/>
-                      <a:tailEnd type="none" w="med" len="med"/>
-                    </a:lnT>
-                    <a:lnB w="12700" cap="flat" cmpd="sng" algn="ctr">
-                      <a:solidFill>
-                        <a:srgbClr val="D4D6DB"/>
-                      </a:solidFill>
-                      <a:prstDash val="solid"/>
-                      <a:round/>
-                      <a:headEnd type="none" w="med" len="med"/>
-                      <a:tailEnd type="none" w="med" len="med"/>
-                    </a:lnB>
-                    <a:solidFill>
-                      <a:srgbClr val="FFFFFF">
-                        <a:alpha val="80000"/>
-                      </a:srgbClr>
-                    </a:solidFill>
-                  </a:tcPr>
-                </a:tc>
-              </a:tr>
-              <a:tr h="407324">
-                <a:tc>
-                  <a:txBody>
-                    <a:bodyPr/>
-                    <a:lstStyle/>
-                    <a:p>
-                      <a:pPr algn="l" indent="0" marL="0">
-                        <a:buNone/>
-                      </a:pPr>
-                      <a:r>
-                        <a:rPr lang="en-US" sz="1800" b="1" dirty="0">
-                          <a:solidFill>
-                            <a:srgbClr val="111827"/>
-                          </a:solidFill>
-                          <a:latin typeface="Pretendard" pitchFamily="34" charset="0"/>
-                          <a:ea typeface="Pretendard" pitchFamily="34" charset="-122"/>
-                          <a:cs typeface="Pretendard" pitchFamily="34" charset="-120"/>
-                        </a:rPr>
-                        <a:t>grid</a:t>
-                      </a:r>
-                      <a:endParaRPr lang="en-US" sz="1800" dirty="0">
-                        <a:latin typeface="Pretendard" charset="0"/>
-                        <a:ea typeface="Pretendard" charset="0"/>
-                        <a:cs typeface="Pretendard" charset="0"/>
-                      </a:endParaRPr>
-                    </a:p>
-                  </a:txBody>
-                  <a:tcPr marL="54864" marR="54864" marT="36576" marB="36576" anchor="ctr">
-                    <a:lnL w="12700" cap="flat" cmpd="sng" algn="ctr">
-                      <a:solidFill>
-                        <a:srgbClr val="D4D6DB"/>
-                      </a:solidFill>
-                      <a:prstDash val="solid"/>
-                      <a:round/>
-                      <a:headEnd type="none" w="med" len="med"/>
-                      <a:tailEnd type="none" w="med" len="med"/>
-                    </a:lnL>
-                    <a:lnR w="12700" cap="flat" cmpd="sng" algn="ctr">
-                      <a:solidFill>
-                        <a:srgbClr val="D4D6DB"/>
-                      </a:solidFill>
-                      <a:prstDash val="solid"/>
-                      <a:round/>
-                      <a:headEnd type="none" w="med" len="med"/>
-                      <a:tailEnd type="none" w="med" len="med"/>
-                    </a:lnR>
-                    <a:lnT w="12700" cap="flat" cmpd="sng" algn="ctr">
-                      <a:solidFill>
-                        <a:srgbClr val="D4D6DB"/>
-                      </a:solidFill>
-                      <a:prstDash val="solid"/>
-                      <a:round/>
-                      <a:headEnd type="none" w="med" len="med"/>
-                      <a:tailEnd type="none" w="med" len="med"/>
-                    </a:lnT>
-                    <a:lnB w="12700" cap="flat" cmpd="sng" algn="ctr">
-                      <a:solidFill>
-                        <a:srgbClr val="D4D6DB"/>
-                      </a:solidFill>
-                      <a:prstDash val="solid"/>
-                      <a:round/>
-                      <a:headEnd type="none" w="med" len="med"/>
-                      <a:tailEnd type="none" w="med" len="med"/>
-                    </a:lnB>
-                  </a:tcPr>
-                </a:tc>
-                <a:tc>
-                  <a:txBody>
-                    <a:bodyPr/>
-                    <a:lstStyle/>
-                    <a:p>
-                      <a:pPr algn="l" indent="0" marL="0">
-                        <a:buNone/>
-                      </a:pPr>
-                      <a:r>
-                        <a:rPr lang="en-US" sz="1800" dirty="0">
-                          <a:solidFill>
-                            <a:srgbClr val="111827"/>
-                          </a:solidFill>
-                          <a:latin typeface="Pretendard" pitchFamily="34" charset="0"/>
-                          <a:ea typeface="Pretendard" pitchFamily="34" charset="-122"/>
-                          <a:cs typeface="Pretendard" pitchFamily="34" charset="-120"/>
-                        </a:rPr>
-                        <a:t>`#DC2626`</a:t>
-                      </a:r>
-                      <a:endParaRPr lang="en-US" sz="1800" dirty="0">
-                        <a:latin typeface="Pretendard" charset="0"/>
-                        <a:ea typeface="Pretendard" charset="0"/>
-                        <a:cs typeface="Pretendard" charset="0"/>
-                      </a:endParaRPr>
-                    </a:p>
-                  </a:txBody>
-                  <a:tcPr marL="54864" marR="54864" marT="36576" marB="36576" anchor="ctr">
-                    <a:lnL w="12700" cap="flat" cmpd="sng" algn="ctr">
-                      <a:solidFill>
-                        <a:srgbClr val="D4D6DB"/>
-                      </a:solidFill>
-                      <a:prstDash val="solid"/>
-                      <a:round/>
-                      <a:headEnd type="none" w="med" len="med"/>
-                      <a:tailEnd type="none" w="med" len="med"/>
-                    </a:lnL>
-                    <a:lnR w="12700" cap="flat" cmpd="sng" algn="ctr">
-                      <a:solidFill>
-                        <a:srgbClr val="D4D6DB"/>
-                      </a:solidFill>
-                      <a:prstDash val="solid"/>
-                      <a:round/>
-                      <a:headEnd type="none" w="med" len="med"/>
-                      <a:tailEnd type="none" w="med" len="med"/>
-                    </a:lnR>
-                    <a:lnT w="12700" cap="flat" cmpd="sng" algn="ctr">
-                      <a:solidFill>
-                        <a:srgbClr val="D4D6DB"/>
-                      </a:solidFill>
-                      <a:prstDash val="solid"/>
-                      <a:round/>
-                      <a:headEnd type="none" w="med" len="med"/>
-                      <a:tailEnd type="none" w="med" len="med"/>
-                    </a:lnT>
-                    <a:lnB w="12700" cap="flat" cmpd="sng" algn="ctr">
-                      <a:solidFill>
-                        <a:srgbClr val="D4D6DB"/>
-                      </a:solidFill>
-                      <a:prstDash val="solid"/>
-                      <a:round/>
-                      <a:headEnd type="none" w="med" len="med"/>
-                      <a:tailEnd type="none" w="med" len="med"/>
-                    </a:lnB>
-                  </a:tcPr>
-                </a:tc>
-                <a:tc>
-                  <a:txBody>
-                    <a:bodyPr/>
-                    <a:lstStyle/>
-                    <a:p>
-                      <a:pPr algn="l" indent="0" marL="0">
-                        <a:buNone/>
-                      </a:pPr>
-                      <a:r>
-                        <a:rPr lang="en-US" sz="1800" dirty="0">
-                          <a:solidFill>
-                            <a:srgbClr val="111827"/>
-                          </a:solidFill>
-                          <a:latin typeface="Pretendard" pitchFamily="34" charset="0"/>
-                          <a:ea typeface="Pretendard" pitchFamily="34" charset="-122"/>
-                          <a:cs typeface="Pretendard" pitchFamily="34" charset="-120"/>
-                        </a:rPr>
-                        <a:t>complementary</a:t>
-                      </a:r>
-                      <a:endParaRPr lang="en-US" sz="1800" dirty="0">
-                        <a:latin typeface="Pretendard" charset="0"/>
-                        <a:ea typeface="Pretendard" charset="0"/>
-                        <a:cs typeface="Pretendard" charset="0"/>
-                      </a:endParaRPr>
-                    </a:p>
-                  </a:txBody>
-                  <a:tcPr marL="54864" marR="54864" marT="36576" marB="36576" anchor="ctr">
-                    <a:lnL w="12700" cap="flat" cmpd="sng" algn="ctr">
-                      <a:solidFill>
-                        <a:srgbClr val="D4D6DB"/>
-                      </a:solidFill>
-                      <a:prstDash val="solid"/>
-                      <a:round/>
-                      <a:headEnd type="none" w="med" len="med"/>
-                      <a:tailEnd type="none" w="med" len="med"/>
-                    </a:lnL>
-                    <a:lnR w="12700" cap="flat" cmpd="sng" algn="ctr">
-                      <a:solidFill>
-                        <a:srgbClr val="D4D6DB"/>
-                      </a:solidFill>
-                      <a:prstDash val="solid"/>
-                      <a:round/>
-                      <a:headEnd type="none" w="med" len="med"/>
-                      <a:tailEnd type="none" w="med" len="med"/>
-                    </a:lnR>
-                    <a:lnT w="12700" cap="flat" cmpd="sng" algn="ctr">
-                      <a:solidFill>
-                        <a:srgbClr val="D4D6DB"/>
-                      </a:solidFill>
-                      <a:prstDash val="solid"/>
-                      <a:round/>
-                      <a:headEnd type="none" w="med" len="med"/>
-                      <a:tailEnd type="none" w="med" len="med"/>
-                    </a:lnT>
-                    <a:lnB w="12700" cap="flat" cmpd="sng" algn="ctr">
-                      <a:solidFill>
-                        <a:srgbClr val="D4D6DB"/>
-                      </a:solidFill>
-                      <a:prstDash val="solid"/>
-                      <a:round/>
-                      <a:headEnd type="none" w="med" len="med"/>
-                      <a:tailEnd type="none" w="med" len="med"/>
-                    </a:lnB>
-                  </a:tcPr>
-                </a:tc>
-                <a:tc>
-                  <a:txBody>
-                    <a:bodyPr/>
-                    <a:lstStyle/>
-                    <a:p>
-                      <a:pPr algn="l" indent="0" marL="0">
-                        <a:buNone/>
-                      </a:pPr>
-                      <a:r>
-                        <a:rPr lang="en-US" sz="1800" dirty="0">
-                          <a:solidFill>
-                            <a:srgbClr val="111827"/>
-                          </a:solidFill>
-                          <a:latin typeface="Pretendard" pitchFamily="34" charset="0"/>
-                          <a:ea typeface="Pretendard" pitchFamily="34" charset="-122"/>
-                          <a:cs typeface="Pretendard" pitchFamily="34" charset="-120"/>
-                        </a:rPr>
-                        <a:t>Swiss modular grid with restrained red accent</a:t>
-                      </a:r>
-                      <a:endParaRPr lang="en-US" sz="1800" dirty="0">
-                        <a:latin typeface="Pretendard" charset="0"/>
-                        <a:ea typeface="Pretendard" charset="0"/>
-                        <a:cs typeface="Pretendard" charset="0"/>
-                      </a:endParaRPr>
-                    </a:p>
-                  </a:txBody>
-                  <a:tcPr marL="54864" marR="54864" marT="36576" marB="36576" anchor="ctr">
-                    <a:lnL w="12700" cap="flat" cmpd="sng" algn="ctr">
-                      <a:solidFill>
-                        <a:srgbClr val="D4D6DB"/>
-                      </a:solidFill>
-                      <a:prstDash val="solid"/>
-                      <a:round/>
-                      <a:headEnd type="none" w="med" len="med"/>
-                      <a:tailEnd type="none" w="med" len="med"/>
-                    </a:lnL>
-                    <a:lnR w="12700" cap="flat" cmpd="sng" algn="ctr">
-                      <a:solidFill>
-                        <a:srgbClr val="D4D6DB"/>
-                      </a:solidFill>
-                      <a:prstDash val="solid"/>
-                      <a:round/>
-                      <a:headEnd type="none" w="med" len="med"/>
-                      <a:tailEnd type="none" w="med" len="med"/>
-                    </a:lnR>
-                    <a:lnT w="12700" cap="flat" cmpd="sng" algn="ctr">
-                      <a:solidFill>
-                        <a:srgbClr val="D4D6DB"/>
-                      </a:solidFill>
-                      <a:prstDash val="solid"/>
-                      <a:round/>
-                      <a:headEnd type="none" w="med" len="med"/>
-                      <a:tailEnd type="none" w="med" len="med"/>
-                    </a:lnT>
-                    <a:lnB w="12700" cap="flat" cmpd="sng" algn="ctr">
-                      <a:solidFill>
-                        <a:srgbClr val="D4D6DB"/>
-                      </a:solidFill>
-                      <a:prstDash val="solid"/>
-                      <a:round/>
-                      <a:headEnd type="none" w="med" len="med"/>
-                      <a:tailEnd type="none" w="med" len="med"/>
-                    </a:lnB>
-                  </a:tcPr>
-                </a:tc>
-              </a:tr>
-              <a:tr h="407324">
-                <a:tc>
-                  <a:txBody>
-                    <a:bodyPr/>
-                    <a:lstStyle/>
-                    <a:p>
-                      <a:pPr algn="l" indent="0" marL="0">
-                        <a:buNone/>
-                      </a:pPr>
-                      <a:r>
-                        <a:rPr lang="en-US" sz="1800" b="1" dirty="0">
-                          <a:solidFill>
-                            <a:srgbClr val="111827"/>
-                          </a:solidFill>
-                          <a:latin typeface="Pretendard" pitchFamily="34" charset="0"/>
-                          <a:ea typeface="Pretendard" pitchFamily="34" charset="-122"/>
-                          <a:cs typeface="Pretendard" pitchFamily="34" charset="-120"/>
-                        </a:rPr>
-                        <a:t>data</a:t>
-                      </a:r>
-                      <a:endParaRPr lang="en-US" sz="1800" dirty="0">
-                        <a:latin typeface="Pretendard" charset="0"/>
-                        <a:ea typeface="Pretendard" charset="0"/>
-                        <a:cs typeface="Pretendard" charset="0"/>
-                      </a:endParaRPr>
-                    </a:p>
-                  </a:txBody>
-                  <a:tcPr marL="54864" marR="54864" marT="36576" marB="36576" anchor="ctr">
-                    <a:lnL w="12700" cap="flat" cmpd="sng" algn="ctr">
-                      <a:solidFill>
-                        <a:srgbClr val="D4D6DB"/>
-                      </a:solidFill>
-                      <a:prstDash val="solid"/>
-                      <a:round/>
-                      <a:headEnd type="none" w="med" len="med"/>
-                      <a:tailEnd type="none" w="med" len="med"/>
-                    </a:lnL>
-                    <a:lnR w="12700" cap="flat" cmpd="sng" algn="ctr">
-                      <a:solidFill>
-                        <a:srgbClr val="D4D6DB"/>
-                      </a:solidFill>
-                      <a:prstDash val="solid"/>
-                      <a:round/>
-                      <a:headEnd type="none" w="med" len="med"/>
-                      <a:tailEnd type="none" w="med" len="med"/>
-                    </a:lnR>
-                    <a:lnT w="12700" cap="flat" cmpd="sng" algn="ctr">
-                      <a:solidFill>
-                        <a:srgbClr val="D4D6DB"/>
-                      </a:solidFill>
-                      <a:prstDash val="solid"/>
-                      <a:round/>
-                      <a:headEnd type="none" w="med" len="med"/>
-                      <a:tailEnd type="none" w="med" len="med"/>
-                    </a:lnT>
-                    <a:lnB w="12700" cap="flat" cmpd="sng" algn="ctr">
-                      <a:solidFill>
-                        <a:srgbClr val="D4D6DB"/>
-                      </a:solidFill>
-                      <a:prstDash val="solid"/>
-                      <a:round/>
-                      <a:headEnd type="none" w="med" len="med"/>
-                      <a:tailEnd type="none" w="med" len="med"/>
-                    </a:lnB>
-                    <a:solidFill>
-                      <a:srgbClr val="FFFFFF">
-                        <a:alpha val="80000"/>
-                      </a:srgbClr>
-                    </a:solidFill>
-                  </a:tcPr>
-                </a:tc>
-                <a:tc>
-                  <a:txBody>
-                    <a:bodyPr/>
-                    <a:lstStyle/>
-                    <a:p>
-                      <a:pPr algn="l" indent="0" marL="0">
-                        <a:buNone/>
-                      </a:pPr>
-                      <a:r>
-                        <a:rPr lang="en-US" sz="1800" dirty="0">
-                          <a:solidFill>
-                            <a:srgbClr val="111827"/>
-                          </a:solidFill>
-                          <a:latin typeface="Pretendard" pitchFamily="34" charset="0"/>
-                          <a:ea typeface="Pretendard" pitchFamily="34" charset="-122"/>
-                          <a:cs typeface="Pretendard" pitchFamily="34" charset="-120"/>
-                        </a:rPr>
-                        <a:t>`#F59E0B`</a:t>
-                      </a:r>
-                      <a:endParaRPr lang="en-US" sz="1800" dirty="0">
-                        <a:latin typeface="Pretendard" charset="0"/>
-                        <a:ea typeface="Pretendard" charset="0"/>
-                        <a:cs typeface="Pretendard" charset="0"/>
-                      </a:endParaRPr>
-                    </a:p>
-                  </a:txBody>
-                  <a:tcPr marL="54864" marR="54864" marT="36576" marB="36576" anchor="ctr">
-                    <a:lnL w="12700" cap="flat" cmpd="sng" algn="ctr">
-                      <a:solidFill>
-                        <a:srgbClr val="D4D6DB"/>
-                      </a:solidFill>
-                      <a:prstDash val="solid"/>
-                      <a:round/>
-                      <a:headEnd type="none" w="med" len="med"/>
-                      <a:tailEnd type="none" w="med" len="med"/>
-                    </a:lnL>
-                    <a:lnR w="12700" cap="flat" cmpd="sng" algn="ctr">
-                      <a:solidFill>
-                        <a:srgbClr val="D4D6DB"/>
-                      </a:solidFill>
-                      <a:prstDash val="solid"/>
-                      <a:round/>
-                      <a:headEnd type="none" w="med" len="med"/>
-                      <a:tailEnd type="none" w="med" len="med"/>
-                    </a:lnR>
-                    <a:lnT w="12700" cap="flat" cmpd="sng" algn="ctr">
-                      <a:solidFill>
-                        <a:srgbClr val="D4D6DB"/>
-                      </a:solidFill>
-                      <a:prstDash val="solid"/>
-                      <a:round/>
-                      <a:headEnd type="none" w="med" len="med"/>
-                      <a:tailEnd type="none" w="med" len="med"/>
-                    </a:lnT>
-                    <a:lnB w="12700" cap="flat" cmpd="sng" algn="ctr">
-                      <a:solidFill>
-                        <a:srgbClr val="D4D6DB"/>
-                      </a:solidFill>
-                      <a:prstDash val="solid"/>
-                      <a:round/>
-                      <a:headEnd type="none" w="med" len="med"/>
-                      <a:tailEnd type="none" w="med" len="med"/>
-                    </a:lnB>
-                    <a:solidFill>
-                      <a:srgbClr val="FFFFFF">
-                        <a:alpha val="80000"/>
-                      </a:srgbClr>
-                    </a:solidFill>
-                  </a:tcPr>
-                </a:tc>
-                <a:tc>
-                  <a:txBody>
-                    <a:bodyPr/>
-                    <a:lstStyle/>
-                    <a:p>
-                      <a:pPr algn="l" indent="0" marL="0">
-                        <a:buNone/>
-                      </a:pPr>
-                      <a:r>
-                        <a:rPr lang="en-US" sz="1800" dirty="0">
-                          <a:solidFill>
-                            <a:srgbClr val="111827"/>
-                          </a:solidFill>
-                          <a:latin typeface="Pretendard" pitchFamily="34" charset="0"/>
-                          <a:ea typeface="Pretendard" pitchFamily="34" charset="-122"/>
-                          <a:cs typeface="Pretendard" pitchFamily="34" charset="-120"/>
-                        </a:rPr>
-                        <a:t>monochromatic</a:t>
-                      </a:r>
-                      <a:endParaRPr lang="en-US" sz="1800" dirty="0">
-                        <a:latin typeface="Pretendard" charset="0"/>
-                        <a:ea typeface="Pretendard" charset="0"/>
-                        <a:cs typeface="Pretendard" charset="0"/>
-                      </a:endParaRPr>
-                    </a:p>
-                  </a:txBody>
-                  <a:tcPr marL="54864" marR="54864" marT="36576" marB="36576" anchor="ctr">
-                    <a:lnL w="12700" cap="flat" cmpd="sng" algn="ctr">
-                      <a:solidFill>
-                        <a:srgbClr val="D4D6DB"/>
-                      </a:solidFill>
-                      <a:prstDash val="solid"/>
-                      <a:round/>
-                      <a:headEnd type="none" w="med" len="med"/>
-                      <a:tailEnd type="none" w="med" len="med"/>
-                    </a:lnL>
-                    <a:lnR w="12700" cap="flat" cmpd="sng" algn="ctr">
-                      <a:solidFill>
-                        <a:srgbClr val="D4D6DB"/>
-                      </a:solidFill>
-                      <a:prstDash val="solid"/>
-                      <a:round/>
-                      <a:headEnd type="none" w="med" len="med"/>
-                      <a:tailEnd type="none" w="med" len="med"/>
-                    </a:lnR>
-                    <a:lnT w="12700" cap="flat" cmpd="sng" algn="ctr">
-                      <a:solidFill>
-                        <a:srgbClr val="D4D6DB"/>
-                      </a:solidFill>
-                      <a:prstDash val="solid"/>
-                      <a:round/>
-                      <a:headEnd type="none" w="med" len="med"/>
-                      <a:tailEnd type="none" w="med" len="med"/>
-                    </a:lnT>
-                    <a:lnB w="12700" cap="flat" cmpd="sng" algn="ctr">
-                      <a:solidFill>
-                        <a:srgbClr val="D4D6DB"/>
-                      </a:solidFill>
-                      <a:prstDash val="solid"/>
-                      <a:round/>
-                      <a:headEnd type="none" w="med" len="med"/>
-                      <a:tailEnd type="none" w="med" len="med"/>
-                    </a:lnB>
-                    <a:solidFill>
-                      <a:srgbClr val="FFFFFF">
-                        <a:alpha val="80000"/>
-                      </a:srgbClr>
-                    </a:solidFill>
-                  </a:tcPr>
-                </a:tc>
-                <a:tc>
-                  <a:txBody>
-                    <a:bodyPr/>
-                    <a:lstStyle/>
-                    <a:p>
-                      <a:pPr algn="l" indent="0" marL="0">
-                        <a:buNone/>
-                      </a:pPr>
-                      <a:r>
-                        <a:rPr lang="en-US" sz="1800" dirty="0">
-                          <a:solidFill>
-                            <a:srgbClr val="111827"/>
-                          </a:solidFill>
-                          <a:latin typeface="Pretendard" pitchFamily="34" charset="0"/>
-                          <a:ea typeface="Pretendard" pitchFamily="34" charset="-122"/>
-                          <a:cs typeface="Pretendard" pitchFamily="34" charset="-120"/>
-                        </a:rPr>
-                        <a:t>Dark data-journalism page with dense proof rails</a:t>
-                      </a:r>
-                      <a:endParaRPr lang="en-US" sz="1800" dirty="0">
-                        <a:latin typeface="Pretendard" charset="0"/>
-                        <a:ea typeface="Pretendard" charset="0"/>
-                        <a:cs typeface="Pretendard" charset="0"/>
-                      </a:endParaRPr>
-                    </a:p>
-                  </a:txBody>
-                  <a:tcPr marL="54864" marR="54864" marT="36576" marB="36576" anchor="ctr">
-                    <a:lnL w="12700" cap="flat" cmpd="sng" algn="ctr">
-                      <a:solidFill>
-                        <a:srgbClr val="D4D6DB"/>
-                      </a:solidFill>
-                      <a:prstDash val="solid"/>
-                      <a:round/>
-                      <a:headEnd type="none" w="med" len="med"/>
-                      <a:tailEnd type="none" w="med" len="med"/>
-                    </a:lnL>
-                    <a:lnR w="12700" cap="flat" cmpd="sng" algn="ctr">
-                      <a:solidFill>
-                        <a:srgbClr val="D4D6DB"/>
-                      </a:solidFill>
-                      <a:prstDash val="solid"/>
-                      <a:round/>
-                      <a:headEnd type="none" w="med" len="med"/>
-                      <a:tailEnd type="none" w="med" len="med"/>
-                    </a:lnR>
-                    <a:lnT w="12700" cap="flat" cmpd="sng" algn="ctr">
-                      <a:solidFill>
-                        <a:srgbClr val="D4D6DB"/>
-                      </a:solidFill>
-                      <a:prstDash val="solid"/>
-                      <a:round/>
-                      <a:headEnd type="none" w="med" len="med"/>
-                      <a:tailEnd type="none" w="med" len="med"/>
-                    </a:lnT>
-                    <a:lnB w="12700" cap="flat" cmpd="sng" algn="ctr">
-                      <a:solidFill>
-                        <a:srgbClr val="D4D6DB"/>
-                      </a:solidFill>
-                      <a:prstDash val="solid"/>
-                      <a:round/>
-                      <a:headEnd type="none" w="med" len="med"/>
-                      <a:tailEnd type="none" w="med" len="med"/>
-                    </a:lnB>
-                    <a:solidFill>
-                      <a:srgbClr val="FFFFFF">
-                        <a:alpha val="80000"/>
-                      </a:srgbClr>
-                    </a:solidFill>
-                  </a:tcPr>
-                </a:tc>
-              </a:tr>
-              <a:tr h="407324">
-                <a:tc>
-                  <a:txBody>
-                    <a:bodyPr/>
-                    <a:lstStyle/>
-                    <a:p>
-                      <a:pPr algn="l" indent="0" marL="0">
-                        <a:buNone/>
-                      </a:pPr>
-                      <a:r>
-                        <a:rPr lang="en-US" sz="1800" b="1" dirty="0">
-                          <a:solidFill>
-                            <a:srgbClr val="111827"/>
-                          </a:solidFill>
-                          <a:latin typeface="Pretendard" pitchFamily="34" charset="0"/>
-                          <a:ea typeface="Pretendard" pitchFamily="34" charset="-122"/>
-                          <a:cs typeface="Pretendard" pitchFamily="34" charset="-120"/>
-                        </a:rPr>
-                        <a:t>magazine</a:t>
-                      </a:r>
-                      <a:endParaRPr lang="en-US" sz="1800" dirty="0">
-                        <a:latin typeface="Pretendard" charset="0"/>
-                        <a:ea typeface="Pretendard" charset="0"/>
-                        <a:cs typeface="Pretendard" charset="0"/>
-                      </a:endParaRPr>
-                    </a:p>
-                  </a:txBody>
-                  <a:tcPr marL="54864" marR="54864" marT="36576" marB="36576" anchor="ctr">
-                    <a:lnL w="12700" cap="flat" cmpd="sng" algn="ctr">
-                      <a:solidFill>
-                        <a:srgbClr val="D4D6DB"/>
-                      </a:solidFill>
-                      <a:prstDash val="solid"/>
-                      <a:round/>
-                      <a:headEnd type="none" w="med" len="med"/>
-                      <a:tailEnd type="none" w="med" len="med"/>
-                    </a:lnL>
-                    <a:lnR w="12700" cap="flat" cmpd="sng" algn="ctr">
-                      <a:solidFill>
-                        <a:srgbClr val="D4D6DB"/>
-                      </a:solidFill>
-                      <a:prstDash val="solid"/>
-                      <a:round/>
-                      <a:headEnd type="none" w="med" len="med"/>
-                      <a:tailEnd type="none" w="med" len="med"/>
-                    </a:lnR>
-                    <a:lnT w="12700" cap="flat" cmpd="sng" algn="ctr">
-                      <a:solidFill>
-                        <a:srgbClr val="D4D6DB"/>
-                      </a:solidFill>
-                      <a:prstDash val="solid"/>
-                      <a:round/>
-                      <a:headEnd type="none" w="med" len="med"/>
-                      <a:tailEnd type="none" w="med" len="med"/>
-                    </a:lnT>
-                    <a:lnB w="12700" cap="flat" cmpd="sng" algn="ctr">
-                      <a:solidFill>
-                        <a:srgbClr val="D4D6DB"/>
-                      </a:solidFill>
-                      <a:prstDash val="solid"/>
-                      <a:round/>
-                      <a:headEnd type="none" w="med" len="med"/>
-                      <a:tailEnd type="none" w="med" len="med"/>
-                    </a:lnB>
-                  </a:tcPr>
-                </a:tc>
-                <a:tc>
-                  <a:txBody>
-                    <a:bodyPr/>
-                    <a:lstStyle/>
-                    <a:p>
-                      <a:pPr algn="l" indent="0" marL="0">
-                        <a:buNone/>
-                      </a:pPr>
-                      <a:r>
-                        <a:rPr lang="en-US" sz="1800" dirty="0">
-                          <a:solidFill>
-                            <a:srgbClr val="111827"/>
-                          </a:solidFill>
-                          <a:latin typeface="Pretendard" pitchFamily="34" charset="0"/>
-                          <a:ea typeface="Pretendard" pitchFamily="34" charset="-122"/>
-                          <a:cs typeface="Pretendard" pitchFamily="34" charset="-120"/>
-                        </a:rPr>
-                        <a:t>`#C2410C`</a:t>
-                      </a:r>
-                      <a:endParaRPr lang="en-US" sz="1800" dirty="0">
-                        <a:latin typeface="Pretendard" charset="0"/>
-                        <a:ea typeface="Pretendard" charset="0"/>
-                        <a:cs typeface="Pretendard" charset="0"/>
-                      </a:endParaRPr>
-                    </a:p>
-                  </a:txBody>
-                  <a:tcPr marL="54864" marR="54864" marT="36576" marB="36576" anchor="ctr">
-                    <a:lnL w="12700" cap="flat" cmpd="sng" algn="ctr">
-                      <a:solidFill>
-                        <a:srgbClr val="D4D6DB"/>
-                      </a:solidFill>
-                      <a:prstDash val="solid"/>
-                      <a:round/>
-                      <a:headEnd type="none" w="med" len="med"/>
-                      <a:tailEnd type="none" w="med" len="med"/>
-                    </a:lnL>
-                    <a:lnR w="12700" cap="flat" cmpd="sng" algn="ctr">
-                      <a:solidFill>
-                        <a:srgbClr val="D4D6DB"/>
-                      </a:solidFill>
-                      <a:prstDash val="solid"/>
-                      <a:round/>
-                      <a:headEnd type="none" w="med" len="med"/>
-                      <a:tailEnd type="none" w="med" len="med"/>
-                    </a:lnR>
-                    <a:lnT w="12700" cap="flat" cmpd="sng" algn="ctr">
-                      <a:solidFill>
-                        <a:srgbClr val="D4D6DB"/>
-                      </a:solidFill>
-                      <a:prstDash val="solid"/>
-                      <a:round/>
-                      <a:headEnd type="none" w="med" len="med"/>
-                      <a:tailEnd type="none" w="med" len="med"/>
-                    </a:lnT>
-                    <a:lnB w="12700" cap="flat" cmpd="sng" algn="ctr">
-                      <a:solidFill>
-                        <a:srgbClr val="D4D6DB"/>
-                      </a:solidFill>
-                      <a:prstDash val="solid"/>
-                      <a:round/>
-                      <a:headEnd type="none" w="med" len="med"/>
-                      <a:tailEnd type="none" w="med" len="med"/>
-                    </a:lnB>
-                  </a:tcPr>
-                </a:tc>
-                <a:tc>
-                  <a:txBody>
-                    <a:bodyPr/>
-                    <a:lstStyle/>
-                    <a:p>
-                      <a:pPr algn="l" indent="0" marL="0">
-                        <a:buNone/>
-                      </a:pPr>
-                      <a:r>
-                        <a:rPr lang="en-US" sz="1800" dirty="0">
-                          <a:solidFill>
-                            <a:srgbClr val="111827"/>
-                          </a:solidFill>
-                          <a:latin typeface="Pretendard" pitchFamily="34" charset="0"/>
-                          <a:ea typeface="Pretendard" pitchFamily="34" charset="-122"/>
-                          <a:cs typeface="Pretendard" pitchFamily="34" charset="-120"/>
-                        </a:rPr>
-                        <a:t>triadic</a:t>
-                      </a:r>
-                      <a:endParaRPr lang="en-US" sz="1800" dirty="0">
-                        <a:latin typeface="Pretendard" charset="0"/>
-                        <a:ea typeface="Pretendard" charset="0"/>
-                        <a:cs typeface="Pretendard" charset="0"/>
-                      </a:endParaRPr>
-                    </a:p>
-                  </a:txBody>
-                  <a:tcPr marL="54864" marR="54864" marT="36576" marB="36576" anchor="ctr">
-                    <a:lnL w="12700" cap="flat" cmpd="sng" algn="ctr">
-                      <a:solidFill>
-                        <a:srgbClr val="D4D6DB"/>
-                      </a:solidFill>
-                      <a:prstDash val="solid"/>
-                      <a:round/>
-                      <a:headEnd type="none" w="med" len="med"/>
-                      <a:tailEnd type="none" w="med" len="med"/>
-                    </a:lnL>
-                    <a:lnR w="12700" cap="flat" cmpd="sng" algn="ctr">
-                      <a:solidFill>
-                        <a:srgbClr val="D4D6DB"/>
-                      </a:solidFill>
-                      <a:prstDash val="solid"/>
-                      <a:round/>
-                      <a:headEnd type="none" w="med" len="med"/>
-                      <a:tailEnd type="none" w="med" len="med"/>
-                    </a:lnR>
-                    <a:lnT w="12700" cap="flat" cmpd="sng" algn="ctr">
-                      <a:solidFill>
-                        <a:srgbClr val="D4D6DB"/>
-                      </a:solidFill>
-                      <a:prstDash val="solid"/>
-                      <a:round/>
-                      <a:headEnd type="none" w="med" len="med"/>
-                      <a:tailEnd type="none" w="med" len="med"/>
-                    </a:lnT>
-                    <a:lnB w="12700" cap="flat" cmpd="sng" algn="ctr">
-                      <a:solidFill>
-                        <a:srgbClr val="D4D6DB"/>
-                      </a:solidFill>
-                      <a:prstDash val="solid"/>
-                      <a:round/>
-                      <a:headEnd type="none" w="med" len="med"/>
-                      <a:tailEnd type="none" w="med" len="med"/>
-                    </a:lnB>
-                  </a:tcPr>
-                </a:tc>
-                <a:tc>
-                  <a:txBody>
-                    <a:bodyPr/>
-                    <a:lstStyle/>
-                    <a:p>
-                      <a:pPr algn="l" indent="0" marL="0">
-                        <a:buNone/>
-                      </a:pPr>
-                      <a:r>
-                        <a:rPr lang="en-US" sz="1800" dirty="0">
-                          <a:solidFill>
-                            <a:srgbClr val="111827"/>
-                          </a:solidFill>
-                          <a:latin typeface="Pretendard" pitchFamily="34" charset="0"/>
-                          <a:ea typeface="Pretendard" pitchFamily="34" charset="-122"/>
-                          <a:cs typeface="Pretendard" pitchFamily="34" charset="-120"/>
-                        </a:rPr>
-                        <a:t>Editorial magazine cover/page rhythm</a:t>
-                      </a:r>
-                      <a:endParaRPr lang="en-US" sz="1800" dirty="0">
-                        <a:latin typeface="Pretendard" charset="0"/>
-                        <a:ea typeface="Pretendard" charset="0"/>
-                        <a:cs typeface="Pretendard" charset="0"/>
-                      </a:endParaRPr>
-                    </a:p>
-                  </a:txBody>
-                  <a:tcPr marL="54864" marR="54864" marT="36576" marB="36576" anchor="ctr">
-                    <a:lnL w="12700" cap="flat" cmpd="sng" algn="ctr">
-                      <a:solidFill>
-                        <a:srgbClr val="D4D6DB"/>
-                      </a:solidFill>
-                      <a:prstDash val="solid"/>
-                      <a:round/>
-                      <a:headEnd type="none" w="med" len="med"/>
-                      <a:tailEnd type="none" w="med" len="med"/>
-                    </a:lnL>
-                    <a:lnR w="12700" cap="flat" cmpd="sng" algn="ctr">
-                      <a:solidFill>
-                        <a:srgbClr val="D4D6DB"/>
-                      </a:solidFill>
-                      <a:prstDash val="solid"/>
-                      <a:round/>
-                      <a:headEnd type="none" w="med" len="med"/>
-                      <a:tailEnd type="none" w="med" len="med"/>
-                    </a:lnR>
-                    <a:lnT w="12700" cap="flat" cmpd="sng" algn="ctr">
-                      <a:solidFill>
-                        <a:srgbClr val="D4D6DB"/>
-                      </a:solidFill>
-                      <a:prstDash val="solid"/>
-                      <a:round/>
-                      <a:headEnd type="none" w="med" len="med"/>
-                      <a:tailEnd type="none" w="med" len="med"/>
-                    </a:lnT>
-                    <a:lnB w="12700" cap="flat" cmpd="sng" algn="ctr">
-                      <a:solidFill>
-                        <a:srgbClr val="D4D6DB"/>
-                      </a:solidFill>
-                      <a:prstDash val="solid"/>
-                      <a:round/>
-                      <a:headEnd type="none" w="med" len="med"/>
-                      <a:tailEnd type="none" w="med" len="med"/>
-                    </a:lnB>
-                  </a:tcPr>
-                </a:tc>
-              </a:tr>
-              <a:tr h="407324">
-                <a:tc>
-                  <a:txBody>
-                    <a:bodyPr/>
-                    <a:lstStyle/>
-                    <a:p>
-                      <a:pPr algn="l" indent="0" marL="0">
-                        <a:buNone/>
-                      </a:pPr>
-                      <a:r>
-                        <a:rPr lang="en-US" sz="1800" b="1" dirty="0">
-                          <a:solidFill>
-                            <a:srgbClr val="111827"/>
-                          </a:solidFill>
-                          <a:latin typeface="Pretendard" pitchFamily="34" charset="0"/>
-                          <a:ea typeface="Pretendard" pitchFamily="34" charset="-122"/>
-                          <a:cs typeface="Pretendard" pitchFamily="34" charset="-120"/>
-                        </a:rPr>
-                        <a:t>executive</a:t>
-                      </a:r>
-                      <a:endParaRPr lang="en-US" sz="1800" dirty="0">
-                        <a:latin typeface="Pretendard" charset="0"/>
-                        <a:ea typeface="Pretendard" charset="0"/>
-                        <a:cs typeface="Pretendard" charset="0"/>
-                      </a:endParaRPr>
-                    </a:p>
-                  </a:txBody>
-                  <a:tcPr marL="54864" marR="54864" marT="36576" marB="36576" anchor="ctr">
-                    <a:lnL w="12700" cap="flat" cmpd="sng" algn="ctr">
-                      <a:solidFill>
-                        <a:srgbClr val="D4D6DB"/>
-                      </a:solidFill>
-                      <a:prstDash val="solid"/>
-                      <a:round/>
-                      <a:headEnd type="none" w="med" len="med"/>
-                      <a:tailEnd type="none" w="med" len="med"/>
-                    </a:lnL>
-                    <a:lnR w="12700" cap="flat" cmpd="sng" algn="ctr">
-                      <a:solidFill>
-                        <a:srgbClr val="D4D6DB"/>
-                      </a:solidFill>
-                      <a:prstDash val="solid"/>
-                      <a:round/>
-                      <a:headEnd type="none" w="med" len="med"/>
-                      <a:tailEnd type="none" w="med" len="med"/>
-                    </a:lnR>
-                    <a:lnT w="12700" cap="flat" cmpd="sng" algn="ctr">
-                      <a:solidFill>
-                        <a:srgbClr val="D4D6DB"/>
-                      </a:solidFill>
-                      <a:prstDash val="solid"/>
-                      <a:round/>
-                      <a:headEnd type="none" w="med" len="med"/>
-                      <a:tailEnd type="none" w="med" len="med"/>
-                    </a:lnT>
-                    <a:lnB w="12700" cap="flat" cmpd="sng" algn="ctr">
-                      <a:solidFill>
-                        <a:srgbClr val="D4D6DB"/>
-                      </a:solidFill>
-                      <a:prstDash val="solid"/>
-                      <a:round/>
-                      <a:headEnd type="none" w="med" len="med"/>
-                      <a:tailEnd type="none" w="med" len="med"/>
-                    </a:lnB>
-                    <a:solidFill>
-                      <a:srgbClr val="FFFFFF">
-                        <a:alpha val="80000"/>
-                      </a:srgbClr>
-                    </a:solidFill>
-                  </a:tcPr>
-                </a:tc>
-                <a:tc>
-                  <a:txBody>
-                    <a:bodyPr/>
-                    <a:lstStyle/>
-                    <a:p>
-                      <a:pPr algn="l" indent="0" marL="0">
-                        <a:buNone/>
-                      </a:pPr>
-                      <a:r>
-                        <a:rPr lang="en-US" sz="1800" dirty="0">
-                          <a:solidFill>
-                            <a:srgbClr val="111827"/>
-                          </a:solidFill>
-                          <a:latin typeface="Pretendard" pitchFamily="34" charset="0"/>
-                          <a:ea typeface="Pretendard" pitchFamily="34" charset="-122"/>
-                          <a:cs typeface="Pretendard" pitchFamily="34" charset="-120"/>
-                        </a:rPr>
-                        <a:t>`#0F766E`</a:t>
-                      </a:r>
-                      <a:endParaRPr lang="en-US" sz="1800" dirty="0">
-                        <a:latin typeface="Pretendard" charset="0"/>
-                        <a:ea typeface="Pretendard" charset="0"/>
-                        <a:cs typeface="Pretendard" charset="0"/>
-                      </a:endParaRPr>
-                    </a:p>
-                  </a:txBody>
-                  <a:tcPr marL="54864" marR="54864" marT="36576" marB="36576" anchor="ctr">
-                    <a:lnL w="12700" cap="flat" cmpd="sng" algn="ctr">
-                      <a:solidFill>
-                        <a:srgbClr val="D4D6DB"/>
-                      </a:solidFill>
-                      <a:prstDash val="solid"/>
-                      <a:round/>
-                      <a:headEnd type="none" w="med" len="med"/>
-                      <a:tailEnd type="none" w="med" len="med"/>
-                    </a:lnL>
-                    <a:lnR w="12700" cap="flat" cmpd="sng" algn="ctr">
-                      <a:solidFill>
-                        <a:srgbClr val="D4D6DB"/>
-                      </a:solidFill>
-                      <a:prstDash val="solid"/>
-                      <a:round/>
-                      <a:headEnd type="none" w="med" len="med"/>
-                      <a:tailEnd type="none" w="med" len="med"/>
-                    </a:lnR>
-                    <a:lnT w="12700" cap="flat" cmpd="sng" algn="ctr">
-                      <a:solidFill>
-                        <a:srgbClr val="D4D6DB"/>
-                      </a:solidFill>
-                      <a:prstDash val="solid"/>
-                      <a:round/>
-                      <a:headEnd type="none" w="med" len="med"/>
-                      <a:tailEnd type="none" w="med" len="med"/>
-                    </a:lnT>
-                    <a:lnB w="12700" cap="flat" cmpd="sng" algn="ctr">
-                      <a:solidFill>
-                        <a:srgbClr val="D4D6DB"/>
-                      </a:solidFill>
-                      <a:prstDash val="solid"/>
-                      <a:round/>
-                      <a:headEnd type="none" w="med" len="med"/>
-                      <a:tailEnd type="none" w="med" len="med"/>
-                    </a:lnB>
-                    <a:solidFill>
-                      <a:srgbClr val="FFFFFF">
-                        <a:alpha val="80000"/>
-                      </a:srgbClr>
-                    </a:solidFill>
-                  </a:tcPr>
-                </a:tc>
-                <a:tc>
-                  <a:txBody>
-                    <a:bodyPr/>
-                    <a:lstStyle/>
-                    <a:p>
-                      <a:pPr algn="l" indent="0" marL="0">
-                        <a:buNone/>
-                      </a:pPr>
-                      <a:r>
-                        <a:rPr lang="en-US" sz="1800" dirty="0">
-                          <a:solidFill>
-                            <a:srgbClr val="111827"/>
-                          </a:solidFill>
-                          <a:latin typeface="Pretendard" pitchFamily="34" charset="0"/>
-                          <a:ea typeface="Pretendard" pitchFamily="34" charset="-122"/>
-                          <a:cs typeface="Pretendard" pitchFamily="34" charset="-120"/>
-                        </a:rPr>
-                        <a:t>complementary</a:t>
-                      </a:r>
-                      <a:endParaRPr lang="en-US" sz="1800" dirty="0">
-                        <a:latin typeface="Pretendard" charset="0"/>
-                        <a:ea typeface="Pretendard" charset="0"/>
-                        <a:cs typeface="Pretendard" charset="0"/>
-                      </a:endParaRPr>
-                    </a:p>
-                  </a:txBody>
-                  <a:tcPr marL="54864" marR="54864" marT="36576" marB="36576" anchor="ctr">
-                    <a:lnL w="12700" cap="flat" cmpd="sng" algn="ctr">
-                      <a:solidFill>
-                        <a:srgbClr val="D4D6DB"/>
-                      </a:solidFill>
-                      <a:prstDash val="solid"/>
-                      <a:round/>
-                      <a:headEnd type="none" w="med" len="med"/>
-                      <a:tailEnd type="none" w="med" len="med"/>
-                    </a:lnL>
-                    <a:lnR w="12700" cap="flat" cmpd="sng" algn="ctr">
-                      <a:solidFill>
-                        <a:srgbClr val="D4D6DB"/>
-                      </a:solidFill>
-                      <a:prstDash val="solid"/>
-                      <a:round/>
-                      <a:headEnd type="none" w="med" len="med"/>
-                      <a:tailEnd type="none" w="med" len="med"/>
-                    </a:lnR>
-                    <a:lnT w="12700" cap="flat" cmpd="sng" algn="ctr">
-                      <a:solidFill>
-                        <a:srgbClr val="D4D6DB"/>
-                      </a:solidFill>
-                      <a:prstDash val="solid"/>
-                      <a:round/>
-                      <a:headEnd type="none" w="med" len="med"/>
-                      <a:tailEnd type="none" w="med" len="med"/>
-                    </a:lnT>
-                    <a:lnB w="12700" cap="flat" cmpd="sng" algn="ctr">
-                      <a:solidFill>
-                        <a:srgbClr val="D4D6DB"/>
-                      </a:solidFill>
-                      <a:prstDash val="solid"/>
-                      <a:round/>
-                      <a:headEnd type="none" w="med" len="med"/>
-                      <a:tailEnd type="none" w="med" len="med"/>
-                    </a:lnB>
-                    <a:solidFill>
-                      <a:srgbClr val="FFFFFF">
-                        <a:alpha val="80000"/>
-                      </a:srgbClr>
-                    </a:solidFill>
-                  </a:tcPr>
-                </a:tc>
-                <a:tc>
-                  <a:txBody>
-                    <a:bodyPr/>
-                    <a:lstStyle/>
-                    <a:p>
-                      <a:pPr algn="l" indent="0" marL="0">
-                        <a:buNone/>
-                      </a:pPr>
-                      <a:r>
-                        <a:rPr lang="en-US" sz="1800" dirty="0">
-                          <a:solidFill>
-                            <a:srgbClr val="111827"/>
-                          </a:solidFill>
-                          <a:latin typeface="Pretendard" pitchFamily="34" charset="0"/>
-                          <a:ea typeface="Pretendard" pitchFamily="34" charset="-122"/>
-                          <a:cs typeface="Pretendard" pitchFamily="34" charset="-120"/>
-                        </a:rPr>
-                        <a:t>Business deck rhythm with a warm opposing accent</a:t>
-                      </a:r>
-                      <a:endParaRPr lang="en-US" sz="1800" dirty="0">
-                        <a:latin typeface="Pretendard" charset="0"/>
-                        <a:ea typeface="Pretendard" charset="0"/>
-                        <a:cs typeface="Pretendard" charset="0"/>
-                      </a:endParaRPr>
-                    </a:p>
-                  </a:txBody>
-                  <a:tcPr marL="54864" marR="54864" marT="36576" marB="36576" anchor="ctr">
-                    <a:lnL w="12700" cap="flat" cmpd="sng" algn="ctr">
-                      <a:solidFill>
-                        <a:srgbClr val="D4D6DB"/>
-                      </a:solidFill>
-                      <a:prstDash val="solid"/>
-                      <a:round/>
-                      <a:headEnd type="none" w="med" len="med"/>
-                      <a:tailEnd type="none" w="med" len="med"/>
-                    </a:lnL>
-                    <a:lnR w="12700" cap="flat" cmpd="sng" algn="ctr">
-                      <a:solidFill>
-                        <a:srgbClr val="D4D6DB"/>
-                      </a:solidFill>
-                      <a:prstDash val="solid"/>
-                      <a:round/>
-                      <a:headEnd type="none" w="med" len="med"/>
-                      <a:tailEnd type="none" w="med" len="med"/>
-                    </a:lnR>
-                    <a:lnT w="12700" cap="flat" cmpd="sng" algn="ctr">
-                      <a:solidFill>
-                        <a:srgbClr val="D4D6DB"/>
-                      </a:solidFill>
-                      <a:prstDash val="solid"/>
-                      <a:round/>
-                      <a:headEnd type="none" w="med" len="med"/>
-                      <a:tailEnd type="none" w="med" len="med"/>
-                    </a:lnT>
-                    <a:lnB w="12700" cap="flat" cmpd="sng" algn="ctr">
-                      <a:solidFill>
-                        <a:srgbClr val="D4D6DB"/>
-                      </a:solidFill>
-                      <a:prstDash val="solid"/>
-                      <a:round/>
-                      <a:headEnd type="none" w="med" len="med"/>
-                      <a:tailEnd type="none" w="med" len="med"/>
-                    </a:lnB>
-                    <a:solidFill>
-                      <a:srgbClr val="FFFFFF">
-                        <a:alpha val="80000"/>
-                      </a:srgbClr>
-                    </a:solidFill>
-                  </a:tcPr>
-                </a:tc>
-              </a:tr>
-              <a:tr h="407324">
-                <a:tc>
-                  <a:txBody>
-                    <a:bodyPr/>
-                    <a:lstStyle/>
-                    <a:p>
-                      <a:pPr algn="l" indent="0" marL="0">
-                        <a:buNone/>
-                      </a:pPr>
-                      <a:r>
-                        <a:rPr lang="en-US" sz="1800" b="1" dirty="0">
-                          <a:solidFill>
-                            <a:srgbClr val="111827"/>
-                          </a:solidFill>
-                          <a:latin typeface="Pretendard" pitchFamily="34" charset="0"/>
-                          <a:ea typeface="Pretendard" pitchFamily="34" charset="-122"/>
-                          <a:cs typeface="Pretendard" pitchFamily="34" charset="-120"/>
-                        </a:rPr>
-                        <a:t>technical</a:t>
-                      </a:r>
-                      <a:endParaRPr lang="en-US" sz="1800" dirty="0">
-                        <a:latin typeface="Pretendard" charset="0"/>
-                        <a:ea typeface="Pretendard" charset="0"/>
-                        <a:cs typeface="Pretendard" charset="0"/>
-                      </a:endParaRPr>
-                    </a:p>
-                  </a:txBody>
-                  <a:tcPr marL="54864" marR="54864" marT="36576" marB="36576" anchor="ctr">
-                    <a:lnL w="12700" cap="flat" cmpd="sng" algn="ctr">
-                      <a:solidFill>
-                        <a:srgbClr val="D4D6DB"/>
-                      </a:solidFill>
-                      <a:prstDash val="solid"/>
-                      <a:round/>
-                      <a:headEnd type="none" w="med" len="med"/>
-                      <a:tailEnd type="none" w="med" len="med"/>
-                    </a:lnL>
-                    <a:lnR w="12700" cap="flat" cmpd="sng" algn="ctr">
-                      <a:solidFill>
-                        <a:srgbClr val="D4D6DB"/>
-                      </a:solidFill>
-                      <a:prstDash val="solid"/>
-                      <a:round/>
-                      <a:headEnd type="none" w="med" len="med"/>
-                      <a:tailEnd type="none" w="med" len="med"/>
-                    </a:lnR>
-                    <a:lnT w="12700" cap="flat" cmpd="sng" algn="ctr">
-                      <a:solidFill>
-                        <a:srgbClr val="D4D6DB"/>
-                      </a:solidFill>
-                      <a:prstDash val="solid"/>
-                      <a:round/>
-                      <a:headEnd type="none" w="med" len="med"/>
-                      <a:tailEnd type="none" w="med" len="med"/>
-                    </a:lnT>
-                    <a:lnB w="12700" cap="flat" cmpd="sng" algn="ctr">
-                      <a:solidFill>
-                        <a:srgbClr val="D4D6DB"/>
-                      </a:solidFill>
-                      <a:prstDash val="solid"/>
-                      <a:round/>
-                      <a:headEnd type="none" w="med" len="med"/>
-                      <a:tailEnd type="none" w="med" len="med"/>
-                    </a:lnB>
-                  </a:tcPr>
-                </a:tc>
-                <a:tc>
-                  <a:txBody>
-                    <a:bodyPr/>
-                    <a:lstStyle/>
-                    <a:p>
-                      <a:pPr algn="l" indent="0" marL="0">
-                        <a:buNone/>
-                      </a:pPr>
-                      <a:r>
-                        <a:rPr lang="en-US" sz="1800" dirty="0">
-                          <a:solidFill>
-                            <a:srgbClr val="111827"/>
-                          </a:solidFill>
-                          <a:latin typeface="Pretendard" pitchFamily="34" charset="0"/>
-                          <a:ea typeface="Pretendard" pitchFamily="34" charset="-122"/>
-                          <a:cs typeface="Pretendard" pitchFamily="34" charset="-120"/>
-                        </a:rPr>
-                        <a:t>`#16A34A`</a:t>
-                      </a:r>
-                      <a:endParaRPr lang="en-US" sz="1800" dirty="0">
-                        <a:latin typeface="Pretendard" charset="0"/>
-                        <a:ea typeface="Pretendard" charset="0"/>
-                        <a:cs typeface="Pretendard" charset="0"/>
-                      </a:endParaRPr>
-                    </a:p>
-                  </a:txBody>
-                  <a:tcPr marL="54864" marR="54864" marT="36576" marB="36576" anchor="ctr">
-                    <a:lnL w="12700" cap="flat" cmpd="sng" algn="ctr">
-                      <a:solidFill>
-                        <a:srgbClr val="D4D6DB"/>
-                      </a:solidFill>
-                      <a:prstDash val="solid"/>
-                      <a:round/>
-                      <a:headEnd type="none" w="med" len="med"/>
-                      <a:tailEnd type="none" w="med" len="med"/>
-                    </a:lnL>
-                    <a:lnR w="12700" cap="flat" cmpd="sng" algn="ctr">
-                      <a:solidFill>
-                        <a:srgbClr val="D4D6DB"/>
-                      </a:solidFill>
-                      <a:prstDash val="solid"/>
-                      <a:round/>
-                      <a:headEnd type="none" w="med" len="med"/>
-                      <a:tailEnd type="none" w="med" len="med"/>
-                    </a:lnR>
-                    <a:lnT w="12700" cap="flat" cmpd="sng" algn="ctr">
-                      <a:solidFill>
-                        <a:srgbClr val="D4D6DB"/>
-                      </a:solidFill>
-                      <a:prstDash val="solid"/>
-                      <a:round/>
-                      <a:headEnd type="none" w="med" len="med"/>
-                      <a:tailEnd type="none" w="med" len="med"/>
-                    </a:lnT>
-                    <a:lnB w="12700" cap="flat" cmpd="sng" algn="ctr">
-                      <a:solidFill>
-                        <a:srgbClr val="D4D6DB"/>
-                      </a:solidFill>
-                      <a:prstDash val="solid"/>
-                      <a:round/>
-                      <a:headEnd type="none" w="med" len="med"/>
-                      <a:tailEnd type="none" w="med" len="med"/>
-                    </a:lnB>
-                  </a:tcPr>
-                </a:tc>
-                <a:tc>
-                  <a:txBody>
-                    <a:bodyPr/>
-                    <a:lstStyle/>
-                    <a:p>
-                      <a:pPr algn="l" indent="0" marL="0">
-                        <a:buNone/>
-                      </a:pPr>
-                      <a:r>
-                        <a:rPr lang="en-US" sz="1800" dirty="0">
-                          <a:solidFill>
-                            <a:srgbClr val="111827"/>
-                          </a:solidFill>
-                          <a:latin typeface="Pretendard" pitchFamily="34" charset="0"/>
-                          <a:ea typeface="Pretendard" pitchFamily="34" charset="-122"/>
-                          <a:cs typeface="Pretendard" pitchFamily="34" charset="-120"/>
-                        </a:rPr>
-                        <a:t>monochromatic</a:t>
-                      </a:r>
-                      <a:endParaRPr lang="en-US" sz="1800" dirty="0">
-                        <a:latin typeface="Pretendard" charset="0"/>
-                        <a:ea typeface="Pretendard" charset="0"/>
-                        <a:cs typeface="Pretendard" charset="0"/>
-                      </a:endParaRPr>
-                    </a:p>
-                  </a:txBody>
-                  <a:tcPr marL="54864" marR="54864" marT="36576" marB="36576" anchor="ctr">
-                    <a:lnL w="12700" cap="flat" cmpd="sng" algn="ctr">
-                      <a:solidFill>
-                        <a:srgbClr val="D4D6DB"/>
-                      </a:solidFill>
-                      <a:prstDash val="solid"/>
-                      <a:round/>
-                      <a:headEnd type="none" w="med" len="med"/>
-                      <a:tailEnd type="none" w="med" len="med"/>
-                    </a:lnL>
-                    <a:lnR w="12700" cap="flat" cmpd="sng" algn="ctr">
-                      <a:solidFill>
-                        <a:srgbClr val="D4D6DB"/>
-                      </a:solidFill>
-                      <a:prstDash val="solid"/>
-                      <a:round/>
-                      <a:headEnd type="none" w="med" len="med"/>
-                      <a:tailEnd type="none" w="med" len="med"/>
-                    </a:lnR>
-                    <a:lnT w="12700" cap="flat" cmpd="sng" algn="ctr">
-                      <a:solidFill>
-                        <a:srgbClr val="D4D6DB"/>
-                      </a:solidFill>
-                      <a:prstDash val="solid"/>
-                      <a:round/>
-                      <a:headEnd type="none" w="med" len="med"/>
-                      <a:tailEnd type="none" w="med" len="med"/>
-                    </a:lnT>
-                    <a:lnB w="12700" cap="flat" cmpd="sng" algn="ctr">
-                      <a:solidFill>
-                        <a:srgbClr val="D4D6DB"/>
-                      </a:solidFill>
-                      <a:prstDash val="solid"/>
-                      <a:round/>
-                      <a:headEnd type="none" w="med" len="med"/>
-                      <a:tailEnd type="none" w="med" len="med"/>
-                    </a:lnB>
-                  </a:tcPr>
-                </a:tc>
-                <a:tc>
-                  <a:txBody>
-                    <a:bodyPr/>
-                    <a:lstStyle/>
-                    <a:p>
-                      <a:pPr algn="l" indent="0" marL="0">
-                        <a:buNone/>
-                      </a:pPr>
-                      <a:r>
-                        <a:rPr lang="en-US" sz="1800" dirty="0">
-                          <a:solidFill>
-                            <a:srgbClr val="111827"/>
-                          </a:solidFill>
-                          <a:latin typeface="Pretendard" pitchFamily="34" charset="0"/>
-                          <a:ea typeface="Pretendard" pitchFamily="34" charset="-122"/>
-                          <a:cs typeface="Pretendard" pitchFamily="34" charset="-120"/>
-                        </a:rPr>
-                        <a:t>Engineering/validation tone with brightness steps</a:t>
-                      </a:r>
-                      <a:endParaRPr lang="en-US" sz="1800" dirty="0">
-                        <a:latin typeface="Pretendard" charset="0"/>
-                        <a:ea typeface="Pretendard" charset="0"/>
-                        <a:cs typeface="Pretendard" charset="0"/>
-                      </a:endParaRPr>
-                    </a:p>
-                  </a:txBody>
-                  <a:tcPr marL="54864" marR="54864" marT="36576" marB="36576" anchor="ctr">
-                    <a:lnL w="12700" cap="flat" cmpd="sng" algn="ctr">
-                      <a:solidFill>
-                        <a:srgbClr val="D4D6DB"/>
-                      </a:solidFill>
-                      <a:prstDash val="solid"/>
-                      <a:round/>
-                      <a:headEnd type="none" w="med" len="med"/>
-                      <a:tailEnd type="none" w="med" len="med"/>
-                    </a:lnL>
-                    <a:lnR w="12700" cap="flat" cmpd="sng" algn="ctr">
-                      <a:solidFill>
-                        <a:srgbClr val="D4D6DB"/>
-                      </a:solidFill>
-                      <a:prstDash val="solid"/>
-                      <a:round/>
-                      <a:headEnd type="none" w="med" len="med"/>
-                      <a:tailEnd type="none" w="med" len="med"/>
-                    </a:lnR>
-                    <a:lnT w="12700" cap="flat" cmpd="sng" algn="ctr">
-                      <a:solidFill>
-                        <a:srgbClr val="D4D6DB"/>
-                      </a:solidFill>
-                      <a:prstDash val="solid"/>
-                      <a:round/>
-                      <a:headEnd type="none" w="med" len="med"/>
-                      <a:tailEnd type="none" w="med" len="med"/>
-                    </a:lnT>
-                    <a:lnB w="12700" cap="flat" cmpd="sng" algn="ctr">
-                      <a:solidFill>
-                        <a:srgbClr val="D4D6DB"/>
-                      </a:solidFill>
-                      <a:prstDash val="solid"/>
-                      <a:round/>
-                      <a:headEnd type="none" w="med" len="med"/>
-                      <a:tailEnd type="none" w="med" len="med"/>
-                    </a:lnB>
-                  </a:tcPr>
-                </a:tc>
-              </a:tr>
-              <a:tr h="407324">
-                <a:tc>
-                  <a:txBody>
-                    <a:bodyPr/>
-                    <a:lstStyle/>
-                    <a:p>
-                      <a:pPr algn="l" indent="0" marL="0">
-                        <a:buNone/>
-                      </a:pPr>
-                      <a:r>
-                        <a:rPr lang="en-US" sz="1800" b="1" dirty="0">
-                          <a:solidFill>
-                            <a:srgbClr val="111827"/>
-                          </a:solidFill>
-                          <a:latin typeface="Pretendard" pitchFamily="34" charset="0"/>
-                          <a:ea typeface="Pretendard" pitchFamily="34" charset="-122"/>
-                          <a:cs typeface="Pretendard" pitchFamily="34" charset="-120"/>
-                        </a:rPr>
-                        <a:t>dark</a:t>
-                      </a:r>
-                      <a:endParaRPr lang="en-US" sz="1800" dirty="0">
-                        <a:latin typeface="Pretendard" charset="0"/>
-                        <a:ea typeface="Pretendard" charset="0"/>
-                        <a:cs typeface="Pretendard" charset="0"/>
-                      </a:endParaRPr>
-                    </a:p>
-                  </a:txBody>
-                  <a:tcPr marL="54864" marR="54864" marT="36576" marB="36576" anchor="ctr">
-                    <a:lnL w="12700" cap="flat" cmpd="sng" algn="ctr">
-                      <a:solidFill>
-                        <a:srgbClr val="D4D6DB"/>
-                      </a:solidFill>
-                      <a:prstDash val="solid"/>
-                      <a:round/>
-                      <a:headEnd type="none" w="med" len="med"/>
-                      <a:tailEnd type="none" w="med" len="med"/>
-                    </a:lnL>
-                    <a:lnR w="12700" cap="flat" cmpd="sng" algn="ctr">
-                      <a:solidFill>
-                        <a:srgbClr val="D4D6DB"/>
-                      </a:solidFill>
-                      <a:prstDash val="solid"/>
-                      <a:round/>
-                      <a:headEnd type="none" w="med" len="med"/>
-                      <a:tailEnd type="none" w="med" len="med"/>
-                    </a:lnR>
-                    <a:lnT w="12700" cap="flat" cmpd="sng" algn="ctr">
-                      <a:solidFill>
-                        <a:srgbClr val="D4D6DB"/>
-                      </a:solidFill>
-                      <a:prstDash val="solid"/>
-                      <a:round/>
-                      <a:headEnd type="none" w="med" len="med"/>
-                      <a:tailEnd type="none" w="med" len="med"/>
-                    </a:lnT>
-                    <a:lnB w="12700" cap="flat" cmpd="sng" algn="ctr">
-                      <a:solidFill>
-                        <a:srgbClr val="D4D6DB"/>
-                      </a:solidFill>
-                      <a:prstDash val="solid"/>
-                      <a:round/>
-                      <a:headEnd type="none" w="med" len="med"/>
-                      <a:tailEnd type="none" w="med" len="med"/>
-                    </a:lnB>
-                    <a:solidFill>
-                      <a:srgbClr val="FFFFFF">
-                        <a:alpha val="80000"/>
-                      </a:srgbClr>
-                    </a:solidFill>
-                  </a:tcPr>
-                </a:tc>
-                <a:tc>
-                  <a:txBody>
-                    <a:bodyPr/>
-                    <a:lstStyle/>
-                    <a:p>
-                      <a:pPr algn="l" indent="0" marL="0">
-                        <a:buNone/>
-                      </a:pPr>
-                      <a:r>
-                        <a:rPr lang="en-US" sz="1800" dirty="0">
-                          <a:solidFill>
-                            <a:srgbClr val="111827"/>
-                          </a:solidFill>
-                          <a:latin typeface="Pretendard" pitchFamily="34" charset="0"/>
-                          <a:ea typeface="Pretendard" pitchFamily="34" charset="-122"/>
-                          <a:cs typeface="Pretendard" pitchFamily="34" charset="-120"/>
-                        </a:rPr>
-                        <a:t>`#E11D48`</a:t>
-                      </a:r>
-                      <a:endParaRPr lang="en-US" sz="1800" dirty="0">
-                        <a:latin typeface="Pretendard" charset="0"/>
-                        <a:ea typeface="Pretendard" charset="0"/>
-                        <a:cs typeface="Pretendard" charset="0"/>
-                      </a:endParaRPr>
-                    </a:p>
-                  </a:txBody>
-                  <a:tcPr marL="54864" marR="54864" marT="36576" marB="36576" anchor="ctr">
-                    <a:lnL w="12700" cap="flat" cmpd="sng" algn="ctr">
-                      <a:solidFill>
-                        <a:srgbClr val="D4D6DB"/>
-                      </a:solidFill>
-                      <a:prstDash val="solid"/>
-                      <a:round/>
-                      <a:headEnd type="none" w="med" len="med"/>
-                      <a:tailEnd type="none" w="med" len="med"/>
-                    </a:lnL>
-                    <a:lnR w="12700" cap="flat" cmpd="sng" algn="ctr">
-                      <a:solidFill>
-                        <a:srgbClr val="D4D6DB"/>
-                      </a:solidFill>
-                      <a:prstDash val="solid"/>
-                      <a:round/>
-                      <a:headEnd type="none" w="med" len="med"/>
-                      <a:tailEnd type="none" w="med" len="med"/>
-                    </a:lnR>
-                    <a:lnT w="12700" cap="flat" cmpd="sng" algn="ctr">
-                      <a:solidFill>
-                        <a:srgbClr val="D4D6DB"/>
-                      </a:solidFill>
-                      <a:prstDash val="solid"/>
-                      <a:round/>
-                      <a:headEnd type="none" w="med" len="med"/>
-                      <a:tailEnd type="none" w="med" len="med"/>
-                    </a:lnT>
-                    <a:lnB w="12700" cap="flat" cmpd="sng" algn="ctr">
-                      <a:solidFill>
-                        <a:srgbClr val="D4D6DB"/>
-                      </a:solidFill>
-                      <a:prstDash val="solid"/>
-                      <a:round/>
-                      <a:headEnd type="none" w="med" len="med"/>
-                      <a:tailEnd type="none" w="med" len="med"/>
-                    </a:lnB>
-                    <a:solidFill>
-                      <a:srgbClr val="FFFFFF">
-                        <a:alpha val="80000"/>
-                      </a:srgbClr>
-                    </a:solidFill>
-                  </a:tcPr>
-                </a:tc>
-                <a:tc>
-                  <a:txBody>
-                    <a:bodyPr/>
-                    <a:lstStyle/>
-                    <a:p>
-                      <a:pPr algn="l" indent="0" marL="0">
-                        <a:buNone/>
-                      </a:pPr>
-                      <a:r>
-                        <a:rPr lang="en-US" sz="1800" dirty="0">
-                          <a:solidFill>
-                            <a:srgbClr val="111827"/>
-                          </a:solidFill>
-                          <a:latin typeface="Pretendard" pitchFamily="34" charset="0"/>
-                          <a:ea typeface="Pretendard" pitchFamily="34" charset="-122"/>
-                          <a:cs typeface="Pretendard" pitchFamily="34" charset="-120"/>
-                        </a:rPr>
-                        <a:t>complementary</a:t>
-                      </a:r>
-                      <a:endParaRPr lang="en-US" sz="1800" dirty="0">
-                        <a:latin typeface="Pretendard" charset="0"/>
-                        <a:ea typeface="Pretendard" charset="0"/>
-                        <a:cs typeface="Pretendard" charset="0"/>
-                      </a:endParaRPr>
-                    </a:p>
-                  </a:txBody>
-                  <a:tcPr marL="54864" marR="54864" marT="36576" marB="36576" anchor="ctr">
-                    <a:lnL w="12700" cap="flat" cmpd="sng" algn="ctr">
-                      <a:solidFill>
-                        <a:srgbClr val="D4D6DB"/>
-                      </a:solidFill>
-                      <a:prstDash val="solid"/>
-                      <a:round/>
-                      <a:headEnd type="none" w="med" len="med"/>
-                      <a:tailEnd type="none" w="med" len="med"/>
-                    </a:lnL>
-                    <a:lnR w="12700" cap="flat" cmpd="sng" algn="ctr">
-                      <a:solidFill>
-                        <a:srgbClr val="D4D6DB"/>
-                      </a:solidFill>
-                      <a:prstDash val="solid"/>
-                      <a:round/>
-                      <a:headEnd type="none" w="med" len="med"/>
-                      <a:tailEnd type="none" w="med" len="med"/>
-                    </a:lnR>
-                    <a:lnT w="12700" cap="flat" cmpd="sng" algn="ctr">
-                      <a:solidFill>
-                        <a:srgbClr val="D4D6DB"/>
-                      </a:solidFill>
-                      <a:prstDash val="solid"/>
-                      <a:round/>
-                      <a:headEnd type="none" w="med" len="med"/>
-                      <a:tailEnd type="none" w="med" len="med"/>
-                    </a:lnT>
-                    <a:lnB w="12700" cap="flat" cmpd="sng" algn="ctr">
-                      <a:solidFill>
-                        <a:srgbClr val="D4D6DB"/>
-                      </a:solidFill>
-                      <a:prstDash val="solid"/>
-                      <a:round/>
-                      <a:headEnd type="none" w="med" len="med"/>
-                      <a:tailEnd type="none" w="med" len="med"/>
-                    </a:lnB>
-                    <a:solidFill>
-                      <a:srgbClr val="FFFFFF">
-                        <a:alpha val="80000"/>
-                      </a:srgbClr>
-                    </a:solidFill>
-                  </a:tcPr>
-                </a:tc>
-                <a:tc>
-                  <a:txBody>
-                    <a:bodyPr/>
-                    <a:lstStyle/>
-                    <a:p>
-                      <a:pPr algn="l" indent="0" marL="0">
-                        <a:buNone/>
-                      </a:pPr>
-                      <a:r>
-                        <a:rPr lang="en-US" sz="1800" dirty="0">
-                          <a:solidFill>
-                            <a:srgbClr val="111827"/>
-                          </a:solidFill>
-                          <a:latin typeface="Pretendard" pitchFamily="34" charset="0"/>
-                          <a:ea typeface="Pretendard" pitchFamily="34" charset="-122"/>
-                          <a:cs typeface="Pretendard" pitchFamily="34" charset="-120"/>
-                        </a:rPr>
-                        <a:t>Dark proof deck with high-contrast emphasis</a:t>
-                      </a:r>
-                      <a:endParaRPr lang="en-US" sz="1800" dirty="0">
-                        <a:latin typeface="Pretendard" charset="0"/>
-                        <a:ea typeface="Pretendard" charset="0"/>
-                        <a:cs typeface="Pretendard" charset="0"/>
-                      </a:endParaRPr>
-                    </a:p>
-                  </a:txBody>
-                  <a:tcPr marL="54864" marR="54864" marT="36576" marB="36576" anchor="ctr">
-                    <a:lnL w="12700" cap="flat" cmpd="sng" algn="ctr">
-                      <a:solidFill>
-                        <a:srgbClr val="D4D6DB"/>
-                      </a:solidFill>
-                      <a:prstDash val="solid"/>
-                      <a:round/>
-                      <a:headEnd type="none" w="med" len="med"/>
-                      <a:tailEnd type="none" w="med" len="med"/>
-                    </a:lnL>
-                    <a:lnR w="12700" cap="flat" cmpd="sng" algn="ctr">
-                      <a:solidFill>
-                        <a:srgbClr val="D4D6DB"/>
-                      </a:solidFill>
-                      <a:prstDash val="solid"/>
-                      <a:round/>
-                      <a:headEnd type="none" w="med" len="med"/>
-                      <a:tailEnd type="none" w="med" len="med"/>
-                    </a:lnR>
-                    <a:lnT w="12700" cap="flat" cmpd="sng" algn="ctr">
-                      <a:solidFill>
-                        <a:srgbClr val="D4D6DB"/>
-                      </a:solidFill>
-                      <a:prstDash val="solid"/>
-                      <a:round/>
-                      <a:headEnd type="none" w="med" len="med"/>
-                      <a:tailEnd type="none" w="med" len="med"/>
-                    </a:lnT>
-                    <a:lnB w="12700" cap="flat" cmpd="sng" algn="ctr">
-                      <a:solidFill>
-                        <a:srgbClr val="D4D6DB"/>
-                      </a:solidFill>
-                      <a:prstDash val="solid"/>
-                      <a:round/>
-                      <a:headEnd type="none" w="med" len="med"/>
-                      <a:tailEnd type="none" w="med" len="med"/>
-                    </a:lnB>
-                    <a:solidFill>
-                      <a:srgbClr val="FFFFFF">
-                        <a:alpha val="80000"/>
-                      </a:srgbClr>
-                    </a:solidFill>
-                  </a:tcPr>
-                </a:tc>
-              </a:tr>
-            </a:tbl>
-          </a:graphicData>
-        </a:graphic>
-      </p:graphicFrame>
+      <p:sp>
+        <p:nvSpPr>
+          <p:cNvPr id="7" name="mdpr:2-2-db6c82:left:block-17-chunk-2"/>
+          <p:cNvSpPr txBox="1"/>
+          <p:nvPr/>
+        </p:nvSpPr>
+        <p:spPr>
+          <a:xfrm>
+            <a:off x="896112" y="1664208"/>
+            <a:ext cx="4791456" cy="4169664"/>
+          </a:xfrm>
+          <a:prstGeom prst="rect">
+            <a:avLst/>
+          </a:prstGeom>
+          <a:noFill/>
+          <a:ln/>
+        </p:spPr>
+        <p:txBody>
+          <a:bodyPr wrap="square" lIns="0" tIns="25400" rIns="25400" bIns="0" rtlCol="0" anchor="t"/>
+          <a:lstStyle/>
+          <a:p>
+            <a:pPr algn="l" indent="0" marL="0">
+              <a:lnSpc>
+                <a:spcPct val="120000"/>
+              </a:lnSpc>
+              <a:buNone/>
+            </a:pPr>
+            <a:r>
+              <a:rPr lang="en-US" sz="2200" b="1" dirty="0">
+                <a:solidFill>
+                  <a:srgbClr val="111827"/>
+                </a:solidFill>
+                <a:latin typeface="Pretendard" pitchFamily="34" charset="0"/>
+                <a:ea typeface="Pretendard" pitchFamily="34" charset="-122"/>
+                <a:cs typeface="Pretendard" pitchFamily="34" charset="-120"/>
+              </a:rPr>
+              <a:t>- Image need</a:t>
+            </a:r>
+            <a:pPr algn="l" indent="0" marL="0">
+              <a:lnSpc>
+                <a:spcPct val="120000"/>
+              </a:lnSpc>
+              <a:buNone/>
+            </a:pPr>
+            <a:r>
+              <a:rPr lang="en-US" sz="2200" dirty="0">
+                <a:solidFill>
+                  <a:srgbClr val="111827"/>
+                </a:solidFill>
+                <a:latin typeface="Pretendard" pitchFamily="34" charset="0"/>
+                <a:ea typeface="Pretendard" pitchFamily="34" charset="-122"/>
+                <a:cs typeface="Pretendard" pitchFamily="34" charset="-120"/>
+              </a:rPr>
+              <a:t>  Image sidecars are reserved only when the source contains or requires an image.</a:t>
+            </a:r>
+            <a:endParaRPr lang="en-US" sz="2200" dirty="0"/>
+          </a:p>
+        </p:txBody>
+      </p:sp>
+      <p:sp>
+        <p:nvSpPr>
+          <p:cNvPr id="8" name="mdpr:2-2-db6c82:right:block-17-chunk-2"/>
+          <p:cNvSpPr txBox="1"/>
+          <p:nvPr/>
+        </p:nvSpPr>
+        <p:spPr>
+          <a:xfrm>
+            <a:off x="6473952" y="1664208"/>
+            <a:ext cx="4791456" cy="4169664"/>
+          </a:xfrm>
+          <a:prstGeom prst="rect">
+            <a:avLst/>
+          </a:prstGeom>
+          <a:noFill/>
+          <a:ln/>
+        </p:spPr>
+        <p:txBody>
+          <a:bodyPr wrap="square" lIns="0" tIns="25400" rIns="25400" bIns="0" rtlCol="0" anchor="t"/>
+          <a:lstStyle/>
+          <a:p>
+            <a:pPr algn="l" indent="0" marL="0">
+              <a:lnSpc>
+                <a:spcPct val="120000"/>
+              </a:lnSpc>
+              <a:buNone/>
+            </a:pPr>
+            <a:r>
+              <a:rPr lang="en-US" sz="2200" b="1" dirty="0">
+                <a:solidFill>
+                  <a:srgbClr val="111827"/>
+                </a:solidFill>
+                <a:latin typeface="Pretendard" pitchFamily="34" charset="0"/>
+                <a:ea typeface="Pretendard" pitchFamily="34" charset="-122"/>
+                <a:cs typeface="Pretendard" pitchFamily="34" charset="-120"/>
+              </a:rPr>
+              <a:t>- Density</a:t>
+            </a:r>
+            <a:pPr algn="l" indent="0" marL="0">
+              <a:lnSpc>
+                <a:spcPct val="120000"/>
+              </a:lnSpc>
+              <a:buNone/>
+            </a:pPr>
+            <a:r>
+              <a:rPr lang="en-US" sz="2200" dirty="0">
+                <a:solidFill>
+                  <a:srgbClr val="111827"/>
+                </a:solidFill>
+                <a:latin typeface="Pretendard" pitchFamily="34" charset="0"/>
+                <a:ea typeface="Pretendard" pitchFamily="34" charset="-122"/>
+                <a:cs typeface="Pretendard" pitchFamily="34" charset="-120"/>
+              </a:rPr>
+              <a:t>  Dense tables and code blocks reduce decoration before shrinking below the readable font floor.</a:t>
+            </a:r>
+            <a:endParaRPr lang="en-US" sz="2200" dirty="0"/>
+          </a:p>
+        </p:txBody>
+      </p:sp>
     </p:spTree>
   </p:cSld>
   <p:clrMapOvr>
